--- a/decks/quality-gates.pptx
+++ b/decks/quality-gates.pptx
@@ -13,9 +13,15 @@
     <p:sldId id="261" r:id="rId7"/>
     <p:sldId id="262" r:id="rId8"/>
     <p:sldId id="263" r:id="rId9"/>
+    <p:sldId id="264" r:id="rId10"/>
+    <p:sldId id="265" r:id="rId11"/>
+    <p:sldId id="266" r:id="rId12"/>
+    <p:sldId id="267" r:id="rId13"/>
+    <p:sldId id="268" r:id="rId14"/>
+    <p:sldId id="269" r:id="rId15"/>
   </p:sldIdLst>
   <p:notesMasterIdLst>
-    <p:notesMasterId r:id="rId10"/>
+    <p:notesMasterId r:id="rId16"/>
   </p:notesMasterIdLst>
   <p:sldSz cx="12191695" cy="6858000"/>
   <p:notesSz cx="6858000" cy="12191695"/>
@@ -112,6 +118,1046 @@
     </a:lvl9pPr>
   </p:defaultTextStyle>
 </p:presentation>
+</file>
+
+<file path=ppt/charts/chart31.xml><?xml version="1.0" encoding="utf-8"?>
+<c:chartSpace xmlns:c="http://schemas.openxmlformats.org/drawingml/2006/chart" xmlns:a="http://schemas.openxmlformats.org/drawingml/2006/main" xmlns:r="http://schemas.openxmlformats.org/officeDocument/2006/relationships">
+  <c:date1904 val="0"/>
+  <c:roundedCorners val="1"/>
+  <c:chart>
+    <c:autoTitleDeleted val="1"/>
+    <c:plotArea>
+      <c:layout/>
+      <c:barChart>
+        <c:barDir val="col"/>
+        <c:grouping val="clustered"/>
+        <c:varyColors val="0"/>
+        <c:ser>
+          <c:idx val="0"/>
+          <c:order val="0"/>
+          <c:tx>
+            <c:strRef>
+              <c:f>Sheet1!$B$1</c:f>
+              <c:strCache>
+                <c:ptCount val="1"/>
+                <c:pt idx="0">
+                  <c:v>Findings per 100 (illustrative)</c:v>
+                </c:pt>
+              </c:strCache>
+            </c:strRef>
+          </c:tx>
+          <c:spPr>
+            <a:solidFill>
+              <a:srgbClr val="3B82F6"/>
+            </a:solidFill>
+            <a:effectLst/>
+          </c:spPr>
+          <c:invertIfNegative val="0"/>
+          <c:dLbls>
+            <c:numFmt formatCode="#,##0" sourceLinked="0"/>
+            <c:txPr>
+              <a:bodyPr/>
+              <a:lstStyle/>
+              <a:p>
+                <a:pPr>
+                  <a:defRPr b="0" i="0" strike="noStrike" sz="1000" u="none">
+                    <a:solidFill>
+                      <a:srgbClr val="E2E8F0"/>
+                    </a:solidFill>
+                    <a:latin typeface="Segoe UI"/>
+                  </a:defRPr>
+                </a:pPr>
+              </a:p>
+            </c:txPr>
+            <c:showLegendKey val="0"/>
+            <c:showVal val="1"/>
+            <c:showCatName val="0"/>
+            <c:showSerName val="0"/>
+            <c:showPercent val="0"/>
+            <c:showBubbleSize val="0"/>
+            <c:showLeaderLines val="0"/>
+          </c:dLbls>
+          <c:dPt>
+            <c:idx val="0"/>
+            <c:invertIfNegative val="0"/>
+            <c:bubble3D val="0"/>
+            <c:spPr>
+              <a:solidFill>
+                <a:srgbClr val="3B82F6"/>
+              </a:solidFill>
+              <a:effectLst/>
+            </c:spPr>
+          </c:dPt>
+          <c:dPt>
+            <c:idx val="1"/>
+            <c:invertIfNegative val="0"/>
+            <c:bubble3D val="0"/>
+            <c:spPr>
+              <a:solidFill>
+                <a:srgbClr val="06B6D4"/>
+              </a:solidFill>
+              <a:effectLst/>
+            </c:spPr>
+          </c:dPt>
+          <c:dPt>
+            <c:idx val="2"/>
+            <c:invertIfNegative val="0"/>
+            <c:bubble3D val="0"/>
+            <c:spPr>
+              <a:solidFill>
+                <a:srgbClr val="22D3A0"/>
+              </a:solidFill>
+              <a:effectLst/>
+            </c:spPr>
+          </c:dPt>
+          <c:dPt>
+            <c:idx val="3"/>
+            <c:invertIfNegative val="0"/>
+            <c:bubble3D val="0"/>
+            <c:spPr>
+              <a:solidFill>
+                <a:srgbClr val="F59E0B"/>
+              </a:solidFill>
+              <a:effectLst/>
+            </c:spPr>
+          </c:dPt>
+          <c:dPt>
+            <c:idx val="4"/>
+            <c:invertIfNegative val="0"/>
+            <c:bubble3D val="0"/>
+            <c:spPr>
+              <a:solidFill>
+                <a:srgbClr val="3B82F6"/>
+              </a:solidFill>
+              <a:effectLst/>
+            </c:spPr>
+          </c:dPt>
+          <c:cat>
+            <c:multiLvlStrRef>
+              <c:f>Sheet1!$A$2:$A$6</c:f>
+              <c:multiLvlStrCache>
+                <c:ptCount val="5"/>
+                <c:lvl>
+                  <c:pt idx="0">
+                    <c:v>Control does nothing</c:v>
+                  </c:pt>
+                  <c:pt idx="1">
+                    <c:v>Label vs behavior mismatch</c:v>
+                  </c:pt>
+                  <c:pt idx="2">
+                    <c:v>Broken offline state</c:v>
+                  </c:pt>
+                  <c:pt idx="3">
+                    <c:v>Stale link or target</c:v>
+                  </c:pt>
+                  <c:pt idx="4">
+                    <c:v>Layout defect</c:v>
+                  </c:pt>
+                </c:lvl>
+              </c:multiLvlStrCache>
+            </c:multiLvlStrRef>
+          </c:cat>
+          <c:val>
+            <c:numRef>
+              <c:f>Sheet1!$B$2:$B$6</c:f>
+              <c:numCache>
+                <c:formatCode>General</c:formatCode>
+                <c:ptCount val="5"/>
+                <c:pt idx="0">
+                  <c:v>34</c:v>
+                </c:pt>
+                <c:pt idx="1">
+                  <c:v>26</c:v>
+                </c:pt>
+                <c:pt idx="2">
+                  <c:v>18</c:v>
+                </c:pt>
+                <c:pt idx="3">
+                  <c:v>12</c:v>
+                </c:pt>
+                <c:pt idx="4">
+                  <c:v>10</c:v>
+                </c:pt>
+              </c:numCache>
+            </c:numRef>
+          </c:val>
+        </c:ser>
+        <c:dLbls>
+          <c:numFmt formatCode="#,##0" sourceLinked="0"/>
+          <c:txPr>
+            <a:bodyPr/>
+            <a:lstStyle/>
+            <a:p>
+              <a:pPr>
+                <a:defRPr b="0" i="0" strike="noStrike" sz="1000" u="none">
+                  <a:solidFill>
+                    <a:srgbClr val="E2E8F0"/>
+                  </a:solidFill>
+                  <a:latin typeface="Segoe UI"/>
+                </a:defRPr>
+              </a:pPr>
+            </a:p>
+          </c:txPr>
+          <c:showLegendKey val="0"/>
+          <c:showVal val="1"/>
+          <c:showCatName val="0"/>
+          <c:showSerName val="0"/>
+          <c:showPercent val="0"/>
+          <c:showBubbleSize val="0"/>
+          <c:showLeaderLines val="0"/>
+        </c:dLbls>
+        <c:gapWidth val="55"/>
+        <c:overlap val="0"/>
+        <c:axId val="2094734554"/>
+        <c:axId val="2094734552"/>
+        <c:axId val="2094734556"/>
+      </c:barChart>
+      <c:catAx>
+        <c:axId val="2094734554"/>
+        <c:scaling>
+          <c:orientation val="minMax"/>
+        </c:scaling>
+        <c:delete val="0"/>
+        <c:axPos val="b"/>
+        <c:numFmt formatCode="General" sourceLinked="1"/>
+        <c:majorTickMark val="out"/>
+        <c:minorTickMark val="none"/>
+        <c:tickLblPos val="low"/>
+        <c:spPr>
+          <a:ln w="12700" cap="flat">
+            <a:solidFill>
+              <a:srgbClr val="24365A"/>
+            </a:solidFill>
+            <a:prstDash val="solid"/>
+            <a:round/>
+          </a:ln>
+        </c:spPr>
+        <c:txPr>
+          <a:bodyPr/>
+          <a:lstStyle/>
+          <a:p>
+            <a:pPr>
+              <a:defRPr sz="1100" b="0" i="0" u="none" strike="noStrike">
+                <a:solidFill>
+                  <a:srgbClr val="94A3B8"/>
+                </a:solidFill>
+                <a:latin typeface="Segoe UI"/>
+              </a:defRPr>
+            </a:pPr>
+            <a:endParaRPr lang="en-US"/>
+          </a:p>
+        </c:txPr>
+        <c:crossAx val="2094734552"/>
+        <c:crosses val="autoZero"/>
+        <c:auto val="1"/>
+        <c:lblAlgn val="ctr"/>
+        <c:noMultiLvlLbl val="1"/>
+      </c:catAx>
+      <c:valAx>
+        <c:axId val="2094734552"/>
+        <c:scaling>
+          <c:orientation val="minMax"/>
+        </c:scaling>
+        <c:delete val="0"/>
+        <c:axPos val="l"/>
+        <c:majorGridlines>
+          <c:spPr>
+            <a:ln w="12700" cap="flat">
+              <a:solidFill>
+                <a:srgbClr val="18243D"/>
+              </a:solidFill>
+              <a:prstDash val="solid"/>
+              <a:round/>
+            </a:ln>
+          </c:spPr>
+        </c:majorGridlines>
+        <c:numFmt formatCode="General" sourceLinked="0"/>
+        <c:majorTickMark val="out"/>
+        <c:minorTickMark val="none"/>
+        <c:tickLblPos val="nextTo"/>
+        <c:spPr>
+          <a:ln w="12700" cap="flat">
+            <a:solidFill>
+              <a:srgbClr val="24365A"/>
+            </a:solidFill>
+            <a:prstDash val="solid"/>
+            <a:round/>
+          </a:ln>
+        </c:spPr>
+        <c:txPr>
+          <a:bodyPr/>
+          <a:lstStyle/>
+          <a:p>
+            <a:pPr>
+              <a:defRPr sz="1000" b="0" i="0" u="none" strike="noStrike">
+                <a:solidFill>
+                  <a:srgbClr val="94A3B8"/>
+                </a:solidFill>
+                <a:latin typeface="Segoe UI"/>
+              </a:defRPr>
+            </a:pPr>
+            <a:endParaRPr lang="en-US"/>
+          </a:p>
+        </c:txPr>
+        <c:crossAx val="2094734554"/>
+        <c:crosses val="autoZero"/>
+        <c:crossBetween val="between"/>
+      </c:valAx>
+      <c:spPr>
+        <a:solidFill>
+          <a:srgbClr val="0D1420"/>
+        </a:solidFill>
+        <a:ln>
+          <a:noFill/>
+        </a:ln>
+        <a:effectLst/>
+      </c:spPr>
+    </c:plotArea>
+    <c:plotVisOnly val="1"/>
+    <c:dispBlanksAs val="span"/>
+  </c:chart>
+  <c:spPr>
+    <a:solidFill>
+      <a:srgbClr val="0D1420"/>
+    </a:solidFill>
+    <a:ln w="12700" cap="flat">
+      <a:solidFill>
+        <a:srgbClr val="24365A"/>
+      </a:solidFill>
+    </a:ln>
+    <a:effectLst/>
+  </c:spPr>
+  <c:externalData r:id="rId1">
+    <c:autoUpdate val="0"/>
+  </c:externalData>
+</c:chartSpace>
+</file>
+
+<file path=ppt/charts/chart32.xml><?xml version="1.0" encoding="utf-8"?>
+<c:chartSpace xmlns:c="http://schemas.openxmlformats.org/drawingml/2006/chart" xmlns:a="http://schemas.openxmlformats.org/drawingml/2006/main" xmlns:r="http://schemas.openxmlformats.org/officeDocument/2006/relationships">
+  <c:date1904 val="0"/>
+  <c:roundedCorners val="1"/>
+  <c:chart>
+    <c:autoTitleDeleted val="1"/>
+    <c:plotArea>
+      <c:layout/>
+      <c:lineChart>
+        <c:varyColors val="0"/>
+        <c:ser>
+          <c:idx val="0"/>
+          <c:order val="0"/>
+          <c:tx>
+            <c:strRef>
+              <c:f>Sheet1!$B$1</c:f>
+              <c:strCache>
+                <c:ptCount val="1"/>
+                <c:pt idx="0">
+                  <c:v>Blockers caught at the gate (illustrative)</c:v>
+                </c:pt>
+              </c:strCache>
+            </c:strRef>
+          </c:tx>
+          <c:spPr>
+            <a:solidFill>
+              <a:srgbClr val="3B82F6"/>
+            </a:solidFill>
+            <a:ln w="31750" cap="flat">
+              <a:solidFill>
+                <a:srgbClr val="3B82F6"/>
+              </a:solidFill>
+              <a:prstDash val="solid"/>
+              <a:round/>
+            </a:ln>
+            <a:effectLst/>
+          </c:spPr>
+          <c:invertIfNegative val="0"/>
+          <c:dLbls>
+            <c:numFmt formatCode="#,##0" sourceLinked="0"/>
+            <c:txPr>
+              <a:bodyPr/>
+              <a:lstStyle/>
+              <a:p>
+                <a:pPr>
+                  <a:defRPr b="0" i="0" strike="noStrike" sz="1200" u="none">
+                    <a:solidFill>
+                      <a:srgbClr val="000000"/>
+                    </a:solidFill>
+                    <a:latin typeface="Arial"/>
+                  </a:defRPr>
+                </a:pPr>
+              </a:p>
+            </c:txPr>
+            <c:showLegendKey val="0"/>
+            <c:showVal val="0"/>
+            <c:showCatName val="0"/>
+            <c:showSerName val="0"/>
+            <c:showPercent val="0"/>
+            <c:showBubbleSize val="0"/>
+            <c:showLeaderLines val="0"/>
+          </c:dLbls>
+          <c:marker>
+            <c:symbol val="circle"/>
+            <c:size val="6"/>
+            <c:spPr>
+              <a:solidFill>
+                <a:srgbClr val="3B82F6"/>
+              </a:solidFill>
+              <a:ln w="9525" cap="flat">
+                <a:solidFill>
+                  <a:srgbClr val="3B82F6"/>
+                </a:solidFill>
+                <a:prstDash val="solid"/>
+                <a:round/>
+              </a:ln>
+              <a:effectLst/>
+            </c:spPr>
+          </c:marker>
+          <c:cat>
+            <c:multiLvlStrRef>
+              <c:f>Sheet1!$A$2:$A$7</c:f>
+              <c:multiLvlStrCache>
+                <c:ptCount val="6"/>
+                <c:lvl>
+                  <c:pt idx="0">
+                    <c:v>Release 1</c:v>
+                  </c:pt>
+                  <c:pt idx="1">
+                    <c:v>Release 2</c:v>
+                  </c:pt>
+                  <c:pt idx="2">
+                    <c:v>Release 3</c:v>
+                  </c:pt>
+                  <c:pt idx="3">
+                    <c:v>Release 4</c:v>
+                  </c:pt>
+                  <c:pt idx="4">
+                    <c:v>Release 5</c:v>
+                  </c:pt>
+                  <c:pt idx="5">
+                    <c:v>Release 6</c:v>
+                  </c:pt>
+                </c:lvl>
+              </c:multiLvlStrCache>
+            </c:multiLvlStrRef>
+          </c:cat>
+          <c:val>
+            <c:numRef>
+              <c:f>Sheet1!$B$2:$B$7</c:f>
+              <c:numCache>
+                <c:formatCode>General</c:formatCode>
+                <c:ptCount val="6"/>
+                <c:pt idx="0">
+                  <c:v>9</c:v>
+                </c:pt>
+                <c:pt idx="1">
+                  <c:v>7</c:v>
+                </c:pt>
+                <c:pt idx="2">
+                  <c:v>5</c:v>
+                </c:pt>
+                <c:pt idx="3">
+                  <c:v>4</c:v>
+                </c:pt>
+                <c:pt idx="4">
+                  <c:v>2</c:v>
+                </c:pt>
+                <c:pt idx="5">
+                  <c:v>1</c:v>
+                </c:pt>
+              </c:numCache>
+            </c:numRef>
+          </c:val>
+          <c:smooth val="0"/>
+        </c:ser>
+        <c:ser>
+          <c:idx val="1"/>
+          <c:order val="1"/>
+          <c:tx>
+            <c:strRef>
+              <c:f>Sheet1!$C$1</c:f>
+              <c:strCache>
+                <c:ptCount val="1"/>
+                <c:pt idx="0">
+                  <c:v>Blockers escaped to production (illustrative)</c:v>
+                </c:pt>
+              </c:strCache>
+            </c:strRef>
+          </c:tx>
+          <c:spPr>
+            <a:solidFill>
+              <a:srgbClr val="06B6D4"/>
+            </a:solidFill>
+            <a:ln w="31750" cap="flat">
+              <a:solidFill>
+                <a:srgbClr val="06B6D4"/>
+              </a:solidFill>
+              <a:prstDash val="solid"/>
+              <a:round/>
+            </a:ln>
+            <a:effectLst/>
+          </c:spPr>
+          <c:invertIfNegative val="0"/>
+          <c:dLbls>
+            <c:numFmt formatCode="#,##0" sourceLinked="0"/>
+            <c:txPr>
+              <a:bodyPr/>
+              <a:lstStyle/>
+              <a:p>
+                <a:pPr>
+                  <a:defRPr b="0" i="0" strike="noStrike" sz="1200" u="none">
+                    <a:solidFill>
+                      <a:srgbClr val="000000"/>
+                    </a:solidFill>
+                    <a:latin typeface="Arial"/>
+                  </a:defRPr>
+                </a:pPr>
+              </a:p>
+            </c:txPr>
+            <c:showLegendKey val="0"/>
+            <c:showVal val="0"/>
+            <c:showCatName val="0"/>
+            <c:showSerName val="0"/>
+            <c:showPercent val="0"/>
+            <c:showBubbleSize val="0"/>
+            <c:showLeaderLines val="0"/>
+          </c:dLbls>
+          <c:marker>
+            <c:symbol val="circle"/>
+            <c:size val="6"/>
+            <c:spPr>
+              <a:solidFill>
+                <a:srgbClr val="06B6D4"/>
+              </a:solidFill>
+              <a:ln w="9525" cap="flat">
+                <a:solidFill>
+                  <a:srgbClr val="06B6D4"/>
+                </a:solidFill>
+                <a:prstDash val="solid"/>
+                <a:round/>
+              </a:ln>
+              <a:effectLst/>
+            </c:spPr>
+          </c:marker>
+          <c:cat>
+            <c:multiLvlStrRef>
+              <c:f>Sheet1!$A$2:$A$7</c:f>
+              <c:multiLvlStrCache>
+                <c:ptCount val="6"/>
+                <c:lvl>
+                  <c:pt idx="0">
+                    <c:v>Release 1</c:v>
+                  </c:pt>
+                  <c:pt idx="1">
+                    <c:v>Release 2</c:v>
+                  </c:pt>
+                  <c:pt idx="2">
+                    <c:v>Release 3</c:v>
+                  </c:pt>
+                  <c:pt idx="3">
+                    <c:v>Release 4</c:v>
+                  </c:pt>
+                  <c:pt idx="4">
+                    <c:v>Release 5</c:v>
+                  </c:pt>
+                  <c:pt idx="5">
+                    <c:v>Release 6</c:v>
+                  </c:pt>
+                </c:lvl>
+              </c:multiLvlStrCache>
+            </c:multiLvlStrRef>
+          </c:cat>
+          <c:val>
+            <c:numRef>
+              <c:f>Sheet1!$C$2:$C$7</c:f>
+              <c:numCache>
+                <c:formatCode>General</c:formatCode>
+                <c:ptCount val="6"/>
+                <c:pt idx="0">
+                  <c:v>3</c:v>
+                </c:pt>
+                <c:pt idx="1">
+                  <c:v>2</c:v>
+                </c:pt>
+                <c:pt idx="2">
+                  <c:v>1</c:v>
+                </c:pt>
+                <c:pt idx="3">
+                  <c:v>1</c:v>
+                </c:pt>
+                <c:pt idx="4">
+                  <c:v>0</c:v>
+                </c:pt>
+                <c:pt idx="5">
+                  <c:v>0</c:v>
+                </c:pt>
+              </c:numCache>
+            </c:numRef>
+          </c:val>
+          <c:smooth val="0"/>
+        </c:ser>
+        <c:dLbls>
+          <c:numFmt formatCode="#,##0" sourceLinked="0"/>
+          <c:txPr>
+            <a:bodyPr/>
+            <a:lstStyle/>
+            <a:p>
+              <a:pPr>
+                <a:defRPr b="0" i="0" strike="noStrike" sz="1200" u="none">
+                  <a:solidFill>
+                    <a:srgbClr val="000000"/>
+                  </a:solidFill>
+                  <a:latin typeface="Arial"/>
+                </a:defRPr>
+              </a:pPr>
+            </a:p>
+          </c:txPr>
+          <c:showLegendKey val="0"/>
+          <c:showVal val="0"/>
+          <c:showCatName val="0"/>
+          <c:showSerName val="0"/>
+          <c:showPercent val="0"/>
+          <c:showBubbleSize val="0"/>
+          <c:showLeaderLines val="0"/>
+        </c:dLbls>
+        <c:marker val="1"/>
+        <c:axId val="2094734554"/>
+        <c:axId val="2094734552"/>
+        <c:axId val="2094734556"/>
+      </c:lineChart>
+      <c:catAx>
+        <c:axId val="2094734554"/>
+        <c:scaling>
+          <c:orientation val="minMax"/>
+        </c:scaling>
+        <c:delete val="0"/>
+        <c:axPos val="b"/>
+        <c:numFmt formatCode="General" sourceLinked="1"/>
+        <c:majorTickMark val="out"/>
+        <c:minorTickMark val="none"/>
+        <c:tickLblPos val="low"/>
+        <c:spPr>
+          <a:ln w="12700" cap="flat">
+            <a:solidFill>
+              <a:srgbClr val="24365A"/>
+            </a:solidFill>
+            <a:prstDash val="solid"/>
+            <a:round/>
+          </a:ln>
+        </c:spPr>
+        <c:txPr>
+          <a:bodyPr/>
+          <a:lstStyle/>
+          <a:p>
+            <a:pPr>
+              <a:defRPr sz="1100" b="0" i="0" u="none" strike="noStrike">
+                <a:solidFill>
+                  <a:srgbClr val="94A3B8"/>
+                </a:solidFill>
+                <a:latin typeface="Segoe UI"/>
+              </a:defRPr>
+            </a:pPr>
+            <a:endParaRPr lang="en-US"/>
+          </a:p>
+        </c:txPr>
+        <c:crossAx val="2094734552"/>
+        <c:crosses val="autoZero"/>
+        <c:auto val="1"/>
+        <c:lblAlgn val="ctr"/>
+        <c:noMultiLvlLbl val="1"/>
+      </c:catAx>
+      <c:valAx>
+        <c:axId val="2094734552"/>
+        <c:scaling>
+          <c:orientation val="minMax"/>
+        </c:scaling>
+        <c:delete val="0"/>
+        <c:axPos val="l"/>
+        <c:majorGridlines>
+          <c:spPr>
+            <a:ln w="12700" cap="flat">
+              <a:solidFill>
+                <a:srgbClr val="18243D"/>
+              </a:solidFill>
+              <a:prstDash val="solid"/>
+              <a:round/>
+            </a:ln>
+          </c:spPr>
+        </c:majorGridlines>
+        <c:numFmt formatCode="General" sourceLinked="0"/>
+        <c:majorTickMark val="out"/>
+        <c:minorTickMark val="none"/>
+        <c:tickLblPos val="nextTo"/>
+        <c:spPr>
+          <a:ln w="12700" cap="flat">
+            <a:solidFill>
+              <a:srgbClr val="24365A"/>
+            </a:solidFill>
+            <a:prstDash val="solid"/>
+            <a:round/>
+          </a:ln>
+        </c:spPr>
+        <c:txPr>
+          <a:bodyPr/>
+          <a:lstStyle/>
+          <a:p>
+            <a:pPr>
+              <a:defRPr sz="1000" b="0" i="0" u="none" strike="noStrike">
+                <a:solidFill>
+                  <a:srgbClr val="94A3B8"/>
+                </a:solidFill>
+                <a:latin typeface="Segoe UI"/>
+              </a:defRPr>
+            </a:pPr>
+            <a:endParaRPr lang="en-US"/>
+          </a:p>
+        </c:txPr>
+        <c:crossAx val="2094734554"/>
+        <c:crosses val="autoZero"/>
+        <c:crossBetween val="between"/>
+      </c:valAx>
+      <c:spPr>
+        <a:solidFill>
+          <a:srgbClr val="0D1420"/>
+        </a:solidFill>
+        <a:ln>
+          <a:noFill/>
+        </a:ln>
+        <a:effectLst/>
+      </c:spPr>
+    </c:plotArea>
+    <c:legend>
+      <c:legendPos val="b"/>
+      <c:overlay val="0"/>
+      <c:txPr>
+        <a:bodyPr/>
+        <a:lstStyle/>
+        <a:p>
+          <a:pPr>
+            <a:defRPr sz="1100">
+              <a:solidFill>
+                <a:srgbClr val="CBD5E1"/>
+              </a:solidFill>
+              <a:latin typeface="Segoe UI"/>
+              <a:cs typeface="Segoe UI"/>
+            </a:defRPr>
+          </a:pPr>
+          <a:endParaRPr lang="en-US"/>
+        </a:p>
+      </c:txPr>
+    </c:legend>
+    <c:plotVisOnly val="1"/>
+    <c:dispBlanksAs val="span"/>
+  </c:chart>
+  <c:spPr>
+    <a:solidFill>
+      <a:srgbClr val="0D1420"/>
+    </a:solidFill>
+    <a:ln w="12700" cap="flat">
+      <a:solidFill>
+        <a:srgbClr val="24365A"/>
+      </a:solidFill>
+    </a:ln>
+    <a:effectLst/>
+  </c:spPr>
+  <c:externalData r:id="rId1">
+    <c:autoUpdate val="0"/>
+  </c:externalData>
+</c:chartSpace>
+</file>
+
+<file path=ppt/charts/chart33.xml><?xml version="1.0" encoding="utf-8"?>
+<c:chartSpace xmlns:c="http://schemas.openxmlformats.org/drawingml/2006/chart" xmlns:a="http://schemas.openxmlformats.org/drawingml/2006/main" xmlns:r="http://schemas.openxmlformats.org/officeDocument/2006/relationships">
+  <c:date1904 val="0"/>
+  <c:roundedCorners val="1"/>
+  <c:chart>
+    <c:autoTitleDeleted val="1"/>
+    <c:plotArea>
+      <c:layout/>
+      <c:doughnutChart>
+        <c:varyColors val="1"/>
+        <c:ser>
+          <c:idx val="0"/>
+          <c:order val="0"/>
+          <c:tx>
+            <c:strRef>
+              <c:f>Sheet1!$B$1</c:f>
+              <c:strCache>
+                <c:ptCount val="1"/>
+                <c:pt idx="0">
+                  <c:v>Breakdown</c:v>
+                </c:pt>
+              </c:strCache>
+            </c:strRef>
+          </c:tx>
+          <c:spPr>
+            <a:solidFill>
+              <a:schemeClr val="accent1"/>
+            </a:solidFill>
+            <a:ln w="9525" cap="flat">
+              <a:solidFill>
+                <a:srgbClr val="F9F9F9"/>
+              </a:solidFill>
+              <a:prstDash val="solid"/>
+              <a:round/>
+            </a:ln>
+            <a:effectLst/>
+          </c:spPr>
+          <c:dPt>
+            <c:idx val="0"/>
+            <c:bubble3D val="0"/>
+            <c:spPr>
+              <a:solidFill>
+                <a:srgbClr val="3B82F6"/>
+              </a:solidFill>
+              <a:effectLst/>
+            </c:spPr>
+          </c:dPt>
+          <c:dPt>
+            <c:idx val="1"/>
+            <c:bubble3D val="0"/>
+            <c:spPr>
+              <a:solidFill>
+                <a:srgbClr val="06B6D4"/>
+              </a:solidFill>
+              <a:effectLst/>
+            </c:spPr>
+          </c:dPt>
+          <c:dPt>
+            <c:idx val="2"/>
+            <c:bubble3D val="0"/>
+            <c:spPr>
+              <a:solidFill>
+                <a:srgbClr val="22D3A0"/>
+              </a:solidFill>
+              <a:effectLst/>
+            </c:spPr>
+          </c:dPt>
+          <c:dPt>
+            <c:idx val="3"/>
+            <c:bubble3D val="0"/>
+            <c:spPr>
+              <a:solidFill>
+                <a:srgbClr val="F59E0B"/>
+              </a:solidFill>
+              <a:effectLst/>
+            </c:spPr>
+          </c:dPt>
+          <c:dLbls>
+            <c:dLbl>
+              <c:idx val="0"/>
+              <c:numFmt formatCode="0%" sourceLinked="0"/>
+              <c:spPr/>
+              <c:txPr>
+                <a:bodyPr/>
+                <a:lstStyle/>
+                <a:p>
+                  <a:pPr>
+                    <a:defRPr sz="1000" b="0" i="0" u="none" strike="noStrike">
+                      <a:solidFill>
+                        <a:srgbClr val="E2E8F0"/>
+                      </a:solidFill>
+                      <a:latin typeface="Segoe UI"/>
+                    </a:defRPr>
+                  </a:pPr>
+                </a:p>
+              </c:txPr>
+              <c:showLegendKey val="0"/>
+              <c:showVal val="0"/>
+              <c:showCatName val="0"/>
+              <c:showSerName val="0"/>
+              <c:showPercent val="1"/>
+              <c:showBubbleSize val="0"/>
+            </c:dLbl>
+            <c:dLbl>
+              <c:idx val="1"/>
+              <c:numFmt formatCode="0%" sourceLinked="0"/>
+              <c:spPr/>
+              <c:txPr>
+                <a:bodyPr/>
+                <a:lstStyle/>
+                <a:p>
+                  <a:pPr>
+                    <a:defRPr sz="1000" b="0" i="0" u="none" strike="noStrike">
+                      <a:solidFill>
+                        <a:srgbClr val="E2E8F0"/>
+                      </a:solidFill>
+                      <a:latin typeface="Segoe UI"/>
+                    </a:defRPr>
+                  </a:pPr>
+                </a:p>
+              </c:txPr>
+              <c:showLegendKey val="0"/>
+              <c:showVal val="0"/>
+              <c:showCatName val="0"/>
+              <c:showSerName val="0"/>
+              <c:showPercent val="1"/>
+              <c:showBubbleSize val="0"/>
+            </c:dLbl>
+            <c:dLbl>
+              <c:idx val="2"/>
+              <c:numFmt formatCode="0%" sourceLinked="0"/>
+              <c:spPr/>
+              <c:txPr>
+                <a:bodyPr/>
+                <a:lstStyle/>
+                <a:p>
+                  <a:pPr>
+                    <a:defRPr sz="1000" b="0" i="0" u="none" strike="noStrike">
+                      <a:solidFill>
+                        <a:srgbClr val="E2E8F0"/>
+                      </a:solidFill>
+                      <a:latin typeface="Segoe UI"/>
+                    </a:defRPr>
+                  </a:pPr>
+                </a:p>
+              </c:txPr>
+              <c:showLegendKey val="0"/>
+              <c:showVal val="0"/>
+              <c:showCatName val="0"/>
+              <c:showSerName val="0"/>
+              <c:showPercent val="1"/>
+              <c:showBubbleSize val="0"/>
+            </c:dLbl>
+            <c:dLbl>
+              <c:idx val="3"/>
+              <c:numFmt formatCode="0%" sourceLinked="0"/>
+              <c:spPr/>
+              <c:txPr>
+                <a:bodyPr/>
+                <a:lstStyle/>
+                <a:p>
+                  <a:pPr>
+                    <a:defRPr sz="1000" b="0" i="0" u="none" strike="noStrike">
+                      <a:solidFill>
+                        <a:srgbClr val="E2E8F0"/>
+                      </a:solidFill>
+                      <a:latin typeface="Segoe UI"/>
+                    </a:defRPr>
+                  </a:pPr>
+                </a:p>
+              </c:txPr>
+              <c:showLegendKey val="0"/>
+              <c:showVal val="0"/>
+              <c:showCatName val="0"/>
+              <c:showSerName val="0"/>
+              <c:showPercent val="1"/>
+              <c:showBubbleSize val="0"/>
+            </c:dLbl>
+            <c:numFmt formatCode="0%" sourceLinked="0"/>
+            <c:txPr>
+              <a:bodyPr/>
+              <a:lstStyle/>
+              <a:p>
+                <a:pPr>
+                  <a:defRPr sz="1800" b="0" i="0" u="none" strike="noStrike">
+                    <a:solidFill>
+                      <a:srgbClr val="000000"/>
+                    </a:solidFill>
+                    <a:latin typeface="Arial"/>
+                  </a:defRPr>
+                </a:pPr>
+              </a:p>
+            </c:txPr>
+            <c:showLegendKey val="0"/>
+            <c:showVal val="0"/>
+            <c:showCatName val="1"/>
+            <c:showSerName val="0"/>
+            <c:showPercent val="1"/>
+            <c:showBubbleSize val="0"/>
+            <c:showLeaderLines val="0"/>
+          </c:dLbls>
+          <c:cat>
+            <c:strRef>
+              <c:f>Sheet1!$A$2:$A$5</c:f>
+              <c:strCache>
+                <c:ptCount val="4"/>
+                <c:pt idx="0">
+                  <c:v>Dead-button sweep</c:v>
+                </c:pt>
+                <c:pt idx="1">
+                  <c:v>Golden path walk</c:v>
+                </c:pt>
+                <c:pt idx="2">
+                  <c:v>Offline &amp; edge checks</c:v>
+                </c:pt>
+                <c:pt idx="3">
+                  <c:v>Evidence &amp; reports</c:v>
+                </c:pt>
+              </c:strCache>
+            </c:strRef>
+          </c:cat>
+          <c:val>
+            <c:numRef>
+              <c:f>Sheet1!$B$2:$B$5</c:f>
+              <c:numCache>
+                <c:ptCount val="4"/>
+                <c:pt idx="0">
+                  <c:v>35</c:v>
+                </c:pt>
+                <c:pt idx="1">
+                  <c:v>30</c:v>
+                </c:pt>
+                <c:pt idx="2">
+                  <c:v>20</c:v>
+                </c:pt>
+                <c:pt idx="3">
+                  <c:v>15</c:v>
+                </c:pt>
+              </c:numCache>
+            </c:numRef>
+          </c:val>
+        </c:ser>
+        <c:firstSliceAng val="0"/>
+        <c:holeSize val="62"/>
+      </c:doughnutChart>
+      <c:spPr>
+        <a:solidFill>
+          <a:srgbClr val="0D1420"/>
+        </a:solidFill>
+        <a:ln>
+          <a:noFill/>
+        </a:ln>
+        <a:effectLst/>
+      </c:spPr>
+    </c:plotArea>
+    <c:legend>
+      <c:legendPos val="r"/>
+      <c:overlay val="0"/>
+      <c:txPr>
+        <a:bodyPr/>
+        <a:lstStyle/>
+        <a:p>
+          <a:pPr>
+            <a:defRPr sz="1100">
+              <a:solidFill>
+                <a:srgbClr val="CBD5E1"/>
+              </a:solidFill>
+              <a:latin typeface="Segoe UI"/>
+              <a:cs typeface="Segoe UI"/>
+            </a:defRPr>
+          </a:pPr>
+          <a:endParaRPr lang="en-US"/>
+        </a:p>
+      </c:txPr>
+    </c:legend>
+    <c:plotVisOnly val="1"/>
+    <c:dispBlanksAs val="span"/>
+  </c:chart>
+  <c:spPr>
+    <a:solidFill>
+      <a:srgbClr val="0D1420"/>
+    </a:solidFill>
+    <a:ln w="12700" cap="flat">
+      <a:solidFill>
+        <a:srgbClr val="24365A"/>
+      </a:solidFill>
+    </a:ln>
+    <a:effectLst/>
+  </c:spPr>
+  <c:externalData r:id="rId1">
+    <c:autoUpdate val="0"/>
+  </c:externalData>
+</c:chartSpace>
 </file>
 
 <file path=ppt/notesMasters/notesMaster1.xml><?xml version="1.0" encoding="utf-8"?>
@@ -551,6 +1597,446 @@
 </p:notes>
 </file>
 
+<file path=ppt/notesSlides/notesSlide10.xml><?xml version="1.0" encoding="utf-8"?>
+<p:notes xmlns:a="http://schemas.openxmlformats.org/drawingml/2006/main" xmlns:r="http://schemas.openxmlformats.org/officeDocument/2006/relationships" xmlns:p="http://schemas.openxmlformats.org/presentationml/2006/main">
+  <p:cSld>
+    <p:spTree>
+      <p:nvGrpSpPr>
+        <p:cNvPr id="1" name=""/>
+        <p:cNvGrpSpPr/>
+        <p:nvPr/>
+      </p:nvGrpSpPr>
+      <p:grpSpPr>
+        <a:xfrm>
+          <a:off x="0" y="0"/>
+          <a:ext cx="0" cy="0"/>
+          <a:chOff x="0" y="0"/>
+          <a:chExt cx="0" cy="0"/>
+        </a:xfrm>
+      </p:grpSpPr>
+      <p:sp>
+        <p:nvSpPr>
+          <p:cNvPr id="2" name="Slide Image Placeholder 1"/>
+          <p:cNvSpPr>
+            <a:spLocks noGrp="1" noRot="1" noChangeAspect="1"/>
+          </p:cNvSpPr>
+          <p:nvPr>
+            <p:ph type="sldImg"/>
+          </p:nvPr>
+        </p:nvSpPr>
+        <p:spPr/>
+      </p:sp>
+      <p:sp>
+        <p:nvSpPr>
+          <p:cNvPr id="3" name="Notes Placeholder 2"/>
+          <p:cNvSpPr>
+            <a:spLocks noGrp="1"/>
+          </p:cNvSpPr>
+          <p:nvPr>
+            <p:ph type="body" idx="1"/>
+          </p:nvPr>
+        </p:nvSpPr>
+        <p:spPr/>
+        <p:txBody>
+          <a:bodyPr/>
+          <a:lstStyle/>
+          <a:p>
+            <a:r>
+              <a:rPr lang="en-US" dirty="0"/>
+              <a:t/>
+            </a:r>
+            <a:endParaRPr lang="en-US" dirty="0"/>
+          </a:p>
+        </p:txBody>
+      </p:sp>
+      <p:sp>
+        <p:nvSpPr>
+          <p:cNvPr id="4" name="Slide Number Placeholder 3"/>
+          <p:cNvSpPr>
+            <a:spLocks noGrp="1"/>
+          </p:cNvSpPr>
+          <p:nvPr>
+            <p:ph type="sldNum" sz="quarter" idx="10"/>
+          </p:nvPr>
+        </p:nvSpPr>
+        <p:spPr/>
+        <p:txBody>
+          <a:bodyPr/>
+          <a:lstStyle/>
+          <a:p>
+            <a:fld id="{F7021451-1387-4CA6-816F-3879F97B5CBC}" type="slidenum">
+              <a:rPr lang="en-US"/>
+              <a:t>10</a:t>
+            </a:fld>
+            <a:endParaRPr lang="en-US"/>
+          </a:p>
+        </p:txBody>
+      </p:sp>
+    </p:spTree>
+    <p:extLst>
+      <p:ext uri="{BB962C8B-B14F-4D97-AF65-F5344CB8AC3E}">
+        <p14:creationId xmlns:p14="http://schemas.microsoft.com/office/powerpoint/2010/main" val="1024086991"/>
+      </p:ext>
+    </p:extLst>
+  </p:cSld>
+  <p:clrMapOvr>
+    <a:masterClrMapping/>
+  </p:clrMapOvr>
+</p:notes>
+</file>
+
+<file path=ppt/notesSlides/notesSlide11.xml><?xml version="1.0" encoding="utf-8"?>
+<p:notes xmlns:a="http://schemas.openxmlformats.org/drawingml/2006/main" xmlns:r="http://schemas.openxmlformats.org/officeDocument/2006/relationships" xmlns:p="http://schemas.openxmlformats.org/presentationml/2006/main">
+  <p:cSld>
+    <p:spTree>
+      <p:nvGrpSpPr>
+        <p:cNvPr id="1" name=""/>
+        <p:cNvGrpSpPr/>
+        <p:nvPr/>
+      </p:nvGrpSpPr>
+      <p:grpSpPr>
+        <a:xfrm>
+          <a:off x="0" y="0"/>
+          <a:ext cx="0" cy="0"/>
+          <a:chOff x="0" y="0"/>
+          <a:chExt cx="0" cy="0"/>
+        </a:xfrm>
+      </p:grpSpPr>
+      <p:sp>
+        <p:nvSpPr>
+          <p:cNvPr id="2" name="Slide Image Placeholder 1"/>
+          <p:cNvSpPr>
+            <a:spLocks noGrp="1" noRot="1" noChangeAspect="1"/>
+          </p:cNvSpPr>
+          <p:nvPr>
+            <p:ph type="sldImg"/>
+          </p:nvPr>
+        </p:nvSpPr>
+        <p:spPr/>
+      </p:sp>
+      <p:sp>
+        <p:nvSpPr>
+          <p:cNvPr id="3" name="Notes Placeholder 2"/>
+          <p:cNvSpPr>
+            <a:spLocks noGrp="1"/>
+          </p:cNvSpPr>
+          <p:nvPr>
+            <p:ph type="body" idx="1"/>
+          </p:nvPr>
+        </p:nvSpPr>
+        <p:spPr/>
+        <p:txBody>
+          <a:bodyPr/>
+          <a:lstStyle/>
+          <a:p>
+            <a:r>
+              <a:rPr lang="en-US" dirty="0"/>
+              <a:t/>
+            </a:r>
+            <a:endParaRPr lang="en-US" dirty="0"/>
+          </a:p>
+        </p:txBody>
+      </p:sp>
+      <p:sp>
+        <p:nvSpPr>
+          <p:cNvPr id="4" name="Slide Number Placeholder 3"/>
+          <p:cNvSpPr>
+            <a:spLocks noGrp="1"/>
+          </p:cNvSpPr>
+          <p:nvPr>
+            <p:ph type="sldNum" sz="quarter" idx="10"/>
+          </p:nvPr>
+        </p:nvSpPr>
+        <p:spPr/>
+        <p:txBody>
+          <a:bodyPr/>
+          <a:lstStyle/>
+          <a:p>
+            <a:fld id="{F7021451-1387-4CA6-816F-3879F97B5CBC}" type="slidenum">
+              <a:rPr lang="en-US"/>
+              <a:t>11</a:t>
+            </a:fld>
+            <a:endParaRPr lang="en-US"/>
+          </a:p>
+        </p:txBody>
+      </p:sp>
+    </p:spTree>
+    <p:extLst>
+      <p:ext uri="{BB962C8B-B14F-4D97-AF65-F5344CB8AC3E}">
+        <p14:creationId xmlns:p14="http://schemas.microsoft.com/office/powerpoint/2010/main" val="1024086991"/>
+      </p:ext>
+    </p:extLst>
+  </p:cSld>
+  <p:clrMapOvr>
+    <a:masterClrMapping/>
+  </p:clrMapOvr>
+</p:notes>
+</file>
+
+<file path=ppt/notesSlides/notesSlide12.xml><?xml version="1.0" encoding="utf-8"?>
+<p:notes xmlns:a="http://schemas.openxmlformats.org/drawingml/2006/main" xmlns:r="http://schemas.openxmlformats.org/officeDocument/2006/relationships" xmlns:p="http://schemas.openxmlformats.org/presentationml/2006/main">
+  <p:cSld>
+    <p:spTree>
+      <p:nvGrpSpPr>
+        <p:cNvPr id="1" name=""/>
+        <p:cNvGrpSpPr/>
+        <p:nvPr/>
+      </p:nvGrpSpPr>
+      <p:grpSpPr>
+        <a:xfrm>
+          <a:off x="0" y="0"/>
+          <a:ext cx="0" cy="0"/>
+          <a:chOff x="0" y="0"/>
+          <a:chExt cx="0" cy="0"/>
+        </a:xfrm>
+      </p:grpSpPr>
+      <p:sp>
+        <p:nvSpPr>
+          <p:cNvPr id="2" name="Slide Image Placeholder 1"/>
+          <p:cNvSpPr>
+            <a:spLocks noGrp="1" noRot="1" noChangeAspect="1"/>
+          </p:cNvSpPr>
+          <p:nvPr>
+            <p:ph type="sldImg"/>
+          </p:nvPr>
+        </p:nvSpPr>
+        <p:spPr/>
+      </p:sp>
+      <p:sp>
+        <p:nvSpPr>
+          <p:cNvPr id="3" name="Notes Placeholder 2"/>
+          <p:cNvSpPr>
+            <a:spLocks noGrp="1"/>
+          </p:cNvSpPr>
+          <p:nvPr>
+            <p:ph type="body" idx="1"/>
+          </p:nvPr>
+        </p:nvSpPr>
+        <p:spPr/>
+        <p:txBody>
+          <a:bodyPr/>
+          <a:lstStyle/>
+          <a:p>
+            <a:r>
+              <a:rPr lang="en-US" dirty="0"/>
+              <a:t/>
+            </a:r>
+            <a:endParaRPr lang="en-US" dirty="0"/>
+          </a:p>
+        </p:txBody>
+      </p:sp>
+      <p:sp>
+        <p:nvSpPr>
+          <p:cNvPr id="4" name="Slide Number Placeholder 3"/>
+          <p:cNvSpPr>
+            <a:spLocks noGrp="1"/>
+          </p:cNvSpPr>
+          <p:nvPr>
+            <p:ph type="sldNum" sz="quarter" idx="10"/>
+          </p:nvPr>
+        </p:nvSpPr>
+        <p:spPr/>
+        <p:txBody>
+          <a:bodyPr/>
+          <a:lstStyle/>
+          <a:p>
+            <a:fld id="{F7021451-1387-4CA6-816F-3879F97B5CBC}" type="slidenum">
+              <a:rPr lang="en-US"/>
+              <a:t>12</a:t>
+            </a:fld>
+            <a:endParaRPr lang="en-US"/>
+          </a:p>
+        </p:txBody>
+      </p:sp>
+    </p:spTree>
+    <p:extLst>
+      <p:ext uri="{BB962C8B-B14F-4D97-AF65-F5344CB8AC3E}">
+        <p14:creationId xmlns:p14="http://schemas.microsoft.com/office/powerpoint/2010/main" val="1024086991"/>
+      </p:ext>
+    </p:extLst>
+  </p:cSld>
+  <p:clrMapOvr>
+    <a:masterClrMapping/>
+  </p:clrMapOvr>
+</p:notes>
+</file>
+
+<file path=ppt/notesSlides/notesSlide13.xml><?xml version="1.0" encoding="utf-8"?>
+<p:notes xmlns:a="http://schemas.openxmlformats.org/drawingml/2006/main" xmlns:r="http://schemas.openxmlformats.org/officeDocument/2006/relationships" xmlns:p="http://schemas.openxmlformats.org/presentationml/2006/main">
+  <p:cSld>
+    <p:spTree>
+      <p:nvGrpSpPr>
+        <p:cNvPr id="1" name=""/>
+        <p:cNvGrpSpPr/>
+        <p:nvPr/>
+      </p:nvGrpSpPr>
+      <p:grpSpPr>
+        <a:xfrm>
+          <a:off x="0" y="0"/>
+          <a:ext cx="0" cy="0"/>
+          <a:chOff x="0" y="0"/>
+          <a:chExt cx="0" cy="0"/>
+        </a:xfrm>
+      </p:grpSpPr>
+      <p:sp>
+        <p:nvSpPr>
+          <p:cNvPr id="2" name="Slide Image Placeholder 1"/>
+          <p:cNvSpPr>
+            <a:spLocks noGrp="1" noRot="1" noChangeAspect="1"/>
+          </p:cNvSpPr>
+          <p:nvPr>
+            <p:ph type="sldImg"/>
+          </p:nvPr>
+        </p:nvSpPr>
+        <p:spPr/>
+      </p:sp>
+      <p:sp>
+        <p:nvSpPr>
+          <p:cNvPr id="3" name="Notes Placeholder 2"/>
+          <p:cNvSpPr>
+            <a:spLocks noGrp="1"/>
+          </p:cNvSpPr>
+          <p:nvPr>
+            <p:ph type="body" idx="1"/>
+          </p:nvPr>
+        </p:nvSpPr>
+        <p:spPr/>
+        <p:txBody>
+          <a:bodyPr/>
+          <a:lstStyle/>
+          <a:p>
+            <a:r>
+              <a:rPr lang="en-US" dirty="0"/>
+              <a:t/>
+            </a:r>
+            <a:endParaRPr lang="en-US" dirty="0"/>
+          </a:p>
+        </p:txBody>
+      </p:sp>
+      <p:sp>
+        <p:nvSpPr>
+          <p:cNvPr id="4" name="Slide Number Placeholder 3"/>
+          <p:cNvSpPr>
+            <a:spLocks noGrp="1"/>
+          </p:cNvSpPr>
+          <p:nvPr>
+            <p:ph type="sldNum" sz="quarter" idx="10"/>
+          </p:nvPr>
+        </p:nvSpPr>
+        <p:spPr/>
+        <p:txBody>
+          <a:bodyPr/>
+          <a:lstStyle/>
+          <a:p>
+            <a:fld id="{F7021451-1387-4CA6-816F-3879F97B5CBC}" type="slidenum">
+              <a:rPr lang="en-US"/>
+              <a:t>13</a:t>
+            </a:fld>
+            <a:endParaRPr lang="en-US"/>
+          </a:p>
+        </p:txBody>
+      </p:sp>
+    </p:spTree>
+    <p:extLst>
+      <p:ext uri="{BB962C8B-B14F-4D97-AF65-F5344CB8AC3E}">
+        <p14:creationId xmlns:p14="http://schemas.microsoft.com/office/powerpoint/2010/main" val="1024086991"/>
+      </p:ext>
+    </p:extLst>
+  </p:cSld>
+  <p:clrMapOvr>
+    <a:masterClrMapping/>
+  </p:clrMapOvr>
+</p:notes>
+</file>
+
+<file path=ppt/notesSlides/notesSlide14.xml><?xml version="1.0" encoding="utf-8"?>
+<p:notes xmlns:a="http://schemas.openxmlformats.org/drawingml/2006/main" xmlns:r="http://schemas.openxmlformats.org/officeDocument/2006/relationships" xmlns:p="http://schemas.openxmlformats.org/presentationml/2006/main">
+  <p:cSld>
+    <p:spTree>
+      <p:nvGrpSpPr>
+        <p:cNvPr id="1" name=""/>
+        <p:cNvGrpSpPr/>
+        <p:nvPr/>
+      </p:nvGrpSpPr>
+      <p:grpSpPr>
+        <a:xfrm>
+          <a:off x="0" y="0"/>
+          <a:ext cx="0" cy="0"/>
+          <a:chOff x="0" y="0"/>
+          <a:chExt cx="0" cy="0"/>
+        </a:xfrm>
+      </p:grpSpPr>
+      <p:sp>
+        <p:nvSpPr>
+          <p:cNvPr id="2" name="Slide Image Placeholder 1"/>
+          <p:cNvSpPr>
+            <a:spLocks noGrp="1" noRot="1" noChangeAspect="1"/>
+          </p:cNvSpPr>
+          <p:nvPr>
+            <p:ph type="sldImg"/>
+          </p:nvPr>
+        </p:nvSpPr>
+        <p:spPr/>
+      </p:sp>
+      <p:sp>
+        <p:nvSpPr>
+          <p:cNvPr id="3" name="Notes Placeholder 2"/>
+          <p:cNvSpPr>
+            <a:spLocks noGrp="1"/>
+          </p:cNvSpPr>
+          <p:nvPr>
+            <p:ph type="body" idx="1"/>
+          </p:nvPr>
+        </p:nvSpPr>
+        <p:spPr/>
+        <p:txBody>
+          <a:bodyPr/>
+          <a:lstStyle/>
+          <a:p>
+            <a:r>
+              <a:rPr lang="en-US" dirty="0"/>
+              <a:t/>
+            </a:r>
+            <a:endParaRPr lang="en-US" dirty="0"/>
+          </a:p>
+        </p:txBody>
+      </p:sp>
+      <p:sp>
+        <p:nvSpPr>
+          <p:cNvPr id="4" name="Slide Number Placeholder 3"/>
+          <p:cNvSpPr>
+            <a:spLocks noGrp="1"/>
+          </p:cNvSpPr>
+          <p:nvPr>
+            <p:ph type="sldNum" sz="quarter" idx="10"/>
+          </p:nvPr>
+        </p:nvSpPr>
+        <p:spPr/>
+        <p:txBody>
+          <a:bodyPr/>
+          <a:lstStyle/>
+          <a:p>
+            <a:fld id="{F7021451-1387-4CA6-816F-3879F97B5CBC}" type="slidenum">
+              <a:rPr lang="en-US"/>
+              <a:t>14</a:t>
+            </a:fld>
+            <a:endParaRPr lang="en-US"/>
+          </a:p>
+        </p:txBody>
+      </p:sp>
+    </p:spTree>
+    <p:extLst>
+      <p:ext uri="{BB962C8B-B14F-4D97-AF65-F5344CB8AC3E}">
+        <p14:creationId xmlns:p14="http://schemas.microsoft.com/office/powerpoint/2010/main" val="1024086991"/>
+      </p:ext>
+    </p:extLst>
+  </p:cSld>
+  <p:clrMapOvr>
+    <a:masterClrMapping/>
+  </p:clrMapOvr>
+</p:notes>
+</file>
+
 <file path=ppt/notesSlides/notesSlide2.xml><?xml version="1.0" encoding="utf-8"?>
 <p:notes xmlns:a="http://schemas.openxmlformats.org/drawingml/2006/main" xmlns:r="http://schemas.openxmlformats.org/officeDocument/2006/relationships" xmlns:p="http://schemas.openxmlformats.org/presentationml/2006/main">
   <p:cSld>
@@ -1149,6 +2635,94 @@
             <a:fld id="{F7021451-1387-4CA6-816F-3879F97B5CBC}" type="slidenum">
               <a:rPr lang="en-US"/>
               <a:t>8</a:t>
+            </a:fld>
+            <a:endParaRPr lang="en-US"/>
+          </a:p>
+        </p:txBody>
+      </p:sp>
+    </p:spTree>
+    <p:extLst>
+      <p:ext uri="{BB962C8B-B14F-4D97-AF65-F5344CB8AC3E}">
+        <p14:creationId xmlns:p14="http://schemas.microsoft.com/office/powerpoint/2010/main" val="1024086991"/>
+      </p:ext>
+    </p:extLst>
+  </p:cSld>
+  <p:clrMapOvr>
+    <a:masterClrMapping/>
+  </p:clrMapOvr>
+</p:notes>
+</file>
+
+<file path=ppt/notesSlides/notesSlide9.xml><?xml version="1.0" encoding="utf-8"?>
+<p:notes xmlns:a="http://schemas.openxmlformats.org/drawingml/2006/main" xmlns:r="http://schemas.openxmlformats.org/officeDocument/2006/relationships" xmlns:p="http://schemas.openxmlformats.org/presentationml/2006/main">
+  <p:cSld>
+    <p:spTree>
+      <p:nvGrpSpPr>
+        <p:cNvPr id="1" name=""/>
+        <p:cNvGrpSpPr/>
+        <p:nvPr/>
+      </p:nvGrpSpPr>
+      <p:grpSpPr>
+        <a:xfrm>
+          <a:off x="0" y="0"/>
+          <a:ext cx="0" cy="0"/>
+          <a:chOff x="0" y="0"/>
+          <a:chExt cx="0" cy="0"/>
+        </a:xfrm>
+      </p:grpSpPr>
+      <p:sp>
+        <p:nvSpPr>
+          <p:cNvPr id="2" name="Slide Image Placeholder 1"/>
+          <p:cNvSpPr>
+            <a:spLocks noGrp="1" noRot="1" noChangeAspect="1"/>
+          </p:cNvSpPr>
+          <p:nvPr>
+            <p:ph type="sldImg"/>
+          </p:nvPr>
+        </p:nvSpPr>
+        <p:spPr/>
+      </p:sp>
+      <p:sp>
+        <p:nvSpPr>
+          <p:cNvPr id="3" name="Notes Placeholder 2"/>
+          <p:cNvSpPr>
+            <a:spLocks noGrp="1"/>
+          </p:cNvSpPr>
+          <p:nvPr>
+            <p:ph type="body" idx="1"/>
+          </p:nvPr>
+        </p:nvSpPr>
+        <p:spPr/>
+        <p:txBody>
+          <a:bodyPr/>
+          <a:lstStyle/>
+          <a:p>
+            <a:r>
+              <a:rPr lang="en-US" dirty="0"/>
+              <a:t/>
+            </a:r>
+            <a:endParaRPr lang="en-US" dirty="0"/>
+          </a:p>
+        </p:txBody>
+      </p:sp>
+      <p:sp>
+        <p:nvSpPr>
+          <p:cNvPr id="4" name="Slide Number Placeholder 3"/>
+          <p:cNvSpPr>
+            <a:spLocks noGrp="1"/>
+          </p:cNvSpPr>
+          <p:nvPr>
+            <p:ph type="sldNum" sz="quarter" idx="10"/>
+          </p:nvPr>
+        </p:nvSpPr>
+        <p:spPr/>
+        <p:txBody>
+          <a:bodyPr/>
+          <a:lstStyle/>
+          <a:p>
+            <a:fld id="{F7021451-1387-4CA6-816F-3879F97B5CBC}" type="slidenum">
+              <a:rPr lang="en-US"/>
+              <a:t>9</a:t>
             </a:fld>
             <a:endParaRPr lang="en-US"/>
           </a:p>
@@ -1546,7 +3120,7 @@
         </p:nvSpPr>
         <p:spPr>
           <a:xfrm>
-            <a:off x="822960" y="1554480"/>
+            <a:off x="822960" y="1783080"/>
             <a:ext cx="10515600" cy="457200"/>
           </a:xfrm>
           <a:prstGeom prst="rect">
@@ -1571,7 +3145,7 @@
                 <a:ea typeface="Consolas" pitchFamily="34" charset="-122"/>
                 <a:cs typeface="Consolas" pitchFamily="34" charset="-120"/>
               </a:rPr>
-              <a:t>QA</a:t>
+              <a:t>ZALIN PLATFORM · QUALITY ENGINEERING</a:t>
             </a:r>
             <a:endParaRPr lang="en-US" sz="1400" dirty="0"/>
           </a:p>
@@ -1586,7 +3160,7 @@
         <p:spPr>
           <a:xfrm>
             <a:off x="822960" y="2286000"/>
-            <a:ext cx="10515600" cy="1737360"/>
+            <a:ext cx="10607040" cy="1691640"/>
           </a:xfrm>
           <a:prstGeom prst="rect">
             <a:avLst/>
@@ -1602,7 +3176,7 @@
               <a:buNone/>
             </a:pPr>
             <a:r>
-              <a:rPr lang="en-US" sz="4400" b="1" dirty="0">
+              <a:rPr lang="en-US" sz="4100" b="1" dirty="0">
                 <a:solidFill>
                   <a:srgbClr val="FFFFFF"/>
                 </a:solidFill>
@@ -1610,9 +3184,9 @@
                 <a:ea typeface="Segoe UI" pitchFamily="34" charset="-122"/>
                 <a:cs typeface="Segoe UI" pitchFamily="34" charset="-120"/>
               </a:rPr>
-              <a:t>Quality gates for AI-generated software</a:t>
-            </a:r>
-            <a:endParaRPr lang="en-US" sz="4400" dirty="0"/>
+              <a:t>Quality Gates for AI-Generated Software</a:t>
+            </a:r>
+            <a:endParaRPr lang="en-US" sz="4100" dirty="0"/>
           </a:p>
         </p:txBody>
       </p:sp>
@@ -1624,8 +3198,8 @@
         </p:nvSpPr>
         <p:spPr>
           <a:xfrm>
-            <a:off x="822960" y="4206240"/>
-            <a:ext cx="10515600" cy="914400"/>
+            <a:off x="822960" y="4023360"/>
+            <a:ext cx="10058400" cy="777240"/>
           </a:xfrm>
           <a:prstGeom prst="rect">
             <a:avLst/>
@@ -1641,7 +3215,7 @@
               <a:buNone/>
             </a:pPr>
             <a:r>
-              <a:rPr lang="en-US" sz="1600" dirty="0">
+              <a:rPr lang="en-US" sz="1700" dirty="0">
                 <a:solidFill>
                   <a:srgbClr val="94A3B8"/>
                 </a:solidFill>
@@ -1649,21 +3223,83 @@
                 <a:ea typeface="Segoe UI" pitchFamily="34" charset="-122"/>
                 <a:cs typeface="Segoe UI" pitchFamily="34" charset="-120"/>
               </a:rPr>
-              <a:t>The release discipline behind 30+ production apps · Rezalian Vatiady</a:t>
-            </a:r>
-            <a:endParaRPr lang="en-US" sz="1600" dirty="0"/>
-          </a:p>
-        </p:txBody>
-      </p:sp>
-      <p:sp>
-        <p:nvSpPr>
-          <p:cNvPr id="7" name="Text 5"/>
-          <p:cNvSpPr/>
-          <p:nvPr/>
-        </p:nvSpPr>
-        <p:spPr>
-          <a:xfrm>
-            <a:off x="10698480" y="6355080"/>
+              <a:t>Four non-negotiables behind 30+ production apps shipped by a team of one plus nine agents</a:t>
+            </a:r>
+            <a:endParaRPr lang="en-US" sz="1700" dirty="0"/>
+          </a:p>
+        </p:txBody>
+      </p:sp>
+      <p:sp>
+        <p:nvSpPr>
+          <p:cNvPr id="7" name="Shape 5"/>
+          <p:cNvSpPr/>
+          <p:nvPr/>
+        </p:nvSpPr>
+        <p:spPr>
+          <a:xfrm>
+            <a:off x="822960" y="5440680"/>
+            <a:ext cx="4114800" cy="0"/>
+          </a:xfrm>
+          <a:prstGeom prst="line">
+            <a:avLst/>
+          </a:prstGeom>
+          <a:noFill/>
+          <a:ln w="31750">
+            <a:solidFill>
+              <a:srgbClr val="3B82F6"/>
+            </a:solidFill>
+            <a:prstDash val="solid"/>
+          </a:ln>
+        </p:spPr>
+      </p:sp>
+      <p:sp>
+        <p:nvSpPr>
+          <p:cNvPr id="8" name="Text 6"/>
+          <p:cNvSpPr/>
+          <p:nvPr/>
+        </p:nvSpPr>
+        <p:spPr>
+          <a:xfrm>
+            <a:off x="822960" y="5596128"/>
+            <a:ext cx="10058400" cy="457200"/>
+          </a:xfrm>
+          <a:prstGeom prst="rect">
+            <a:avLst/>
+          </a:prstGeom>
+          <a:noFill/>
+          <a:ln/>
+        </p:spPr>
+        <p:txBody>
+          <a:bodyPr wrap="square" rtlCol="0" anchor="ctr"/>
+          <a:lstStyle/>
+          <a:p>
+            <a:pPr indent="0" marL="0">
+              <a:buNone/>
+            </a:pPr>
+            <a:r>
+              <a:rPr lang="en-US" sz="1250" dirty="0">
+                <a:solidFill>
+                  <a:srgbClr val="64748B"/>
+                </a:solidFill>
+                <a:latin typeface="Segoe UI" pitchFamily="34" charset="0"/>
+                <a:ea typeface="Segoe UI" pitchFamily="34" charset="-122"/>
+                <a:cs typeface="Segoe UI" pitchFamily="34" charset="-120"/>
+              </a:rPr>
+              <a:t>Rezalian Vatiady · Zalin Labs · 2026</a:t>
+            </a:r>
+            <a:endParaRPr lang="en-US" sz="1250" dirty="0"/>
+          </a:p>
+        </p:txBody>
+      </p:sp>
+      <p:sp>
+        <p:nvSpPr>
+          <p:cNvPr id="9" name="Text 7"/>
+          <p:cNvSpPr/>
+          <p:nvPr/>
+        </p:nvSpPr>
+        <p:spPr>
+          <a:xfrm>
+            <a:off x="10698480" y="6382512"/>
             <a:ext cx="1188720" cy="365760"/>
           </a:xfrm>
           <a:prstGeom prst="rect">
@@ -1688,7 +3324,1980 @@
                 <a:ea typeface="Consolas" pitchFamily="34" charset="-122"/>
                 <a:cs typeface="Consolas" pitchFamily="34" charset="-120"/>
               </a:rPr>
-              <a:t>1 / 8</a:t>
+              <a:t>1 / 14</a:t>
+            </a:r>
+            <a:endParaRPr lang="en-US" sz="1000" dirty="0"/>
+          </a:p>
+        </p:txBody>
+      </p:sp>
+    </p:spTree>
+  </p:cSld>
+  <p:clrMapOvr>
+    <a:masterClrMapping/>
+  </p:clrMapOvr>
+</p:sld>
+</file>
+
+<file path=ppt/slides/slide10.xml><?xml version="1.0" encoding="utf-8"?>
+<p:sld xmlns:a="http://schemas.openxmlformats.org/drawingml/2006/main" xmlns:r="http://schemas.openxmlformats.org/officeDocument/2006/relationships" xmlns:p="http://schemas.openxmlformats.org/presentationml/2006/main">
+  <p:cSld name="Slide 10">
+    <p:bg>
+      <p:bgPr>
+        <a:solidFill>
+          <a:srgbClr val="0A0C12"/>
+        </a:solidFill>
+      </p:bgPr>
+    </p:bg>
+    <p:spTree>
+      <p:nvGrpSpPr>
+        <p:cNvPr id="1" name=""/>
+        <p:cNvGrpSpPr/>
+        <p:nvPr/>
+      </p:nvGrpSpPr>
+      <p:grpSpPr>
+        <a:xfrm>
+          <a:off x="0" y="0"/>
+          <a:ext cx="0" cy="0"/>
+          <a:chOff x="0" y="0"/>
+          <a:chExt cx="0" cy="0"/>
+        </a:xfrm>
+      </p:grpSpPr>
+      <p:sp>
+        <p:nvSpPr>
+          <p:cNvPr id="2" name="Shape 0"/>
+          <p:cNvSpPr/>
+          <p:nvPr/>
+        </p:nvSpPr>
+        <p:spPr>
+          <a:xfrm>
+            <a:off x="0" y="0"/>
+            <a:ext cx="7680960" cy="64008"/>
+          </a:xfrm>
+          <a:prstGeom prst="rect">
+            <a:avLst/>
+          </a:prstGeom>
+          <a:solidFill>
+            <a:srgbClr val="3B82F6"/>
+          </a:solidFill>
+          <a:ln/>
+        </p:spPr>
+      </p:sp>
+      <p:sp>
+        <p:nvSpPr>
+          <p:cNvPr id="3" name="Shape 1"/>
+          <p:cNvSpPr/>
+          <p:nvPr/>
+        </p:nvSpPr>
+        <p:spPr>
+          <a:xfrm>
+            <a:off x="7680960" y="0"/>
+            <a:ext cx="4510735" cy="64008"/>
+          </a:xfrm>
+          <a:prstGeom prst="rect">
+            <a:avLst/>
+          </a:prstGeom>
+          <a:solidFill>
+            <a:srgbClr val="06B6D4"/>
+          </a:solidFill>
+          <a:ln/>
+        </p:spPr>
+      </p:sp>
+      <p:sp>
+        <p:nvSpPr>
+          <p:cNvPr id="4" name="Text 2"/>
+          <p:cNvSpPr/>
+          <p:nvPr/>
+        </p:nvSpPr>
+        <p:spPr>
+          <a:xfrm>
+            <a:off x="822960" y="502920"/>
+            <a:ext cx="10515600" cy="365760"/>
+          </a:xfrm>
+          <a:prstGeom prst="rect">
+            <a:avLst/>
+          </a:prstGeom>
+          <a:noFill/>
+          <a:ln/>
+        </p:spPr>
+        <p:txBody>
+          <a:bodyPr wrap="square" rtlCol="0" anchor="ctr"/>
+          <a:lstStyle/>
+          <a:p>
+            <a:pPr indent="0" marL="0">
+              <a:buNone/>
+            </a:pPr>
+            <a:r>
+              <a:rPr lang="en-US" sz="1200" spc="300" kern="0" dirty="0">
+                <a:solidFill>
+                  <a:srgbClr val="06B6D4"/>
+                </a:solidFill>
+                <a:latin typeface="Consolas" pitchFamily="34" charset="0"/>
+                <a:ea typeface="Consolas" pitchFamily="34" charset="-122"/>
+                <a:cs typeface="Consolas" pitchFamily="34" charset="-120"/>
+              </a:rPr>
+              <a:t>DISCIPLINE OVER TIME</a:t>
+            </a:r>
+            <a:endParaRPr lang="en-US" sz="1200" dirty="0"/>
+          </a:p>
+        </p:txBody>
+      </p:sp>
+      <p:sp>
+        <p:nvSpPr>
+          <p:cNvPr id="5" name="Text 3"/>
+          <p:cNvSpPr/>
+          <p:nvPr/>
+        </p:nvSpPr>
+        <p:spPr>
+          <a:xfrm>
+            <a:off x="822960" y="914400"/>
+            <a:ext cx="10561320" cy="868680"/>
+          </a:xfrm>
+          <a:prstGeom prst="rect">
+            <a:avLst/>
+          </a:prstGeom>
+          <a:noFill/>
+          <a:ln/>
+        </p:spPr>
+        <p:txBody>
+          <a:bodyPr wrap="square" rtlCol="0" anchor="ctr"/>
+          <a:lstStyle/>
+          <a:p>
+            <a:pPr indent="0" marL="0">
+              <a:buNone/>
+            </a:pPr>
+            <a:r>
+              <a:rPr lang="en-US" sz="2700" b="1" dirty="0">
+                <a:solidFill>
+                  <a:srgbClr val="FFFFFF"/>
+                </a:solidFill>
+                <a:latin typeface="Segoe UI" pitchFamily="34" charset="0"/>
+                <a:ea typeface="Segoe UI" pitchFamily="34" charset="-122"/>
+                <a:cs typeface="Segoe UI" pitchFamily="34" charset="-120"/>
+              </a:rPr>
+              <a:t>Gates front-load the pain, then the escapes go to zero</a:t>
+            </a:r>
+            <a:endParaRPr lang="en-US" sz="2700" dirty="0"/>
+          </a:p>
+        </p:txBody>
+      </p:sp>
+      <p:graphicFrame>
+        <p:nvGraphicFramePr>
+          <p:cNvPr id="6" name="Chart 0" descr=""/>
+          <p:cNvGraphicFramePr/>
+          <p:nvPr/>
+        </p:nvGraphicFramePr>
+        <p:xfrm>
+          <a:off x="822960" y="1874520"/>
+          <a:ext cx="10515600" cy="3337560"/>
+        </p:xfrm>
+        <a:graphic xmlns:a="http://schemas.openxmlformats.org/drawingml/2006/main">
+          <a:graphicData uri="http://schemas.openxmlformats.org/drawingml/2006/chart">
+            <c:chart xmlns:c="http://schemas.openxmlformats.org/drawingml/2006/chart" r:id="rId1"/>
+          </a:graphicData>
+        </a:graphic>
+      </p:graphicFrame>
+      <p:sp>
+        <p:nvSpPr>
+          <p:cNvPr id="7" name="Shape 4"/>
+          <p:cNvSpPr/>
+          <p:nvPr/>
+        </p:nvSpPr>
+        <p:spPr>
+          <a:xfrm>
+            <a:off x="822960" y="5413248"/>
+            <a:ext cx="10515600" cy="0"/>
+          </a:xfrm>
+          <a:prstGeom prst="line">
+            <a:avLst/>
+          </a:prstGeom>
+          <a:noFill/>
+          <a:ln w="12700">
+            <a:solidFill>
+              <a:srgbClr val="1E2D45"/>
+            </a:solidFill>
+            <a:prstDash val="solid"/>
+          </a:ln>
+        </p:spPr>
+      </p:sp>
+      <p:sp>
+        <p:nvSpPr>
+          <p:cNvPr id="8" name="Text 5"/>
+          <p:cNvSpPr/>
+          <p:nvPr/>
+        </p:nvSpPr>
+        <p:spPr>
+          <a:xfrm>
+            <a:off x="822960" y="5504688"/>
+            <a:ext cx="10424160" cy="411480"/>
+          </a:xfrm>
+          <a:prstGeom prst="rect">
+            <a:avLst/>
+          </a:prstGeom>
+          <a:noFill/>
+          <a:ln/>
+        </p:spPr>
+        <p:txBody>
+          <a:bodyPr wrap="square" rtlCol="0" anchor="ctr"/>
+          <a:lstStyle/>
+          <a:p>
+            <a:pPr indent="0" marL="0">
+              <a:buNone/>
+            </a:pPr>
+            <a:r>
+              <a:rPr lang="en-US" sz="1300" i="1" dirty="0">
+                <a:solidFill>
+                  <a:srgbClr val="06B6D4"/>
+                </a:solidFill>
+                <a:latin typeface="Segoe UI" pitchFamily="34" charset="0"/>
+                <a:ea typeface="Segoe UI" pitchFamily="34" charset="-122"/>
+                <a:cs typeface="Segoe UI" pitchFamily="34" charset="-120"/>
+              </a:rPr>
+              <a:t>→  Early releases catch the most, and escapes trend to zero as specs and sweeps mature - the gate gets smarter with every run.</a:t>
+            </a:r>
+            <a:endParaRPr lang="en-US" sz="1300" dirty="0"/>
+          </a:p>
+        </p:txBody>
+      </p:sp>
+      <p:sp>
+        <p:nvSpPr>
+          <p:cNvPr id="9" name="Shape 6"/>
+          <p:cNvSpPr/>
+          <p:nvPr/>
+        </p:nvSpPr>
+        <p:spPr>
+          <a:xfrm>
+            <a:off x="822960" y="5961888"/>
+            <a:ext cx="10515600" cy="0"/>
+          </a:xfrm>
+          <a:prstGeom prst="line">
+            <a:avLst/>
+          </a:prstGeom>
+          <a:noFill/>
+          <a:ln w="12700">
+            <a:solidFill>
+              <a:srgbClr val="1E2D45"/>
+            </a:solidFill>
+            <a:prstDash val="solid"/>
+          </a:ln>
+        </p:spPr>
+      </p:sp>
+      <p:sp>
+        <p:nvSpPr>
+          <p:cNvPr id="10" name="Text 7"/>
+          <p:cNvSpPr/>
+          <p:nvPr/>
+        </p:nvSpPr>
+        <p:spPr>
+          <a:xfrm>
+            <a:off x="822960" y="6053328"/>
+            <a:ext cx="9692640" cy="457200"/>
+          </a:xfrm>
+          <a:prstGeom prst="rect">
+            <a:avLst/>
+          </a:prstGeom>
+          <a:noFill/>
+          <a:ln/>
+        </p:spPr>
+        <p:txBody>
+          <a:bodyPr wrap="square" rtlCol="0" anchor="ctr"/>
+          <a:lstStyle/>
+          <a:p>
+            <a:pPr indent="0" marL="0">
+              <a:buNone/>
+            </a:pPr>
+            <a:r>
+              <a:rPr lang="en-US" sz="1150" dirty="0">
+                <a:solidFill>
+                  <a:srgbClr val="64748B"/>
+                </a:solidFill>
+                <a:latin typeface="Segoe UI" pitchFamily="34" charset="0"/>
+                <a:ea typeface="Segoe UI" pitchFamily="34" charset="-122"/>
+                <a:cs typeface="Segoe UI" pitchFamily="34" charset="-120"/>
+              </a:rPr>
+              <a:t>Illustrative trend for one app's first six gated releases; the point is the direction, not the decimals.</a:t>
+            </a:r>
+            <a:endParaRPr lang="en-US" sz="1150" dirty="0"/>
+          </a:p>
+        </p:txBody>
+      </p:sp>
+      <p:sp>
+        <p:nvSpPr>
+          <p:cNvPr id="11" name="Text 8"/>
+          <p:cNvSpPr/>
+          <p:nvPr/>
+        </p:nvSpPr>
+        <p:spPr>
+          <a:xfrm>
+            <a:off x="10698480" y="6382512"/>
+            <a:ext cx="1188720" cy="365760"/>
+          </a:xfrm>
+          <a:prstGeom prst="rect">
+            <a:avLst/>
+          </a:prstGeom>
+          <a:noFill/>
+          <a:ln/>
+        </p:spPr>
+        <p:txBody>
+          <a:bodyPr wrap="square" rtlCol="0" anchor="ctr"/>
+          <a:lstStyle/>
+          <a:p>
+            <a:pPr algn="r" indent="0" marL="0">
+              <a:buNone/>
+            </a:pPr>
+            <a:r>
+              <a:rPr lang="en-US" sz="1000" dirty="0">
+                <a:solidFill>
+                  <a:srgbClr val="64748B"/>
+                </a:solidFill>
+                <a:latin typeface="Consolas" pitchFamily="34" charset="0"/>
+                <a:ea typeface="Consolas" pitchFamily="34" charset="-122"/>
+                <a:cs typeface="Consolas" pitchFamily="34" charset="-120"/>
+              </a:rPr>
+              <a:t>10 / 14</a:t>
+            </a:r>
+            <a:endParaRPr lang="en-US" sz="1000" dirty="0"/>
+          </a:p>
+        </p:txBody>
+      </p:sp>
+    </p:spTree>
+  </p:cSld>
+  <p:clrMapOvr>
+    <a:masterClrMapping/>
+  </p:clrMapOvr>
+</p:sld>
+</file>
+
+<file path=ppt/slides/slide11.xml><?xml version="1.0" encoding="utf-8"?>
+<p:sld xmlns:a="http://schemas.openxmlformats.org/drawingml/2006/main" xmlns:r="http://schemas.openxmlformats.org/officeDocument/2006/relationships" xmlns:p="http://schemas.openxmlformats.org/presentationml/2006/main">
+  <p:cSld name="Slide 11">
+    <p:bg>
+      <p:bgPr>
+        <a:solidFill>
+          <a:srgbClr val="0A0C12"/>
+        </a:solidFill>
+      </p:bgPr>
+    </p:bg>
+    <p:spTree>
+      <p:nvGrpSpPr>
+        <p:cNvPr id="1" name=""/>
+        <p:cNvGrpSpPr/>
+        <p:nvPr/>
+      </p:nvGrpSpPr>
+      <p:grpSpPr>
+        <a:xfrm>
+          <a:off x="0" y="0"/>
+          <a:ext cx="0" cy="0"/>
+          <a:chOff x="0" y="0"/>
+          <a:chExt cx="0" cy="0"/>
+        </a:xfrm>
+      </p:grpSpPr>
+      <p:sp>
+        <p:nvSpPr>
+          <p:cNvPr id="2" name="Shape 0"/>
+          <p:cNvSpPr/>
+          <p:nvPr/>
+        </p:nvSpPr>
+        <p:spPr>
+          <a:xfrm>
+            <a:off x="0" y="0"/>
+            <a:ext cx="7680960" cy="64008"/>
+          </a:xfrm>
+          <a:prstGeom prst="rect">
+            <a:avLst/>
+          </a:prstGeom>
+          <a:solidFill>
+            <a:srgbClr val="3B82F6"/>
+          </a:solidFill>
+          <a:ln/>
+        </p:spPr>
+      </p:sp>
+      <p:sp>
+        <p:nvSpPr>
+          <p:cNvPr id="3" name="Shape 1"/>
+          <p:cNvSpPr/>
+          <p:nvPr/>
+        </p:nvSpPr>
+        <p:spPr>
+          <a:xfrm>
+            <a:off x="7680960" y="0"/>
+            <a:ext cx="4510735" cy="64008"/>
+          </a:xfrm>
+          <a:prstGeom prst="rect">
+            <a:avLst/>
+          </a:prstGeom>
+          <a:solidFill>
+            <a:srgbClr val="06B6D4"/>
+          </a:solidFill>
+          <a:ln/>
+        </p:spPr>
+      </p:sp>
+      <p:sp>
+        <p:nvSpPr>
+          <p:cNvPr id="4" name="Text 2"/>
+          <p:cNvSpPr/>
+          <p:nvPr/>
+        </p:nvSpPr>
+        <p:spPr>
+          <a:xfrm>
+            <a:off x="822960" y="502920"/>
+            <a:ext cx="10515600" cy="365760"/>
+          </a:xfrm>
+          <a:prstGeom prst="rect">
+            <a:avLst/>
+          </a:prstGeom>
+          <a:noFill/>
+          <a:ln/>
+        </p:spPr>
+        <p:txBody>
+          <a:bodyPr wrap="square" rtlCol="0" anchor="ctr"/>
+          <a:lstStyle/>
+          <a:p>
+            <a:pPr indent="0" marL="0">
+              <a:buNone/>
+            </a:pPr>
+            <a:r>
+              <a:rPr lang="en-US" sz="1200" spc="300" kern="0" dirty="0">
+                <a:solidFill>
+                  <a:srgbClr val="06B6D4"/>
+                </a:solidFill>
+                <a:latin typeface="Consolas" pitchFamily="34" charset="0"/>
+                <a:ea typeface="Consolas" pitchFamily="34" charset="-122"/>
+                <a:cs typeface="Consolas" pitchFamily="34" charset="-120"/>
+              </a:rPr>
+              <a:t>THE DIFFERENCE</a:t>
+            </a:r>
+            <a:endParaRPr lang="en-US" sz="1200" dirty="0"/>
+          </a:p>
+        </p:txBody>
+      </p:sp>
+      <p:sp>
+        <p:nvSpPr>
+          <p:cNvPr id="5" name="Text 3"/>
+          <p:cNvSpPr/>
+          <p:nvPr/>
+        </p:nvSpPr>
+        <p:spPr>
+          <a:xfrm>
+            <a:off x="822960" y="914400"/>
+            <a:ext cx="10561320" cy="868680"/>
+          </a:xfrm>
+          <a:prstGeom prst="rect">
+            <a:avLst/>
+          </a:prstGeom>
+          <a:noFill/>
+          <a:ln/>
+        </p:spPr>
+        <p:txBody>
+          <a:bodyPr wrap="square" rtlCol="0" anchor="ctr"/>
+          <a:lstStyle/>
+          <a:p>
+            <a:pPr indent="0" marL="0">
+              <a:buNone/>
+            </a:pPr>
+            <a:r>
+              <a:rPr lang="en-US" sz="2700" b="1" dirty="0">
+                <a:solidFill>
+                  <a:srgbClr val="FFFFFF"/>
+                </a:solidFill>
+                <a:latin typeface="Segoe UI" pitchFamily="34" charset="0"/>
+                <a:ea typeface="Segoe UI" pitchFamily="34" charset="-122"/>
+                <a:cs typeface="Segoe UI" pitchFamily="34" charset="-120"/>
+              </a:rPr>
+              <a:t>Speed without gates versus speed with gates</a:t>
+            </a:r>
+            <a:endParaRPr lang="en-US" sz="2700" dirty="0"/>
+          </a:p>
+        </p:txBody>
+      </p:sp>
+      <p:sp>
+        <p:nvSpPr>
+          <p:cNvPr id="6" name="Shape 4"/>
+          <p:cNvSpPr/>
+          <p:nvPr/>
+        </p:nvSpPr>
+        <p:spPr>
+          <a:xfrm>
+            <a:off x="822960" y="2011680"/>
+            <a:ext cx="5074920" cy="3611880"/>
+          </a:xfrm>
+          <a:prstGeom prst="roundRect">
+            <a:avLst>
+              <a:gd name="adj" fmla="val 2025"/>
+            </a:avLst>
+          </a:prstGeom>
+          <a:solidFill>
+            <a:srgbClr val="111A2E"/>
+          </a:solidFill>
+          <a:ln w="12700">
+            <a:solidFill>
+              <a:srgbClr val="1E2D45"/>
+            </a:solidFill>
+            <a:prstDash val="solid"/>
+          </a:ln>
+        </p:spPr>
+      </p:sp>
+      <p:sp>
+        <p:nvSpPr>
+          <p:cNvPr id="7" name="Text 5"/>
+          <p:cNvSpPr/>
+          <p:nvPr/>
+        </p:nvSpPr>
+        <p:spPr>
+          <a:xfrm>
+            <a:off x="1097280" y="2240280"/>
+            <a:ext cx="4526280" cy="502920"/>
+          </a:xfrm>
+          <a:prstGeom prst="rect">
+            <a:avLst/>
+          </a:prstGeom>
+          <a:noFill/>
+          <a:ln/>
+        </p:spPr>
+        <p:txBody>
+          <a:bodyPr wrap="square" rtlCol="0" anchor="ctr"/>
+          <a:lstStyle/>
+          <a:p>
+            <a:pPr indent="0" marL="0">
+              <a:buNone/>
+            </a:pPr>
+            <a:r>
+              <a:rPr lang="en-US" sz="1650" b="1" dirty="0">
+                <a:solidFill>
+                  <a:srgbClr val="06B6D4"/>
+                </a:solidFill>
+                <a:latin typeface="Segoe UI" pitchFamily="34" charset="0"/>
+                <a:ea typeface="Segoe UI" pitchFamily="34" charset="-122"/>
+                <a:cs typeface="Segoe UI" pitchFamily="34" charset="-120"/>
+              </a:rPr>
+              <a:t>Ungated AI speed</a:t>
+            </a:r>
+            <a:endParaRPr lang="en-US" sz="1650" dirty="0"/>
+          </a:p>
+        </p:txBody>
+      </p:sp>
+      <p:sp>
+        <p:nvSpPr>
+          <p:cNvPr id="8" name="Text 6"/>
+          <p:cNvSpPr/>
+          <p:nvPr/>
+        </p:nvSpPr>
+        <p:spPr>
+          <a:xfrm>
+            <a:off x="1097280" y="2834640"/>
+            <a:ext cx="4553712" cy="2651760"/>
+          </a:xfrm>
+          <a:prstGeom prst="rect">
+            <a:avLst/>
+          </a:prstGeom>
+          <a:noFill/>
+          <a:ln/>
+        </p:spPr>
+        <p:txBody>
+          <a:bodyPr wrap="square" rtlCol="0" anchor="t"/>
+          <a:lstStyle/>
+          <a:p>
+            <a:pPr marL="342900" indent="-342900">
+              <a:lnSpc>
+                <a:spcPct val="112000"/>
+              </a:lnSpc>
+              <a:spcAft>
+                <a:spcPts val="900"/>
+              </a:spcAft>
+              <a:buSzPct val="100000"/>
+              <a:buChar char="▸"/>
+            </a:pPr>
+            <a:r>
+              <a:rPr lang="en-US" sz="1280" dirty="0">
+                <a:solidFill>
+                  <a:srgbClr val="CBD5E1"/>
+                </a:solidFill>
+                <a:latin typeface="Segoe UI" pitchFamily="34" charset="0"/>
+                <a:ea typeface="Segoe UI" pitchFamily="34" charset="-122"/>
+                <a:cs typeface="Segoe UI" pitchFamily="34" charset="-120"/>
+              </a:rPr>
+              <a:t>Debt compounds at machine pace</a:t>
+            </a:r>
+            <a:endParaRPr lang="en-US" sz="1280" dirty="0"/>
+          </a:p>
+          <a:p>
+            <a:pPr marL="342900" indent="-342900">
+              <a:lnSpc>
+                <a:spcPct val="112000"/>
+              </a:lnSpc>
+              <a:spcAft>
+                <a:spcPts val="900"/>
+              </a:spcAft>
+              <a:buSzPct val="100000"/>
+              <a:buChar char="▸"/>
+            </a:pPr>
+            <a:r>
+              <a:rPr lang="en-US" sz="1280" dirty="0">
+                <a:solidFill>
+                  <a:srgbClr val="CBD5E1"/>
+                </a:solidFill>
+                <a:latin typeface="Segoe UI" pitchFamily="34" charset="0"/>
+                <a:ea typeface="Segoe UI" pitchFamily="34" charset="-122"/>
+                <a:cs typeface="Segoe UI" pitchFamily="34" charset="-120"/>
+              </a:rPr>
+              <a:t>A button that does nothing ships silently</a:t>
+            </a:r>
+            <a:endParaRPr lang="en-US" sz="1280" dirty="0"/>
+          </a:p>
+          <a:p>
+            <a:pPr marL="342900" indent="-342900">
+              <a:lnSpc>
+                <a:spcPct val="112000"/>
+              </a:lnSpc>
+              <a:spcAft>
+                <a:spcPts val="900"/>
+              </a:spcAft>
+              <a:buSzPct val="100000"/>
+              <a:buChar char="▸"/>
+            </a:pPr>
+            <a:r>
+              <a:rPr lang="en-US" sz="1280" dirty="0">
+                <a:solidFill>
+                  <a:srgbClr val="CBD5E1"/>
+                </a:solidFill>
+                <a:latin typeface="Segoe UI" pitchFamily="34" charset="0"/>
+                <a:ea typeface="Segoe UI" pitchFamily="34" charset="-122"/>
+                <a:cs typeface="Segoe UI" pitchFamily="34" charset="-120"/>
+              </a:rPr>
+              <a:t>Rollback is an emergency</a:t>
+            </a:r>
+            <a:endParaRPr lang="en-US" sz="1280" dirty="0"/>
+          </a:p>
+          <a:p>
+            <a:pPr marL="342900" indent="-342900">
+              <a:lnSpc>
+                <a:spcPct val="112000"/>
+              </a:lnSpc>
+              <a:spcAft>
+                <a:spcPts val="900"/>
+              </a:spcAft>
+              <a:buSzPct val="100000"/>
+              <a:buChar char="▸"/>
+            </a:pPr>
+            <a:r>
+              <a:rPr lang="en-US" sz="1280" dirty="0">
+                <a:solidFill>
+                  <a:srgbClr val="CBD5E1"/>
+                </a:solidFill>
+                <a:latin typeface="Segoe UI" pitchFamily="34" charset="0"/>
+                <a:ea typeface="Segoe UI" pitchFamily="34" charset="-122"/>
+                <a:cs typeface="Segoe UI" pitchFamily="34" charset="-120"/>
+              </a:rPr>
+              <a:t>Users run the test suite</a:t>
+            </a:r>
+            <a:endParaRPr lang="en-US" sz="1280" dirty="0"/>
+          </a:p>
+        </p:txBody>
+      </p:sp>
+      <p:sp>
+        <p:nvSpPr>
+          <p:cNvPr id="9" name="Shape 7"/>
+          <p:cNvSpPr/>
+          <p:nvPr/>
+        </p:nvSpPr>
+        <p:spPr>
+          <a:xfrm>
+            <a:off x="6291072" y="2011680"/>
+            <a:ext cx="5074920" cy="3611880"/>
+          </a:xfrm>
+          <a:prstGeom prst="roundRect">
+            <a:avLst>
+              <a:gd name="adj" fmla="val 2025"/>
+            </a:avLst>
+          </a:prstGeom>
+          <a:solidFill>
+            <a:srgbClr val="111A2E"/>
+          </a:solidFill>
+          <a:ln w="12700">
+            <a:solidFill>
+              <a:srgbClr val="1E2D45"/>
+            </a:solidFill>
+            <a:prstDash val="solid"/>
+          </a:ln>
+        </p:spPr>
+      </p:sp>
+      <p:sp>
+        <p:nvSpPr>
+          <p:cNvPr id="10" name="Text 8"/>
+          <p:cNvSpPr/>
+          <p:nvPr/>
+        </p:nvSpPr>
+        <p:spPr>
+          <a:xfrm>
+            <a:off x="6565392" y="2240280"/>
+            <a:ext cx="4526280" cy="502920"/>
+          </a:xfrm>
+          <a:prstGeom prst="rect">
+            <a:avLst/>
+          </a:prstGeom>
+          <a:noFill/>
+          <a:ln/>
+        </p:spPr>
+        <p:txBody>
+          <a:bodyPr wrap="square" rtlCol="0" anchor="ctr"/>
+          <a:lstStyle/>
+          <a:p>
+            <a:pPr indent="0" marL="0">
+              <a:buNone/>
+            </a:pPr>
+            <a:r>
+              <a:rPr lang="en-US" sz="1650" b="1" dirty="0">
+                <a:solidFill>
+                  <a:srgbClr val="93C5FD"/>
+                </a:solidFill>
+                <a:latin typeface="Segoe UI" pitchFamily="34" charset="0"/>
+                <a:ea typeface="Segoe UI" pitchFamily="34" charset="-122"/>
+                <a:cs typeface="Segoe UI" pitchFamily="34" charset="-120"/>
+              </a:rPr>
+              <a:t>Gated AI speed</a:t>
+            </a:r>
+            <a:endParaRPr lang="en-US" sz="1650" dirty="0"/>
+          </a:p>
+        </p:txBody>
+      </p:sp>
+      <p:sp>
+        <p:nvSpPr>
+          <p:cNvPr id="11" name="Text 9"/>
+          <p:cNvSpPr/>
+          <p:nvPr/>
+        </p:nvSpPr>
+        <p:spPr>
+          <a:xfrm>
+            <a:off x="6565392" y="2834640"/>
+            <a:ext cx="4553712" cy="2651760"/>
+          </a:xfrm>
+          <a:prstGeom prst="rect">
+            <a:avLst/>
+          </a:prstGeom>
+          <a:noFill/>
+          <a:ln/>
+        </p:spPr>
+        <p:txBody>
+          <a:bodyPr wrap="square" rtlCol="0" anchor="t"/>
+          <a:lstStyle/>
+          <a:p>
+            <a:pPr marL="342900" indent="-342900">
+              <a:lnSpc>
+                <a:spcPct val="112000"/>
+              </a:lnSpc>
+              <a:spcAft>
+                <a:spcPts val="900"/>
+              </a:spcAft>
+              <a:buSzPct val="100000"/>
+              <a:buChar char="▸"/>
+            </a:pPr>
+            <a:r>
+              <a:rPr lang="en-US" sz="1280" dirty="0">
+                <a:solidFill>
+                  <a:srgbClr val="CBD5E1"/>
+                </a:solidFill>
+                <a:latin typeface="Segoe UI" pitchFamily="34" charset="0"/>
+                <a:ea typeface="Segoe UI" pitchFamily="34" charset="-122"/>
+                <a:cs typeface="Segoe UI" pitchFamily="34" charset="-120"/>
+              </a:rPr>
+              <a:t>Every release walks the golden path</a:t>
+            </a:r>
+            <a:endParaRPr lang="en-US" sz="1280" dirty="0"/>
+          </a:p>
+          <a:p>
+            <a:pPr marL="342900" indent="-342900">
+              <a:lnSpc>
+                <a:spcPct val="112000"/>
+              </a:lnSpc>
+              <a:spcAft>
+                <a:spcPts val="900"/>
+              </a:spcAft>
+              <a:buSzPct val="100000"/>
+              <a:buChar char="▸"/>
+            </a:pPr>
+            <a:r>
+              <a:rPr lang="en-US" sz="1280" dirty="0">
+                <a:solidFill>
+                  <a:srgbClr val="CBD5E1"/>
+                </a:solidFill>
+                <a:latin typeface="Segoe UI" pitchFamily="34" charset="0"/>
+                <a:ea typeface="Segoe UI" pitchFamily="34" charset="-122"/>
+                <a:cs typeface="Segoe UI" pitchFamily="34" charset="-120"/>
+              </a:rPr>
+              <a:t>Agents sweep every screen for liars</a:t>
+            </a:r>
+            <a:endParaRPr lang="en-US" sz="1280" dirty="0"/>
+          </a:p>
+          <a:p>
+            <a:pPr marL="342900" indent="-342900">
+              <a:lnSpc>
+                <a:spcPct val="112000"/>
+              </a:lnSpc>
+              <a:spcAft>
+                <a:spcPts val="900"/>
+              </a:spcAft>
+              <a:buSzPct val="100000"/>
+              <a:buChar char="▸"/>
+            </a:pPr>
+            <a:r>
+              <a:rPr lang="en-US" sz="1280" dirty="0">
+                <a:solidFill>
+                  <a:srgbClr val="CBD5E1"/>
+                </a:solidFill>
+                <a:latin typeface="Segoe UI" pitchFamily="34" charset="0"/>
+                <a:ea typeface="Segoe UI" pitchFamily="34" charset="-122"/>
+                <a:cs typeface="Segoe UI" pitchFamily="34" charset="-120"/>
+              </a:rPr>
+              <a:t>Rollback is a normal Tuesday</a:t>
+            </a:r>
+            <a:endParaRPr lang="en-US" sz="1280" dirty="0"/>
+          </a:p>
+          <a:p>
+            <a:pPr marL="342900" indent="-342900">
+              <a:lnSpc>
+                <a:spcPct val="112000"/>
+              </a:lnSpc>
+              <a:spcAft>
+                <a:spcPts val="900"/>
+              </a:spcAft>
+              <a:buSzPct val="100000"/>
+              <a:buChar char="▸"/>
+            </a:pPr>
+            <a:r>
+              <a:rPr lang="en-US" sz="1280" dirty="0">
+                <a:solidFill>
+                  <a:srgbClr val="CBD5E1"/>
+                </a:solidFill>
+                <a:latin typeface="Segoe UI" pitchFamily="34" charset="0"/>
+                <a:ea typeface="Segoe UI" pitchFamily="34" charset="-122"/>
+                <a:cs typeface="Segoe UI" pitchFamily="34" charset="-120"/>
+              </a:rPr>
+              <a:t>Evidence a stranger could audit</a:t>
+            </a:r>
+            <a:endParaRPr lang="en-US" sz="1280" dirty="0"/>
+          </a:p>
+        </p:txBody>
+      </p:sp>
+      <p:sp>
+        <p:nvSpPr>
+          <p:cNvPr id="12" name="Shape 10"/>
+          <p:cNvSpPr/>
+          <p:nvPr/>
+        </p:nvSpPr>
+        <p:spPr>
+          <a:xfrm>
+            <a:off x="822960" y="5961888"/>
+            <a:ext cx="10515600" cy="0"/>
+          </a:xfrm>
+          <a:prstGeom prst="line">
+            <a:avLst/>
+          </a:prstGeom>
+          <a:noFill/>
+          <a:ln w="12700">
+            <a:solidFill>
+              <a:srgbClr val="1E2D45"/>
+            </a:solidFill>
+            <a:prstDash val="solid"/>
+          </a:ln>
+        </p:spPr>
+      </p:sp>
+      <p:sp>
+        <p:nvSpPr>
+          <p:cNvPr id="13" name="Text 11"/>
+          <p:cNvSpPr/>
+          <p:nvPr/>
+        </p:nvSpPr>
+        <p:spPr>
+          <a:xfrm>
+            <a:off x="822960" y="6053328"/>
+            <a:ext cx="9692640" cy="457200"/>
+          </a:xfrm>
+          <a:prstGeom prst="rect">
+            <a:avLst/>
+          </a:prstGeom>
+          <a:noFill/>
+          <a:ln/>
+        </p:spPr>
+        <p:txBody>
+          <a:bodyPr wrap="square" rtlCol="0" anchor="ctr"/>
+          <a:lstStyle/>
+          <a:p>
+            <a:pPr indent="0" marL="0">
+              <a:buNone/>
+            </a:pPr>
+            <a:r>
+              <a:rPr lang="en-US" sz="1150" dirty="0">
+                <a:solidFill>
+                  <a:srgbClr val="64748B"/>
+                </a:solidFill>
+                <a:latin typeface="Segoe UI" pitchFamily="34" charset="0"/>
+                <a:ea typeface="Segoe UI" pitchFamily="34" charset="-122"/>
+                <a:cs typeface="Segoe UI" pitchFamily="34" charset="-120"/>
+              </a:rPr>
+              <a:t>Same speed, opposite trajectory - the gates decide which one you get.</a:t>
+            </a:r>
+            <a:endParaRPr lang="en-US" sz="1150" dirty="0"/>
+          </a:p>
+        </p:txBody>
+      </p:sp>
+      <p:sp>
+        <p:nvSpPr>
+          <p:cNvPr id="14" name="Text 12"/>
+          <p:cNvSpPr/>
+          <p:nvPr/>
+        </p:nvSpPr>
+        <p:spPr>
+          <a:xfrm>
+            <a:off x="10698480" y="6382512"/>
+            <a:ext cx="1188720" cy="365760"/>
+          </a:xfrm>
+          <a:prstGeom prst="rect">
+            <a:avLst/>
+          </a:prstGeom>
+          <a:noFill/>
+          <a:ln/>
+        </p:spPr>
+        <p:txBody>
+          <a:bodyPr wrap="square" rtlCol="0" anchor="ctr"/>
+          <a:lstStyle/>
+          <a:p>
+            <a:pPr algn="r" indent="0" marL="0">
+              <a:buNone/>
+            </a:pPr>
+            <a:r>
+              <a:rPr lang="en-US" sz="1000" dirty="0">
+                <a:solidFill>
+                  <a:srgbClr val="64748B"/>
+                </a:solidFill>
+                <a:latin typeface="Consolas" pitchFamily="34" charset="0"/>
+                <a:ea typeface="Consolas" pitchFamily="34" charset="-122"/>
+                <a:cs typeface="Consolas" pitchFamily="34" charset="-120"/>
+              </a:rPr>
+              <a:t>11 / 14</a:t>
+            </a:r>
+            <a:endParaRPr lang="en-US" sz="1000" dirty="0"/>
+          </a:p>
+        </p:txBody>
+      </p:sp>
+    </p:spTree>
+  </p:cSld>
+  <p:clrMapOvr>
+    <a:masterClrMapping/>
+  </p:clrMapOvr>
+</p:sld>
+</file>
+
+<file path=ppt/slides/slide12.xml><?xml version="1.0" encoding="utf-8"?>
+<p:sld xmlns:a="http://schemas.openxmlformats.org/drawingml/2006/main" xmlns:r="http://schemas.openxmlformats.org/officeDocument/2006/relationships" xmlns:p="http://schemas.openxmlformats.org/presentationml/2006/main">
+  <p:cSld name="Slide 12">
+    <p:bg>
+      <p:bgPr>
+        <a:solidFill>
+          <a:srgbClr val="0A0C12"/>
+        </a:solidFill>
+      </p:bgPr>
+    </p:bg>
+    <p:spTree>
+      <p:nvGrpSpPr>
+        <p:cNvPr id="1" name=""/>
+        <p:cNvGrpSpPr/>
+        <p:nvPr/>
+      </p:nvGrpSpPr>
+      <p:grpSpPr>
+        <a:xfrm>
+          <a:off x="0" y="0"/>
+          <a:ext cx="0" cy="0"/>
+          <a:chOff x="0" y="0"/>
+          <a:chExt cx="0" cy="0"/>
+        </a:xfrm>
+      </p:grpSpPr>
+      <p:sp>
+        <p:nvSpPr>
+          <p:cNvPr id="2" name="Shape 0"/>
+          <p:cNvSpPr/>
+          <p:nvPr/>
+        </p:nvSpPr>
+        <p:spPr>
+          <a:xfrm>
+            <a:off x="0" y="0"/>
+            <a:ext cx="7680960" cy="64008"/>
+          </a:xfrm>
+          <a:prstGeom prst="rect">
+            <a:avLst/>
+          </a:prstGeom>
+          <a:solidFill>
+            <a:srgbClr val="3B82F6"/>
+          </a:solidFill>
+          <a:ln/>
+        </p:spPr>
+      </p:sp>
+      <p:sp>
+        <p:nvSpPr>
+          <p:cNvPr id="3" name="Shape 1"/>
+          <p:cNvSpPr/>
+          <p:nvPr/>
+        </p:nvSpPr>
+        <p:spPr>
+          <a:xfrm>
+            <a:off x="7680960" y="0"/>
+            <a:ext cx="4510735" cy="64008"/>
+          </a:xfrm>
+          <a:prstGeom prst="rect">
+            <a:avLst/>
+          </a:prstGeom>
+          <a:solidFill>
+            <a:srgbClr val="06B6D4"/>
+          </a:solidFill>
+          <a:ln/>
+        </p:spPr>
+      </p:sp>
+      <p:sp>
+        <p:nvSpPr>
+          <p:cNvPr id="4" name="Text 2"/>
+          <p:cNvSpPr/>
+          <p:nvPr/>
+        </p:nvSpPr>
+        <p:spPr>
+          <a:xfrm>
+            <a:off x="822960" y="502920"/>
+            <a:ext cx="10515600" cy="365760"/>
+          </a:xfrm>
+          <a:prstGeom prst="rect">
+            <a:avLst/>
+          </a:prstGeom>
+          <a:noFill/>
+          <a:ln/>
+        </p:spPr>
+        <p:txBody>
+          <a:bodyPr wrap="square" rtlCol="0" anchor="ctr"/>
+          <a:lstStyle/>
+          <a:p>
+            <a:pPr indent="0" marL="0">
+              <a:buNone/>
+            </a:pPr>
+            <a:r>
+              <a:rPr lang="en-US" sz="1200" spc="300" kern="0" dirty="0">
+                <a:solidFill>
+                  <a:srgbClr val="06B6D4"/>
+                </a:solidFill>
+                <a:latin typeface="Consolas" pitchFamily="34" charset="0"/>
+                <a:ea typeface="Consolas" pitchFamily="34" charset="-122"/>
+                <a:cs typeface="Consolas" pitchFamily="34" charset="-120"/>
+              </a:rPr>
+              <a:t>QA EFFORT</a:t>
+            </a:r>
+            <a:endParaRPr lang="en-US" sz="1200" dirty="0"/>
+          </a:p>
+        </p:txBody>
+      </p:sp>
+      <p:sp>
+        <p:nvSpPr>
+          <p:cNvPr id="5" name="Text 3"/>
+          <p:cNvSpPr/>
+          <p:nvPr/>
+        </p:nvSpPr>
+        <p:spPr>
+          <a:xfrm>
+            <a:off x="822960" y="914400"/>
+            <a:ext cx="10561320" cy="868680"/>
+          </a:xfrm>
+          <a:prstGeom prst="rect">
+            <a:avLst/>
+          </a:prstGeom>
+          <a:noFill/>
+          <a:ln/>
+        </p:spPr>
+        <p:txBody>
+          <a:bodyPr wrap="square" rtlCol="0" anchor="ctr"/>
+          <a:lstStyle/>
+          <a:p>
+            <a:pPr indent="0" marL="0">
+              <a:buNone/>
+            </a:pPr>
+            <a:r>
+              <a:rPr lang="en-US" sz="2700" b="1" dirty="0">
+                <a:solidFill>
+                  <a:srgbClr val="FFFFFF"/>
+                </a:solidFill>
+                <a:latin typeface="Segoe UI" pitchFamily="34" charset="0"/>
+                <a:ea typeface="Segoe UI" pitchFamily="34" charset="-122"/>
+                <a:cs typeface="Segoe UI" pitchFamily="34" charset="-120"/>
+              </a:rPr>
+              <a:t>Where QA agent time goes on each release</a:t>
+            </a:r>
+            <a:endParaRPr lang="en-US" sz="2700" dirty="0"/>
+          </a:p>
+        </p:txBody>
+      </p:sp>
+      <p:graphicFrame>
+        <p:nvGraphicFramePr>
+          <p:cNvPr id="6" name="Chart 0" descr=""/>
+          <p:cNvGraphicFramePr/>
+          <p:nvPr/>
+        </p:nvGraphicFramePr>
+        <p:xfrm>
+          <a:off x="822960" y="1874520"/>
+          <a:ext cx="10515600" cy="3337560"/>
+        </p:xfrm>
+        <a:graphic xmlns:a="http://schemas.openxmlformats.org/drawingml/2006/main">
+          <a:graphicData uri="http://schemas.openxmlformats.org/drawingml/2006/chart">
+            <c:chart xmlns:c="http://schemas.openxmlformats.org/drawingml/2006/chart" r:id="rId1"/>
+          </a:graphicData>
+        </a:graphic>
+      </p:graphicFrame>
+      <p:sp>
+        <p:nvSpPr>
+          <p:cNvPr id="7" name="Shape 4"/>
+          <p:cNvSpPr/>
+          <p:nvPr/>
+        </p:nvSpPr>
+        <p:spPr>
+          <a:xfrm>
+            <a:off x="822960" y="5413248"/>
+            <a:ext cx="10515600" cy="0"/>
+          </a:xfrm>
+          <a:prstGeom prst="line">
+            <a:avLst/>
+          </a:prstGeom>
+          <a:noFill/>
+          <a:ln w="12700">
+            <a:solidFill>
+              <a:srgbClr val="1E2D45"/>
+            </a:solidFill>
+            <a:prstDash val="solid"/>
+          </a:ln>
+        </p:spPr>
+      </p:sp>
+      <p:sp>
+        <p:nvSpPr>
+          <p:cNvPr id="8" name="Text 5"/>
+          <p:cNvSpPr/>
+          <p:nvPr/>
+        </p:nvSpPr>
+        <p:spPr>
+          <a:xfrm>
+            <a:off x="822960" y="5504688"/>
+            <a:ext cx="10424160" cy="411480"/>
+          </a:xfrm>
+          <a:prstGeom prst="rect">
+            <a:avLst/>
+          </a:prstGeom>
+          <a:noFill/>
+          <a:ln/>
+        </p:spPr>
+        <p:txBody>
+          <a:bodyPr wrap="square" rtlCol="0" anchor="ctr"/>
+          <a:lstStyle/>
+          <a:p>
+            <a:pPr indent="0" marL="0">
+              <a:buNone/>
+            </a:pPr>
+            <a:r>
+              <a:rPr lang="en-US" sz="1300" i="1" dirty="0">
+                <a:solidFill>
+                  <a:srgbClr val="06B6D4"/>
+                </a:solidFill>
+                <a:latin typeface="Segoe UI" pitchFamily="34" charset="0"/>
+                <a:ea typeface="Segoe UI" pitchFamily="34" charset="-122"/>
+                <a:cs typeface="Segoe UI" pitchFamily="34" charset="-120"/>
+              </a:rPr>
+              <a:t>→  Most QA effort is systematic sweeping - repeatable work agents do reliably, which is why the discipline actually happens every release.</a:t>
+            </a:r>
+            <a:endParaRPr lang="en-US" sz="1300" dirty="0"/>
+          </a:p>
+        </p:txBody>
+      </p:sp>
+      <p:sp>
+        <p:nvSpPr>
+          <p:cNvPr id="9" name="Shape 6"/>
+          <p:cNvSpPr/>
+          <p:nvPr/>
+        </p:nvSpPr>
+        <p:spPr>
+          <a:xfrm>
+            <a:off x="822960" y="5961888"/>
+            <a:ext cx="10515600" cy="0"/>
+          </a:xfrm>
+          <a:prstGeom prst="line">
+            <a:avLst/>
+          </a:prstGeom>
+          <a:noFill/>
+          <a:ln w="12700">
+            <a:solidFill>
+              <a:srgbClr val="1E2D45"/>
+            </a:solidFill>
+            <a:prstDash val="solid"/>
+          </a:ln>
+        </p:spPr>
+      </p:sp>
+      <p:sp>
+        <p:nvSpPr>
+          <p:cNvPr id="10" name="Text 7"/>
+          <p:cNvSpPr/>
+          <p:nvPr/>
+        </p:nvSpPr>
+        <p:spPr>
+          <a:xfrm>
+            <a:off x="822960" y="6053328"/>
+            <a:ext cx="9692640" cy="457200"/>
+          </a:xfrm>
+          <a:prstGeom prst="rect">
+            <a:avLst/>
+          </a:prstGeom>
+          <a:noFill/>
+          <a:ln/>
+        </p:spPr>
+        <p:txBody>
+          <a:bodyPr wrap="square" rtlCol="0" anchor="ctr"/>
+          <a:lstStyle/>
+          <a:p>
+            <a:pPr indent="0" marL="0">
+              <a:buNone/>
+            </a:pPr>
+            <a:r>
+              <a:rPr lang="en-US" sz="1150" dirty="0">
+                <a:solidFill>
+                  <a:srgbClr val="64748B"/>
+                </a:solidFill>
+                <a:latin typeface="Segoe UI" pitchFamily="34" charset="0"/>
+                <a:ea typeface="Segoe UI" pitchFamily="34" charset="-122"/>
+                <a:cs typeface="Segoe UI" pitchFamily="34" charset="-120"/>
+              </a:rPr>
+              <a:t>Illustrative effort split across the four gates for a routine release.</a:t>
+            </a:r>
+            <a:endParaRPr lang="en-US" sz="1150" dirty="0"/>
+          </a:p>
+        </p:txBody>
+      </p:sp>
+      <p:sp>
+        <p:nvSpPr>
+          <p:cNvPr id="11" name="Text 8"/>
+          <p:cNvSpPr/>
+          <p:nvPr/>
+        </p:nvSpPr>
+        <p:spPr>
+          <a:xfrm>
+            <a:off x="10698480" y="6382512"/>
+            <a:ext cx="1188720" cy="365760"/>
+          </a:xfrm>
+          <a:prstGeom prst="rect">
+            <a:avLst/>
+          </a:prstGeom>
+          <a:noFill/>
+          <a:ln/>
+        </p:spPr>
+        <p:txBody>
+          <a:bodyPr wrap="square" rtlCol="0" anchor="ctr"/>
+          <a:lstStyle/>
+          <a:p>
+            <a:pPr algn="r" indent="0" marL="0">
+              <a:buNone/>
+            </a:pPr>
+            <a:r>
+              <a:rPr lang="en-US" sz="1000" dirty="0">
+                <a:solidFill>
+                  <a:srgbClr val="64748B"/>
+                </a:solidFill>
+                <a:latin typeface="Consolas" pitchFamily="34" charset="0"/>
+                <a:ea typeface="Consolas" pitchFamily="34" charset="-122"/>
+                <a:cs typeface="Consolas" pitchFamily="34" charset="-120"/>
+              </a:rPr>
+              <a:t>12 / 14</a:t>
+            </a:r>
+            <a:endParaRPr lang="en-US" sz="1000" dirty="0"/>
+          </a:p>
+        </p:txBody>
+      </p:sp>
+    </p:spTree>
+  </p:cSld>
+  <p:clrMapOvr>
+    <a:masterClrMapping/>
+  </p:clrMapOvr>
+</p:sld>
+</file>
+
+<file path=ppt/slides/slide13.xml><?xml version="1.0" encoding="utf-8"?>
+<p:sld xmlns:a="http://schemas.openxmlformats.org/drawingml/2006/main" xmlns:r="http://schemas.openxmlformats.org/officeDocument/2006/relationships" xmlns:p="http://schemas.openxmlformats.org/presentationml/2006/main">
+  <p:cSld name="Slide 13">
+    <p:bg>
+      <p:bgPr>
+        <a:solidFill>
+          <a:srgbClr val="0A0C12"/>
+        </a:solidFill>
+      </p:bgPr>
+    </p:bg>
+    <p:spTree>
+      <p:nvGrpSpPr>
+        <p:cNvPr id="1" name=""/>
+        <p:cNvGrpSpPr/>
+        <p:nvPr/>
+      </p:nvGrpSpPr>
+      <p:grpSpPr>
+        <a:xfrm>
+          <a:off x="0" y="0"/>
+          <a:ext cx="0" cy="0"/>
+          <a:chOff x="0" y="0"/>
+          <a:chExt cx="0" cy="0"/>
+        </a:xfrm>
+      </p:grpSpPr>
+      <p:sp>
+        <p:nvSpPr>
+          <p:cNvPr id="2" name="Shape 0"/>
+          <p:cNvSpPr/>
+          <p:nvPr/>
+        </p:nvSpPr>
+        <p:spPr>
+          <a:xfrm>
+            <a:off x="0" y="0"/>
+            <a:ext cx="7680960" cy="64008"/>
+          </a:xfrm>
+          <a:prstGeom prst="rect">
+            <a:avLst/>
+          </a:prstGeom>
+          <a:solidFill>
+            <a:srgbClr val="3B82F6"/>
+          </a:solidFill>
+          <a:ln/>
+        </p:spPr>
+      </p:sp>
+      <p:sp>
+        <p:nvSpPr>
+          <p:cNvPr id="3" name="Shape 1"/>
+          <p:cNvSpPr/>
+          <p:nvPr/>
+        </p:nvSpPr>
+        <p:spPr>
+          <a:xfrm>
+            <a:off x="7680960" y="0"/>
+            <a:ext cx="4510735" cy="64008"/>
+          </a:xfrm>
+          <a:prstGeom prst="rect">
+            <a:avLst/>
+          </a:prstGeom>
+          <a:solidFill>
+            <a:srgbClr val="06B6D4"/>
+          </a:solidFill>
+          <a:ln/>
+        </p:spPr>
+      </p:sp>
+      <p:sp>
+        <p:nvSpPr>
+          <p:cNvPr id="4" name="Text 2"/>
+          <p:cNvSpPr/>
+          <p:nvPr/>
+        </p:nvSpPr>
+        <p:spPr>
+          <a:xfrm>
+            <a:off x="822960" y="502920"/>
+            <a:ext cx="10515600" cy="365760"/>
+          </a:xfrm>
+          <a:prstGeom prst="rect">
+            <a:avLst/>
+          </a:prstGeom>
+          <a:noFill/>
+          <a:ln/>
+        </p:spPr>
+        <p:txBody>
+          <a:bodyPr wrap="square" rtlCol="0" anchor="ctr"/>
+          <a:lstStyle/>
+          <a:p>
+            <a:pPr indent="0" marL="0">
+              <a:buNone/>
+            </a:pPr>
+            <a:r>
+              <a:rPr lang="en-US" sz="1200" spc="300" kern="0" dirty="0">
+                <a:solidFill>
+                  <a:srgbClr val="06B6D4"/>
+                </a:solidFill>
+                <a:latin typeface="Consolas" pitchFamily="34" charset="0"/>
+                <a:ea typeface="Consolas" pitchFamily="34" charset="-122"/>
+                <a:cs typeface="Consolas" pitchFamily="34" charset="-120"/>
+              </a:rPr>
+              <a:t>ENFORCEMENT</a:t>
+            </a:r>
+            <a:endParaRPr lang="en-US" sz="1200" dirty="0"/>
+          </a:p>
+        </p:txBody>
+      </p:sp>
+      <p:sp>
+        <p:nvSpPr>
+          <p:cNvPr id="5" name="Text 3"/>
+          <p:cNvSpPr/>
+          <p:nvPr/>
+        </p:nvSpPr>
+        <p:spPr>
+          <a:xfrm>
+            <a:off x="822960" y="914400"/>
+            <a:ext cx="10561320" cy="868680"/>
+          </a:xfrm>
+          <a:prstGeom prst="rect">
+            <a:avLst/>
+          </a:prstGeom>
+          <a:noFill/>
+          <a:ln/>
+        </p:spPr>
+        <p:txBody>
+          <a:bodyPr wrap="square" rtlCol="0" anchor="ctr"/>
+          <a:lstStyle/>
+          <a:p>
+            <a:pPr indent="0" marL="0">
+              <a:buNone/>
+            </a:pPr>
+            <a:r>
+              <a:rPr lang="en-US" sz="2700" b="1" dirty="0">
+                <a:solidFill>
+                  <a:srgbClr val="FFFFFF"/>
+                </a:solidFill>
+                <a:latin typeface="Segoe UI" pitchFamily="34" charset="0"/>
+                <a:ea typeface="Segoe UI" pitchFamily="34" charset="-122"/>
+                <a:cs typeface="Segoe UI" pitchFamily="34" charset="-120"/>
+              </a:rPr>
+              <a:t>A gate that cannot stop traffic is not a gate</a:t>
+            </a:r>
+            <a:endParaRPr lang="en-US" sz="2700" dirty="0"/>
+          </a:p>
+        </p:txBody>
+      </p:sp>
+      <p:sp>
+        <p:nvSpPr>
+          <p:cNvPr id="6" name="Text 4"/>
+          <p:cNvSpPr/>
+          <p:nvPr/>
+        </p:nvSpPr>
+        <p:spPr>
+          <a:xfrm>
+            <a:off x="868680" y="2011680"/>
+            <a:ext cx="10424160" cy="3566160"/>
+          </a:xfrm>
+          <a:prstGeom prst="rect">
+            <a:avLst/>
+          </a:prstGeom>
+          <a:noFill/>
+          <a:ln/>
+        </p:spPr>
+        <p:txBody>
+          <a:bodyPr wrap="square" rtlCol="0" anchor="t"/>
+          <a:lstStyle/>
+          <a:p>
+            <a:pPr marL="342900" indent="-342900">
+              <a:lnSpc>
+                <a:spcPct val="112000"/>
+              </a:lnSpc>
+              <a:spcAft>
+                <a:spcPts val="900"/>
+              </a:spcAft>
+              <a:buSzPct val="100000"/>
+              <a:buChar char="▸"/>
+            </a:pPr>
+            <a:r>
+              <a:rPr lang="en-US" sz="1600" dirty="0">
+                <a:solidFill>
+                  <a:srgbClr val="CBD5E1"/>
+                </a:solidFill>
+                <a:latin typeface="Segoe UI" pitchFamily="34" charset="0"/>
+                <a:ea typeface="Segoe UI" pitchFamily="34" charset="-122"/>
+                <a:cs typeface="Segoe UI" pitchFamily="34" charset="-120"/>
+              </a:rPr>
+              <a:t>One blocked item equals no deploy - the gate is only real if it can stop the line.</a:t>
+            </a:r>
+            <a:endParaRPr lang="en-US" sz="1600" dirty="0"/>
+          </a:p>
+          <a:p>
+            <a:pPr marL="342900" indent="-342900">
+              <a:lnSpc>
+                <a:spcPct val="112000"/>
+              </a:lnSpc>
+              <a:spcAft>
+                <a:spcPts val="900"/>
+              </a:spcAft>
+              <a:buSzPct val="100000"/>
+              <a:buChar char="▸"/>
+            </a:pPr>
+            <a:r>
+              <a:rPr lang="en-US" sz="1600" dirty="0">
+                <a:solidFill>
+                  <a:srgbClr val="CBD5E1"/>
+                </a:solidFill>
+                <a:latin typeface="Segoe UI" pitchFamily="34" charset="0"/>
+                <a:ea typeface="Segoe UI" pitchFamily="34" charset="-122"/>
+                <a:cs typeface="Segoe UI" pitchFamily="34" charset="-120"/>
+              </a:rPr>
+              <a:t>No 'just this once': exceptions are how gates die, quietly and permanently.</a:t>
+            </a:r>
+            <a:endParaRPr lang="en-US" sz="1600" dirty="0"/>
+          </a:p>
+          <a:p>
+            <a:pPr marL="342900" indent="-342900">
+              <a:lnSpc>
+                <a:spcPct val="112000"/>
+              </a:lnSpc>
+              <a:spcAft>
+                <a:spcPts val="900"/>
+              </a:spcAft>
+              <a:buSzPct val="100000"/>
+              <a:buChar char="▸"/>
+            </a:pPr>
+            <a:r>
+              <a:rPr lang="en-US" sz="1600" dirty="0">
+                <a:solidFill>
+                  <a:srgbClr val="CBD5E1"/>
+                </a:solidFill>
+                <a:latin typeface="Segoe UI" pitchFamily="34" charset="0"/>
+                <a:ea typeface="Segoe UI" pitchFamily="34" charset="-122"/>
+                <a:cs typeface="Segoe UI" pitchFamily="34" charset="-120"/>
+              </a:rPr>
+              <a:t>Agents never approve their own releases - flagged decisions route through a human approval queue.</a:t>
+            </a:r>
+            <a:endParaRPr lang="en-US" sz="1600" dirty="0"/>
+          </a:p>
+          <a:p>
+            <a:pPr marL="342900" indent="-342900">
+              <a:lnSpc>
+                <a:spcPct val="112000"/>
+              </a:lnSpc>
+              <a:spcAft>
+                <a:spcPts val="900"/>
+              </a:spcAft>
+              <a:buSzPct val="100000"/>
+              <a:buChar char="▸"/>
+            </a:pPr>
+            <a:r>
+              <a:rPr lang="en-US" sz="1600" dirty="0">
+                <a:solidFill>
+                  <a:srgbClr val="CBD5E1"/>
+                </a:solidFill>
+                <a:latin typeface="Segoe UI" pitchFamily="34" charset="0"/>
+                <a:ea typeface="Segoe UI" pitchFamily="34" charset="-122"/>
+                <a:cs typeface="Segoe UI" pitchFamily="34" charset="-120"/>
+              </a:rPr>
+              <a:t>Evidence is recorded where reviewers can actually find it, not scattered across chats.</a:t>
+            </a:r>
+            <a:endParaRPr lang="en-US" sz="1600" dirty="0"/>
+          </a:p>
+        </p:txBody>
+      </p:sp>
+      <p:sp>
+        <p:nvSpPr>
+          <p:cNvPr id="7" name="Shape 5"/>
+          <p:cNvSpPr/>
+          <p:nvPr/>
+        </p:nvSpPr>
+        <p:spPr>
+          <a:xfrm>
+            <a:off x="822960" y="5961888"/>
+            <a:ext cx="10515600" cy="0"/>
+          </a:xfrm>
+          <a:prstGeom prst="line">
+            <a:avLst/>
+          </a:prstGeom>
+          <a:noFill/>
+          <a:ln w="12700">
+            <a:solidFill>
+              <a:srgbClr val="1E2D45"/>
+            </a:solidFill>
+            <a:prstDash val="solid"/>
+          </a:ln>
+        </p:spPr>
+      </p:sp>
+      <p:sp>
+        <p:nvSpPr>
+          <p:cNvPr id="8" name="Text 6"/>
+          <p:cNvSpPr/>
+          <p:nvPr/>
+        </p:nvSpPr>
+        <p:spPr>
+          <a:xfrm>
+            <a:off x="822960" y="6053328"/>
+            <a:ext cx="9692640" cy="457200"/>
+          </a:xfrm>
+          <a:prstGeom prst="rect">
+            <a:avLst/>
+          </a:prstGeom>
+          <a:noFill/>
+          <a:ln/>
+        </p:spPr>
+        <p:txBody>
+          <a:bodyPr wrap="square" rtlCol="0" anchor="ctr"/>
+          <a:lstStyle/>
+          <a:p>
+            <a:pPr indent="0" marL="0">
+              <a:buNone/>
+            </a:pPr>
+            <a:r>
+              <a:rPr lang="en-US" sz="1150" dirty="0">
+                <a:solidFill>
+                  <a:srgbClr val="64748B"/>
+                </a:solidFill>
+                <a:latin typeface="Segoe UI" pitchFamily="34" charset="0"/>
+                <a:ea typeface="Segoe UI" pitchFamily="34" charset="-122"/>
+                <a:cs typeface="Segoe UI" pitchFamily="34" charset="-120"/>
+              </a:rPr>
+              <a:t>Make honesty cheaper than lying, and the easy path becomes the correct path.</a:t>
+            </a:r>
+            <a:endParaRPr lang="en-US" sz="1150" dirty="0"/>
+          </a:p>
+        </p:txBody>
+      </p:sp>
+      <p:sp>
+        <p:nvSpPr>
+          <p:cNvPr id="9" name="Text 7"/>
+          <p:cNvSpPr/>
+          <p:nvPr/>
+        </p:nvSpPr>
+        <p:spPr>
+          <a:xfrm>
+            <a:off x="10698480" y="6382512"/>
+            <a:ext cx="1188720" cy="365760"/>
+          </a:xfrm>
+          <a:prstGeom prst="rect">
+            <a:avLst/>
+          </a:prstGeom>
+          <a:noFill/>
+          <a:ln/>
+        </p:spPr>
+        <p:txBody>
+          <a:bodyPr wrap="square" rtlCol="0" anchor="ctr"/>
+          <a:lstStyle/>
+          <a:p>
+            <a:pPr algn="r" indent="0" marL="0">
+              <a:buNone/>
+            </a:pPr>
+            <a:r>
+              <a:rPr lang="en-US" sz="1000" dirty="0">
+                <a:solidFill>
+                  <a:srgbClr val="64748B"/>
+                </a:solidFill>
+                <a:latin typeface="Consolas" pitchFamily="34" charset="0"/>
+                <a:ea typeface="Consolas" pitchFamily="34" charset="-122"/>
+                <a:cs typeface="Consolas" pitchFamily="34" charset="-120"/>
+              </a:rPr>
+              <a:t>13 / 14</a:t>
+            </a:r>
+            <a:endParaRPr lang="en-US" sz="1000" dirty="0"/>
+          </a:p>
+        </p:txBody>
+      </p:sp>
+    </p:spTree>
+  </p:cSld>
+  <p:clrMapOvr>
+    <a:masterClrMapping/>
+  </p:clrMapOvr>
+</p:sld>
+</file>
+
+<file path=ppt/slides/slide14.xml><?xml version="1.0" encoding="utf-8"?>
+<p:sld xmlns:a="http://schemas.openxmlformats.org/drawingml/2006/main" xmlns:r="http://schemas.openxmlformats.org/officeDocument/2006/relationships" xmlns:p="http://schemas.openxmlformats.org/presentationml/2006/main">
+  <p:cSld name="Slide 14">
+    <p:bg>
+      <p:bgPr>
+        <a:solidFill>
+          <a:srgbClr val="0A0C12"/>
+        </a:solidFill>
+      </p:bgPr>
+    </p:bg>
+    <p:spTree>
+      <p:nvGrpSpPr>
+        <p:cNvPr id="1" name=""/>
+        <p:cNvGrpSpPr/>
+        <p:nvPr/>
+      </p:nvGrpSpPr>
+      <p:grpSpPr>
+        <a:xfrm>
+          <a:off x="0" y="0"/>
+          <a:ext cx="0" cy="0"/>
+          <a:chOff x="0" y="0"/>
+          <a:chExt cx="0" cy="0"/>
+        </a:xfrm>
+      </p:grpSpPr>
+      <p:sp>
+        <p:nvSpPr>
+          <p:cNvPr id="2" name="Shape 0"/>
+          <p:cNvSpPr/>
+          <p:nvPr/>
+        </p:nvSpPr>
+        <p:spPr>
+          <a:xfrm>
+            <a:off x="0" y="0"/>
+            <a:ext cx="7680960" cy="64008"/>
+          </a:xfrm>
+          <a:prstGeom prst="rect">
+            <a:avLst/>
+          </a:prstGeom>
+          <a:solidFill>
+            <a:srgbClr val="3B82F6"/>
+          </a:solidFill>
+          <a:ln/>
+        </p:spPr>
+      </p:sp>
+      <p:sp>
+        <p:nvSpPr>
+          <p:cNvPr id="3" name="Shape 1"/>
+          <p:cNvSpPr/>
+          <p:nvPr/>
+        </p:nvSpPr>
+        <p:spPr>
+          <a:xfrm>
+            <a:off x="7680960" y="0"/>
+            <a:ext cx="4510735" cy="64008"/>
+          </a:xfrm>
+          <a:prstGeom prst="rect">
+            <a:avLst/>
+          </a:prstGeom>
+          <a:solidFill>
+            <a:srgbClr val="06B6D4"/>
+          </a:solidFill>
+          <a:ln/>
+        </p:spPr>
+      </p:sp>
+      <p:sp>
+        <p:nvSpPr>
+          <p:cNvPr id="4" name="Text 2"/>
+          <p:cNvSpPr/>
+          <p:nvPr/>
+        </p:nvSpPr>
+        <p:spPr>
+          <a:xfrm>
+            <a:off x="822960" y="1417320"/>
+            <a:ext cx="10515600" cy="411480"/>
+          </a:xfrm>
+          <a:prstGeom prst="rect">
+            <a:avLst/>
+          </a:prstGeom>
+          <a:noFill/>
+          <a:ln/>
+        </p:spPr>
+        <p:txBody>
+          <a:bodyPr wrap="square" rtlCol="0" anchor="ctr"/>
+          <a:lstStyle/>
+          <a:p>
+            <a:pPr algn="ctr" indent="0" marL="0">
+              <a:buNone/>
+            </a:pPr>
+            <a:r>
+              <a:rPr lang="en-US" sz="1300" spc="400" kern="0" dirty="0">
+                <a:solidFill>
+                  <a:srgbClr val="06B6D4"/>
+                </a:solidFill>
+                <a:latin typeface="Consolas" pitchFamily="34" charset="0"/>
+                <a:ea typeface="Consolas" pitchFamily="34" charset="-122"/>
+                <a:cs typeface="Consolas" pitchFamily="34" charset="-120"/>
+              </a:rPr>
+              <a:t>WORK WITH ME</a:t>
+            </a:r>
+            <a:endParaRPr lang="en-US" sz="1300" dirty="0"/>
+          </a:p>
+        </p:txBody>
+      </p:sp>
+      <p:sp>
+        <p:nvSpPr>
+          <p:cNvPr id="5" name="Text 3"/>
+          <p:cNvSpPr/>
+          <p:nvPr/>
+        </p:nvSpPr>
+        <p:spPr>
+          <a:xfrm>
+            <a:off x="822960" y="1920240"/>
+            <a:ext cx="10515600" cy="1371600"/>
+          </a:xfrm>
+          <a:prstGeom prst="rect">
+            <a:avLst/>
+          </a:prstGeom>
+          <a:noFill/>
+          <a:ln/>
+        </p:spPr>
+        <p:txBody>
+          <a:bodyPr wrap="square" rtlCol="0" anchor="ctr"/>
+          <a:lstStyle/>
+          <a:p>
+            <a:pPr algn="ctr" indent="0" marL="0">
+              <a:buNone/>
+            </a:pPr>
+            <a:r>
+              <a:rPr lang="en-US" sz="3200" b="1" dirty="0">
+                <a:solidFill>
+                  <a:srgbClr val="FFFFFF"/>
+                </a:solidFill>
+                <a:latin typeface="Segoe UI" pitchFamily="34" charset="0"/>
+                <a:ea typeface="Segoe UI" pitchFamily="34" charset="-122"/>
+                <a:cs typeface="Segoe UI" pitchFamily="34" charset="-120"/>
+              </a:rPr>
+              <a:t>Ship fast without shipping junk</a:t>
+            </a:r>
+            <a:endParaRPr lang="en-US" sz="3200" dirty="0"/>
+          </a:p>
+        </p:txBody>
+      </p:sp>
+      <p:sp>
+        <p:nvSpPr>
+          <p:cNvPr id="6" name="Text 4"/>
+          <p:cNvSpPr/>
+          <p:nvPr/>
+        </p:nvSpPr>
+        <p:spPr>
+          <a:xfrm>
+            <a:off x="2011680" y="3429000"/>
+            <a:ext cx="8183880" cy="1554480"/>
+          </a:xfrm>
+          <a:prstGeom prst="rect">
+            <a:avLst/>
+          </a:prstGeom>
+          <a:noFill/>
+          <a:ln/>
+        </p:spPr>
+        <p:txBody>
+          <a:bodyPr wrap="square" rtlCol="0" anchor="t"/>
+          <a:lstStyle/>
+          <a:p>
+            <a:pPr algn="ctr" indent="0" marL="0">
+              <a:spcAft>
+                <a:spcPts val="800"/>
+              </a:spcAft>
+              <a:buNone/>
+            </a:pPr>
+            <a:r>
+              <a:rPr lang="en-US" sz="1500" dirty="0">
+                <a:solidFill>
+                  <a:srgbClr val="CBD5E1"/>
+                </a:solidFill>
+                <a:latin typeface="Segoe UI" pitchFamily="34" charset="0"/>
+                <a:ea typeface="Segoe UI" pitchFamily="34" charset="-122"/>
+                <a:cs typeface="Segoe UI" pitchFamily="34" charset="-120"/>
+              </a:rPr>
+              <a:t>The gate discipline that ships 30+ apps is available for your product</a:t>
+            </a:r>
+            <a:pPr algn="ctr" indent="0" marL="0">
+              <a:spcAft>
+                <a:spcPts val="800"/>
+              </a:spcAft>
+              <a:buNone/>
+            </a:pPr>
+            <a:r>
+              <a:rPr lang="en-US" sz="1500" dirty="0">
+                <a:solidFill>
+                  <a:srgbClr val="CBD5E1"/>
+                </a:solidFill>
+                <a:latin typeface="Segoe UI" pitchFamily="34" charset="0"/>
+                <a:ea typeface="Segoe UI" pitchFamily="34" charset="-122"/>
+                <a:cs typeface="Segoe UI" pitchFamily="34" charset="-120"/>
+              </a:rPr>
+              <a:t>I audit and harden AI-generated codebases: golden path, sweeps, evidence trails</a:t>
+            </a:r>
+            <a:pPr algn="ctr" indent="0" marL="0">
+              <a:spcAft>
+                <a:spcPts val="800"/>
+              </a:spcAft>
+              <a:buNone/>
+            </a:pPr>
+            <a:r>
+              <a:rPr lang="en-US" sz="1500" dirty="0">
+                <a:solidFill>
+                  <a:srgbClr val="CBD5E1"/>
+                </a:solidFill>
+                <a:latin typeface="Segoe UI" pitchFamily="34" charset="0"/>
+                <a:ea typeface="Segoe UI" pitchFamily="34" charset="-122"/>
+                <a:cs typeface="Segoe UI" pitchFamily="34" charset="-120"/>
+              </a:rPr>
+              <a:t>Bring your current release process - I will tell you where it lies</a:t>
+            </a:r>
+            <a:endParaRPr lang="en-US" sz="1500" dirty="0"/>
+          </a:p>
+        </p:txBody>
+      </p:sp>
+      <p:sp>
+        <p:nvSpPr>
+          <p:cNvPr id="7" name="Shape 5"/>
+          <p:cNvSpPr/>
+          <p:nvPr/>
+        </p:nvSpPr>
+        <p:spPr>
+          <a:xfrm>
+            <a:off x="3566160" y="5212080"/>
+            <a:ext cx="5074920" cy="0"/>
+          </a:xfrm>
+          <a:prstGeom prst="line">
+            <a:avLst/>
+          </a:prstGeom>
+          <a:noFill/>
+          <a:ln w="25400">
+            <a:solidFill>
+              <a:srgbClr val="3B82F6"/>
+            </a:solidFill>
+            <a:prstDash val="solid"/>
+          </a:ln>
+        </p:spPr>
+      </p:sp>
+      <p:sp>
+        <p:nvSpPr>
+          <p:cNvPr id="8" name="Text 6"/>
+          <p:cNvSpPr/>
+          <p:nvPr/>
+        </p:nvSpPr>
+        <p:spPr>
+          <a:xfrm>
+            <a:off x="822960" y="5376672"/>
+            <a:ext cx="10515600" cy="457200"/>
+          </a:xfrm>
+          <a:prstGeom prst="rect">
+            <a:avLst/>
+          </a:prstGeom>
+          <a:noFill/>
+          <a:ln/>
+        </p:spPr>
+        <p:txBody>
+          <a:bodyPr wrap="square" rtlCol="0" anchor="ctr"/>
+          <a:lstStyle/>
+          <a:p>
+            <a:pPr algn="ctr" indent="0" marL="0">
+              <a:buNone/>
+            </a:pPr>
+            <a:r>
+              <a:rPr lang="en-US" sz="1350" b="1" dirty="0">
+                <a:solidFill>
+                  <a:srgbClr val="06B6D4"/>
+                </a:solidFill>
+                <a:latin typeface="Consolas" pitchFamily="34" charset="0"/>
+                <a:ea typeface="Consolas" pitchFamily="34" charset="-122"/>
+                <a:cs typeface="Consolas" pitchFamily="34" charset="-120"/>
+              </a:rPr>
+              <a:t>rezalianvatiady.github.io · github.com/rezalianvatiady</a:t>
+            </a:r>
+            <a:endParaRPr lang="en-US" sz="1350" dirty="0"/>
+          </a:p>
+        </p:txBody>
+      </p:sp>
+      <p:sp>
+        <p:nvSpPr>
+          <p:cNvPr id="9" name="Text 7"/>
+          <p:cNvSpPr/>
+          <p:nvPr/>
+        </p:nvSpPr>
+        <p:spPr>
+          <a:xfrm>
+            <a:off x="10698480" y="6382512"/>
+            <a:ext cx="1188720" cy="365760"/>
+          </a:xfrm>
+          <a:prstGeom prst="rect">
+            <a:avLst/>
+          </a:prstGeom>
+          <a:noFill/>
+          <a:ln/>
+        </p:spPr>
+        <p:txBody>
+          <a:bodyPr wrap="square" rtlCol="0" anchor="ctr"/>
+          <a:lstStyle/>
+          <a:p>
+            <a:pPr algn="r" indent="0" marL="0">
+              <a:buNone/>
+            </a:pPr>
+            <a:r>
+              <a:rPr lang="en-US" sz="1000" dirty="0">
+                <a:solidFill>
+                  <a:srgbClr val="64748B"/>
+                </a:solidFill>
+                <a:latin typeface="Consolas" pitchFamily="34" charset="0"/>
+                <a:ea typeface="Consolas" pitchFamily="34" charset="-122"/>
+                <a:cs typeface="Consolas" pitchFamily="34" charset="-120"/>
+              </a:rPr>
+              <a:t>14 / 14</a:t>
             </a:r>
             <a:endParaRPr lang="en-US" sz="1000" dirty="0"/>
           </a:p>
@@ -1799,7 +5408,7 @@
                 <a:ea typeface="Consolas" pitchFamily="34" charset="-122"/>
                 <a:cs typeface="Consolas" pitchFamily="34" charset="-120"/>
               </a:rPr>
-              <a:t>THE RISK</a:t>
+              <a:t>AGENDA</a:t>
             </a:r>
             <a:endParaRPr lang="en-US" sz="1200" dirty="0"/>
           </a:p>
@@ -1813,8 +5422,8 @@
         </p:nvSpPr>
         <p:spPr>
           <a:xfrm>
-            <a:off x="822960" y="960120"/>
-            <a:ext cx="10515600" cy="868680"/>
+            <a:off x="822960" y="914400"/>
+            <a:ext cx="10561320" cy="868680"/>
           </a:xfrm>
           <a:prstGeom prst="rect">
             <a:avLst/>
@@ -1830,7 +5439,7 @@
               <a:buNone/>
             </a:pPr>
             <a:r>
-              <a:rPr lang="en-US" sz="3000" b="1" dirty="0">
+              <a:rPr lang="en-US" sz="2700" b="1" dirty="0">
                 <a:solidFill>
                   <a:srgbClr val="FFFFFF"/>
                 </a:solidFill>
@@ -1838,45 +5447,102 @@
                 <a:ea typeface="Segoe UI" pitchFamily="34" charset="-122"/>
                 <a:cs typeface="Segoe UI" pitchFamily="34" charset="-120"/>
               </a:rPr>
-              <a:t>AI writes code at machine speed</a:t>
-            </a:r>
-            <a:endParaRPr lang="en-US" sz="3000" dirty="0"/>
-          </a:p>
-        </p:txBody>
-      </p:sp>
-      <p:sp>
-        <p:nvSpPr>
-          <p:cNvPr id="6" name="Text 4"/>
-          <p:cNvSpPr/>
-          <p:nvPr/>
-        </p:nvSpPr>
-        <p:spPr>
-          <a:xfrm>
-            <a:off x="868680" y="2057400"/>
-            <a:ext cx="10424160" cy="3566160"/>
-          </a:xfrm>
-          <a:prstGeom prst="rect">
-            <a:avLst/>
-          </a:prstGeom>
-          <a:noFill/>
-          <a:ln/>
-        </p:spPr>
-        <p:txBody>
-          <a:bodyPr wrap="square" rtlCol="0" anchor="t"/>
-          <a:lstStyle/>
-          <a:p>
-            <a:pPr marL="342900" indent="-342900">
-              <a:lnSpc>
-                <a:spcPct val="115000"/>
-              </a:lnSpc>
-              <a:spcAft>
-                <a:spcPts val="1000"/>
-              </a:spcAft>
-              <a:buSzPct val="100000"/>
-              <a:buChar char="▸"/>
-            </a:pPr>
-            <a:r>
-              <a:rPr lang="en-US" sz="1600" dirty="0">
+              <a:t>What this deck covers</a:t>
+            </a:r>
+            <a:endParaRPr lang="en-US" sz="2700" dirty="0"/>
+          </a:p>
+        </p:txBody>
+      </p:sp>
+      <p:sp>
+        <p:nvSpPr>
+          <p:cNvPr id="6" name="Shape 4"/>
+          <p:cNvSpPr/>
+          <p:nvPr/>
+        </p:nvSpPr>
+        <p:spPr>
+          <a:xfrm>
+            <a:off x="868680" y="2112264"/>
+            <a:ext cx="420624" cy="420624"/>
+          </a:xfrm>
+          <a:prstGeom prst="ellipse">
+            <a:avLst/>
+          </a:prstGeom>
+          <a:solidFill>
+            <a:srgbClr val="111A2E"/>
+          </a:solidFill>
+          <a:ln w="19050">
+            <a:solidFill>
+              <a:srgbClr val="3B82F6"/>
+            </a:solidFill>
+            <a:prstDash val="solid"/>
+          </a:ln>
+        </p:spPr>
+      </p:sp>
+      <p:sp>
+        <p:nvSpPr>
+          <p:cNvPr id="7" name="Text 5"/>
+          <p:cNvSpPr/>
+          <p:nvPr/>
+        </p:nvSpPr>
+        <p:spPr>
+          <a:xfrm>
+            <a:off x="868680" y="2112264"/>
+            <a:ext cx="420624" cy="420624"/>
+          </a:xfrm>
+          <a:prstGeom prst="rect">
+            <a:avLst/>
+          </a:prstGeom>
+          <a:noFill/>
+          <a:ln/>
+        </p:spPr>
+        <p:txBody>
+          <a:bodyPr wrap="square" rtlCol="0" anchor="ctr"/>
+          <a:lstStyle/>
+          <a:p>
+            <a:pPr algn="ctr" indent="0" marL="0">
+              <a:buNone/>
+            </a:pPr>
+            <a:r>
+              <a:rPr lang="en-US" sz="1300" b="1" dirty="0">
+                <a:solidFill>
+                  <a:srgbClr val="3B82F6"/>
+                </a:solidFill>
+                <a:latin typeface="Consolas" pitchFamily="34" charset="0"/>
+                <a:ea typeface="Consolas" pitchFamily="34" charset="-122"/>
+                <a:cs typeface="Consolas" pitchFamily="34" charset="-120"/>
+              </a:rPr>
+              <a:t>1</a:t>
+            </a:r>
+            <a:endParaRPr lang="en-US" sz="1300" dirty="0"/>
+          </a:p>
+        </p:txBody>
+      </p:sp>
+      <p:sp>
+        <p:nvSpPr>
+          <p:cNvPr id="8" name="Text 6"/>
+          <p:cNvSpPr/>
+          <p:nvPr/>
+        </p:nvSpPr>
+        <p:spPr>
+          <a:xfrm>
+            <a:off x="1435608" y="2057400"/>
+            <a:ext cx="4480560" cy="822960"/>
+          </a:xfrm>
+          <a:prstGeom prst="rect">
+            <a:avLst/>
+          </a:prstGeom>
+          <a:noFill/>
+          <a:ln/>
+        </p:spPr>
+        <p:txBody>
+          <a:bodyPr wrap="square" rtlCol="0" anchor="ctr"/>
+          <a:lstStyle/>
+          <a:p>
+            <a:pPr indent="0" marL="0">
+              <a:buNone/>
+            </a:pPr>
+            <a:r>
+              <a:rPr lang="en-US" sz="1450" dirty="0">
                 <a:solidFill>
                   <a:srgbClr val="CBD5E1"/>
                 </a:solidFill>
@@ -1884,23 +5550,102 @@
                 <a:ea typeface="Segoe UI" pitchFamily="34" charset="-122"/>
                 <a:cs typeface="Segoe UI" pitchFamily="34" charset="-120"/>
               </a:rPr>
-              <a:t>Unreviewed speed is technical debt at machine pace</a:t>
-            </a:r>
-            <a:endParaRPr lang="en-US" sz="1600" dirty="0"/>
-          </a:p>
-          <a:p>
-            <a:pPr marL="342900" indent="-342900">
-              <a:lnSpc>
-                <a:spcPct val="115000"/>
-              </a:lnSpc>
-              <a:spcAft>
-                <a:spcPts val="1000"/>
-              </a:spcAft>
-              <a:buSzPct val="100000"/>
-              <a:buChar char="▸"/>
-            </a:pPr>
-            <a:r>
-              <a:rPr lang="en-US" sz="1600" dirty="0">
+              <a:t>The risk: machine-speed code without machine-speed judgment</a:t>
+            </a:r>
+            <a:endParaRPr lang="en-US" sz="1450" dirty="0"/>
+          </a:p>
+        </p:txBody>
+      </p:sp>
+      <p:sp>
+        <p:nvSpPr>
+          <p:cNvPr id="9" name="Shape 7"/>
+          <p:cNvSpPr/>
+          <p:nvPr/>
+        </p:nvSpPr>
+        <p:spPr>
+          <a:xfrm>
+            <a:off x="868680" y="3044952"/>
+            <a:ext cx="420624" cy="420624"/>
+          </a:xfrm>
+          <a:prstGeom prst="ellipse">
+            <a:avLst/>
+          </a:prstGeom>
+          <a:solidFill>
+            <a:srgbClr val="111A2E"/>
+          </a:solidFill>
+          <a:ln w="19050">
+            <a:solidFill>
+              <a:srgbClr val="06B6D4"/>
+            </a:solidFill>
+            <a:prstDash val="solid"/>
+          </a:ln>
+        </p:spPr>
+      </p:sp>
+      <p:sp>
+        <p:nvSpPr>
+          <p:cNvPr id="10" name="Text 8"/>
+          <p:cNvSpPr/>
+          <p:nvPr/>
+        </p:nvSpPr>
+        <p:spPr>
+          <a:xfrm>
+            <a:off x="868680" y="3044952"/>
+            <a:ext cx="420624" cy="420624"/>
+          </a:xfrm>
+          <a:prstGeom prst="rect">
+            <a:avLst/>
+          </a:prstGeom>
+          <a:noFill/>
+          <a:ln/>
+        </p:spPr>
+        <p:txBody>
+          <a:bodyPr wrap="square" rtlCol="0" anchor="ctr"/>
+          <a:lstStyle/>
+          <a:p>
+            <a:pPr algn="ctr" indent="0" marL="0">
+              <a:buNone/>
+            </a:pPr>
+            <a:r>
+              <a:rPr lang="en-US" sz="1300" b="1" dirty="0">
+                <a:solidFill>
+                  <a:srgbClr val="06B6D4"/>
+                </a:solidFill>
+                <a:latin typeface="Consolas" pitchFamily="34" charset="0"/>
+                <a:ea typeface="Consolas" pitchFamily="34" charset="-122"/>
+                <a:cs typeface="Consolas" pitchFamily="34" charset="-120"/>
+              </a:rPr>
+              <a:t>2</a:t>
+            </a:r>
+            <a:endParaRPr lang="en-US" sz="1300" dirty="0"/>
+          </a:p>
+        </p:txBody>
+      </p:sp>
+      <p:sp>
+        <p:nvSpPr>
+          <p:cNvPr id="11" name="Text 9"/>
+          <p:cNvSpPr/>
+          <p:nvPr/>
+        </p:nvSpPr>
+        <p:spPr>
+          <a:xfrm>
+            <a:off x="1435608" y="2990088"/>
+            <a:ext cx="4480560" cy="822960"/>
+          </a:xfrm>
+          <a:prstGeom prst="rect">
+            <a:avLst/>
+          </a:prstGeom>
+          <a:noFill/>
+          <a:ln/>
+        </p:spPr>
+        <p:txBody>
+          <a:bodyPr wrap="square" rtlCol="0" anchor="ctr"/>
+          <a:lstStyle/>
+          <a:p>
+            <a:pPr indent="0" marL="0">
+              <a:buNone/>
+            </a:pPr>
+            <a:r>
+              <a:rPr lang="en-US" sz="1450" dirty="0">
                 <a:solidFill>
                   <a:srgbClr val="CBD5E1"/>
                 </a:solidFill>
@@ -1908,23 +5653,102 @@
                 <a:ea typeface="Segoe UI" pitchFamily="34" charset="-122"/>
                 <a:cs typeface="Segoe UI" pitchFamily="34" charset="-120"/>
               </a:rPr>
-              <a:t>The failure mode is subtle: a button that does nothing</a:t>
-            </a:r>
-            <a:endParaRPr lang="en-US" sz="1600" dirty="0"/>
-          </a:p>
-          <a:p>
-            <a:pPr marL="342900" indent="-342900">
-              <a:lnSpc>
-                <a:spcPct val="115000"/>
-              </a:lnSpc>
-              <a:spcAft>
-                <a:spcPts val="1000"/>
-              </a:spcAft>
-              <a:buSzPct val="100000"/>
-              <a:buChar char="▸"/>
-            </a:pPr>
-            <a:r>
-              <a:rPr lang="en-US" sz="1600" dirty="0">
+              <a:t>Four gates, defined operationally with pass conditions and evidence</a:t>
+            </a:r>
+            <a:endParaRPr lang="en-US" sz="1450" dirty="0"/>
+          </a:p>
+        </p:txBody>
+      </p:sp>
+      <p:sp>
+        <p:nvSpPr>
+          <p:cNvPr id="12" name="Shape 10"/>
+          <p:cNvSpPr/>
+          <p:nvPr/>
+        </p:nvSpPr>
+        <p:spPr>
+          <a:xfrm>
+            <a:off x="868680" y="3977640"/>
+            <a:ext cx="420624" cy="420624"/>
+          </a:xfrm>
+          <a:prstGeom prst="ellipse">
+            <a:avLst/>
+          </a:prstGeom>
+          <a:solidFill>
+            <a:srgbClr val="111A2E"/>
+          </a:solidFill>
+          <a:ln w="19050">
+            <a:solidFill>
+              <a:srgbClr val="3B82F6"/>
+            </a:solidFill>
+            <a:prstDash val="solid"/>
+          </a:ln>
+        </p:spPr>
+      </p:sp>
+      <p:sp>
+        <p:nvSpPr>
+          <p:cNvPr id="13" name="Text 11"/>
+          <p:cNvSpPr/>
+          <p:nvPr/>
+        </p:nvSpPr>
+        <p:spPr>
+          <a:xfrm>
+            <a:off x="868680" y="3977640"/>
+            <a:ext cx="420624" cy="420624"/>
+          </a:xfrm>
+          <a:prstGeom prst="rect">
+            <a:avLst/>
+          </a:prstGeom>
+          <a:noFill/>
+          <a:ln/>
+        </p:spPr>
+        <p:txBody>
+          <a:bodyPr wrap="square" rtlCol="0" anchor="ctr"/>
+          <a:lstStyle/>
+          <a:p>
+            <a:pPr algn="ctr" indent="0" marL="0">
+              <a:buNone/>
+            </a:pPr>
+            <a:r>
+              <a:rPr lang="en-US" sz="1300" b="1" dirty="0">
+                <a:solidFill>
+                  <a:srgbClr val="3B82F6"/>
+                </a:solidFill>
+                <a:latin typeface="Consolas" pitchFamily="34" charset="0"/>
+                <a:ea typeface="Consolas" pitchFamily="34" charset="-122"/>
+                <a:cs typeface="Consolas" pitchFamily="34" charset="-120"/>
+              </a:rPr>
+              <a:t>3</a:t>
+            </a:r>
+            <a:endParaRPr lang="en-US" sz="1300" dirty="0"/>
+          </a:p>
+        </p:txBody>
+      </p:sp>
+      <p:sp>
+        <p:nvSpPr>
+          <p:cNvPr id="14" name="Text 12"/>
+          <p:cNvSpPr/>
+          <p:nvPr/>
+        </p:nvSpPr>
+        <p:spPr>
+          <a:xfrm>
+            <a:off x="1435608" y="3922776"/>
+            <a:ext cx="4480560" cy="822960"/>
+          </a:xfrm>
+          <a:prstGeom prst="rect">
+            <a:avLst/>
+          </a:prstGeom>
+          <a:noFill/>
+          <a:ln/>
+        </p:spPr>
+        <p:txBody>
+          <a:bodyPr wrap="square" rtlCol="0" anchor="ctr"/>
+          <a:lstStyle/>
+          <a:p>
+            <a:pPr indent="0" marL="0">
+              <a:buNone/>
+            </a:pPr>
+            <a:r>
+              <a:rPr lang="en-US" sz="1450" dirty="0">
                 <a:solidFill>
                   <a:srgbClr val="CBD5E1"/>
                 </a:solidFill>
@@ -1932,23 +5756,102 @@
                 <a:ea typeface="Segoe UI" pitchFamily="34" charset="-122"/>
                 <a:cs typeface="Segoe UI" pitchFamily="34" charset="-120"/>
               </a:rPr>
-              <a:t>Silent skips, unbumped versions, flows that lie</a:t>
-            </a:r>
-            <a:endParaRPr lang="en-US" sz="1600" dirty="0"/>
-          </a:p>
-          <a:p>
-            <a:pPr marL="342900" indent="-342900">
-              <a:lnSpc>
-                <a:spcPct val="115000"/>
-              </a:lnSpc>
-              <a:spcAft>
-                <a:spcPts val="1000"/>
-              </a:spcAft>
-              <a:buSzPct val="100000"/>
-              <a:buChar char="▸"/>
-            </a:pPr>
-            <a:r>
-              <a:rPr lang="en-US" sz="1600" dirty="0">
+              <a:t>How the gates run inside the build-gate-promote-record pipeline</a:t>
+            </a:r>
+            <a:endParaRPr lang="en-US" sz="1450" dirty="0"/>
+          </a:p>
+        </p:txBody>
+      </p:sp>
+      <p:sp>
+        <p:nvSpPr>
+          <p:cNvPr id="15" name="Shape 13"/>
+          <p:cNvSpPr/>
+          <p:nvPr/>
+        </p:nvSpPr>
+        <p:spPr>
+          <a:xfrm>
+            <a:off x="6355080" y="2112264"/>
+            <a:ext cx="420624" cy="420624"/>
+          </a:xfrm>
+          <a:prstGeom prst="ellipse">
+            <a:avLst/>
+          </a:prstGeom>
+          <a:solidFill>
+            <a:srgbClr val="111A2E"/>
+          </a:solidFill>
+          <a:ln w="19050">
+            <a:solidFill>
+              <a:srgbClr val="06B6D4"/>
+            </a:solidFill>
+            <a:prstDash val="solid"/>
+          </a:ln>
+        </p:spPr>
+      </p:sp>
+      <p:sp>
+        <p:nvSpPr>
+          <p:cNvPr id="16" name="Text 14"/>
+          <p:cNvSpPr/>
+          <p:nvPr/>
+        </p:nvSpPr>
+        <p:spPr>
+          <a:xfrm>
+            <a:off x="6355080" y="2112264"/>
+            <a:ext cx="420624" cy="420624"/>
+          </a:xfrm>
+          <a:prstGeom prst="rect">
+            <a:avLst/>
+          </a:prstGeom>
+          <a:noFill/>
+          <a:ln/>
+        </p:spPr>
+        <p:txBody>
+          <a:bodyPr wrap="square" rtlCol="0" anchor="ctr"/>
+          <a:lstStyle/>
+          <a:p>
+            <a:pPr algn="ctr" indent="0" marL="0">
+              <a:buNone/>
+            </a:pPr>
+            <a:r>
+              <a:rPr lang="en-US" sz="1300" b="1" dirty="0">
+                <a:solidFill>
+                  <a:srgbClr val="06B6D4"/>
+                </a:solidFill>
+                <a:latin typeface="Consolas" pitchFamily="34" charset="0"/>
+                <a:ea typeface="Consolas" pitchFamily="34" charset="-122"/>
+                <a:cs typeface="Consolas" pitchFamily="34" charset="-120"/>
+              </a:rPr>
+              <a:t>4</a:t>
+            </a:r>
+            <a:endParaRPr lang="en-US" sz="1300" dirty="0"/>
+          </a:p>
+        </p:txBody>
+      </p:sp>
+      <p:sp>
+        <p:nvSpPr>
+          <p:cNvPr id="17" name="Text 15"/>
+          <p:cNvSpPr/>
+          <p:nvPr/>
+        </p:nvSpPr>
+        <p:spPr>
+          <a:xfrm>
+            <a:off x="6922008" y="2057400"/>
+            <a:ext cx="4480560" cy="822960"/>
+          </a:xfrm>
+          <a:prstGeom prst="rect">
+            <a:avLst/>
+          </a:prstGeom>
+          <a:noFill/>
+          <a:ln/>
+        </p:spPr>
+        <p:txBody>
+          <a:bodyPr wrap="square" rtlCol="0" anchor="ctr"/>
+          <a:lstStyle/>
+          <a:p>
+            <a:pPr indent="0" marL="0">
+              <a:buNone/>
+            </a:pPr>
+            <a:r>
+              <a:rPr lang="en-US" sz="1450" dirty="0">
                 <a:solidFill>
                   <a:srgbClr val="CBD5E1"/>
                 </a:solidFill>
@@ -1956,22 +5859,47 @@
                 <a:ea typeface="Segoe UI" pitchFamily="34" charset="-122"/>
                 <a:cs typeface="Segoe UI" pitchFamily="34" charset="-120"/>
               </a:rPr>
-              <a:t>Gates turn speed from a liability into an asset</a:t>
-            </a:r>
-            <a:endParaRPr lang="en-US" sz="1600" dirty="0"/>
-          </a:p>
-        </p:txBody>
-      </p:sp>
-      <p:sp>
-        <p:nvSpPr>
-          <p:cNvPr id="7" name="Text 5"/>
-          <p:cNvSpPr/>
-          <p:nvPr/>
-        </p:nvSpPr>
-        <p:spPr>
-          <a:xfrm>
-            <a:off x="10698480" y="6355080"/>
-            <a:ext cx="1188720" cy="365760"/>
+              <a:t>What enforcement looks like when a gate fails</a:t>
+            </a:r>
+            <a:endParaRPr lang="en-US" sz="1450" dirty="0"/>
+          </a:p>
+        </p:txBody>
+      </p:sp>
+      <p:sp>
+        <p:nvSpPr>
+          <p:cNvPr id="18" name="Shape 16"/>
+          <p:cNvSpPr/>
+          <p:nvPr/>
+        </p:nvSpPr>
+        <p:spPr>
+          <a:xfrm>
+            <a:off x="6355080" y="3044952"/>
+            <a:ext cx="420624" cy="420624"/>
+          </a:xfrm>
+          <a:prstGeom prst="ellipse">
+            <a:avLst/>
+          </a:prstGeom>
+          <a:solidFill>
+            <a:srgbClr val="111A2E"/>
+          </a:solidFill>
+          <a:ln w="19050">
+            <a:solidFill>
+              <a:srgbClr val="3B82F6"/>
+            </a:solidFill>
+            <a:prstDash val="solid"/>
+          </a:ln>
+        </p:spPr>
+      </p:sp>
+      <p:sp>
+        <p:nvSpPr>
+          <p:cNvPr id="19" name="Text 17"/>
+          <p:cNvSpPr/>
+          <p:nvPr/>
+        </p:nvSpPr>
+        <p:spPr>
+          <a:xfrm>
+            <a:off x="6355080" y="3044952"/>
+            <a:ext cx="420624" cy="420624"/>
           </a:xfrm>
           <a:prstGeom prst="rect">
             <a:avLst/>
@@ -1983,19 +5911,97 @@
           <a:bodyPr wrap="square" rtlCol="0" anchor="ctr"/>
           <a:lstStyle/>
           <a:p>
-            <a:pPr algn="r" indent="0" marL="0">
+            <a:pPr algn="ctr" indent="0" marL="0">
               <a:buNone/>
             </a:pPr>
             <a:r>
-              <a:rPr lang="en-US" sz="1000" dirty="0">
-                <a:solidFill>
-                  <a:srgbClr val="64748B"/>
+              <a:rPr lang="en-US" sz="1300" b="1" dirty="0">
+                <a:solidFill>
+                  <a:srgbClr val="3B82F6"/>
                 </a:solidFill>
                 <a:latin typeface="Consolas" pitchFamily="34" charset="0"/>
                 <a:ea typeface="Consolas" pitchFamily="34" charset="-122"/>
                 <a:cs typeface="Consolas" pitchFamily="34" charset="-120"/>
               </a:rPr>
-              <a:t>2 / 8</a:t>
+              <a:t>5</a:t>
+            </a:r>
+            <a:endParaRPr lang="en-US" sz="1300" dirty="0"/>
+          </a:p>
+        </p:txBody>
+      </p:sp>
+      <p:sp>
+        <p:nvSpPr>
+          <p:cNvPr id="20" name="Text 18"/>
+          <p:cNvSpPr/>
+          <p:nvPr/>
+        </p:nvSpPr>
+        <p:spPr>
+          <a:xfrm>
+            <a:off x="6922008" y="2990088"/>
+            <a:ext cx="4480560" cy="822960"/>
+          </a:xfrm>
+          <a:prstGeom prst="rect">
+            <a:avLst/>
+          </a:prstGeom>
+          <a:noFill/>
+          <a:ln/>
+        </p:spPr>
+        <p:txBody>
+          <a:bodyPr wrap="square" rtlCol="0" anchor="ctr"/>
+          <a:lstStyle/>
+          <a:p>
+            <a:pPr indent="0" marL="0">
+              <a:buNone/>
+            </a:pPr>
+            <a:r>
+              <a:rPr lang="en-US" sz="1450" dirty="0">
+                <a:solidFill>
+                  <a:srgbClr val="CBD5E1"/>
+                </a:solidFill>
+                <a:latin typeface="Segoe UI" pitchFamily="34" charset="0"/>
+                <a:ea typeface="Segoe UI" pitchFamily="34" charset="-122"/>
+                <a:cs typeface="Segoe UI" pitchFamily="34" charset="-120"/>
+              </a:rPr>
+              <a:t>What this buys: 30+ apps shipped, updated, and supported</a:t>
+            </a:r>
+            <a:endParaRPr lang="en-US" sz="1450" dirty="0"/>
+          </a:p>
+        </p:txBody>
+      </p:sp>
+      <p:sp>
+        <p:nvSpPr>
+          <p:cNvPr id="21" name="Text 19"/>
+          <p:cNvSpPr/>
+          <p:nvPr/>
+        </p:nvSpPr>
+        <p:spPr>
+          <a:xfrm>
+            <a:off x="10698480" y="6382512"/>
+            <a:ext cx="1188720" cy="365760"/>
+          </a:xfrm>
+          <a:prstGeom prst="rect">
+            <a:avLst/>
+          </a:prstGeom>
+          <a:noFill/>
+          <a:ln/>
+        </p:spPr>
+        <p:txBody>
+          <a:bodyPr wrap="square" rtlCol="0" anchor="ctr"/>
+          <a:lstStyle/>
+          <a:p>
+            <a:pPr algn="r" indent="0" marL="0">
+              <a:buNone/>
+            </a:pPr>
+            <a:r>
+              <a:rPr lang="en-US" sz="1000" dirty="0">
+                <a:solidFill>
+                  <a:srgbClr val="64748B"/>
+                </a:solidFill>
+                <a:latin typeface="Consolas" pitchFamily="34" charset="0"/>
+                <a:ea typeface="Consolas" pitchFamily="34" charset="-122"/>
+                <a:cs typeface="Consolas" pitchFamily="34" charset="-120"/>
+              </a:rPr>
+              <a:t>2 / 14</a:t>
             </a:r>
             <a:endParaRPr lang="en-US" sz="1000" dirty="0"/>
           </a:p>
@@ -2106,7 +6112,7 @@
                 <a:ea typeface="Consolas" pitchFamily="34" charset="-122"/>
                 <a:cs typeface="Consolas" pitchFamily="34" charset="-120"/>
               </a:rPr>
-              <a:t>GATE 1</a:t>
+              <a:t>THE RISK</a:t>
             </a:r>
             <a:endParaRPr lang="en-US" sz="1200" dirty="0"/>
           </a:p>
@@ -2120,8 +6126,8 @@
         </p:nvSpPr>
         <p:spPr>
           <a:xfrm>
-            <a:off x="822960" y="960120"/>
-            <a:ext cx="10515600" cy="868680"/>
+            <a:off x="822960" y="914400"/>
+            <a:ext cx="10561320" cy="868680"/>
           </a:xfrm>
           <a:prstGeom prst="rect">
             <a:avLst/>
@@ -2137,7 +6143,7 @@
               <a:buNone/>
             </a:pPr>
             <a:r>
-              <a:rPr lang="en-US" sz="3000" b="1" dirty="0">
+              <a:rPr lang="en-US" sz="2700" b="1" dirty="0">
                 <a:solidFill>
                   <a:srgbClr val="FFFFFF"/>
                 </a:solidFill>
@@ -2145,9 +6151,9 @@
                 <a:ea typeface="Segoe UI" pitchFamily="34" charset="-122"/>
                 <a:cs typeface="Segoe UI" pitchFamily="34" charset="-120"/>
               </a:rPr>
-              <a:t>The golden path must work</a:t>
-            </a:r>
-            <a:endParaRPr lang="en-US" sz="3000" dirty="0"/>
+              <a:t>AI writes code at machine speed - and debt at machine pace</a:t>
+            </a:r>
+            <a:endParaRPr lang="en-US" sz="2700" dirty="0"/>
           </a:p>
         </p:txBody>
       </p:sp>
@@ -2159,7 +6165,7 @@
         </p:nvSpPr>
         <p:spPr>
           <a:xfrm>
-            <a:off x="868680" y="2057400"/>
+            <a:off x="868680" y="2011680"/>
             <a:ext cx="10424160" cy="3566160"/>
           </a:xfrm>
           <a:prstGeom prst="rect">
@@ -2174,10 +6180,10 @@
           <a:p>
             <a:pPr marL="342900" indent="-342900">
               <a:lnSpc>
-                <a:spcPct val="115000"/>
+                <a:spcPct val="112000"/>
               </a:lnSpc>
               <a:spcAft>
-                <a:spcPts val="1000"/>
+                <a:spcPts val="900"/>
               </a:spcAft>
               <a:buSzPct val="100000"/>
               <a:buChar char="▸"/>
@@ -2191,17 +6197,17 @@
                 <a:ea typeface="Segoe UI" pitchFamily="34" charset="-122"/>
                 <a:cs typeface="Segoe UI" pitchFamily="34" charset="-120"/>
               </a:rPr>
-              <a:t>One most-important user journey per app</a:t>
+              <a:t>AI changed the cost of writing code; it did not change the cost of shipping junk - that bill still comes due, with interest.</a:t>
             </a:r>
             <a:endParaRPr lang="en-US" sz="1600" dirty="0"/>
           </a:p>
           <a:p>
             <a:pPr marL="342900" indent="-342900">
               <a:lnSpc>
-                <a:spcPct val="115000"/>
+                <a:spcPct val="112000"/>
               </a:lnSpc>
               <a:spcAft>
-                <a:spcPts val="1000"/>
+                <a:spcPts val="900"/>
               </a:spcAft>
               <a:buSzPct val="100000"/>
               <a:buChar char="▸"/>
@@ -2215,17 +6221,17 @@
                 <a:ea typeface="Segoe UI" pitchFamily="34" charset="-122"/>
                 <a:cs typeface="Segoe UI" pitchFamily="34" charset="-120"/>
               </a:rPr>
-              <a:t>Walked end-to-end every release, no exceptions</a:t>
+              <a:t>The failure mode is not a crash: it is a button that does nothing and a flow that silently skips validation.</a:t>
             </a:r>
             <a:endParaRPr lang="en-US" sz="1600" dirty="0"/>
           </a:p>
           <a:p>
             <a:pPr marL="342900" indent="-342900">
               <a:lnSpc>
-                <a:spcPct val="115000"/>
+                <a:spcPct val="112000"/>
               </a:lnSpc>
               <a:spcAft>
-                <a:spcPts val="1000"/>
+                <a:spcPts val="900"/>
               </a:spcAft>
               <a:buSzPct val="100000"/>
               <a:buChar char="▸"/>
@@ -2239,17 +6245,17 @@
                 <a:ea typeface="Segoe UI" pitchFamily="34" charset="-122"/>
                 <a:cs typeface="Segoe UI" pitchFamily="34" charset="-120"/>
               </a:rPr>
-              <a:t>If it breaks, nothing else matters - the build stops</a:t>
+              <a:t>Silent skips, unbumped versions, and flows that lie are invisible to a green test suite.</a:t>
             </a:r>
             <a:endParaRPr lang="en-US" sz="1600" dirty="0"/>
           </a:p>
           <a:p>
             <a:pPr marL="342900" indent="-342900">
               <a:lnSpc>
-                <a:spcPct val="115000"/>
+                <a:spcPct val="112000"/>
               </a:lnSpc>
               <a:spcAft>
-                <a:spcPts val="1000"/>
+                <a:spcPts val="900"/>
               </a:spcAft>
               <a:buSzPct val="100000"/>
               <a:buChar char="▸"/>
@@ -2263,7 +6269,7 @@
                 <a:ea typeface="Segoe UI" pitchFamily="34" charset="-122"/>
                 <a:cs typeface="Segoe UI" pitchFamily="34" charset="-120"/>
               </a:rPr>
-              <a:t>Boring, repeatable, non-negotiable</a:t>
+              <a:t>Gates turn speed from a liability into an asset by making honesty cheaper than lying.</a:t>
             </a:r>
             <a:endParaRPr lang="en-US" sz="1600" dirty="0"/>
           </a:p>
@@ -2271,13 +6277,75 @@
       </p:sp>
       <p:sp>
         <p:nvSpPr>
-          <p:cNvPr id="7" name="Text 5"/>
-          <p:cNvSpPr/>
-          <p:nvPr/>
-        </p:nvSpPr>
-        <p:spPr>
-          <a:xfrm>
-            <a:off x="10698480" y="6355080"/>
+          <p:cNvPr id="7" name="Shape 5"/>
+          <p:cNvSpPr/>
+          <p:nvPr/>
+        </p:nvSpPr>
+        <p:spPr>
+          <a:xfrm>
+            <a:off x="822960" y="5961888"/>
+            <a:ext cx="10515600" cy="0"/>
+          </a:xfrm>
+          <a:prstGeom prst="line">
+            <a:avLst/>
+          </a:prstGeom>
+          <a:noFill/>
+          <a:ln w="12700">
+            <a:solidFill>
+              <a:srgbClr val="1E2D45"/>
+            </a:solidFill>
+            <a:prstDash val="solid"/>
+          </a:ln>
+        </p:spPr>
+      </p:sp>
+      <p:sp>
+        <p:nvSpPr>
+          <p:cNvPr id="8" name="Text 6"/>
+          <p:cNvSpPr/>
+          <p:nvPr/>
+        </p:nvSpPr>
+        <p:spPr>
+          <a:xfrm>
+            <a:off x="822960" y="6053328"/>
+            <a:ext cx="9692640" cy="457200"/>
+          </a:xfrm>
+          <a:prstGeom prst="rect">
+            <a:avLst/>
+          </a:prstGeom>
+          <a:noFill/>
+          <a:ln/>
+        </p:spPr>
+        <p:txBody>
+          <a:bodyPr wrap="square" rtlCol="0" anchor="ctr"/>
+          <a:lstStyle/>
+          <a:p>
+            <a:pPr indent="0" marL="0">
+              <a:buNone/>
+            </a:pPr>
+            <a:r>
+              <a:rPr lang="en-US" sz="1150" dirty="0">
+                <a:solidFill>
+                  <a:srgbClr val="64748B"/>
+                </a:solidFill>
+                <a:latin typeface="Segoe UI" pitchFamily="34" charset="0"/>
+                <a:ea typeface="Segoe UI" pitchFamily="34" charset="-122"/>
+                <a:cs typeface="Segoe UI" pitchFamily="34" charset="-120"/>
+              </a:rPr>
+              <a:t>Unreviewed speed is technical debt at machine pace.</a:t>
+            </a:r>
+            <a:endParaRPr lang="en-US" sz="1150" dirty="0"/>
+          </a:p>
+        </p:txBody>
+      </p:sp>
+      <p:sp>
+        <p:nvSpPr>
+          <p:cNvPr id="9" name="Text 7"/>
+          <p:cNvSpPr/>
+          <p:nvPr/>
+        </p:nvSpPr>
+        <p:spPr>
+          <a:xfrm>
+            <a:off x="10698480" y="6382512"/>
             <a:ext cx="1188720" cy="365760"/>
           </a:xfrm>
           <a:prstGeom prst="rect">
@@ -2302,7 +6370,7 @@
                 <a:ea typeface="Consolas" pitchFamily="34" charset="-122"/>
                 <a:cs typeface="Consolas" pitchFamily="34" charset="-120"/>
               </a:rPr>
-              <a:t>3 / 8</a:t>
+              <a:t>3 / 14</a:t>
             </a:r>
             <a:endParaRPr lang="en-US" sz="1000" dirty="0"/>
           </a:p>
@@ -2413,7 +6481,7 @@
                 <a:ea typeface="Consolas" pitchFamily="34" charset="-122"/>
                 <a:cs typeface="Consolas" pitchFamily="34" charset="-120"/>
               </a:rPr>
-              <a:t>GATE 2</a:t>
+              <a:t>THE SYSTEM</a:t>
             </a:r>
             <a:endParaRPr lang="en-US" sz="1200" dirty="0"/>
           </a:p>
@@ -2427,8 +6495,8 @@
         </p:nvSpPr>
         <p:spPr>
           <a:xfrm>
-            <a:off x="822960" y="960120"/>
-            <a:ext cx="10515600" cy="868680"/>
+            <a:off x="822960" y="914400"/>
+            <a:ext cx="10561320" cy="868680"/>
           </a:xfrm>
           <a:prstGeom prst="rect">
             <a:avLst/>
@@ -2444,7 +6512,7 @@
               <a:buNone/>
             </a:pPr>
             <a:r>
-              <a:rPr lang="en-US" sz="3000" b="1" dirty="0">
+              <a:rPr lang="en-US" sz="2700" b="1" dirty="0">
                 <a:solidFill>
                   <a:srgbClr val="FFFFFF"/>
                 </a:solidFill>
@@ -2452,139 +6520,659 @@
                 <a:ea typeface="Segoe UI" pitchFamily="34" charset="-122"/>
                 <a:cs typeface="Segoe UI" pitchFamily="34" charset="-120"/>
               </a:rPr>
-              <a:t>Zero dead buttons</a:t>
-            </a:r>
-            <a:endParaRPr lang="en-US" sz="3000" dirty="0"/>
-          </a:p>
-        </p:txBody>
-      </p:sp>
-      <p:sp>
-        <p:nvSpPr>
-          <p:cNvPr id="6" name="Text 4"/>
-          <p:cNvSpPr/>
-          <p:nvPr/>
-        </p:nvSpPr>
-        <p:spPr>
-          <a:xfrm>
-            <a:off x="868680" y="2057400"/>
-            <a:ext cx="10424160" cy="3566160"/>
-          </a:xfrm>
-          <a:prstGeom prst="rect">
-            <a:avLst/>
-          </a:prstGeom>
-          <a:noFill/>
-          <a:ln/>
-        </p:spPr>
-        <p:txBody>
-          <a:bodyPr wrap="square" rtlCol="0" anchor="t"/>
-          <a:lstStyle/>
-          <a:p>
-            <a:pPr marL="342900" indent="-342900">
-              <a:lnSpc>
-                <a:spcPct val="115000"/>
-              </a:lnSpc>
-              <a:spcAft>
-                <a:spcPts val="1000"/>
-              </a:spcAft>
-              <a:buSzPct val="100000"/>
-              <a:buChar char="▸"/>
-            </a:pPr>
-            <a:r>
-              <a:rPr lang="en-US" sz="1600" dirty="0">
-                <a:solidFill>
-                  <a:srgbClr val="CBD5E1"/>
+              <a:t>The system the gates protect</a:t>
+            </a:r>
+            <a:endParaRPr lang="en-US" sz="2700" dirty="0"/>
+          </a:p>
+        </p:txBody>
+      </p:sp>
+      <p:sp>
+        <p:nvSpPr>
+          <p:cNvPr id="6" name="Shape 4"/>
+          <p:cNvSpPr/>
+          <p:nvPr/>
+        </p:nvSpPr>
+        <p:spPr>
+          <a:xfrm>
+            <a:off x="822960" y="2194560"/>
+            <a:ext cx="2423160" cy="2697480"/>
+          </a:xfrm>
+          <a:prstGeom prst="roundRect">
+            <a:avLst>
+              <a:gd name="adj" fmla="val 3019"/>
+            </a:avLst>
+          </a:prstGeom>
+          <a:solidFill>
+            <a:srgbClr val="111A2E"/>
+          </a:solidFill>
+          <a:ln w="12700">
+            <a:solidFill>
+              <a:srgbClr val="1E2D45"/>
+            </a:solidFill>
+            <a:prstDash val="solid"/>
+          </a:ln>
+        </p:spPr>
+      </p:sp>
+      <p:sp>
+        <p:nvSpPr>
+          <p:cNvPr id="7" name="Text 5"/>
+          <p:cNvSpPr/>
+          <p:nvPr/>
+        </p:nvSpPr>
+        <p:spPr>
+          <a:xfrm>
+            <a:off x="960120" y="2514600"/>
+            <a:ext cx="2148840" cy="914400"/>
+          </a:xfrm>
+          <a:prstGeom prst="rect">
+            <a:avLst/>
+          </a:prstGeom>
+          <a:noFill/>
+          <a:ln/>
+        </p:spPr>
+        <p:txBody>
+          <a:bodyPr wrap="square" rtlCol="0" anchor="ctr"/>
+          <a:lstStyle/>
+          <a:p>
+            <a:pPr algn="ctr" indent="0" marL="0">
+              <a:buNone/>
+            </a:pPr>
+            <a:r>
+              <a:rPr lang="en-US" sz="3800" b="1" dirty="0">
+                <a:solidFill>
+                  <a:srgbClr val="3B82F6"/>
                 </a:solidFill>
                 <a:latin typeface="Segoe UI" pitchFamily="34" charset="0"/>
                 <a:ea typeface="Segoe UI" pitchFamily="34" charset="-122"/>
                 <a:cs typeface="Segoe UI" pitchFamily="34" charset="-120"/>
               </a:rPr>
-              <a:t>Every interactive element does what it claims or gets removed</a:t>
-            </a:r>
-            <a:endParaRPr lang="en-US" sz="1600" dirty="0"/>
-          </a:p>
-          <a:p>
-            <a:pPr marL="342900" indent="-342900">
-              <a:lnSpc>
-                <a:spcPct val="115000"/>
-              </a:lnSpc>
-              <a:spcAft>
-                <a:spcPts val="1000"/>
-              </a:spcAft>
-              <a:buSzPct val="100000"/>
-              <a:buChar char="▸"/>
-            </a:pPr>
-            <a:r>
-              <a:rPr lang="en-US" sz="1600" dirty="0">
-                <a:solidFill>
-                  <a:srgbClr val="CBD5E1"/>
+              <a:t>30+</a:t>
+            </a:r>
+            <a:endParaRPr lang="en-US" sz="3800" dirty="0"/>
+          </a:p>
+        </p:txBody>
+      </p:sp>
+      <p:sp>
+        <p:nvSpPr>
+          <p:cNvPr id="8" name="Text 6"/>
+          <p:cNvSpPr/>
+          <p:nvPr/>
+        </p:nvSpPr>
+        <p:spPr>
+          <a:xfrm>
+            <a:off x="960120" y="3520440"/>
+            <a:ext cx="2148840" cy="502920"/>
+          </a:xfrm>
+          <a:prstGeom prst="rect">
+            <a:avLst/>
+          </a:prstGeom>
+          <a:noFill/>
+          <a:ln/>
+        </p:spPr>
+        <p:txBody>
+          <a:bodyPr wrap="square" rtlCol="0" anchor="ctr"/>
+          <a:lstStyle/>
+          <a:p>
+            <a:pPr algn="ctr" indent="0" marL="0">
+              <a:buNone/>
+            </a:pPr>
+            <a:r>
+              <a:rPr lang="en-US" sz="1450" b="1" dirty="0">
+                <a:solidFill>
+                  <a:srgbClr val="FFFFFF"/>
                 </a:solidFill>
                 <a:latin typeface="Segoe UI" pitchFamily="34" charset="0"/>
                 <a:ea typeface="Segoe UI" pitchFamily="34" charset="-122"/>
                 <a:cs typeface="Segoe UI" pitchFamily="34" charset="-120"/>
               </a:rPr>
-              <a:t>Agents sweep every screen systematically</a:t>
-            </a:r>
-            <a:endParaRPr lang="en-US" sz="1600" dirty="0"/>
-          </a:p>
-          <a:p>
-            <a:pPr marL="342900" indent="-342900">
-              <a:lnSpc>
-                <a:spcPct val="115000"/>
-              </a:lnSpc>
-              <a:spcAft>
-                <a:spcPts val="1000"/>
-              </a:spcAft>
-              <a:buSzPct val="100000"/>
-              <a:buChar char="▸"/>
-            </a:pPr>
-            <a:r>
-              <a:rPr lang="en-US" sz="1600" dirty="0">
-                <a:solidFill>
-                  <a:srgbClr val="CBD5E1"/>
+              <a:t>Production apps</a:t>
+            </a:r>
+            <a:endParaRPr lang="en-US" sz="1450" dirty="0"/>
+          </a:p>
+        </p:txBody>
+      </p:sp>
+      <p:sp>
+        <p:nvSpPr>
+          <p:cNvPr id="9" name="Text 7"/>
+          <p:cNvSpPr/>
+          <p:nvPr/>
+        </p:nvSpPr>
+        <p:spPr>
+          <a:xfrm>
+            <a:off x="1005840" y="4069080"/>
+            <a:ext cx="2057400" cy="685800"/>
+          </a:xfrm>
+          <a:prstGeom prst="rect">
+            <a:avLst/>
+          </a:prstGeom>
+          <a:noFill/>
+          <a:ln/>
+        </p:spPr>
+        <p:txBody>
+          <a:bodyPr wrap="square" rtlCol="0" anchor="ctr"/>
+          <a:lstStyle/>
+          <a:p>
+            <a:pPr algn="ctr" indent="0" marL="0">
+              <a:buNone/>
+            </a:pPr>
+            <a:r>
+              <a:rPr lang="en-US" sz="1050" dirty="0">
+                <a:solidFill>
+                  <a:srgbClr val="94A3B8"/>
                 </a:solidFill>
                 <a:latin typeface="Segoe UI" pitchFamily="34" charset="0"/>
                 <a:ea typeface="Segoe UI" pitchFamily="34" charset="-122"/>
                 <a:cs typeface="Segoe UI" pitchFamily="34" charset="-120"/>
               </a:rPr>
-              <a:t>An element that lies is a bug, full stop</a:t>
-            </a:r>
-            <a:endParaRPr lang="en-US" sz="1600" dirty="0"/>
-          </a:p>
-          <a:p>
-            <a:pPr marL="342900" indent="-342900">
-              <a:lnSpc>
-                <a:spcPct val="115000"/>
-              </a:lnSpc>
-              <a:spcAft>
-                <a:spcPts val="1000"/>
-              </a:spcAft>
-              <a:buSzPct val="100000"/>
-              <a:buChar char="▸"/>
-            </a:pPr>
-            <a:r>
-              <a:rPr lang="en-US" sz="1600" dirty="0">
-                <a:solidFill>
-                  <a:srgbClr val="CBD5E1"/>
+              <a:t>Shipped, updated, and supported through the gated pipeline</a:t>
+            </a:r>
+            <a:endParaRPr lang="en-US" sz="1050" dirty="0"/>
+          </a:p>
+        </p:txBody>
+      </p:sp>
+      <p:sp>
+        <p:nvSpPr>
+          <p:cNvPr id="10" name="Shape 8"/>
+          <p:cNvSpPr/>
+          <p:nvPr/>
+        </p:nvSpPr>
+        <p:spPr>
+          <a:xfrm>
+            <a:off x="3520440" y="2194560"/>
+            <a:ext cx="2423160" cy="2697480"/>
+          </a:xfrm>
+          <a:prstGeom prst="roundRect">
+            <a:avLst>
+              <a:gd name="adj" fmla="val 3019"/>
+            </a:avLst>
+          </a:prstGeom>
+          <a:solidFill>
+            <a:srgbClr val="111A2E"/>
+          </a:solidFill>
+          <a:ln w="12700">
+            <a:solidFill>
+              <a:srgbClr val="1E2D45"/>
+            </a:solidFill>
+            <a:prstDash val="solid"/>
+          </a:ln>
+        </p:spPr>
+      </p:sp>
+      <p:sp>
+        <p:nvSpPr>
+          <p:cNvPr id="11" name="Text 9"/>
+          <p:cNvSpPr/>
+          <p:nvPr/>
+        </p:nvSpPr>
+        <p:spPr>
+          <a:xfrm>
+            <a:off x="3657600" y="2514600"/>
+            <a:ext cx="2148840" cy="914400"/>
+          </a:xfrm>
+          <a:prstGeom prst="rect">
+            <a:avLst/>
+          </a:prstGeom>
+          <a:noFill/>
+          <a:ln/>
+        </p:spPr>
+        <p:txBody>
+          <a:bodyPr wrap="square" rtlCol="0" anchor="ctr"/>
+          <a:lstStyle/>
+          <a:p>
+            <a:pPr algn="ctr" indent="0" marL="0">
+              <a:buNone/>
+            </a:pPr>
+            <a:r>
+              <a:rPr lang="en-US" sz="3800" b="1" dirty="0">
+                <a:solidFill>
+                  <a:srgbClr val="06B6D4"/>
                 </a:solidFill>
                 <a:latin typeface="Segoe UI" pitchFamily="34" charset="0"/>
                 <a:ea typeface="Segoe UI" pitchFamily="34" charset="-122"/>
                 <a:cs typeface="Segoe UI" pitchFamily="34" charset="-120"/>
               </a:rPr>
-              <a:t>Offline behavior gets checked too</a:t>
-            </a:r>
-            <a:endParaRPr lang="en-US" sz="1600" dirty="0"/>
-          </a:p>
-        </p:txBody>
-      </p:sp>
-      <p:sp>
-        <p:nvSpPr>
-          <p:cNvPr id="7" name="Text 5"/>
-          <p:cNvSpPr/>
-          <p:nvPr/>
-        </p:nvSpPr>
-        <p:spPr>
-          <a:xfrm>
-            <a:off x="10698480" y="6355080"/>
+              <a:t>9+</a:t>
+            </a:r>
+            <a:endParaRPr lang="en-US" sz="3800" dirty="0"/>
+          </a:p>
+        </p:txBody>
+      </p:sp>
+      <p:sp>
+        <p:nvSpPr>
+          <p:cNvPr id="12" name="Text 10"/>
+          <p:cNvSpPr/>
+          <p:nvPr/>
+        </p:nvSpPr>
+        <p:spPr>
+          <a:xfrm>
+            <a:off x="3657600" y="3520440"/>
+            <a:ext cx="2148840" cy="502920"/>
+          </a:xfrm>
+          <a:prstGeom prst="rect">
+            <a:avLst/>
+          </a:prstGeom>
+          <a:noFill/>
+          <a:ln/>
+        </p:spPr>
+        <p:txBody>
+          <a:bodyPr wrap="square" rtlCol="0" anchor="ctr"/>
+          <a:lstStyle/>
+          <a:p>
+            <a:pPr algn="ctr" indent="0" marL="0">
+              <a:buNone/>
+            </a:pPr>
+            <a:r>
+              <a:rPr lang="en-US" sz="1450" b="1" dirty="0">
+                <a:solidFill>
+                  <a:srgbClr val="FFFFFF"/>
+                </a:solidFill>
+                <a:latin typeface="Segoe UI" pitchFamily="34" charset="0"/>
+                <a:ea typeface="Segoe UI" pitchFamily="34" charset="-122"/>
+                <a:cs typeface="Segoe UI" pitchFamily="34" charset="-120"/>
+              </a:rPr>
+              <a:t>Specialist agents</a:t>
+            </a:r>
+            <a:endParaRPr lang="en-US" sz="1450" dirty="0"/>
+          </a:p>
+        </p:txBody>
+      </p:sp>
+      <p:sp>
+        <p:nvSpPr>
+          <p:cNvPr id="13" name="Text 11"/>
+          <p:cNvSpPr/>
+          <p:nvPr/>
+        </p:nvSpPr>
+        <p:spPr>
+          <a:xfrm>
+            <a:off x="3703320" y="4069080"/>
+            <a:ext cx="2057400" cy="685800"/>
+          </a:xfrm>
+          <a:prstGeom prst="rect">
+            <a:avLst/>
+          </a:prstGeom>
+          <a:noFill/>
+          <a:ln/>
+        </p:spPr>
+        <p:txBody>
+          <a:bodyPr wrap="square" rtlCol="0" anchor="ctr"/>
+          <a:lstStyle/>
+          <a:p>
+            <a:pPr algn="ctr" indent="0" marL="0">
+              <a:buNone/>
+            </a:pPr>
+            <a:r>
+              <a:rPr lang="en-US" sz="1050" dirty="0">
+                <a:solidFill>
+                  <a:srgbClr val="94A3B8"/>
+                </a:solidFill>
+                <a:latin typeface="Segoe UI" pitchFamily="34" charset="0"/>
+                <a:ea typeface="Segoe UI" pitchFamily="34" charset="-122"/>
+                <a:cs typeface="Segoe UI" pitchFamily="34" charset="-120"/>
+              </a:rPr>
+              <a:t>QA sweeps and evidence collection run on every release</a:t>
+            </a:r>
+            <a:endParaRPr lang="en-US" sz="1050" dirty="0"/>
+          </a:p>
+        </p:txBody>
+      </p:sp>
+      <p:sp>
+        <p:nvSpPr>
+          <p:cNvPr id="14" name="Shape 12"/>
+          <p:cNvSpPr/>
+          <p:nvPr/>
+        </p:nvSpPr>
+        <p:spPr>
+          <a:xfrm>
+            <a:off x="6217920" y="2194560"/>
+            <a:ext cx="2423160" cy="2697480"/>
+          </a:xfrm>
+          <a:prstGeom prst="roundRect">
+            <a:avLst>
+              <a:gd name="adj" fmla="val 3019"/>
+            </a:avLst>
+          </a:prstGeom>
+          <a:solidFill>
+            <a:srgbClr val="111A2E"/>
+          </a:solidFill>
+          <a:ln w="12700">
+            <a:solidFill>
+              <a:srgbClr val="1E2D45"/>
+            </a:solidFill>
+            <a:prstDash val="solid"/>
+          </a:ln>
+        </p:spPr>
+      </p:sp>
+      <p:sp>
+        <p:nvSpPr>
+          <p:cNvPr id="15" name="Text 13"/>
+          <p:cNvSpPr/>
+          <p:nvPr/>
+        </p:nvSpPr>
+        <p:spPr>
+          <a:xfrm>
+            <a:off x="6355080" y="2514600"/>
+            <a:ext cx="2148840" cy="914400"/>
+          </a:xfrm>
+          <a:prstGeom prst="rect">
+            <a:avLst/>
+          </a:prstGeom>
+          <a:noFill/>
+          <a:ln/>
+        </p:spPr>
+        <p:txBody>
+          <a:bodyPr wrap="square" rtlCol="0" anchor="ctr"/>
+          <a:lstStyle/>
+          <a:p>
+            <a:pPr algn="ctr" indent="0" marL="0">
+              <a:buNone/>
+            </a:pPr>
+            <a:r>
+              <a:rPr lang="en-US" sz="3800" b="1" dirty="0">
+                <a:solidFill>
+                  <a:srgbClr val="22D3A0"/>
+                </a:solidFill>
+                <a:latin typeface="Segoe UI" pitchFamily="34" charset="0"/>
+                <a:ea typeface="Segoe UI" pitchFamily="34" charset="-122"/>
+                <a:cs typeface="Segoe UI" pitchFamily="34" charset="-120"/>
+              </a:rPr>
+              <a:t>51/52</a:t>
+            </a:r>
+            <a:endParaRPr lang="en-US" sz="3800" dirty="0"/>
+          </a:p>
+        </p:txBody>
+      </p:sp>
+      <p:sp>
+        <p:nvSpPr>
+          <p:cNvPr id="16" name="Text 14"/>
+          <p:cNvSpPr/>
+          <p:nvPr/>
+        </p:nvSpPr>
+        <p:spPr>
+          <a:xfrm>
+            <a:off x="6355080" y="3520440"/>
+            <a:ext cx="2148840" cy="502920"/>
+          </a:xfrm>
+          <a:prstGeom prst="rect">
+            <a:avLst/>
+          </a:prstGeom>
+          <a:noFill/>
+          <a:ln/>
+        </p:spPr>
+        <p:txBody>
+          <a:bodyPr wrap="square" rtlCol="0" anchor="ctr"/>
+          <a:lstStyle/>
+          <a:p>
+            <a:pPr algn="ctr" indent="0" marL="0">
+              <a:buNone/>
+            </a:pPr>
+            <a:r>
+              <a:rPr lang="en-US" sz="1450" b="1" dirty="0">
+                <a:solidFill>
+                  <a:srgbClr val="FFFFFF"/>
+                </a:solidFill>
+                <a:latin typeface="Segoe UI" pitchFamily="34" charset="0"/>
+                <a:ea typeface="Segoe UI" pitchFamily="34" charset="-122"/>
+                <a:cs typeface="Segoe UI" pitchFamily="34" charset="-120"/>
+              </a:rPr>
+              <a:t>Production checks</a:t>
+            </a:r>
+            <a:endParaRPr lang="en-US" sz="1450" dirty="0"/>
+          </a:p>
+        </p:txBody>
+      </p:sp>
+      <p:sp>
+        <p:nvSpPr>
+          <p:cNvPr id="17" name="Text 15"/>
+          <p:cNvSpPr/>
+          <p:nvPr/>
+        </p:nvSpPr>
+        <p:spPr>
+          <a:xfrm>
+            <a:off x="6400800" y="4069080"/>
+            <a:ext cx="2057400" cy="685800"/>
+          </a:xfrm>
+          <a:prstGeom prst="rect">
+            <a:avLst/>
+          </a:prstGeom>
+          <a:noFill/>
+          <a:ln/>
+        </p:spPr>
+        <p:txBody>
+          <a:bodyPr wrap="square" rtlCol="0" anchor="ctr"/>
+          <a:lstStyle/>
+          <a:p>
+            <a:pPr algn="ctr" indent="0" marL="0">
+              <a:buNone/>
+            </a:pPr>
+            <a:r>
+              <a:rPr lang="en-US" sz="1050" dirty="0">
+                <a:solidFill>
+                  <a:srgbClr val="94A3B8"/>
+                </a:solidFill>
+                <a:latin typeface="Segoe UI" pitchFamily="34" charset="0"/>
+                <a:ea typeface="Segoe UI" pitchFamily="34" charset="-122"/>
+                <a:cs typeface="Segoe UI" pitchFamily="34" charset="-120"/>
+              </a:rPr>
+              <a:t>Passing in the live ZalinOS platform</a:t>
+            </a:r>
+            <a:endParaRPr lang="en-US" sz="1050" dirty="0"/>
+          </a:p>
+        </p:txBody>
+      </p:sp>
+      <p:sp>
+        <p:nvSpPr>
+          <p:cNvPr id="18" name="Shape 16"/>
+          <p:cNvSpPr/>
+          <p:nvPr/>
+        </p:nvSpPr>
+        <p:spPr>
+          <a:xfrm>
+            <a:off x="8915400" y="2194560"/>
+            <a:ext cx="2423160" cy="2697480"/>
+          </a:xfrm>
+          <a:prstGeom prst="roundRect">
+            <a:avLst>
+              <a:gd name="adj" fmla="val 3019"/>
+            </a:avLst>
+          </a:prstGeom>
+          <a:solidFill>
+            <a:srgbClr val="111A2E"/>
+          </a:solidFill>
+          <a:ln w="12700">
+            <a:solidFill>
+              <a:srgbClr val="1E2D45"/>
+            </a:solidFill>
+            <a:prstDash val="solid"/>
+          </a:ln>
+        </p:spPr>
+      </p:sp>
+      <p:sp>
+        <p:nvSpPr>
+          <p:cNvPr id="19" name="Text 17"/>
+          <p:cNvSpPr/>
+          <p:nvPr/>
+        </p:nvSpPr>
+        <p:spPr>
+          <a:xfrm>
+            <a:off x="9052560" y="2514600"/>
+            <a:ext cx="2148840" cy="914400"/>
+          </a:xfrm>
+          <a:prstGeom prst="rect">
+            <a:avLst/>
+          </a:prstGeom>
+          <a:noFill/>
+          <a:ln/>
+        </p:spPr>
+        <p:txBody>
+          <a:bodyPr wrap="square" rtlCol="0" anchor="ctr"/>
+          <a:lstStyle/>
+          <a:p>
+            <a:pPr algn="ctr" indent="0" marL="0">
+              <a:buNone/>
+            </a:pPr>
+            <a:r>
+              <a:rPr lang="en-US" sz="3800" b="1" dirty="0">
+                <a:solidFill>
+                  <a:srgbClr val="F59E0B"/>
+                </a:solidFill>
+                <a:latin typeface="Segoe UI" pitchFamily="34" charset="0"/>
+                <a:ea typeface="Segoe UI" pitchFamily="34" charset="-122"/>
+                <a:cs typeface="Segoe UI" pitchFamily="34" charset="-120"/>
+              </a:rPr>
+              <a:t>100%</a:t>
+            </a:r>
+            <a:endParaRPr lang="en-US" sz="3800" dirty="0"/>
+          </a:p>
+        </p:txBody>
+      </p:sp>
+      <p:sp>
+        <p:nvSpPr>
+          <p:cNvPr id="20" name="Text 18"/>
+          <p:cNvSpPr/>
+          <p:nvPr/>
+        </p:nvSpPr>
+        <p:spPr>
+          <a:xfrm>
+            <a:off x="9052560" y="3520440"/>
+            <a:ext cx="2148840" cy="502920"/>
+          </a:xfrm>
+          <a:prstGeom prst="rect">
+            <a:avLst/>
+          </a:prstGeom>
+          <a:noFill/>
+          <a:ln/>
+        </p:spPr>
+        <p:txBody>
+          <a:bodyPr wrap="square" rtlCol="0" anchor="ctr"/>
+          <a:lstStyle/>
+          <a:p>
+            <a:pPr algn="ctr" indent="0" marL="0">
+              <a:buNone/>
+            </a:pPr>
+            <a:r>
+              <a:rPr lang="en-US" sz="1450" b="1" dirty="0">
+                <a:solidFill>
+                  <a:srgbClr val="FFFFFF"/>
+                </a:solidFill>
+                <a:latin typeface="Segoe UI" pitchFamily="34" charset="0"/>
+                <a:ea typeface="Segoe UI" pitchFamily="34" charset="-122"/>
+                <a:cs typeface="Segoe UI" pitchFamily="34" charset="-120"/>
+              </a:rPr>
+              <a:t>Router accuracy</a:t>
+            </a:r>
+            <a:endParaRPr lang="en-US" sz="1450" dirty="0"/>
+          </a:p>
+        </p:txBody>
+      </p:sp>
+      <p:sp>
+        <p:nvSpPr>
+          <p:cNvPr id="21" name="Text 19"/>
+          <p:cNvSpPr/>
+          <p:nvPr/>
+        </p:nvSpPr>
+        <p:spPr>
+          <a:xfrm>
+            <a:off x="9098280" y="4069080"/>
+            <a:ext cx="2057400" cy="685800"/>
+          </a:xfrm>
+          <a:prstGeom prst="rect">
+            <a:avLst/>
+          </a:prstGeom>
+          <a:noFill/>
+          <a:ln/>
+        </p:spPr>
+        <p:txBody>
+          <a:bodyPr wrap="square" rtlCol="0" anchor="ctr"/>
+          <a:lstStyle/>
+          <a:p>
+            <a:pPr algn="ctr" indent="0" marL="0">
+              <a:buNone/>
+            </a:pPr>
+            <a:r>
+              <a:rPr lang="en-US" sz="1050" dirty="0">
+                <a:solidFill>
+                  <a:srgbClr val="94A3B8"/>
+                </a:solidFill>
+                <a:latin typeface="Segoe UI" pitchFamily="34" charset="0"/>
+                <a:ea typeface="Segoe UI" pitchFamily="34" charset="-122"/>
+                <a:cs typeface="Segoe UI" pitchFamily="34" charset="-120"/>
+              </a:rPr>
+              <a:t>On the 30-query intent-router validation set</a:t>
+            </a:r>
+            <a:endParaRPr lang="en-US" sz="1050" dirty="0"/>
+          </a:p>
+        </p:txBody>
+      </p:sp>
+      <p:sp>
+        <p:nvSpPr>
+          <p:cNvPr id="22" name="Shape 20"/>
+          <p:cNvSpPr/>
+          <p:nvPr/>
+        </p:nvSpPr>
+        <p:spPr>
+          <a:xfrm>
+            <a:off x="822960" y="5413248"/>
+            <a:ext cx="10515600" cy="0"/>
+          </a:xfrm>
+          <a:prstGeom prst="line">
+            <a:avLst/>
+          </a:prstGeom>
+          <a:noFill/>
+          <a:ln w="12700">
+            <a:solidFill>
+              <a:srgbClr val="1E2D45"/>
+            </a:solidFill>
+            <a:prstDash val="solid"/>
+          </a:ln>
+        </p:spPr>
+      </p:sp>
+      <p:sp>
+        <p:nvSpPr>
+          <p:cNvPr id="23" name="Text 21"/>
+          <p:cNvSpPr/>
+          <p:nvPr/>
+        </p:nvSpPr>
+        <p:spPr>
+          <a:xfrm>
+            <a:off x="822960" y="5504688"/>
+            <a:ext cx="10424160" cy="411480"/>
+          </a:xfrm>
+          <a:prstGeom prst="rect">
+            <a:avLst/>
+          </a:prstGeom>
+          <a:noFill/>
+          <a:ln/>
+        </p:spPr>
+        <p:txBody>
+          <a:bodyPr wrap="square" rtlCol="0" anchor="ctr"/>
+          <a:lstStyle/>
+          <a:p>
+            <a:pPr indent="0" marL="0">
+              <a:buNone/>
+            </a:pPr>
+            <a:r>
+              <a:rPr lang="en-US" sz="1300" i="1" dirty="0">
+                <a:solidFill>
+                  <a:srgbClr val="06B6D4"/>
+                </a:solidFill>
+                <a:latin typeface="Segoe UI" pitchFamily="34" charset="0"/>
+                <a:ea typeface="Segoe UI" pitchFamily="34" charset="-122"/>
+                <a:cs typeface="Segoe UI" pitchFamily="34" charset="-120"/>
+              </a:rPr>
+              <a:t>→  Numbers from the public portfolio and published build logs.</a:t>
+            </a:r>
+            <a:endParaRPr lang="en-US" sz="1300" dirty="0"/>
+          </a:p>
+        </p:txBody>
+      </p:sp>
+      <p:sp>
+        <p:nvSpPr>
+          <p:cNvPr id="24" name="Text 22"/>
+          <p:cNvSpPr/>
+          <p:nvPr/>
+        </p:nvSpPr>
+        <p:spPr>
+          <a:xfrm>
+            <a:off x="10698480" y="6382512"/>
             <a:ext cx="1188720" cy="365760"/>
           </a:xfrm>
           <a:prstGeom prst="rect">
@@ -2609,7 +7197,7 @@
                 <a:ea typeface="Consolas" pitchFamily="34" charset="-122"/>
                 <a:cs typeface="Consolas" pitchFamily="34" charset="-120"/>
               </a:rPr>
-              <a:t>4 / 8</a:t>
+              <a:t>4 / 14</a:t>
             </a:r>
             <a:endParaRPr lang="en-US" sz="1000" dirty="0"/>
           </a:p>
@@ -2720,7 +7308,7 @@
                 <a:ea typeface="Consolas" pitchFamily="34" charset="-122"/>
                 <a:cs typeface="Consolas" pitchFamily="34" charset="-120"/>
               </a:rPr>
-              <a:t>GATE 3</a:t>
+              <a:t>PIPELINE</a:t>
             </a:r>
             <a:endParaRPr lang="en-US" sz="1200" dirty="0"/>
           </a:p>
@@ -2734,8 +7322,8 @@
         </p:nvSpPr>
         <p:spPr>
           <a:xfrm>
-            <a:off x="822960" y="960120"/>
-            <a:ext cx="10515600" cy="868680"/>
+            <a:off x="822960" y="914400"/>
+            <a:ext cx="10561320" cy="868680"/>
           </a:xfrm>
           <a:prstGeom prst="rect">
             <a:avLst/>
@@ -2751,7 +7339,7 @@
               <a:buNone/>
             </a:pPr>
             <a:r>
-              <a:rPr lang="en-US" sz="3000" b="1" dirty="0">
+              <a:rPr lang="en-US" sz="2700" b="1" dirty="0">
                 <a:solidFill>
                   <a:srgbClr val="FFFFFF"/>
                 </a:solidFill>
@@ -2759,69 +7347,143 @@
                 <a:ea typeface="Segoe UI" pitchFamily="34" charset="-122"/>
                 <a:cs typeface="Segoe UI" pitchFamily="34" charset="-120"/>
               </a:rPr>
-              <a:t>Version bump plus backup</a:t>
-            </a:r>
-            <a:endParaRPr lang="en-US" sz="3000" dirty="0"/>
-          </a:p>
-        </p:txBody>
-      </p:sp>
-      <p:sp>
-        <p:nvSpPr>
-          <p:cNvPr id="6" name="Text 4"/>
-          <p:cNvSpPr/>
-          <p:nvPr/>
-        </p:nvSpPr>
-        <p:spPr>
-          <a:xfrm>
-            <a:off x="868680" y="2057400"/>
-            <a:ext cx="10424160" cy="3566160"/>
-          </a:xfrm>
-          <a:prstGeom prst="rect">
-            <a:avLst/>
-          </a:prstGeom>
-          <a:noFill/>
-          <a:ln/>
-        </p:spPr>
-        <p:txBody>
-          <a:bodyPr wrap="square" rtlCol="0" anchor="t"/>
-          <a:lstStyle/>
-          <a:p>
-            <a:pPr marL="342900" indent="-342900">
-              <a:lnSpc>
-                <a:spcPct val="115000"/>
-              </a:lnSpc>
-              <a:spcAft>
-                <a:spcPts val="1000"/>
-              </a:spcAft>
-              <a:buSzPct val="100000"/>
-              <a:buChar char="▸"/>
-            </a:pPr>
-            <a:r>
-              <a:rPr lang="en-US" sz="1600" dirty="0">
-                <a:solidFill>
-                  <a:srgbClr val="CBD5E1"/>
+              <a:t>Where the gates sit: build, gate, promote, record</a:t>
+            </a:r>
+            <a:endParaRPr lang="en-US" sz="2700" dirty="0"/>
+          </a:p>
+        </p:txBody>
+      </p:sp>
+      <p:sp>
+        <p:nvSpPr>
+          <p:cNvPr id="6" name="Shape 4"/>
+          <p:cNvSpPr/>
+          <p:nvPr/>
+        </p:nvSpPr>
+        <p:spPr>
+          <a:xfrm>
+            <a:off x="1075792" y="2514600"/>
+            <a:ext cx="2331720" cy="2103120"/>
+          </a:xfrm>
+          <a:prstGeom prst="roundRect">
+            <a:avLst>
+              <a:gd name="adj" fmla="val 3043"/>
+            </a:avLst>
+          </a:prstGeom>
+          <a:solidFill>
+            <a:srgbClr val="111A2E"/>
+          </a:solidFill>
+          <a:ln w="19050">
+            <a:solidFill>
+              <a:srgbClr val="3B82F6"/>
+            </a:solidFill>
+            <a:prstDash val="solid"/>
+          </a:ln>
+        </p:spPr>
+      </p:sp>
+      <p:sp>
+        <p:nvSpPr>
+          <p:cNvPr id="7" name="Text 5"/>
+          <p:cNvSpPr/>
+          <p:nvPr/>
+        </p:nvSpPr>
+        <p:spPr>
+          <a:xfrm>
+            <a:off x="1203808" y="2633472"/>
+            <a:ext cx="2075688" cy="310896"/>
+          </a:xfrm>
+          <a:prstGeom prst="rect">
+            <a:avLst/>
+          </a:prstGeom>
+          <a:noFill/>
+          <a:ln/>
+        </p:spPr>
+        <p:txBody>
+          <a:bodyPr wrap="square" rtlCol="0" anchor="ctr"/>
+          <a:lstStyle/>
+          <a:p>
+            <a:pPr indent="0" marL="0">
+              <a:buNone/>
+            </a:pPr>
+            <a:r>
+              <a:rPr lang="en-US" sz="1100" b="1" dirty="0">
+                <a:solidFill>
+                  <a:srgbClr val="3B82F6"/>
+                </a:solidFill>
+                <a:latin typeface="Consolas" pitchFamily="34" charset="0"/>
+                <a:ea typeface="Consolas" pitchFamily="34" charset="-122"/>
+                <a:cs typeface="Consolas" pitchFamily="34" charset="-120"/>
+              </a:rPr>
+              <a:t>01</a:t>
+            </a:r>
+            <a:endParaRPr lang="en-US" sz="1100" dirty="0"/>
+          </a:p>
+        </p:txBody>
+      </p:sp>
+      <p:sp>
+        <p:nvSpPr>
+          <p:cNvPr id="8" name="Text 6"/>
+          <p:cNvSpPr/>
+          <p:nvPr/>
+        </p:nvSpPr>
+        <p:spPr>
+          <a:xfrm>
+            <a:off x="1203808" y="2962656"/>
+            <a:ext cx="2075688" cy="566928"/>
+          </a:xfrm>
+          <a:prstGeom prst="rect">
+            <a:avLst/>
+          </a:prstGeom>
+          <a:noFill/>
+          <a:ln/>
+        </p:spPr>
+        <p:txBody>
+          <a:bodyPr wrap="square" rtlCol="0" anchor="ctr"/>
+          <a:lstStyle/>
+          <a:p>
+            <a:pPr indent="0" marL="0">
+              <a:buNone/>
+            </a:pPr>
+            <a:r>
+              <a:rPr lang="en-US" sz="1350" b="1" dirty="0">
+                <a:solidFill>
+                  <a:srgbClr val="FFFFFF"/>
                 </a:solidFill>
                 <a:latin typeface="Segoe UI" pitchFamily="34" charset="0"/>
                 <a:ea typeface="Segoe UI" pitchFamily="34" charset="-122"/>
                 <a:cs typeface="Segoe UI" pitchFamily="34" charset="-120"/>
               </a:rPr>
-              <a:t>No release without a version increment</a:t>
-            </a:r>
-            <a:endParaRPr lang="en-US" sz="1600" dirty="0"/>
-          </a:p>
-          <a:p>
-            <a:pPr marL="342900" indent="-342900">
-              <a:lnSpc>
-                <a:spcPct val="115000"/>
-              </a:lnSpc>
-              <a:spcAft>
-                <a:spcPts val="1000"/>
-              </a:spcAft>
-              <a:buSzPct val="100000"/>
-              <a:buChar char="▸"/>
-            </a:pPr>
-            <a:r>
-              <a:rPr lang="en-US" sz="1600" dirty="0">
+              <a:t>Build</a:t>
+            </a:r>
+            <a:endParaRPr lang="en-US" sz="1350" dirty="0"/>
+          </a:p>
+        </p:txBody>
+      </p:sp>
+      <p:sp>
+        <p:nvSpPr>
+          <p:cNvPr id="9" name="Text 7"/>
+          <p:cNvSpPr/>
+          <p:nvPr/>
+        </p:nvSpPr>
+        <p:spPr>
+          <a:xfrm>
+            <a:off x="1203808" y="3566160"/>
+            <a:ext cx="2075688" cy="960120"/>
+          </a:xfrm>
+          <a:prstGeom prst="rect">
+            <a:avLst/>
+          </a:prstGeom>
+          <a:noFill/>
+          <a:ln/>
+        </p:spPr>
+        <p:txBody>
+          <a:bodyPr wrap="square" rtlCol="0" anchor="ctr"/>
+          <a:lstStyle/>
+          <a:p>
+            <a:pPr indent="0" marL="0">
+              <a:buNone/>
+            </a:pPr>
+            <a:r>
+              <a:rPr lang="en-US" sz="980" dirty="0">
                 <a:solidFill>
                   <a:srgbClr val="CBD5E1"/>
                 </a:solidFill>
@@ -2829,47 +7491,163 @@
                 <a:ea typeface="Segoe UI" pitchFamily="34" charset="-122"/>
                 <a:cs typeface="Segoe UI" pitchFamily="34" charset="-120"/>
               </a:rPr>
-              <a:t>The previous version is archived before the new one ships</a:t>
-            </a:r>
-            <a:endParaRPr lang="en-US" sz="1600" dirty="0"/>
-          </a:p>
-          <a:p>
-            <a:pPr marL="342900" indent="-342900">
-              <a:lnSpc>
-                <a:spcPct val="115000"/>
-              </a:lnSpc>
-              <a:spcAft>
-                <a:spcPts val="1000"/>
-              </a:spcAft>
-              <a:buSzPct val="100000"/>
-              <a:buChar char="▸"/>
-            </a:pPr>
-            <a:r>
-              <a:rPr lang="en-US" sz="1600" dirty="0">
-                <a:solidFill>
-                  <a:srgbClr val="CBD5E1"/>
+              <a:t>Engineering agents produce versioned builds from structured specs.</a:t>
+            </a:r>
+            <a:endParaRPr lang="en-US" sz="980" dirty="0"/>
+          </a:p>
+        </p:txBody>
+      </p:sp>
+      <p:sp>
+        <p:nvSpPr>
+          <p:cNvPr id="10" name="Shape 8"/>
+          <p:cNvSpPr/>
+          <p:nvPr/>
+        </p:nvSpPr>
+        <p:spPr>
+          <a:xfrm>
+            <a:off x="3421228" y="3419856"/>
+            <a:ext cx="210312" cy="274320"/>
+          </a:xfrm>
+          <a:prstGeom prst="rightArrow">
+            <a:avLst/>
+          </a:prstGeom>
+          <a:solidFill>
+            <a:srgbClr val="06B6D4"/>
+          </a:solidFill>
+          <a:ln/>
+        </p:spPr>
+      </p:sp>
+      <p:sp>
+        <p:nvSpPr>
+          <p:cNvPr id="11" name="Shape 9"/>
+          <p:cNvSpPr/>
+          <p:nvPr/>
+        </p:nvSpPr>
+        <p:spPr>
+          <a:xfrm>
+            <a:off x="3645256" y="2514600"/>
+            <a:ext cx="2331720" cy="2103120"/>
+          </a:xfrm>
+          <a:prstGeom prst="roundRect">
+            <a:avLst>
+              <a:gd name="adj" fmla="val 3043"/>
+            </a:avLst>
+          </a:prstGeom>
+          <a:solidFill>
+            <a:srgbClr val="111A2E"/>
+          </a:solidFill>
+          <a:ln w="19050">
+            <a:solidFill>
+              <a:srgbClr val="06B6D4"/>
+            </a:solidFill>
+            <a:prstDash val="solid"/>
+          </a:ln>
+        </p:spPr>
+      </p:sp>
+      <p:sp>
+        <p:nvSpPr>
+          <p:cNvPr id="12" name="Text 10"/>
+          <p:cNvSpPr/>
+          <p:nvPr/>
+        </p:nvSpPr>
+        <p:spPr>
+          <a:xfrm>
+            <a:off x="3773272" y="2633472"/>
+            <a:ext cx="2075688" cy="310896"/>
+          </a:xfrm>
+          <a:prstGeom prst="rect">
+            <a:avLst/>
+          </a:prstGeom>
+          <a:noFill/>
+          <a:ln/>
+        </p:spPr>
+        <p:txBody>
+          <a:bodyPr wrap="square" rtlCol="0" anchor="ctr"/>
+          <a:lstStyle/>
+          <a:p>
+            <a:pPr indent="0" marL="0">
+              <a:buNone/>
+            </a:pPr>
+            <a:r>
+              <a:rPr lang="en-US" sz="1100" b="1" dirty="0">
+                <a:solidFill>
+                  <a:srgbClr val="06B6D4"/>
+                </a:solidFill>
+                <a:latin typeface="Consolas" pitchFamily="34" charset="0"/>
+                <a:ea typeface="Consolas" pitchFamily="34" charset="-122"/>
+                <a:cs typeface="Consolas" pitchFamily="34" charset="-120"/>
+              </a:rPr>
+              <a:t>02</a:t>
+            </a:r>
+            <a:endParaRPr lang="en-US" sz="1100" dirty="0"/>
+          </a:p>
+        </p:txBody>
+      </p:sp>
+      <p:sp>
+        <p:nvSpPr>
+          <p:cNvPr id="13" name="Text 11"/>
+          <p:cNvSpPr/>
+          <p:nvPr/>
+        </p:nvSpPr>
+        <p:spPr>
+          <a:xfrm>
+            <a:off x="3773272" y="2962656"/>
+            <a:ext cx="2075688" cy="566928"/>
+          </a:xfrm>
+          <a:prstGeom prst="rect">
+            <a:avLst/>
+          </a:prstGeom>
+          <a:noFill/>
+          <a:ln/>
+        </p:spPr>
+        <p:txBody>
+          <a:bodyPr wrap="square" rtlCol="0" anchor="ctr"/>
+          <a:lstStyle/>
+          <a:p>
+            <a:pPr indent="0" marL="0">
+              <a:buNone/>
+            </a:pPr>
+            <a:r>
+              <a:rPr lang="en-US" sz="1350" b="1" dirty="0">
+                <a:solidFill>
+                  <a:srgbClr val="FFFFFF"/>
                 </a:solidFill>
                 <a:latin typeface="Segoe UI" pitchFamily="34" charset="0"/>
                 <a:ea typeface="Segoe UI" pitchFamily="34" charset="-122"/>
                 <a:cs typeface="Segoe UI" pitchFamily="34" charset="-120"/>
               </a:rPr>
-              <a:t>Rollback is a normal procedure, not an emergency</a:t>
-            </a:r>
-            <a:endParaRPr lang="en-US" sz="1600" dirty="0"/>
-          </a:p>
-          <a:p>
-            <a:pPr marL="342900" indent="-342900">
-              <a:lnSpc>
-                <a:spcPct val="115000"/>
-              </a:lnSpc>
-              <a:spcAft>
-                <a:spcPts val="1000"/>
-              </a:spcAft>
-              <a:buSzPct val="100000"/>
-              <a:buChar char="▸"/>
-            </a:pPr>
-            <a:r>
-              <a:rPr lang="en-US" sz="1600" dirty="0">
+              <a:t>Gate</a:t>
+            </a:r>
+            <a:endParaRPr lang="en-US" sz="1350" dirty="0"/>
+          </a:p>
+        </p:txBody>
+      </p:sp>
+      <p:sp>
+        <p:nvSpPr>
+          <p:cNvPr id="14" name="Text 12"/>
+          <p:cNvSpPr/>
+          <p:nvPr/>
+        </p:nvSpPr>
+        <p:spPr>
+          <a:xfrm>
+            <a:off x="3773272" y="3566160"/>
+            <a:ext cx="2075688" cy="960120"/>
+          </a:xfrm>
+          <a:prstGeom prst="rect">
+            <a:avLst/>
+          </a:prstGeom>
+          <a:noFill/>
+          <a:ln/>
+        </p:spPr>
+        <p:txBody>
+          <a:bodyPr wrap="square" rtlCol="0" anchor="ctr"/>
+          <a:lstStyle/>
+          <a:p>
+            <a:pPr indent="0" marL="0">
+              <a:buNone/>
+            </a:pPr>
+            <a:r>
+              <a:rPr lang="en-US" sz="980" dirty="0">
                 <a:solidFill>
                   <a:srgbClr val="CBD5E1"/>
                 </a:solidFill>
@@ -2877,22 +7655,69 @@
                 <a:ea typeface="Segoe UI" pitchFamily="34" charset="-122"/>
                 <a:cs typeface="Segoe UI" pitchFamily="34" charset="-120"/>
               </a:rPr>
-              <a:t>This rule has saved more projects than any architecture</a:t>
-            </a:r>
-            <a:endParaRPr lang="en-US" sz="1600" dirty="0"/>
-          </a:p>
-        </p:txBody>
-      </p:sp>
-      <p:sp>
-        <p:nvSpPr>
-          <p:cNvPr id="7" name="Text 5"/>
-          <p:cNvSpPr/>
-          <p:nvPr/>
-        </p:nvSpPr>
-        <p:spPr>
-          <a:xfrm>
-            <a:off x="10698480" y="6355080"/>
-            <a:ext cx="1188720" cy="365760"/>
+              <a:t>QA walks the golden path, sweeps for dead buttons, and checks offline behavior.</a:t>
+            </a:r>
+            <a:endParaRPr lang="en-US" sz="980" dirty="0"/>
+          </a:p>
+        </p:txBody>
+      </p:sp>
+      <p:sp>
+        <p:nvSpPr>
+          <p:cNvPr id="15" name="Shape 13"/>
+          <p:cNvSpPr/>
+          <p:nvPr/>
+        </p:nvSpPr>
+        <p:spPr>
+          <a:xfrm>
+            <a:off x="5990692" y="3419856"/>
+            <a:ext cx="210312" cy="274320"/>
+          </a:xfrm>
+          <a:prstGeom prst="rightArrow">
+            <a:avLst/>
+          </a:prstGeom>
+          <a:solidFill>
+            <a:srgbClr val="06B6D4"/>
+          </a:solidFill>
+          <a:ln/>
+        </p:spPr>
+      </p:sp>
+      <p:sp>
+        <p:nvSpPr>
+          <p:cNvPr id="16" name="Shape 14"/>
+          <p:cNvSpPr/>
+          <p:nvPr/>
+        </p:nvSpPr>
+        <p:spPr>
+          <a:xfrm>
+            <a:off x="6214720" y="2514600"/>
+            <a:ext cx="2331720" cy="2103120"/>
+          </a:xfrm>
+          <a:prstGeom prst="roundRect">
+            <a:avLst>
+              <a:gd name="adj" fmla="val 3043"/>
+            </a:avLst>
+          </a:prstGeom>
+          <a:solidFill>
+            <a:srgbClr val="111A2E"/>
+          </a:solidFill>
+          <a:ln w="19050">
+            <a:solidFill>
+              <a:srgbClr val="3B82F6"/>
+            </a:solidFill>
+            <a:prstDash val="solid"/>
+          </a:ln>
+        </p:spPr>
+      </p:sp>
+      <p:sp>
+        <p:nvSpPr>
+          <p:cNvPr id="17" name="Text 15"/>
+          <p:cNvSpPr/>
+          <p:nvPr/>
+        </p:nvSpPr>
+        <p:spPr>
+          <a:xfrm>
+            <a:off x="6342736" y="2633472"/>
+            <a:ext cx="2075688" cy="310896"/>
           </a:xfrm>
           <a:prstGeom prst="rect">
             <a:avLst/>
@@ -2904,19 +7729,362 @@
           <a:bodyPr wrap="square" rtlCol="0" anchor="ctr"/>
           <a:lstStyle/>
           <a:p>
-            <a:pPr algn="r" indent="0" marL="0">
+            <a:pPr indent="0" marL="0">
               <a:buNone/>
             </a:pPr>
             <a:r>
-              <a:rPr lang="en-US" sz="1000" dirty="0">
-                <a:solidFill>
-                  <a:srgbClr val="64748B"/>
+              <a:rPr lang="en-US" sz="1100" b="1" dirty="0">
+                <a:solidFill>
+                  <a:srgbClr val="3B82F6"/>
                 </a:solidFill>
                 <a:latin typeface="Consolas" pitchFamily="34" charset="0"/>
                 <a:ea typeface="Consolas" pitchFamily="34" charset="-122"/>
                 <a:cs typeface="Consolas" pitchFamily="34" charset="-120"/>
               </a:rPr>
-              <a:t>5 / 8</a:t>
+              <a:t>03</a:t>
+            </a:r>
+            <a:endParaRPr lang="en-US" sz="1100" dirty="0"/>
+          </a:p>
+        </p:txBody>
+      </p:sp>
+      <p:sp>
+        <p:nvSpPr>
+          <p:cNvPr id="18" name="Text 16"/>
+          <p:cNvSpPr/>
+          <p:nvPr/>
+        </p:nvSpPr>
+        <p:spPr>
+          <a:xfrm>
+            <a:off x="6342736" y="2962656"/>
+            <a:ext cx="2075688" cy="566928"/>
+          </a:xfrm>
+          <a:prstGeom prst="rect">
+            <a:avLst/>
+          </a:prstGeom>
+          <a:noFill/>
+          <a:ln/>
+        </p:spPr>
+        <p:txBody>
+          <a:bodyPr wrap="square" rtlCol="0" anchor="ctr"/>
+          <a:lstStyle/>
+          <a:p>
+            <a:pPr indent="0" marL="0">
+              <a:buNone/>
+            </a:pPr>
+            <a:r>
+              <a:rPr lang="en-US" sz="1350" b="1" dirty="0">
+                <a:solidFill>
+                  <a:srgbClr val="FFFFFF"/>
+                </a:solidFill>
+                <a:latin typeface="Segoe UI" pitchFamily="34" charset="0"/>
+                <a:ea typeface="Segoe UI" pitchFamily="34" charset="-122"/>
+                <a:cs typeface="Segoe UI" pitchFamily="34" charset="-120"/>
+              </a:rPr>
+              <a:t>Promote</a:t>
+            </a:r>
+            <a:endParaRPr lang="en-US" sz="1350" dirty="0"/>
+          </a:p>
+        </p:txBody>
+      </p:sp>
+      <p:sp>
+        <p:nvSpPr>
+          <p:cNvPr id="19" name="Text 17"/>
+          <p:cNvSpPr/>
+          <p:nvPr/>
+        </p:nvSpPr>
+        <p:spPr>
+          <a:xfrm>
+            <a:off x="6342736" y="3566160"/>
+            <a:ext cx="2075688" cy="960120"/>
+          </a:xfrm>
+          <a:prstGeom prst="rect">
+            <a:avLst/>
+          </a:prstGeom>
+          <a:noFill/>
+          <a:ln/>
+        </p:spPr>
+        <p:txBody>
+          <a:bodyPr wrap="square" rtlCol="0" anchor="ctr"/>
+          <a:lstStyle/>
+          <a:p>
+            <a:pPr indent="0" marL="0">
+              <a:buNone/>
+            </a:pPr>
+            <a:r>
+              <a:rPr lang="en-US" sz="980" dirty="0">
+                <a:solidFill>
+                  <a:srgbClr val="CBD5E1"/>
+                </a:solidFill>
+                <a:latin typeface="Segoe UI" pitchFamily="34" charset="0"/>
+                <a:ea typeface="Segoe UI" pitchFamily="34" charset="-122"/>
+                <a:cs typeface="Segoe UI" pitchFamily="34" charset="-120"/>
+              </a:rPr>
+              <a:t>New versions land in one place the owner always knows - no scatter, no surprises.</a:t>
+            </a:r>
+            <a:endParaRPr lang="en-US" sz="980" dirty="0"/>
+          </a:p>
+        </p:txBody>
+      </p:sp>
+      <p:sp>
+        <p:nvSpPr>
+          <p:cNvPr id="20" name="Shape 18"/>
+          <p:cNvSpPr/>
+          <p:nvPr/>
+        </p:nvSpPr>
+        <p:spPr>
+          <a:xfrm>
+            <a:off x="8560156" y="3419856"/>
+            <a:ext cx="210312" cy="274320"/>
+          </a:xfrm>
+          <a:prstGeom prst="rightArrow">
+            <a:avLst/>
+          </a:prstGeom>
+          <a:solidFill>
+            <a:srgbClr val="06B6D4"/>
+          </a:solidFill>
+          <a:ln/>
+        </p:spPr>
+      </p:sp>
+      <p:sp>
+        <p:nvSpPr>
+          <p:cNvPr id="21" name="Shape 19"/>
+          <p:cNvSpPr/>
+          <p:nvPr/>
+        </p:nvSpPr>
+        <p:spPr>
+          <a:xfrm>
+            <a:off x="8784184" y="2514600"/>
+            <a:ext cx="2331720" cy="2103120"/>
+          </a:xfrm>
+          <a:prstGeom prst="roundRect">
+            <a:avLst>
+              <a:gd name="adj" fmla="val 3043"/>
+            </a:avLst>
+          </a:prstGeom>
+          <a:solidFill>
+            <a:srgbClr val="111A2E"/>
+          </a:solidFill>
+          <a:ln w="19050">
+            <a:solidFill>
+              <a:srgbClr val="06B6D4"/>
+            </a:solidFill>
+            <a:prstDash val="solid"/>
+          </a:ln>
+        </p:spPr>
+      </p:sp>
+      <p:sp>
+        <p:nvSpPr>
+          <p:cNvPr id="22" name="Text 20"/>
+          <p:cNvSpPr/>
+          <p:nvPr/>
+        </p:nvSpPr>
+        <p:spPr>
+          <a:xfrm>
+            <a:off x="8912200" y="2633472"/>
+            <a:ext cx="2075688" cy="310896"/>
+          </a:xfrm>
+          <a:prstGeom prst="rect">
+            <a:avLst/>
+          </a:prstGeom>
+          <a:noFill/>
+          <a:ln/>
+        </p:spPr>
+        <p:txBody>
+          <a:bodyPr wrap="square" rtlCol="0" anchor="ctr"/>
+          <a:lstStyle/>
+          <a:p>
+            <a:pPr indent="0" marL="0">
+              <a:buNone/>
+            </a:pPr>
+            <a:r>
+              <a:rPr lang="en-US" sz="1100" b="1" dirty="0">
+                <a:solidFill>
+                  <a:srgbClr val="06B6D4"/>
+                </a:solidFill>
+                <a:latin typeface="Consolas" pitchFamily="34" charset="0"/>
+                <a:ea typeface="Consolas" pitchFamily="34" charset="-122"/>
+                <a:cs typeface="Consolas" pitchFamily="34" charset="-120"/>
+              </a:rPr>
+              <a:t>04</a:t>
+            </a:r>
+            <a:endParaRPr lang="en-US" sz="1100" dirty="0"/>
+          </a:p>
+        </p:txBody>
+      </p:sp>
+      <p:sp>
+        <p:nvSpPr>
+          <p:cNvPr id="23" name="Text 21"/>
+          <p:cNvSpPr/>
+          <p:nvPr/>
+        </p:nvSpPr>
+        <p:spPr>
+          <a:xfrm>
+            <a:off x="8912200" y="2962656"/>
+            <a:ext cx="2075688" cy="566928"/>
+          </a:xfrm>
+          <a:prstGeom prst="rect">
+            <a:avLst/>
+          </a:prstGeom>
+          <a:noFill/>
+          <a:ln/>
+        </p:spPr>
+        <p:txBody>
+          <a:bodyPr wrap="square" rtlCol="0" anchor="ctr"/>
+          <a:lstStyle/>
+          <a:p>
+            <a:pPr indent="0" marL="0">
+              <a:buNone/>
+            </a:pPr>
+            <a:r>
+              <a:rPr lang="en-US" sz="1350" b="1" dirty="0">
+                <a:solidFill>
+                  <a:srgbClr val="FFFFFF"/>
+                </a:solidFill>
+                <a:latin typeface="Segoe UI" pitchFamily="34" charset="0"/>
+                <a:ea typeface="Segoe UI" pitchFamily="34" charset="-122"/>
+                <a:cs typeface="Segoe UI" pitchFamily="34" charset="-120"/>
+              </a:rPr>
+              <a:t>Record</a:t>
+            </a:r>
+            <a:endParaRPr lang="en-US" sz="1350" dirty="0"/>
+          </a:p>
+        </p:txBody>
+      </p:sp>
+      <p:sp>
+        <p:nvSpPr>
+          <p:cNvPr id="24" name="Text 22"/>
+          <p:cNvSpPr/>
+          <p:nvPr/>
+        </p:nvSpPr>
+        <p:spPr>
+          <a:xfrm>
+            <a:off x="8912200" y="3566160"/>
+            <a:ext cx="2075688" cy="960120"/>
+          </a:xfrm>
+          <a:prstGeom prst="rect">
+            <a:avLst/>
+          </a:prstGeom>
+          <a:noFill/>
+          <a:ln/>
+        </p:spPr>
+        <p:txBody>
+          <a:bodyPr wrap="square" rtlCol="0" anchor="ctr"/>
+          <a:lstStyle/>
+          <a:p>
+            <a:pPr indent="0" marL="0">
+              <a:buNone/>
+            </a:pPr>
+            <a:r>
+              <a:rPr lang="en-US" sz="980" dirty="0">
+                <a:solidFill>
+                  <a:srgbClr val="CBD5E1"/>
+                </a:solidFill>
+                <a:latin typeface="Segoe UI" pitchFamily="34" charset="0"/>
+                <a:ea typeface="Segoe UI" pitchFamily="34" charset="-122"/>
+                <a:cs typeface="Segoe UI" pitchFamily="34" charset="-120"/>
+              </a:rPr>
+              <a:t>Every app keeps a status file: features, version history, decisions.</a:t>
+            </a:r>
+            <a:endParaRPr lang="en-US" sz="980" dirty="0"/>
+          </a:p>
+        </p:txBody>
+      </p:sp>
+      <p:sp>
+        <p:nvSpPr>
+          <p:cNvPr id="25" name="Shape 23"/>
+          <p:cNvSpPr/>
+          <p:nvPr/>
+        </p:nvSpPr>
+        <p:spPr>
+          <a:xfrm>
+            <a:off x="822960" y="5961888"/>
+            <a:ext cx="10515600" cy="0"/>
+          </a:xfrm>
+          <a:prstGeom prst="line">
+            <a:avLst/>
+          </a:prstGeom>
+          <a:noFill/>
+          <a:ln w="12700">
+            <a:solidFill>
+              <a:srgbClr val="1E2D45"/>
+            </a:solidFill>
+            <a:prstDash val="solid"/>
+          </a:ln>
+        </p:spPr>
+      </p:sp>
+      <p:sp>
+        <p:nvSpPr>
+          <p:cNvPr id="26" name="Text 24"/>
+          <p:cNvSpPr/>
+          <p:nvPr/>
+        </p:nvSpPr>
+        <p:spPr>
+          <a:xfrm>
+            <a:off x="822960" y="6053328"/>
+            <a:ext cx="9692640" cy="457200"/>
+          </a:xfrm>
+          <a:prstGeom prst="rect">
+            <a:avLst/>
+          </a:prstGeom>
+          <a:noFill/>
+          <a:ln/>
+        </p:spPr>
+        <p:txBody>
+          <a:bodyPr wrap="square" rtlCol="0" anchor="ctr"/>
+          <a:lstStyle/>
+          <a:p>
+            <a:pPr indent="0" marL="0">
+              <a:buNone/>
+            </a:pPr>
+            <a:r>
+              <a:rPr lang="en-US" sz="1150" dirty="0">
+                <a:solidFill>
+                  <a:srgbClr val="64748B"/>
+                </a:solidFill>
+                <a:latin typeface="Segoe UI" pitchFamily="34" charset="0"/>
+                <a:ea typeface="Segoe UI" pitchFamily="34" charset="-122"/>
+                <a:cs typeface="Segoe UI" pitchFamily="34" charset="-120"/>
+              </a:rPr>
+              <a:t>With 30+ apps you do not maintain apps - you maintain the pipeline.</a:t>
+            </a:r>
+            <a:endParaRPr lang="en-US" sz="1150" dirty="0"/>
+          </a:p>
+        </p:txBody>
+      </p:sp>
+      <p:sp>
+        <p:nvSpPr>
+          <p:cNvPr id="27" name="Text 25"/>
+          <p:cNvSpPr/>
+          <p:nvPr/>
+        </p:nvSpPr>
+        <p:spPr>
+          <a:xfrm>
+            <a:off x="10698480" y="6382512"/>
+            <a:ext cx="1188720" cy="365760"/>
+          </a:xfrm>
+          <a:prstGeom prst="rect">
+            <a:avLst/>
+          </a:prstGeom>
+          <a:noFill/>
+          <a:ln/>
+        </p:spPr>
+        <p:txBody>
+          <a:bodyPr wrap="square" rtlCol="0" anchor="ctr"/>
+          <a:lstStyle/>
+          <a:p>
+            <a:pPr algn="r" indent="0" marL="0">
+              <a:buNone/>
+            </a:pPr>
+            <a:r>
+              <a:rPr lang="en-US" sz="1000" dirty="0">
+                <a:solidFill>
+                  <a:srgbClr val="64748B"/>
+                </a:solidFill>
+                <a:latin typeface="Consolas" pitchFamily="34" charset="0"/>
+                <a:ea typeface="Consolas" pitchFamily="34" charset="-122"/>
+                <a:cs typeface="Consolas" pitchFamily="34" charset="-120"/>
+              </a:rPr>
+              <a:t>5 / 14</a:t>
             </a:r>
             <a:endParaRPr lang="en-US" sz="1000" dirty="0"/>
           </a:p>
@@ -3027,7 +8195,7 @@
                 <a:ea typeface="Consolas" pitchFamily="34" charset="-122"/>
                 <a:cs typeface="Consolas" pitchFamily="34" charset="-120"/>
               </a:rPr>
-              <a:t>GATE 4</a:t>
+              <a:t>THE GATES</a:t>
             </a:r>
             <a:endParaRPr lang="en-US" sz="1200" dirty="0"/>
           </a:p>
@@ -3041,8 +8209,8 @@
         </p:nvSpPr>
         <p:spPr>
           <a:xfrm>
-            <a:off x="822960" y="960120"/>
-            <a:ext cx="10515600" cy="868680"/>
+            <a:off x="822960" y="914400"/>
+            <a:ext cx="10561320" cy="868680"/>
           </a:xfrm>
           <a:prstGeom prst="rect">
             <a:avLst/>
@@ -3058,7 +8226,7 @@
               <a:buNone/>
             </a:pPr>
             <a:r>
-              <a:rPr lang="en-US" sz="3000" b="1" dirty="0">
+              <a:rPr lang="en-US" sz="2700" b="1" dirty="0">
                 <a:solidFill>
                   <a:srgbClr val="FFFFFF"/>
                 </a:solidFill>
@@ -3066,139 +8234,1485 @@
                 <a:ea typeface="Segoe UI" pitchFamily="34" charset="-122"/>
                 <a:cs typeface="Segoe UI" pitchFamily="34" charset="-120"/>
               </a:rPr>
-              <a:t>Physical evidence</a:t>
-            </a:r>
-            <a:endParaRPr lang="en-US" sz="3000" dirty="0"/>
-          </a:p>
-        </p:txBody>
-      </p:sp>
-      <p:sp>
-        <p:nvSpPr>
-          <p:cNvPr id="6" name="Text 4"/>
-          <p:cNvSpPr/>
-          <p:nvPr/>
-        </p:nvSpPr>
-        <p:spPr>
-          <a:xfrm>
-            <a:off x="868680" y="2057400"/>
-            <a:ext cx="10424160" cy="3566160"/>
-          </a:xfrm>
-          <a:prstGeom prst="rect">
-            <a:avLst/>
-          </a:prstGeom>
-          <a:noFill/>
-          <a:ln/>
-        </p:spPr>
-        <p:txBody>
-          <a:bodyPr wrap="square" rtlCol="0" anchor="t"/>
-          <a:lstStyle/>
-          <a:p>
-            <a:pPr marL="342900" indent="-342900">
-              <a:lnSpc>
-                <a:spcPct val="115000"/>
-              </a:lnSpc>
-              <a:spcAft>
-                <a:spcPts val="1000"/>
-              </a:spcAft>
-              <a:buSzPct val="100000"/>
-              <a:buChar char="▸"/>
-            </a:pPr>
-            <a:r>
-              <a:rPr lang="en-US" sz="1600" dirty="0">
-                <a:solidFill>
-                  <a:srgbClr val="CBD5E1"/>
+              <a:t>Four gates, defined operationally</a:t>
+            </a:r>
+            <a:endParaRPr lang="en-US" sz="2700" dirty="0"/>
+          </a:p>
+        </p:txBody>
+      </p:sp>
+      <p:graphicFrame>
+        <p:nvGraphicFramePr>
+          <p:cNvPr id="7" name="Table 0"/>
+          <p:cNvGraphicFramePr>
+            <a:graphicFrameLocks noGrp="1"/>
+          </p:cNvGraphicFramePr>
+          <p:nvPr>
+            <p:extLst>
+              <p:ext uri="{D42A27DB-BD31-4B8C-83A1-F6EECF244321}">
+                <p14:modId xmlns:p14="http://schemas.microsoft.com/office/powerpoint/2010/main" val="1579011935"/>
+              </p:ext>
+            </p:extLst>
+          </p:nvPr>
+        </p:nvGraphicFramePr>
+        <p:xfrm>
+          <a:off x="822960" y="2011680"/>
+          <a:ext cx="10515600" cy="914400"/>
+        </p:xfrm>
+        <a:graphic>
+          <a:graphicData uri="http://schemas.openxmlformats.org/drawingml/2006/table">
+            <a:tbl>
+              <a:tblPr/>
+              <a:tblGrid>
+                <a:gridCol w="2628900"/>
+                <a:gridCol w="2628900"/>
+                <a:gridCol w="2628900"/>
+                <a:gridCol w="2628900"/>
+              </a:tblGrid>
+              <a:tr h="402336">
+                <a:tc>
+                  <a:txBody>
+                    <a:bodyPr/>
+                    <a:lstStyle/>
+                    <a:p>
+                      <a:pPr indent="0" marL="0">
+                        <a:buNone/>
+                      </a:pPr>
+                      <a:r>
+                        <a:rPr lang="en-US" sz="1150" b="1" dirty="0">
+                          <a:solidFill>
+                            <a:srgbClr val="FFFFFF"/>
+                          </a:solidFill>
+                          <a:latin typeface="Segoe UI" pitchFamily="34" charset="0"/>
+                          <a:ea typeface="Segoe UI" pitchFamily="34" charset="-122"/>
+                          <a:cs typeface="Segoe UI" pitchFamily="34" charset="-120"/>
+                        </a:rPr>
+                        <a:t>Gate</a:t>
+                      </a:r>
+                      <a:endParaRPr lang="en-US" sz="1150" dirty="0">
+                        <a:latin typeface="Segoe UI" charset="0"/>
+                        <a:ea typeface="Segoe UI" charset="0"/>
+                        <a:cs typeface="Segoe UI" charset="0"/>
+                      </a:endParaRPr>
+                    </a:p>
+                  </a:txBody>
+                  <a:tcPr marL="64008" marR="64008" marT="64008" marB="64008" anchor="ctr">
+                    <a:lnL w="6350" cap="flat" cmpd="sng" algn="ctr">
+                      <a:solidFill>
+                        <a:srgbClr val="24365A"/>
+                      </a:solidFill>
+                      <a:prstDash val="solid"/>
+                      <a:round/>
+                      <a:headEnd type="none" w="med" len="med"/>
+                      <a:tailEnd type="none" w="med" len="med"/>
+                    </a:lnL>
+                    <a:lnR w="6350" cap="flat" cmpd="sng" algn="ctr">
+                      <a:solidFill>
+                        <a:srgbClr val="24365A"/>
+                      </a:solidFill>
+                      <a:prstDash val="solid"/>
+                      <a:round/>
+                      <a:headEnd type="none" w="med" len="med"/>
+                      <a:tailEnd type="none" w="med" len="med"/>
+                    </a:lnR>
+                    <a:lnT w="6350" cap="flat" cmpd="sng" algn="ctr">
+                      <a:solidFill>
+                        <a:srgbClr val="24365A"/>
+                      </a:solidFill>
+                      <a:prstDash val="solid"/>
+                      <a:round/>
+                      <a:headEnd type="none" w="med" len="med"/>
+                      <a:tailEnd type="none" w="med" len="med"/>
+                    </a:lnT>
+                    <a:lnB w="6350" cap="flat" cmpd="sng" algn="ctr">
+                      <a:solidFill>
+                        <a:srgbClr val="24365A"/>
+                      </a:solidFill>
+                      <a:prstDash val="solid"/>
+                      <a:round/>
+                      <a:headEnd type="none" w="med" len="med"/>
+                      <a:tailEnd type="none" w="med" len="med"/>
+                    </a:lnB>
+                    <a:solidFill>
+                      <a:srgbClr val="16233B"/>
+                    </a:solidFill>
+                  </a:tcPr>
+                </a:tc>
+                <a:tc>
+                  <a:txBody>
+                    <a:bodyPr/>
+                    <a:lstStyle/>
+                    <a:p>
+                      <a:pPr indent="0" marL="0">
+                        <a:buNone/>
+                      </a:pPr>
+                      <a:r>
+                        <a:rPr lang="en-US" sz="1150" b="1" dirty="0">
+                          <a:solidFill>
+                            <a:srgbClr val="FFFFFF"/>
+                          </a:solidFill>
+                          <a:latin typeface="Segoe UI" pitchFamily="34" charset="0"/>
+                          <a:ea typeface="Segoe UI" pitchFamily="34" charset="-122"/>
+                          <a:cs typeface="Segoe UI" pitchFamily="34" charset="-120"/>
+                        </a:rPr>
+                        <a:t>Check</a:t>
+                      </a:r>
+                      <a:endParaRPr lang="en-US" sz="1150" dirty="0">
+                        <a:latin typeface="Segoe UI" charset="0"/>
+                        <a:ea typeface="Segoe UI" charset="0"/>
+                        <a:cs typeface="Segoe UI" charset="0"/>
+                      </a:endParaRPr>
+                    </a:p>
+                  </a:txBody>
+                  <a:tcPr marL="64008" marR="64008" marT="64008" marB="64008" anchor="ctr">
+                    <a:lnL w="6350" cap="flat" cmpd="sng" algn="ctr">
+                      <a:solidFill>
+                        <a:srgbClr val="24365A"/>
+                      </a:solidFill>
+                      <a:prstDash val="solid"/>
+                      <a:round/>
+                      <a:headEnd type="none" w="med" len="med"/>
+                      <a:tailEnd type="none" w="med" len="med"/>
+                    </a:lnL>
+                    <a:lnR w="6350" cap="flat" cmpd="sng" algn="ctr">
+                      <a:solidFill>
+                        <a:srgbClr val="24365A"/>
+                      </a:solidFill>
+                      <a:prstDash val="solid"/>
+                      <a:round/>
+                      <a:headEnd type="none" w="med" len="med"/>
+                      <a:tailEnd type="none" w="med" len="med"/>
+                    </a:lnR>
+                    <a:lnT w="6350" cap="flat" cmpd="sng" algn="ctr">
+                      <a:solidFill>
+                        <a:srgbClr val="24365A"/>
+                      </a:solidFill>
+                      <a:prstDash val="solid"/>
+                      <a:round/>
+                      <a:headEnd type="none" w="med" len="med"/>
+                      <a:tailEnd type="none" w="med" len="med"/>
+                    </a:lnT>
+                    <a:lnB w="6350" cap="flat" cmpd="sng" algn="ctr">
+                      <a:solidFill>
+                        <a:srgbClr val="24365A"/>
+                      </a:solidFill>
+                      <a:prstDash val="solid"/>
+                      <a:round/>
+                      <a:headEnd type="none" w="med" len="med"/>
+                      <a:tailEnd type="none" w="med" len="med"/>
+                    </a:lnB>
+                    <a:solidFill>
+                      <a:srgbClr val="16233B"/>
+                    </a:solidFill>
+                  </a:tcPr>
+                </a:tc>
+                <a:tc>
+                  <a:txBody>
+                    <a:bodyPr/>
+                    <a:lstStyle/>
+                    <a:p>
+                      <a:pPr indent="0" marL="0">
+                        <a:buNone/>
+                      </a:pPr>
+                      <a:r>
+                        <a:rPr lang="en-US" sz="1150" b="1" dirty="0">
+                          <a:solidFill>
+                            <a:srgbClr val="FFFFFF"/>
+                          </a:solidFill>
+                          <a:latin typeface="Segoe UI" pitchFamily="34" charset="0"/>
+                          <a:ea typeface="Segoe UI" pitchFamily="34" charset="-122"/>
+                          <a:cs typeface="Segoe UI" pitchFamily="34" charset="-120"/>
+                        </a:rPr>
+                        <a:t>Pass condition</a:t>
+                      </a:r>
+                      <a:endParaRPr lang="en-US" sz="1150" dirty="0">
+                        <a:latin typeface="Segoe UI" charset="0"/>
+                        <a:ea typeface="Segoe UI" charset="0"/>
+                        <a:cs typeface="Segoe UI" charset="0"/>
+                      </a:endParaRPr>
+                    </a:p>
+                  </a:txBody>
+                  <a:tcPr marL="64008" marR="64008" marT="64008" marB="64008" anchor="ctr">
+                    <a:lnL w="6350" cap="flat" cmpd="sng" algn="ctr">
+                      <a:solidFill>
+                        <a:srgbClr val="24365A"/>
+                      </a:solidFill>
+                      <a:prstDash val="solid"/>
+                      <a:round/>
+                      <a:headEnd type="none" w="med" len="med"/>
+                      <a:tailEnd type="none" w="med" len="med"/>
+                    </a:lnL>
+                    <a:lnR w="6350" cap="flat" cmpd="sng" algn="ctr">
+                      <a:solidFill>
+                        <a:srgbClr val="24365A"/>
+                      </a:solidFill>
+                      <a:prstDash val="solid"/>
+                      <a:round/>
+                      <a:headEnd type="none" w="med" len="med"/>
+                      <a:tailEnd type="none" w="med" len="med"/>
+                    </a:lnR>
+                    <a:lnT w="6350" cap="flat" cmpd="sng" algn="ctr">
+                      <a:solidFill>
+                        <a:srgbClr val="24365A"/>
+                      </a:solidFill>
+                      <a:prstDash val="solid"/>
+                      <a:round/>
+                      <a:headEnd type="none" w="med" len="med"/>
+                      <a:tailEnd type="none" w="med" len="med"/>
+                    </a:lnT>
+                    <a:lnB w="6350" cap="flat" cmpd="sng" algn="ctr">
+                      <a:solidFill>
+                        <a:srgbClr val="24365A"/>
+                      </a:solidFill>
+                      <a:prstDash val="solid"/>
+                      <a:round/>
+                      <a:headEnd type="none" w="med" len="med"/>
+                      <a:tailEnd type="none" w="med" len="med"/>
+                    </a:lnB>
+                    <a:solidFill>
+                      <a:srgbClr val="16233B"/>
+                    </a:solidFill>
+                  </a:tcPr>
+                </a:tc>
+                <a:tc>
+                  <a:txBody>
+                    <a:bodyPr/>
+                    <a:lstStyle/>
+                    <a:p>
+                      <a:pPr indent="0" marL="0">
+                        <a:buNone/>
+                      </a:pPr>
+                      <a:r>
+                        <a:rPr lang="en-US" sz="1150" b="1" dirty="0">
+                          <a:solidFill>
+                            <a:srgbClr val="FFFFFF"/>
+                          </a:solidFill>
+                          <a:latin typeface="Segoe UI" pitchFamily="34" charset="0"/>
+                          <a:ea typeface="Segoe UI" pitchFamily="34" charset="-122"/>
+                          <a:cs typeface="Segoe UI" pitchFamily="34" charset="-120"/>
+                        </a:rPr>
+                        <a:t>Evidence</a:t>
+                      </a:r>
+                      <a:endParaRPr lang="en-US" sz="1150" dirty="0">
+                        <a:latin typeface="Segoe UI" charset="0"/>
+                        <a:ea typeface="Segoe UI" charset="0"/>
+                        <a:cs typeface="Segoe UI" charset="0"/>
+                      </a:endParaRPr>
+                    </a:p>
+                  </a:txBody>
+                  <a:tcPr marL="64008" marR="64008" marT="64008" marB="64008" anchor="ctr">
+                    <a:lnL w="6350" cap="flat" cmpd="sng" algn="ctr">
+                      <a:solidFill>
+                        <a:srgbClr val="24365A"/>
+                      </a:solidFill>
+                      <a:prstDash val="solid"/>
+                      <a:round/>
+                      <a:headEnd type="none" w="med" len="med"/>
+                      <a:tailEnd type="none" w="med" len="med"/>
+                    </a:lnL>
+                    <a:lnR w="6350" cap="flat" cmpd="sng" algn="ctr">
+                      <a:solidFill>
+                        <a:srgbClr val="24365A"/>
+                      </a:solidFill>
+                      <a:prstDash val="solid"/>
+                      <a:round/>
+                      <a:headEnd type="none" w="med" len="med"/>
+                      <a:tailEnd type="none" w="med" len="med"/>
+                    </a:lnR>
+                    <a:lnT w="6350" cap="flat" cmpd="sng" algn="ctr">
+                      <a:solidFill>
+                        <a:srgbClr val="24365A"/>
+                      </a:solidFill>
+                      <a:prstDash val="solid"/>
+                      <a:round/>
+                      <a:headEnd type="none" w="med" len="med"/>
+                      <a:tailEnd type="none" w="med" len="med"/>
+                    </a:lnT>
+                    <a:lnB w="6350" cap="flat" cmpd="sng" algn="ctr">
+                      <a:solidFill>
+                        <a:srgbClr val="24365A"/>
+                      </a:solidFill>
+                      <a:prstDash val="solid"/>
+                      <a:round/>
+                      <a:headEnd type="none" w="med" len="med"/>
+                      <a:tailEnd type="none" w="med" len="med"/>
+                    </a:lnB>
+                    <a:solidFill>
+                      <a:srgbClr val="16233B"/>
+                    </a:solidFill>
+                  </a:tcPr>
+                </a:tc>
+              </a:tr>
+              <a:tr h="402336">
+                <a:tc>
+                  <a:txBody>
+                    <a:bodyPr/>
+                    <a:lstStyle/>
+                    <a:p>
+                      <a:pPr indent="0" marL="0">
+                        <a:buNone/>
+                      </a:pPr>
+                      <a:r>
+                        <a:rPr lang="en-US" sz="1080" dirty="0">
+                          <a:solidFill>
+                            <a:srgbClr val="CBD5E1"/>
+                          </a:solidFill>
+                          <a:latin typeface="Segoe UI" pitchFamily="34" charset="0"/>
+                          <a:ea typeface="Segoe UI" pitchFamily="34" charset="-122"/>
+                          <a:cs typeface="Segoe UI" pitchFamily="34" charset="-120"/>
+                        </a:rPr>
+                        <a:t>1 · Golden path</a:t>
+                      </a:r>
+                      <a:endParaRPr lang="en-US" sz="1080" dirty="0">
+                        <a:latin typeface="Segoe UI" charset="0"/>
+                        <a:ea typeface="Segoe UI" charset="0"/>
+                        <a:cs typeface="Segoe UI" charset="0"/>
+                      </a:endParaRPr>
+                    </a:p>
+                  </a:txBody>
+                  <a:tcPr marL="64008" marR="64008" marT="64008" marB="64008" anchor="ctr">
+                    <a:lnL w="6350" cap="flat" cmpd="sng" algn="ctr">
+                      <a:solidFill>
+                        <a:srgbClr val="24365A"/>
+                      </a:solidFill>
+                      <a:prstDash val="solid"/>
+                      <a:round/>
+                      <a:headEnd type="none" w="med" len="med"/>
+                      <a:tailEnd type="none" w="med" len="med"/>
+                    </a:lnL>
+                    <a:lnR w="6350" cap="flat" cmpd="sng" algn="ctr">
+                      <a:solidFill>
+                        <a:srgbClr val="24365A"/>
+                      </a:solidFill>
+                      <a:prstDash val="solid"/>
+                      <a:round/>
+                      <a:headEnd type="none" w="med" len="med"/>
+                      <a:tailEnd type="none" w="med" len="med"/>
+                    </a:lnR>
+                    <a:lnT w="6350" cap="flat" cmpd="sng" algn="ctr">
+                      <a:solidFill>
+                        <a:srgbClr val="24365A"/>
+                      </a:solidFill>
+                      <a:prstDash val="solid"/>
+                      <a:round/>
+                      <a:headEnd type="none" w="med" len="med"/>
+                      <a:tailEnd type="none" w="med" len="med"/>
+                    </a:lnT>
+                    <a:lnB w="6350" cap="flat" cmpd="sng" algn="ctr">
+                      <a:solidFill>
+                        <a:srgbClr val="24365A"/>
+                      </a:solidFill>
+                      <a:prstDash val="solid"/>
+                      <a:round/>
+                      <a:headEnd type="none" w="med" len="med"/>
+                      <a:tailEnd type="none" w="med" len="med"/>
+                    </a:lnB>
+                    <a:solidFill>
+                      <a:srgbClr val="101A2D"/>
+                    </a:solidFill>
+                  </a:tcPr>
+                </a:tc>
+                <a:tc>
+                  <a:txBody>
+                    <a:bodyPr/>
+                    <a:lstStyle/>
+                    <a:p>
+                      <a:pPr indent="0" marL="0">
+                        <a:buNone/>
+                      </a:pPr>
+                      <a:r>
+                        <a:rPr lang="en-US" sz="1080" dirty="0">
+                          <a:solidFill>
+                            <a:srgbClr val="CBD5E1"/>
+                          </a:solidFill>
+                          <a:latin typeface="Segoe UI" pitchFamily="34" charset="0"/>
+                          <a:ea typeface="Segoe UI" pitchFamily="34" charset="-122"/>
+                          <a:cs typeface="Segoe UI" pitchFamily="34" charset="-120"/>
+                        </a:rPr>
+                        <a:t>Walk the single most important user journey end-to-end</a:t>
+                      </a:r>
+                      <a:endParaRPr lang="en-US" sz="1080" dirty="0">
+                        <a:latin typeface="Segoe UI" charset="0"/>
+                        <a:ea typeface="Segoe UI" charset="0"/>
+                        <a:cs typeface="Segoe UI" charset="0"/>
+                      </a:endParaRPr>
+                    </a:p>
+                  </a:txBody>
+                  <a:tcPr marL="64008" marR="64008" marT="64008" marB="64008" anchor="ctr">
+                    <a:lnL w="6350" cap="flat" cmpd="sng" algn="ctr">
+                      <a:solidFill>
+                        <a:srgbClr val="24365A"/>
+                      </a:solidFill>
+                      <a:prstDash val="solid"/>
+                      <a:round/>
+                      <a:headEnd type="none" w="med" len="med"/>
+                      <a:tailEnd type="none" w="med" len="med"/>
+                    </a:lnL>
+                    <a:lnR w="6350" cap="flat" cmpd="sng" algn="ctr">
+                      <a:solidFill>
+                        <a:srgbClr val="24365A"/>
+                      </a:solidFill>
+                      <a:prstDash val="solid"/>
+                      <a:round/>
+                      <a:headEnd type="none" w="med" len="med"/>
+                      <a:tailEnd type="none" w="med" len="med"/>
+                    </a:lnR>
+                    <a:lnT w="6350" cap="flat" cmpd="sng" algn="ctr">
+                      <a:solidFill>
+                        <a:srgbClr val="24365A"/>
+                      </a:solidFill>
+                      <a:prstDash val="solid"/>
+                      <a:round/>
+                      <a:headEnd type="none" w="med" len="med"/>
+                      <a:tailEnd type="none" w="med" len="med"/>
+                    </a:lnT>
+                    <a:lnB w="6350" cap="flat" cmpd="sng" algn="ctr">
+                      <a:solidFill>
+                        <a:srgbClr val="24365A"/>
+                      </a:solidFill>
+                      <a:prstDash val="solid"/>
+                      <a:round/>
+                      <a:headEnd type="none" w="med" len="med"/>
+                      <a:tailEnd type="none" w="med" len="med"/>
+                    </a:lnB>
+                    <a:solidFill>
+                      <a:srgbClr val="101A2D"/>
+                    </a:solidFill>
+                  </a:tcPr>
+                </a:tc>
+                <a:tc>
+                  <a:txBody>
+                    <a:bodyPr/>
+                    <a:lstStyle/>
+                    <a:p>
+                      <a:pPr indent="0" marL="0">
+                        <a:buNone/>
+                      </a:pPr>
+                      <a:r>
+                        <a:rPr lang="en-US" sz="1080" dirty="0">
+                          <a:solidFill>
+                            <a:srgbClr val="CBD5E1"/>
+                          </a:solidFill>
+                          <a:latin typeface="Segoe UI" pitchFamily="34" charset="0"/>
+                          <a:ea typeface="Segoe UI" pitchFamily="34" charset="-122"/>
+                          <a:cs typeface="Segoe UI" pitchFamily="34" charset="-120"/>
+                        </a:rPr>
+                        <a:t>Journey completes with no blockers</a:t>
+                      </a:r>
+                      <a:endParaRPr lang="en-US" sz="1080" dirty="0">
+                        <a:latin typeface="Segoe UI" charset="0"/>
+                        <a:ea typeface="Segoe UI" charset="0"/>
+                        <a:cs typeface="Segoe UI" charset="0"/>
+                      </a:endParaRPr>
+                    </a:p>
+                  </a:txBody>
+                  <a:tcPr marL="64008" marR="64008" marT="64008" marB="64008" anchor="ctr">
+                    <a:lnL w="6350" cap="flat" cmpd="sng" algn="ctr">
+                      <a:solidFill>
+                        <a:srgbClr val="24365A"/>
+                      </a:solidFill>
+                      <a:prstDash val="solid"/>
+                      <a:round/>
+                      <a:headEnd type="none" w="med" len="med"/>
+                      <a:tailEnd type="none" w="med" len="med"/>
+                    </a:lnL>
+                    <a:lnR w="6350" cap="flat" cmpd="sng" algn="ctr">
+                      <a:solidFill>
+                        <a:srgbClr val="24365A"/>
+                      </a:solidFill>
+                      <a:prstDash val="solid"/>
+                      <a:round/>
+                      <a:headEnd type="none" w="med" len="med"/>
+                      <a:tailEnd type="none" w="med" len="med"/>
+                    </a:lnR>
+                    <a:lnT w="6350" cap="flat" cmpd="sng" algn="ctr">
+                      <a:solidFill>
+                        <a:srgbClr val="24365A"/>
+                      </a:solidFill>
+                      <a:prstDash val="solid"/>
+                      <a:round/>
+                      <a:headEnd type="none" w="med" len="med"/>
+                      <a:tailEnd type="none" w="med" len="med"/>
+                    </a:lnT>
+                    <a:lnB w="6350" cap="flat" cmpd="sng" algn="ctr">
+                      <a:solidFill>
+                        <a:srgbClr val="24365A"/>
+                      </a:solidFill>
+                      <a:prstDash val="solid"/>
+                      <a:round/>
+                      <a:headEnd type="none" w="med" len="med"/>
+                      <a:tailEnd type="none" w="med" len="med"/>
+                    </a:lnB>
+                    <a:solidFill>
+                      <a:srgbClr val="101A2D"/>
+                    </a:solidFill>
+                  </a:tcPr>
+                </a:tc>
+                <a:tc>
+                  <a:txBody>
+                    <a:bodyPr/>
+                    <a:lstStyle/>
+                    <a:p>
+                      <a:pPr indent="0" marL="0">
+                        <a:buNone/>
+                      </a:pPr>
+                      <a:r>
+                        <a:rPr lang="en-US" sz="1080" dirty="0">
+                          <a:solidFill>
+                            <a:srgbClr val="CBD5E1"/>
+                          </a:solidFill>
+                          <a:latin typeface="Segoe UI" pitchFamily="34" charset="0"/>
+                          <a:ea typeface="Segoe UI" pitchFamily="34" charset="-122"/>
+                          <a:cs typeface="Segoe UI" pitchFamily="34" charset="-120"/>
+                        </a:rPr>
+                        <a:t>Run log per release</a:t>
+                      </a:r>
+                      <a:endParaRPr lang="en-US" sz="1080" dirty="0">
+                        <a:latin typeface="Segoe UI" charset="0"/>
+                        <a:ea typeface="Segoe UI" charset="0"/>
+                        <a:cs typeface="Segoe UI" charset="0"/>
+                      </a:endParaRPr>
+                    </a:p>
+                  </a:txBody>
+                  <a:tcPr marL="64008" marR="64008" marT="64008" marB="64008" anchor="ctr">
+                    <a:lnL w="6350" cap="flat" cmpd="sng" algn="ctr">
+                      <a:solidFill>
+                        <a:srgbClr val="24365A"/>
+                      </a:solidFill>
+                      <a:prstDash val="solid"/>
+                      <a:round/>
+                      <a:headEnd type="none" w="med" len="med"/>
+                      <a:tailEnd type="none" w="med" len="med"/>
+                    </a:lnL>
+                    <a:lnR w="6350" cap="flat" cmpd="sng" algn="ctr">
+                      <a:solidFill>
+                        <a:srgbClr val="24365A"/>
+                      </a:solidFill>
+                      <a:prstDash val="solid"/>
+                      <a:round/>
+                      <a:headEnd type="none" w="med" len="med"/>
+                      <a:tailEnd type="none" w="med" len="med"/>
+                    </a:lnR>
+                    <a:lnT w="6350" cap="flat" cmpd="sng" algn="ctr">
+                      <a:solidFill>
+                        <a:srgbClr val="24365A"/>
+                      </a:solidFill>
+                      <a:prstDash val="solid"/>
+                      <a:round/>
+                      <a:headEnd type="none" w="med" len="med"/>
+                      <a:tailEnd type="none" w="med" len="med"/>
+                    </a:lnT>
+                    <a:lnB w="6350" cap="flat" cmpd="sng" algn="ctr">
+                      <a:solidFill>
+                        <a:srgbClr val="24365A"/>
+                      </a:solidFill>
+                      <a:prstDash val="solid"/>
+                      <a:round/>
+                      <a:headEnd type="none" w="med" len="med"/>
+                      <a:tailEnd type="none" w="med" len="med"/>
+                    </a:lnB>
+                    <a:solidFill>
+                      <a:srgbClr val="101A2D"/>
+                    </a:solidFill>
+                  </a:tcPr>
+                </a:tc>
+              </a:tr>
+              <a:tr h="402336">
+                <a:tc>
+                  <a:txBody>
+                    <a:bodyPr/>
+                    <a:lstStyle/>
+                    <a:p>
+                      <a:pPr indent="0" marL="0">
+                        <a:buNone/>
+                      </a:pPr>
+                      <a:r>
+                        <a:rPr lang="en-US" sz="1080" dirty="0">
+                          <a:solidFill>
+                            <a:srgbClr val="CBD5E1"/>
+                          </a:solidFill>
+                          <a:latin typeface="Segoe UI" pitchFamily="34" charset="0"/>
+                          <a:ea typeface="Segoe UI" pitchFamily="34" charset="-122"/>
+                          <a:cs typeface="Segoe UI" pitchFamily="34" charset="-120"/>
+                        </a:rPr>
+                        <a:t>2 · Zero dead buttons</a:t>
+                      </a:r>
+                      <a:endParaRPr lang="en-US" sz="1080" dirty="0">
+                        <a:latin typeface="Segoe UI" charset="0"/>
+                        <a:ea typeface="Segoe UI" charset="0"/>
+                        <a:cs typeface="Segoe UI" charset="0"/>
+                      </a:endParaRPr>
+                    </a:p>
+                  </a:txBody>
+                  <a:tcPr marL="64008" marR="64008" marT="64008" marB="64008" anchor="ctr">
+                    <a:lnL w="6350" cap="flat" cmpd="sng" algn="ctr">
+                      <a:solidFill>
+                        <a:srgbClr val="24365A"/>
+                      </a:solidFill>
+                      <a:prstDash val="solid"/>
+                      <a:round/>
+                      <a:headEnd type="none" w="med" len="med"/>
+                      <a:tailEnd type="none" w="med" len="med"/>
+                    </a:lnL>
+                    <a:lnR w="6350" cap="flat" cmpd="sng" algn="ctr">
+                      <a:solidFill>
+                        <a:srgbClr val="24365A"/>
+                      </a:solidFill>
+                      <a:prstDash val="solid"/>
+                      <a:round/>
+                      <a:headEnd type="none" w="med" len="med"/>
+                      <a:tailEnd type="none" w="med" len="med"/>
+                    </a:lnR>
+                    <a:lnT w="6350" cap="flat" cmpd="sng" algn="ctr">
+                      <a:solidFill>
+                        <a:srgbClr val="24365A"/>
+                      </a:solidFill>
+                      <a:prstDash val="solid"/>
+                      <a:round/>
+                      <a:headEnd type="none" w="med" len="med"/>
+                      <a:tailEnd type="none" w="med" len="med"/>
+                    </a:lnT>
+                    <a:lnB w="6350" cap="flat" cmpd="sng" algn="ctr">
+                      <a:solidFill>
+                        <a:srgbClr val="24365A"/>
+                      </a:solidFill>
+                      <a:prstDash val="solid"/>
+                      <a:round/>
+                      <a:headEnd type="none" w="med" len="med"/>
+                      <a:tailEnd type="none" w="med" len="med"/>
+                    </a:lnB>
+                    <a:solidFill>
+                      <a:srgbClr val="0D1420"/>
+                    </a:solidFill>
+                  </a:tcPr>
+                </a:tc>
+                <a:tc>
+                  <a:txBody>
+                    <a:bodyPr/>
+                    <a:lstStyle/>
+                    <a:p>
+                      <a:pPr indent="0" marL="0">
+                        <a:buNone/>
+                      </a:pPr>
+                      <a:r>
+                        <a:rPr lang="en-US" sz="1080" dirty="0">
+                          <a:solidFill>
+                            <a:srgbClr val="CBD5E1"/>
+                          </a:solidFill>
+                          <a:latin typeface="Segoe UI" pitchFamily="34" charset="0"/>
+                          <a:ea typeface="Segoe UI" pitchFamily="34" charset="-122"/>
+                          <a:cs typeface="Segoe UI" pitchFamily="34" charset="-120"/>
+                        </a:rPr>
+                        <a:t>Agents sweep every screen and interactive element</a:t>
+                      </a:r>
+                      <a:endParaRPr lang="en-US" sz="1080" dirty="0">
+                        <a:latin typeface="Segoe UI" charset="0"/>
+                        <a:ea typeface="Segoe UI" charset="0"/>
+                        <a:cs typeface="Segoe UI" charset="0"/>
+                      </a:endParaRPr>
+                    </a:p>
+                  </a:txBody>
+                  <a:tcPr marL="64008" marR="64008" marT="64008" marB="64008" anchor="ctr">
+                    <a:lnL w="6350" cap="flat" cmpd="sng" algn="ctr">
+                      <a:solidFill>
+                        <a:srgbClr val="24365A"/>
+                      </a:solidFill>
+                      <a:prstDash val="solid"/>
+                      <a:round/>
+                      <a:headEnd type="none" w="med" len="med"/>
+                      <a:tailEnd type="none" w="med" len="med"/>
+                    </a:lnL>
+                    <a:lnR w="6350" cap="flat" cmpd="sng" algn="ctr">
+                      <a:solidFill>
+                        <a:srgbClr val="24365A"/>
+                      </a:solidFill>
+                      <a:prstDash val="solid"/>
+                      <a:round/>
+                      <a:headEnd type="none" w="med" len="med"/>
+                      <a:tailEnd type="none" w="med" len="med"/>
+                    </a:lnR>
+                    <a:lnT w="6350" cap="flat" cmpd="sng" algn="ctr">
+                      <a:solidFill>
+                        <a:srgbClr val="24365A"/>
+                      </a:solidFill>
+                      <a:prstDash val="solid"/>
+                      <a:round/>
+                      <a:headEnd type="none" w="med" len="med"/>
+                      <a:tailEnd type="none" w="med" len="med"/>
+                    </a:lnT>
+                    <a:lnB w="6350" cap="flat" cmpd="sng" algn="ctr">
+                      <a:solidFill>
+                        <a:srgbClr val="24365A"/>
+                      </a:solidFill>
+                      <a:prstDash val="solid"/>
+                      <a:round/>
+                      <a:headEnd type="none" w="med" len="med"/>
+                      <a:tailEnd type="none" w="med" len="med"/>
+                    </a:lnB>
+                    <a:solidFill>
+                      <a:srgbClr val="0D1420"/>
+                    </a:solidFill>
+                  </a:tcPr>
+                </a:tc>
+                <a:tc>
+                  <a:txBody>
+                    <a:bodyPr/>
+                    <a:lstStyle/>
+                    <a:p>
+                      <a:pPr indent="0" marL="0">
+                        <a:buNone/>
+                      </a:pPr>
+                      <a:r>
+                        <a:rPr lang="en-US" sz="1080" dirty="0">
+                          <a:solidFill>
+                            <a:srgbClr val="CBD5E1"/>
+                          </a:solidFill>
+                          <a:latin typeface="Segoe UI" pitchFamily="34" charset="0"/>
+                          <a:ea typeface="Segoe UI" pitchFamily="34" charset="-122"/>
+                          <a:cs typeface="Segoe UI" pitchFamily="34" charset="-120"/>
+                        </a:rPr>
+                        <a:t>Every control does what it claims</a:t>
+                      </a:r>
+                      <a:endParaRPr lang="en-US" sz="1080" dirty="0">
+                        <a:latin typeface="Segoe UI" charset="0"/>
+                        <a:ea typeface="Segoe UI" charset="0"/>
+                        <a:cs typeface="Segoe UI" charset="0"/>
+                      </a:endParaRPr>
+                    </a:p>
+                  </a:txBody>
+                  <a:tcPr marL="64008" marR="64008" marT="64008" marB="64008" anchor="ctr">
+                    <a:lnL w="6350" cap="flat" cmpd="sng" algn="ctr">
+                      <a:solidFill>
+                        <a:srgbClr val="24365A"/>
+                      </a:solidFill>
+                      <a:prstDash val="solid"/>
+                      <a:round/>
+                      <a:headEnd type="none" w="med" len="med"/>
+                      <a:tailEnd type="none" w="med" len="med"/>
+                    </a:lnL>
+                    <a:lnR w="6350" cap="flat" cmpd="sng" algn="ctr">
+                      <a:solidFill>
+                        <a:srgbClr val="24365A"/>
+                      </a:solidFill>
+                      <a:prstDash val="solid"/>
+                      <a:round/>
+                      <a:headEnd type="none" w="med" len="med"/>
+                      <a:tailEnd type="none" w="med" len="med"/>
+                    </a:lnR>
+                    <a:lnT w="6350" cap="flat" cmpd="sng" algn="ctr">
+                      <a:solidFill>
+                        <a:srgbClr val="24365A"/>
+                      </a:solidFill>
+                      <a:prstDash val="solid"/>
+                      <a:round/>
+                      <a:headEnd type="none" w="med" len="med"/>
+                      <a:tailEnd type="none" w="med" len="med"/>
+                    </a:lnT>
+                    <a:lnB w="6350" cap="flat" cmpd="sng" algn="ctr">
+                      <a:solidFill>
+                        <a:srgbClr val="24365A"/>
+                      </a:solidFill>
+                      <a:prstDash val="solid"/>
+                      <a:round/>
+                      <a:headEnd type="none" w="med" len="med"/>
+                      <a:tailEnd type="none" w="med" len="med"/>
+                    </a:lnB>
+                    <a:solidFill>
+                      <a:srgbClr val="0D1420"/>
+                    </a:solidFill>
+                  </a:tcPr>
+                </a:tc>
+                <a:tc>
+                  <a:txBody>
+                    <a:bodyPr/>
+                    <a:lstStyle/>
+                    <a:p>
+                      <a:pPr indent="0" marL="0">
+                        <a:buNone/>
+                      </a:pPr>
+                      <a:r>
+                        <a:rPr lang="en-US" sz="1080" dirty="0">
+                          <a:solidFill>
+                            <a:srgbClr val="CBD5E1"/>
+                          </a:solidFill>
+                          <a:latin typeface="Segoe UI" pitchFamily="34" charset="0"/>
+                          <a:ea typeface="Segoe UI" pitchFamily="34" charset="-122"/>
+                          <a:cs typeface="Segoe UI" pitchFamily="34" charset="-120"/>
+                        </a:rPr>
+                        <a:t>Sweep report</a:t>
+                      </a:r>
+                      <a:endParaRPr lang="en-US" sz="1080" dirty="0">
+                        <a:latin typeface="Segoe UI" charset="0"/>
+                        <a:ea typeface="Segoe UI" charset="0"/>
+                        <a:cs typeface="Segoe UI" charset="0"/>
+                      </a:endParaRPr>
+                    </a:p>
+                  </a:txBody>
+                  <a:tcPr marL="64008" marR="64008" marT="64008" marB="64008" anchor="ctr">
+                    <a:lnL w="6350" cap="flat" cmpd="sng" algn="ctr">
+                      <a:solidFill>
+                        <a:srgbClr val="24365A"/>
+                      </a:solidFill>
+                      <a:prstDash val="solid"/>
+                      <a:round/>
+                      <a:headEnd type="none" w="med" len="med"/>
+                      <a:tailEnd type="none" w="med" len="med"/>
+                    </a:lnL>
+                    <a:lnR w="6350" cap="flat" cmpd="sng" algn="ctr">
+                      <a:solidFill>
+                        <a:srgbClr val="24365A"/>
+                      </a:solidFill>
+                      <a:prstDash val="solid"/>
+                      <a:round/>
+                      <a:headEnd type="none" w="med" len="med"/>
+                      <a:tailEnd type="none" w="med" len="med"/>
+                    </a:lnR>
+                    <a:lnT w="6350" cap="flat" cmpd="sng" algn="ctr">
+                      <a:solidFill>
+                        <a:srgbClr val="24365A"/>
+                      </a:solidFill>
+                      <a:prstDash val="solid"/>
+                      <a:round/>
+                      <a:headEnd type="none" w="med" len="med"/>
+                      <a:tailEnd type="none" w="med" len="med"/>
+                    </a:lnT>
+                    <a:lnB w="6350" cap="flat" cmpd="sng" algn="ctr">
+                      <a:solidFill>
+                        <a:srgbClr val="24365A"/>
+                      </a:solidFill>
+                      <a:prstDash val="solid"/>
+                      <a:round/>
+                      <a:headEnd type="none" w="med" len="med"/>
+                      <a:tailEnd type="none" w="med" len="med"/>
+                    </a:lnB>
+                    <a:solidFill>
+                      <a:srgbClr val="0D1420"/>
+                    </a:solidFill>
+                  </a:tcPr>
+                </a:tc>
+              </a:tr>
+              <a:tr h="402336">
+                <a:tc>
+                  <a:txBody>
+                    <a:bodyPr/>
+                    <a:lstStyle/>
+                    <a:p>
+                      <a:pPr indent="0" marL="0">
+                        <a:buNone/>
+                      </a:pPr>
+                      <a:r>
+                        <a:rPr lang="en-US" sz="1080" dirty="0">
+                          <a:solidFill>
+                            <a:srgbClr val="CBD5E1"/>
+                          </a:solidFill>
+                          <a:latin typeface="Segoe UI" pitchFamily="34" charset="0"/>
+                          <a:ea typeface="Segoe UI" pitchFamily="34" charset="-122"/>
+                          <a:cs typeface="Segoe UI" pitchFamily="34" charset="-120"/>
+                        </a:rPr>
+                        <a:t>3 · Version + backup</a:t>
+                      </a:r>
+                      <a:endParaRPr lang="en-US" sz="1080" dirty="0">
+                        <a:latin typeface="Segoe UI" charset="0"/>
+                        <a:ea typeface="Segoe UI" charset="0"/>
+                        <a:cs typeface="Segoe UI" charset="0"/>
+                      </a:endParaRPr>
+                    </a:p>
+                  </a:txBody>
+                  <a:tcPr marL="64008" marR="64008" marT="64008" marB="64008" anchor="ctr">
+                    <a:lnL w="6350" cap="flat" cmpd="sng" algn="ctr">
+                      <a:solidFill>
+                        <a:srgbClr val="24365A"/>
+                      </a:solidFill>
+                      <a:prstDash val="solid"/>
+                      <a:round/>
+                      <a:headEnd type="none" w="med" len="med"/>
+                      <a:tailEnd type="none" w="med" len="med"/>
+                    </a:lnL>
+                    <a:lnR w="6350" cap="flat" cmpd="sng" algn="ctr">
+                      <a:solidFill>
+                        <a:srgbClr val="24365A"/>
+                      </a:solidFill>
+                      <a:prstDash val="solid"/>
+                      <a:round/>
+                      <a:headEnd type="none" w="med" len="med"/>
+                      <a:tailEnd type="none" w="med" len="med"/>
+                    </a:lnR>
+                    <a:lnT w="6350" cap="flat" cmpd="sng" algn="ctr">
+                      <a:solidFill>
+                        <a:srgbClr val="24365A"/>
+                      </a:solidFill>
+                      <a:prstDash val="solid"/>
+                      <a:round/>
+                      <a:headEnd type="none" w="med" len="med"/>
+                      <a:tailEnd type="none" w="med" len="med"/>
+                    </a:lnT>
+                    <a:lnB w="6350" cap="flat" cmpd="sng" algn="ctr">
+                      <a:solidFill>
+                        <a:srgbClr val="24365A"/>
+                      </a:solidFill>
+                      <a:prstDash val="solid"/>
+                      <a:round/>
+                      <a:headEnd type="none" w="med" len="med"/>
+                      <a:tailEnd type="none" w="med" len="med"/>
+                    </a:lnB>
+                    <a:solidFill>
+                      <a:srgbClr val="101A2D"/>
+                    </a:solidFill>
+                  </a:tcPr>
+                </a:tc>
+                <a:tc>
+                  <a:txBody>
+                    <a:bodyPr/>
+                    <a:lstStyle/>
+                    <a:p>
+                      <a:pPr indent="0" marL="0">
+                        <a:buNone/>
+                      </a:pPr>
+                      <a:r>
+                        <a:rPr lang="en-US" sz="1080" dirty="0">
+                          <a:solidFill>
+                            <a:srgbClr val="CBD5E1"/>
+                          </a:solidFill>
+                          <a:latin typeface="Segoe UI" pitchFamily="34" charset="0"/>
+                          <a:ea typeface="Segoe UI" pitchFamily="34" charset="-122"/>
+                          <a:cs typeface="Segoe UI" pitchFamily="34" charset="-120"/>
+                        </a:rPr>
+                        <a:t>Increment the version and archive the previous build</a:t>
+                      </a:r>
+                      <a:endParaRPr lang="en-US" sz="1080" dirty="0">
+                        <a:latin typeface="Segoe UI" charset="0"/>
+                        <a:ea typeface="Segoe UI" charset="0"/>
+                        <a:cs typeface="Segoe UI" charset="0"/>
+                      </a:endParaRPr>
+                    </a:p>
+                  </a:txBody>
+                  <a:tcPr marL="64008" marR="64008" marT="64008" marB="64008" anchor="ctr">
+                    <a:lnL w="6350" cap="flat" cmpd="sng" algn="ctr">
+                      <a:solidFill>
+                        <a:srgbClr val="24365A"/>
+                      </a:solidFill>
+                      <a:prstDash val="solid"/>
+                      <a:round/>
+                      <a:headEnd type="none" w="med" len="med"/>
+                      <a:tailEnd type="none" w="med" len="med"/>
+                    </a:lnL>
+                    <a:lnR w="6350" cap="flat" cmpd="sng" algn="ctr">
+                      <a:solidFill>
+                        <a:srgbClr val="24365A"/>
+                      </a:solidFill>
+                      <a:prstDash val="solid"/>
+                      <a:round/>
+                      <a:headEnd type="none" w="med" len="med"/>
+                      <a:tailEnd type="none" w="med" len="med"/>
+                    </a:lnR>
+                    <a:lnT w="6350" cap="flat" cmpd="sng" algn="ctr">
+                      <a:solidFill>
+                        <a:srgbClr val="24365A"/>
+                      </a:solidFill>
+                      <a:prstDash val="solid"/>
+                      <a:round/>
+                      <a:headEnd type="none" w="med" len="med"/>
+                      <a:tailEnd type="none" w="med" len="med"/>
+                    </a:lnT>
+                    <a:lnB w="6350" cap="flat" cmpd="sng" algn="ctr">
+                      <a:solidFill>
+                        <a:srgbClr val="24365A"/>
+                      </a:solidFill>
+                      <a:prstDash val="solid"/>
+                      <a:round/>
+                      <a:headEnd type="none" w="med" len="med"/>
+                      <a:tailEnd type="none" w="med" len="med"/>
+                    </a:lnB>
+                    <a:solidFill>
+                      <a:srgbClr val="101A2D"/>
+                    </a:solidFill>
+                  </a:tcPr>
+                </a:tc>
+                <a:tc>
+                  <a:txBody>
+                    <a:bodyPr/>
+                    <a:lstStyle/>
+                    <a:p>
+                      <a:pPr indent="0" marL="0">
+                        <a:buNone/>
+                      </a:pPr>
+                      <a:r>
+                        <a:rPr lang="en-US" sz="1080" dirty="0">
+                          <a:solidFill>
+                            <a:srgbClr val="CBD5E1"/>
+                          </a:solidFill>
+                          <a:latin typeface="Segoe UI" pitchFamily="34" charset="0"/>
+                          <a:ea typeface="Segoe UI" pitchFamily="34" charset="-122"/>
+                          <a:cs typeface="Segoe UI" pitchFamily="34" charset="-120"/>
+                        </a:rPr>
+                        <a:t>Bumped and archived before promote</a:t>
+                      </a:r>
+                      <a:endParaRPr lang="en-US" sz="1080" dirty="0">
+                        <a:latin typeface="Segoe UI" charset="0"/>
+                        <a:ea typeface="Segoe UI" charset="0"/>
+                        <a:cs typeface="Segoe UI" charset="0"/>
+                      </a:endParaRPr>
+                    </a:p>
+                  </a:txBody>
+                  <a:tcPr marL="64008" marR="64008" marT="64008" marB="64008" anchor="ctr">
+                    <a:lnL w="6350" cap="flat" cmpd="sng" algn="ctr">
+                      <a:solidFill>
+                        <a:srgbClr val="24365A"/>
+                      </a:solidFill>
+                      <a:prstDash val="solid"/>
+                      <a:round/>
+                      <a:headEnd type="none" w="med" len="med"/>
+                      <a:tailEnd type="none" w="med" len="med"/>
+                    </a:lnL>
+                    <a:lnR w="6350" cap="flat" cmpd="sng" algn="ctr">
+                      <a:solidFill>
+                        <a:srgbClr val="24365A"/>
+                      </a:solidFill>
+                      <a:prstDash val="solid"/>
+                      <a:round/>
+                      <a:headEnd type="none" w="med" len="med"/>
+                      <a:tailEnd type="none" w="med" len="med"/>
+                    </a:lnR>
+                    <a:lnT w="6350" cap="flat" cmpd="sng" algn="ctr">
+                      <a:solidFill>
+                        <a:srgbClr val="24365A"/>
+                      </a:solidFill>
+                      <a:prstDash val="solid"/>
+                      <a:round/>
+                      <a:headEnd type="none" w="med" len="med"/>
+                      <a:tailEnd type="none" w="med" len="med"/>
+                    </a:lnT>
+                    <a:lnB w="6350" cap="flat" cmpd="sng" algn="ctr">
+                      <a:solidFill>
+                        <a:srgbClr val="24365A"/>
+                      </a:solidFill>
+                      <a:prstDash val="solid"/>
+                      <a:round/>
+                      <a:headEnd type="none" w="med" len="med"/>
+                      <a:tailEnd type="none" w="med" len="med"/>
+                    </a:lnB>
+                    <a:solidFill>
+                      <a:srgbClr val="101A2D"/>
+                    </a:solidFill>
+                  </a:tcPr>
+                </a:tc>
+                <a:tc>
+                  <a:txBody>
+                    <a:bodyPr/>
+                    <a:lstStyle/>
+                    <a:p>
+                      <a:pPr indent="0" marL="0">
+                        <a:buNone/>
+                      </a:pPr>
+                      <a:r>
+                        <a:rPr lang="en-US" sz="1080" dirty="0">
+                          <a:solidFill>
+                            <a:srgbClr val="CBD5E1"/>
+                          </a:solidFill>
+                          <a:latin typeface="Segoe UI" pitchFamily="34" charset="0"/>
+                          <a:ea typeface="Segoe UI" pitchFamily="34" charset="-122"/>
+                          <a:cs typeface="Segoe UI" pitchFamily="34" charset="-120"/>
+                        </a:rPr>
+                        <a:t>Backup archive</a:t>
+                      </a:r>
+                      <a:endParaRPr lang="en-US" sz="1080" dirty="0">
+                        <a:latin typeface="Segoe UI" charset="0"/>
+                        <a:ea typeface="Segoe UI" charset="0"/>
+                        <a:cs typeface="Segoe UI" charset="0"/>
+                      </a:endParaRPr>
+                    </a:p>
+                  </a:txBody>
+                  <a:tcPr marL="64008" marR="64008" marT="64008" marB="64008" anchor="ctr">
+                    <a:lnL w="6350" cap="flat" cmpd="sng" algn="ctr">
+                      <a:solidFill>
+                        <a:srgbClr val="24365A"/>
+                      </a:solidFill>
+                      <a:prstDash val="solid"/>
+                      <a:round/>
+                      <a:headEnd type="none" w="med" len="med"/>
+                      <a:tailEnd type="none" w="med" len="med"/>
+                    </a:lnL>
+                    <a:lnR w="6350" cap="flat" cmpd="sng" algn="ctr">
+                      <a:solidFill>
+                        <a:srgbClr val="24365A"/>
+                      </a:solidFill>
+                      <a:prstDash val="solid"/>
+                      <a:round/>
+                      <a:headEnd type="none" w="med" len="med"/>
+                      <a:tailEnd type="none" w="med" len="med"/>
+                    </a:lnR>
+                    <a:lnT w="6350" cap="flat" cmpd="sng" algn="ctr">
+                      <a:solidFill>
+                        <a:srgbClr val="24365A"/>
+                      </a:solidFill>
+                      <a:prstDash val="solid"/>
+                      <a:round/>
+                      <a:headEnd type="none" w="med" len="med"/>
+                      <a:tailEnd type="none" w="med" len="med"/>
+                    </a:lnT>
+                    <a:lnB w="6350" cap="flat" cmpd="sng" algn="ctr">
+                      <a:solidFill>
+                        <a:srgbClr val="24365A"/>
+                      </a:solidFill>
+                      <a:prstDash val="solid"/>
+                      <a:round/>
+                      <a:headEnd type="none" w="med" len="med"/>
+                      <a:tailEnd type="none" w="med" len="med"/>
+                    </a:lnB>
+                    <a:solidFill>
+                      <a:srgbClr val="101A2D"/>
+                    </a:solidFill>
+                  </a:tcPr>
+                </a:tc>
+              </a:tr>
+              <a:tr h="402336">
+                <a:tc>
+                  <a:txBody>
+                    <a:bodyPr/>
+                    <a:lstStyle/>
+                    <a:p>
+                      <a:pPr indent="0" marL="0">
+                        <a:buNone/>
+                      </a:pPr>
+                      <a:r>
+                        <a:rPr lang="en-US" sz="1080" dirty="0">
+                          <a:solidFill>
+                            <a:srgbClr val="CBD5E1"/>
+                          </a:solidFill>
+                          <a:latin typeface="Segoe UI" pitchFamily="34" charset="0"/>
+                          <a:ea typeface="Segoe UI" pitchFamily="34" charset="-122"/>
+                          <a:cs typeface="Segoe UI" pitchFamily="34" charset="-120"/>
+                        </a:rPr>
+                        <a:t>4 · Physical evidence</a:t>
+                      </a:r>
+                      <a:endParaRPr lang="en-US" sz="1080" dirty="0">
+                        <a:latin typeface="Segoe UI" charset="0"/>
+                        <a:ea typeface="Segoe UI" charset="0"/>
+                        <a:cs typeface="Segoe UI" charset="0"/>
+                      </a:endParaRPr>
+                    </a:p>
+                  </a:txBody>
+                  <a:tcPr marL="64008" marR="64008" marT="64008" marB="64008" anchor="ctr">
+                    <a:lnL w="6350" cap="flat" cmpd="sng" algn="ctr">
+                      <a:solidFill>
+                        <a:srgbClr val="24365A"/>
+                      </a:solidFill>
+                      <a:prstDash val="solid"/>
+                      <a:round/>
+                      <a:headEnd type="none" w="med" len="med"/>
+                      <a:tailEnd type="none" w="med" len="med"/>
+                    </a:lnL>
+                    <a:lnR w="6350" cap="flat" cmpd="sng" algn="ctr">
+                      <a:solidFill>
+                        <a:srgbClr val="24365A"/>
+                      </a:solidFill>
+                      <a:prstDash val="solid"/>
+                      <a:round/>
+                      <a:headEnd type="none" w="med" len="med"/>
+                      <a:tailEnd type="none" w="med" len="med"/>
+                    </a:lnR>
+                    <a:lnT w="6350" cap="flat" cmpd="sng" algn="ctr">
+                      <a:solidFill>
+                        <a:srgbClr val="24365A"/>
+                      </a:solidFill>
+                      <a:prstDash val="solid"/>
+                      <a:round/>
+                      <a:headEnd type="none" w="med" len="med"/>
+                      <a:tailEnd type="none" w="med" len="med"/>
+                    </a:lnT>
+                    <a:lnB w="6350" cap="flat" cmpd="sng" algn="ctr">
+                      <a:solidFill>
+                        <a:srgbClr val="24365A"/>
+                      </a:solidFill>
+                      <a:prstDash val="solid"/>
+                      <a:round/>
+                      <a:headEnd type="none" w="med" len="med"/>
+                      <a:tailEnd type="none" w="med" len="med"/>
+                    </a:lnB>
+                    <a:solidFill>
+                      <a:srgbClr val="0D1420"/>
+                    </a:solidFill>
+                  </a:tcPr>
+                </a:tc>
+                <a:tc>
+                  <a:txBody>
+                    <a:bodyPr/>
+                    <a:lstStyle/>
+                    <a:p>
+                      <a:pPr indent="0" marL="0">
+                        <a:buNone/>
+                      </a:pPr>
+                      <a:r>
+                        <a:rPr lang="en-US" sz="1080" dirty="0">
+                          <a:solidFill>
+                            <a:srgbClr val="CBD5E1"/>
+                          </a:solidFill>
+                          <a:latin typeface="Segoe UI" pitchFamily="34" charset="0"/>
+                          <a:ea typeface="Segoe UI" pitchFamily="34" charset="-122"/>
+                          <a:cs typeface="Segoe UI" pitchFamily="34" charset="-120"/>
+                        </a:rPr>
+                        <a:t>Prove the pass with an artifact</a:t>
+                      </a:r>
+                      <a:endParaRPr lang="en-US" sz="1080" dirty="0">
+                        <a:latin typeface="Segoe UI" charset="0"/>
+                        <a:ea typeface="Segoe UI" charset="0"/>
+                        <a:cs typeface="Segoe UI" charset="0"/>
+                      </a:endParaRPr>
+                    </a:p>
+                  </a:txBody>
+                  <a:tcPr marL="64008" marR="64008" marT="64008" marB="64008" anchor="ctr">
+                    <a:lnL w="6350" cap="flat" cmpd="sng" algn="ctr">
+                      <a:solidFill>
+                        <a:srgbClr val="24365A"/>
+                      </a:solidFill>
+                      <a:prstDash val="solid"/>
+                      <a:round/>
+                      <a:headEnd type="none" w="med" len="med"/>
+                      <a:tailEnd type="none" w="med" len="med"/>
+                    </a:lnL>
+                    <a:lnR w="6350" cap="flat" cmpd="sng" algn="ctr">
+                      <a:solidFill>
+                        <a:srgbClr val="24365A"/>
+                      </a:solidFill>
+                      <a:prstDash val="solid"/>
+                      <a:round/>
+                      <a:headEnd type="none" w="med" len="med"/>
+                      <a:tailEnd type="none" w="med" len="med"/>
+                    </a:lnR>
+                    <a:lnT w="6350" cap="flat" cmpd="sng" algn="ctr">
+                      <a:solidFill>
+                        <a:srgbClr val="24365A"/>
+                      </a:solidFill>
+                      <a:prstDash val="solid"/>
+                      <a:round/>
+                      <a:headEnd type="none" w="med" len="med"/>
+                      <a:tailEnd type="none" w="med" len="med"/>
+                    </a:lnT>
+                    <a:lnB w="6350" cap="flat" cmpd="sng" algn="ctr">
+                      <a:solidFill>
+                        <a:srgbClr val="24365A"/>
+                      </a:solidFill>
+                      <a:prstDash val="solid"/>
+                      <a:round/>
+                      <a:headEnd type="none" w="med" len="med"/>
+                      <a:tailEnd type="none" w="med" len="med"/>
+                    </a:lnB>
+                    <a:solidFill>
+                      <a:srgbClr val="0D1420"/>
+                    </a:solidFill>
+                  </a:tcPr>
+                </a:tc>
+                <a:tc>
+                  <a:txBody>
+                    <a:bodyPr/>
+                    <a:lstStyle/>
+                    <a:p>
+                      <a:pPr indent="0" marL="0">
+                        <a:buNone/>
+                      </a:pPr>
+                      <a:r>
+                        <a:rPr lang="en-US" sz="1080" dirty="0">
+                          <a:solidFill>
+                            <a:srgbClr val="CBD5E1"/>
+                          </a:solidFill>
+                          <a:latin typeface="Segoe UI" pitchFamily="34" charset="0"/>
+                          <a:ea typeface="Segoe UI" pitchFamily="34" charset="-122"/>
+                          <a:cs typeface="Segoe UI" pitchFamily="34" charset="-120"/>
+                        </a:rPr>
+                        <a:t>A stranger could audit it</a:t>
+                      </a:r>
+                      <a:endParaRPr lang="en-US" sz="1080" dirty="0">
+                        <a:latin typeface="Segoe UI" charset="0"/>
+                        <a:ea typeface="Segoe UI" charset="0"/>
+                        <a:cs typeface="Segoe UI" charset="0"/>
+                      </a:endParaRPr>
+                    </a:p>
+                  </a:txBody>
+                  <a:tcPr marL="64008" marR="64008" marT="64008" marB="64008" anchor="ctr">
+                    <a:lnL w="6350" cap="flat" cmpd="sng" algn="ctr">
+                      <a:solidFill>
+                        <a:srgbClr val="24365A"/>
+                      </a:solidFill>
+                      <a:prstDash val="solid"/>
+                      <a:round/>
+                      <a:headEnd type="none" w="med" len="med"/>
+                      <a:tailEnd type="none" w="med" len="med"/>
+                    </a:lnL>
+                    <a:lnR w="6350" cap="flat" cmpd="sng" algn="ctr">
+                      <a:solidFill>
+                        <a:srgbClr val="24365A"/>
+                      </a:solidFill>
+                      <a:prstDash val="solid"/>
+                      <a:round/>
+                      <a:headEnd type="none" w="med" len="med"/>
+                      <a:tailEnd type="none" w="med" len="med"/>
+                    </a:lnR>
+                    <a:lnT w="6350" cap="flat" cmpd="sng" algn="ctr">
+                      <a:solidFill>
+                        <a:srgbClr val="24365A"/>
+                      </a:solidFill>
+                      <a:prstDash val="solid"/>
+                      <a:round/>
+                      <a:headEnd type="none" w="med" len="med"/>
+                      <a:tailEnd type="none" w="med" len="med"/>
+                    </a:lnT>
+                    <a:lnB w="6350" cap="flat" cmpd="sng" algn="ctr">
+                      <a:solidFill>
+                        <a:srgbClr val="24365A"/>
+                      </a:solidFill>
+                      <a:prstDash val="solid"/>
+                      <a:round/>
+                      <a:headEnd type="none" w="med" len="med"/>
+                      <a:tailEnd type="none" w="med" len="med"/>
+                    </a:lnB>
+                    <a:solidFill>
+                      <a:srgbClr val="0D1420"/>
+                    </a:solidFill>
+                  </a:tcPr>
+                </a:tc>
+                <a:tc>
+                  <a:txBody>
+                    <a:bodyPr/>
+                    <a:lstStyle/>
+                    <a:p>
+                      <a:pPr indent="0" marL="0">
+                        <a:buNone/>
+                      </a:pPr>
+                      <a:r>
+                        <a:rPr lang="en-US" sz="1080" dirty="0">
+                          <a:solidFill>
+                            <a:srgbClr val="CBD5E1"/>
+                          </a:solidFill>
+                          <a:latin typeface="Segoe UI" pitchFamily="34" charset="0"/>
+                          <a:ea typeface="Segoe UI" pitchFamily="34" charset="-122"/>
+                          <a:cs typeface="Segoe UI" pitchFamily="34" charset="-120"/>
+                        </a:rPr>
+                        <a:t>Log, file, screenshot, or marker</a:t>
+                      </a:r>
+                      <a:endParaRPr lang="en-US" sz="1080" dirty="0">
+                        <a:latin typeface="Segoe UI" charset="0"/>
+                        <a:ea typeface="Segoe UI" charset="0"/>
+                        <a:cs typeface="Segoe UI" charset="0"/>
+                      </a:endParaRPr>
+                    </a:p>
+                  </a:txBody>
+                  <a:tcPr marL="64008" marR="64008" marT="64008" marB="64008" anchor="ctr">
+                    <a:lnL w="6350" cap="flat" cmpd="sng" algn="ctr">
+                      <a:solidFill>
+                        <a:srgbClr val="24365A"/>
+                      </a:solidFill>
+                      <a:prstDash val="solid"/>
+                      <a:round/>
+                      <a:headEnd type="none" w="med" len="med"/>
+                      <a:tailEnd type="none" w="med" len="med"/>
+                    </a:lnL>
+                    <a:lnR w="6350" cap="flat" cmpd="sng" algn="ctr">
+                      <a:solidFill>
+                        <a:srgbClr val="24365A"/>
+                      </a:solidFill>
+                      <a:prstDash val="solid"/>
+                      <a:round/>
+                      <a:headEnd type="none" w="med" len="med"/>
+                      <a:tailEnd type="none" w="med" len="med"/>
+                    </a:lnR>
+                    <a:lnT w="6350" cap="flat" cmpd="sng" algn="ctr">
+                      <a:solidFill>
+                        <a:srgbClr val="24365A"/>
+                      </a:solidFill>
+                      <a:prstDash val="solid"/>
+                      <a:round/>
+                      <a:headEnd type="none" w="med" len="med"/>
+                      <a:tailEnd type="none" w="med" len="med"/>
+                    </a:lnT>
+                    <a:lnB w="6350" cap="flat" cmpd="sng" algn="ctr">
+                      <a:solidFill>
+                        <a:srgbClr val="24365A"/>
+                      </a:solidFill>
+                      <a:prstDash val="solid"/>
+                      <a:round/>
+                      <a:headEnd type="none" w="med" len="med"/>
+                      <a:tailEnd type="none" w="med" len="med"/>
+                    </a:lnB>
+                    <a:solidFill>
+                      <a:srgbClr val="0D1420"/>
+                    </a:solidFill>
+                  </a:tcPr>
+                </a:tc>
+              </a:tr>
+            </a:tbl>
+          </a:graphicData>
+        </a:graphic>
+      </p:graphicFrame>
+      <p:sp>
+        <p:nvSpPr>
+          <p:cNvPr id="7" name="Shape 4"/>
+          <p:cNvSpPr/>
+          <p:nvPr/>
+        </p:nvSpPr>
+        <p:spPr>
+          <a:xfrm>
+            <a:off x="822960" y="5961888"/>
+            <a:ext cx="10515600" cy="0"/>
+          </a:xfrm>
+          <a:prstGeom prst="line">
+            <a:avLst/>
+          </a:prstGeom>
+          <a:noFill/>
+          <a:ln w="12700">
+            <a:solidFill>
+              <a:srgbClr val="1E2D45"/>
+            </a:solidFill>
+            <a:prstDash val="solid"/>
+          </a:ln>
+        </p:spPr>
+      </p:sp>
+      <p:sp>
+        <p:nvSpPr>
+          <p:cNvPr id="8" name="Text 5"/>
+          <p:cNvSpPr/>
+          <p:nvPr/>
+        </p:nvSpPr>
+        <p:spPr>
+          <a:xfrm>
+            <a:off x="822960" y="6053328"/>
+            <a:ext cx="9692640" cy="457200"/>
+          </a:xfrm>
+          <a:prstGeom prst="rect">
+            <a:avLst/>
+          </a:prstGeom>
+          <a:noFill/>
+          <a:ln/>
+        </p:spPr>
+        <p:txBody>
+          <a:bodyPr wrap="square" rtlCol="0" anchor="ctr"/>
+          <a:lstStyle/>
+          <a:p>
+            <a:pPr indent="0" marL="0">
+              <a:buNone/>
+            </a:pPr>
+            <a:r>
+              <a:rPr lang="en-US" sz="1150" dirty="0">
+                <a:solidFill>
+                  <a:srgbClr val="64748B"/>
                 </a:solidFill>
                 <a:latin typeface="Segoe UI" pitchFamily="34" charset="0"/>
                 <a:ea typeface="Segoe UI" pitchFamily="34" charset="-122"/>
                 <a:cs typeface="Segoe UI" pitchFamily="34" charset="-120"/>
               </a:rPr>
-              <a:t>Passing means a log, file, screenshot, or marker</a:t>
-            </a:r>
-            <a:endParaRPr lang="en-US" sz="1600" dirty="0"/>
-          </a:p>
-          <a:p>
-            <a:pPr marL="342900" indent="-342900">
-              <a:lnSpc>
-                <a:spcPct val="115000"/>
-              </a:lnSpc>
-              <a:spcAft>
-                <a:spcPts val="1000"/>
-              </a:spcAft>
-              <a:buSzPct val="100000"/>
-              <a:buChar char="▸"/>
-            </a:pPr>
-            <a:r>
-              <a:rPr lang="en-US" sz="1600" dirty="0">
-                <a:solidFill>
-                  <a:srgbClr val="CBD5E1"/>
-                </a:solidFill>
-                <a:latin typeface="Segoe UI" pitchFamily="34" charset="0"/>
-                <a:ea typeface="Segoe UI" pitchFamily="34" charset="-122"/>
-                <a:cs typeface="Segoe UI" pitchFamily="34" charset="-120"/>
-              </a:rPr>
-              <a:t>Something a stranger could audit</a:t>
-            </a:r>
-            <a:endParaRPr lang="en-US" sz="1600" dirty="0"/>
-          </a:p>
-          <a:p>
-            <a:pPr marL="342900" indent="-342900">
-              <a:lnSpc>
-                <a:spcPct val="115000"/>
-              </a:lnSpc>
-              <a:spcAft>
-                <a:spcPts val="1000"/>
-              </a:spcAft>
-              <a:buSzPct val="100000"/>
-              <a:buChar char="▸"/>
-            </a:pPr>
-            <a:r>
-              <a:rPr lang="en-US" sz="1600" dirty="0">
-                <a:solidFill>
-                  <a:srgbClr val="CBD5E1"/>
-                </a:solidFill>
-                <a:latin typeface="Segoe UI" pitchFamily="34" charset="0"/>
-                <a:ea typeface="Segoe UI" pitchFamily="34" charset="-122"/>
-                <a:cs typeface="Segoe UI" pitchFamily="34" charset="-120"/>
-              </a:rPr>
-              <a:t>A status field is not evidence</a:t>
-            </a:r>
-            <a:endParaRPr lang="en-US" sz="1600" dirty="0"/>
-          </a:p>
-          <a:p>
-            <a:pPr marL="342900" indent="-342900">
-              <a:lnSpc>
-                <a:spcPct val="115000"/>
-              </a:lnSpc>
-              <a:spcAft>
-                <a:spcPts val="1000"/>
-              </a:spcAft>
-              <a:buSzPct val="100000"/>
-              <a:buChar char="▸"/>
-            </a:pPr>
-            <a:r>
-              <a:rPr lang="en-US" sz="1600" dirty="0">
-                <a:solidFill>
-                  <a:srgbClr val="CBD5E1"/>
-                </a:solidFill>
-                <a:latin typeface="Segoe UI" pitchFamily="34" charset="0"/>
-                <a:ea typeface="Segoe UI" pitchFamily="34" charset="-122"/>
-                <a:cs typeface="Segoe UI" pitchFamily="34" charset="-120"/>
-              </a:rPr>
-              <a:t>Agents behave differently when proof is mandatory</a:t>
-            </a:r>
-            <a:endParaRPr lang="en-US" sz="1600" dirty="0"/>
-          </a:p>
-        </p:txBody>
-      </p:sp>
-      <p:sp>
-        <p:nvSpPr>
-          <p:cNvPr id="7" name="Text 5"/>
-          <p:cNvSpPr/>
-          <p:nvPr/>
-        </p:nvSpPr>
-        <p:spPr>
-          <a:xfrm>
-            <a:off x="10698480" y="6355080"/>
+              <a:t>A status field is not evidence - the artifact is what makes the pass auditable.</a:t>
+            </a:r>
+            <a:endParaRPr lang="en-US" sz="1150" dirty="0"/>
+          </a:p>
+        </p:txBody>
+      </p:sp>
+      <p:sp>
+        <p:nvSpPr>
+          <p:cNvPr id="9" name="Text 6"/>
+          <p:cNvSpPr/>
+          <p:nvPr/>
+        </p:nvSpPr>
+        <p:spPr>
+          <a:xfrm>
+            <a:off x="10698480" y="6382512"/>
             <a:ext cx="1188720" cy="365760"/>
           </a:xfrm>
           <a:prstGeom prst="rect">
@@ -3223,7 +9737,7 @@
                 <a:ea typeface="Consolas" pitchFamily="34" charset="-122"/>
                 <a:cs typeface="Consolas" pitchFamily="34" charset="-120"/>
               </a:rPr>
-              <a:t>6 / 8</a:t>
+              <a:t>6 / 14</a:t>
             </a:r>
             <a:endParaRPr lang="en-US" sz="1000" dirty="0"/>
           </a:p>
@@ -3334,7 +9848,7 @@
                 <a:ea typeface="Consolas" pitchFamily="34" charset="-122"/>
                 <a:cs typeface="Consolas" pitchFamily="34" charset="-120"/>
               </a:rPr>
-              <a:t>ENFORCEMENT</a:t>
+              <a:t>GATES 1 &amp; 2</a:t>
             </a:r>
             <a:endParaRPr lang="en-US" sz="1200" dirty="0"/>
           </a:p>
@@ -3348,8 +9862,8 @@
         </p:nvSpPr>
         <p:spPr>
           <a:xfrm>
-            <a:off x="822960" y="960120"/>
-            <a:ext cx="10515600" cy="868680"/>
+            <a:off x="822960" y="914400"/>
+            <a:ext cx="10561320" cy="868680"/>
           </a:xfrm>
           <a:prstGeom prst="rect">
             <a:avLst/>
@@ -3365,7 +9879,7 @@
               <a:buNone/>
             </a:pPr>
             <a:r>
-              <a:rPr lang="en-US" sz="3000" b="1" dirty="0">
+              <a:rPr lang="en-US" sz="2700" b="1" dirty="0">
                 <a:solidFill>
                   <a:srgbClr val="FFFFFF"/>
                 </a:solidFill>
@@ -3373,9 +9887,9 @@
                 <a:ea typeface="Segoe UI" pitchFamily="34" charset="-122"/>
                 <a:cs typeface="Segoe UI" pitchFamily="34" charset="-120"/>
               </a:rPr>
-              <a:t>A gate that cannot stop traffic is not a gate</a:t>
-            </a:r>
-            <a:endParaRPr lang="en-US" sz="3000" dirty="0"/>
+              <a:t>The golden path and the dead-button sweep</a:t>
+            </a:r>
+            <a:endParaRPr lang="en-US" sz="2700" dirty="0"/>
           </a:p>
         </p:txBody>
       </p:sp>
@@ -3387,7 +9901,7 @@
         </p:nvSpPr>
         <p:spPr>
           <a:xfrm>
-            <a:off x="868680" y="2057400"/>
+            <a:off x="868680" y="2011680"/>
             <a:ext cx="10424160" cy="3566160"/>
           </a:xfrm>
           <a:prstGeom prst="rect">
@@ -3402,10 +9916,10 @@
           <a:p>
             <a:pPr marL="342900" indent="-342900">
               <a:lnSpc>
-                <a:spcPct val="115000"/>
+                <a:spcPct val="112000"/>
               </a:lnSpc>
               <a:spcAft>
-                <a:spcPts val="1000"/>
+                <a:spcPts val="900"/>
               </a:spcAft>
               <a:buSzPct val="100000"/>
               <a:buChar char="▸"/>
@@ -3419,17 +9933,17 @@
                 <a:ea typeface="Segoe UI" pitchFamily="34" charset="-122"/>
                 <a:cs typeface="Segoe UI" pitchFamily="34" charset="-120"/>
               </a:rPr>
-              <a:t>One blocked item = no deploy</a:t>
+              <a:t>Gate 1: every release walks the single most important user journey end-to-end - if it breaks, the build does not ship.</a:t>
             </a:r>
             <a:endParaRPr lang="en-US" sz="1600" dirty="0"/>
           </a:p>
           <a:p>
             <a:pPr marL="342900" indent="-342900">
               <a:lnSpc>
-                <a:spcPct val="115000"/>
+                <a:spcPct val="112000"/>
               </a:lnSpc>
               <a:spcAft>
-                <a:spcPts val="1000"/>
+                <a:spcPts val="900"/>
               </a:spcAft>
               <a:buSzPct val="100000"/>
               <a:buChar char="▸"/>
@@ -3443,17 +9957,17 @@
                 <a:ea typeface="Segoe UI" pitchFamily="34" charset="-122"/>
                 <a:cs typeface="Segoe UI" pitchFamily="34" charset="-120"/>
               </a:rPr>
-              <a:t>No 'just this once' - that is how gates die</a:t>
+              <a:t>The golden path check is boring, repeatable, and non-negotiable; that is exactly why it works.</a:t>
             </a:r>
             <a:endParaRPr lang="en-US" sz="1600" dirty="0"/>
           </a:p>
           <a:p>
             <a:pPr marL="342900" indent="-342900">
               <a:lnSpc>
-                <a:spcPct val="115000"/>
+                <a:spcPct val="112000"/>
               </a:lnSpc>
               <a:spcAft>
-                <a:spcPts val="1000"/>
+                <a:spcPts val="900"/>
               </a:spcAft>
               <a:buSzPct val="100000"/>
               <a:buChar char="▸"/>
@@ -3467,21 +9981,107 @@
                 <a:ea typeface="Segoe UI" pitchFamily="34" charset="-122"/>
                 <a:cs typeface="Segoe UI" pitchFamily="34" charset="-120"/>
               </a:rPr>
-              <a:t>Evidence recorded where reviewers can find it</a:t>
+              <a:t>Gate 2: agents sweep every screen so every button, link, and toggle does what it claims or gets removed.</a:t>
             </a:r>
             <a:endParaRPr lang="en-US" sz="1600" dirty="0"/>
           </a:p>
-        </p:txBody>
-      </p:sp>
-      <p:sp>
-        <p:nvSpPr>
-          <p:cNvPr id="7" name="Text 5"/>
-          <p:cNvSpPr/>
-          <p:nvPr/>
-        </p:nvSpPr>
-        <p:spPr>
-          <a:xfrm>
-            <a:off x="10698480" y="6355080"/>
+          <a:p>
+            <a:pPr marL="342900" indent="-342900">
+              <a:lnSpc>
+                <a:spcPct val="112000"/>
+              </a:lnSpc>
+              <a:spcAft>
+                <a:spcPts val="900"/>
+              </a:spcAft>
+              <a:buSzPct val="100000"/>
+              <a:buChar char="▸"/>
+            </a:pPr>
+            <a:r>
+              <a:rPr lang="en-US" sz="1600" dirty="0">
+                <a:solidFill>
+                  <a:srgbClr val="CBD5E1"/>
+                </a:solidFill>
+                <a:latin typeface="Segoe UI" pitchFamily="34" charset="0"/>
+                <a:ea typeface="Segoe UI" pitchFamily="34" charset="-122"/>
+                <a:cs typeface="Segoe UI" pitchFamily="34" charset="-120"/>
+              </a:rPr>
+              <a:t>An interactive element that lies is a bug, full stop - and offline behavior gets checked too.</a:t>
+            </a:r>
+            <a:endParaRPr lang="en-US" sz="1600" dirty="0"/>
+          </a:p>
+        </p:txBody>
+      </p:sp>
+      <p:sp>
+        <p:nvSpPr>
+          <p:cNvPr id="7" name="Shape 5"/>
+          <p:cNvSpPr/>
+          <p:nvPr/>
+        </p:nvSpPr>
+        <p:spPr>
+          <a:xfrm>
+            <a:off x="822960" y="5961888"/>
+            <a:ext cx="10515600" cy="0"/>
+          </a:xfrm>
+          <a:prstGeom prst="line">
+            <a:avLst/>
+          </a:prstGeom>
+          <a:noFill/>
+          <a:ln w="12700">
+            <a:solidFill>
+              <a:srgbClr val="1E2D45"/>
+            </a:solidFill>
+            <a:prstDash val="solid"/>
+          </a:ln>
+        </p:spPr>
+      </p:sp>
+      <p:sp>
+        <p:nvSpPr>
+          <p:cNvPr id="8" name="Text 6"/>
+          <p:cNvSpPr/>
+          <p:nvPr/>
+        </p:nvSpPr>
+        <p:spPr>
+          <a:xfrm>
+            <a:off x="822960" y="6053328"/>
+            <a:ext cx="9692640" cy="457200"/>
+          </a:xfrm>
+          <a:prstGeom prst="rect">
+            <a:avLst/>
+          </a:prstGeom>
+          <a:noFill/>
+          <a:ln/>
+        </p:spPr>
+        <p:txBody>
+          <a:bodyPr wrap="square" rtlCol="0" anchor="ctr"/>
+          <a:lstStyle/>
+          <a:p>
+            <a:pPr indent="0" marL="0">
+              <a:buNone/>
+            </a:pPr>
+            <a:r>
+              <a:rPr lang="en-US" sz="1150" dirty="0">
+                <a:solidFill>
+                  <a:srgbClr val="64748B"/>
+                </a:solidFill>
+                <a:latin typeface="Segoe UI" pitchFamily="34" charset="0"/>
+                <a:ea typeface="Segoe UI" pitchFamily="34" charset="-122"/>
+                <a:cs typeface="Segoe UI" pitchFamily="34" charset="-120"/>
+              </a:rPr>
+              <a:t>One most-important journey, swept screens, zero exceptions.</a:t>
+            </a:r>
+            <a:endParaRPr lang="en-US" sz="1150" dirty="0"/>
+          </a:p>
+        </p:txBody>
+      </p:sp>
+      <p:sp>
+        <p:nvSpPr>
+          <p:cNvPr id="9" name="Text 7"/>
+          <p:cNvSpPr/>
+          <p:nvPr/>
+        </p:nvSpPr>
+        <p:spPr>
+          <a:xfrm>
+            <a:off x="10698480" y="6382512"/>
             <a:ext cx="1188720" cy="365760"/>
           </a:xfrm>
           <a:prstGeom prst="rect">
@@ -3506,7 +10106,7 @@
                 <a:ea typeface="Consolas" pitchFamily="34" charset="-122"/>
                 <a:cs typeface="Consolas" pitchFamily="34" charset="-120"/>
               </a:rPr>
-              <a:t>7 / 8</a:t>
+              <a:t>7 / 14</a:t>
             </a:r>
             <a:endParaRPr lang="en-US" sz="1000" dirty="0"/>
           </a:p>
@@ -3592,8 +10192,8 @@
         </p:nvSpPr>
         <p:spPr>
           <a:xfrm>
-            <a:off x="822960" y="1554480"/>
-            <a:ext cx="10515600" cy="457200"/>
+            <a:off x="822960" y="502920"/>
+            <a:ext cx="10515600" cy="365760"/>
           </a:xfrm>
           <a:prstGeom prst="rect">
             <a:avLst/>
@@ -3609,7 +10209,7 @@
               <a:buNone/>
             </a:pPr>
             <a:r>
-              <a:rPr lang="en-US" sz="1400" spc="400" kern="0" dirty="0">
+              <a:rPr lang="en-US" sz="1200" spc="300" kern="0" dirty="0">
                 <a:solidFill>
                   <a:srgbClr val="06B6D4"/>
                 </a:solidFill>
@@ -3617,9 +10217,9 @@
                 <a:ea typeface="Consolas" pitchFamily="34" charset="-122"/>
                 <a:cs typeface="Consolas" pitchFamily="34" charset="-120"/>
               </a:rPr>
-              <a:t>TAKEAWAY</a:t>
-            </a:r>
-            <a:endParaRPr lang="en-US" sz="1400" dirty="0"/>
+              <a:t>GATE 2 IN NUMBERS</a:t>
+            </a:r>
+            <a:endParaRPr lang="en-US" sz="1200" dirty="0"/>
           </a:p>
         </p:txBody>
       </p:sp>
@@ -3631,8 +10231,8 @@
         </p:nvSpPr>
         <p:spPr>
           <a:xfrm>
-            <a:off x="822960" y="2286000"/>
-            <a:ext cx="10515600" cy="1737360"/>
+            <a:off x="822960" y="914400"/>
+            <a:ext cx="10561320" cy="868680"/>
           </a:xfrm>
           <a:prstGeom prst="rect">
             <a:avLst/>
@@ -3648,7 +10248,7 @@
               <a:buNone/>
             </a:pPr>
             <a:r>
-              <a:rPr lang="en-US" sz="4400" b="1" dirty="0">
+              <a:rPr lang="en-US" sz="2700" b="1" dirty="0">
                 <a:solidFill>
                   <a:srgbClr val="FFFFFF"/>
                 </a:solidFill>
@@ -3656,22 +10256,61 @@
                 <a:ea typeface="Segoe UI" pitchFamily="34" charset="-122"/>
                 <a:cs typeface="Segoe UI" pitchFamily="34" charset="-120"/>
               </a:rPr>
-              <a:t>Make honesty cheaper than lying</a:t>
-            </a:r>
-            <a:endParaRPr lang="en-US" sz="4400" dirty="0"/>
-          </a:p>
-        </p:txBody>
-      </p:sp>
-      <p:sp>
-        <p:nvSpPr>
-          <p:cNvPr id="6" name="Text 4"/>
-          <p:cNvSpPr/>
-          <p:nvPr/>
-        </p:nvSpPr>
-        <p:spPr>
-          <a:xfrm>
-            <a:off x="822960" y="4206240"/>
-            <a:ext cx="10515600" cy="914400"/>
+              <a:t>What a dead-button sweep actually catches</a:t>
+            </a:r>
+            <a:endParaRPr lang="en-US" sz="2700" dirty="0"/>
+          </a:p>
+        </p:txBody>
+      </p:sp>
+      <p:graphicFrame>
+        <p:nvGraphicFramePr>
+          <p:cNvPr id="6" name="Chart 0" descr=""/>
+          <p:cNvGraphicFramePr/>
+          <p:nvPr/>
+        </p:nvGraphicFramePr>
+        <p:xfrm>
+          <a:off x="822960" y="1874520"/>
+          <a:ext cx="10515600" cy="3337560"/>
+        </p:xfrm>
+        <a:graphic xmlns:a="http://schemas.openxmlformats.org/drawingml/2006/main">
+          <a:graphicData uri="http://schemas.openxmlformats.org/drawingml/2006/chart">
+            <c:chart xmlns:c="http://schemas.openxmlformats.org/drawingml/2006/chart" r:id="rId1"/>
+          </a:graphicData>
+        </a:graphic>
+      </p:graphicFrame>
+      <p:sp>
+        <p:nvSpPr>
+          <p:cNvPr id="7" name="Shape 4"/>
+          <p:cNvSpPr/>
+          <p:nvPr/>
+        </p:nvSpPr>
+        <p:spPr>
+          <a:xfrm>
+            <a:off x="822960" y="5413248"/>
+            <a:ext cx="10515600" cy="0"/>
+          </a:xfrm>
+          <a:prstGeom prst="line">
+            <a:avLst/>
+          </a:prstGeom>
+          <a:noFill/>
+          <a:ln w="12700">
+            <a:solidFill>
+              <a:srgbClr val="1E2D45"/>
+            </a:solidFill>
+            <a:prstDash val="solid"/>
+          </a:ln>
+        </p:spPr>
+      </p:sp>
+      <p:sp>
+        <p:nvSpPr>
+          <p:cNvPr id="8" name="Text 5"/>
+          <p:cNvSpPr/>
+          <p:nvPr/>
+        </p:nvSpPr>
+        <p:spPr>
+          <a:xfrm>
+            <a:off x="822960" y="5504688"/>
+            <a:ext cx="10424160" cy="411480"/>
           </a:xfrm>
           <a:prstGeom prst="rect">
             <a:avLst/>
@@ -3687,29 +10326,91 @@
               <a:buNone/>
             </a:pPr>
             <a:r>
-              <a:rPr lang="en-US" sz="1600" dirty="0">
-                <a:solidFill>
-                  <a:srgbClr val="94A3B8"/>
+              <a:rPr lang="en-US" sz="1300" i="1" dirty="0">
+                <a:solidFill>
+                  <a:srgbClr val="06B6D4"/>
                 </a:solidFill>
                 <a:latin typeface="Segoe UI" pitchFamily="34" charset="0"/>
                 <a:ea typeface="Segoe UI" pitchFamily="34" charset="-122"/>
                 <a:cs typeface="Segoe UI" pitchFamily="34" charset="-120"/>
               </a:rPr>
-              <a:t>Design the system so the easy path and the correct path are the same path. · rezalianvatiady.github.io</a:t>
-            </a:r>
-            <a:endParaRPr lang="en-US" sz="1600" dirty="0"/>
-          </a:p>
-        </p:txBody>
-      </p:sp>
-      <p:sp>
-        <p:nvSpPr>
-          <p:cNvPr id="7" name="Text 5"/>
-          <p:cNvSpPr/>
-          <p:nvPr/>
-        </p:nvSpPr>
-        <p:spPr>
-          <a:xfrm>
-            <a:off x="10698480" y="6355080"/>
+              <a:t>→  The most common finding is an element that renders perfectly and does nothing - invisible to a passing test suite, obvious to a sweep.</a:t>
+            </a:r>
+            <a:endParaRPr lang="en-US" sz="1300" dirty="0"/>
+          </a:p>
+        </p:txBody>
+      </p:sp>
+      <p:sp>
+        <p:nvSpPr>
+          <p:cNvPr id="9" name="Shape 6"/>
+          <p:cNvSpPr/>
+          <p:nvPr/>
+        </p:nvSpPr>
+        <p:spPr>
+          <a:xfrm>
+            <a:off x="822960" y="5961888"/>
+            <a:ext cx="10515600" cy="0"/>
+          </a:xfrm>
+          <a:prstGeom prst="line">
+            <a:avLst/>
+          </a:prstGeom>
+          <a:noFill/>
+          <a:ln w="12700">
+            <a:solidFill>
+              <a:srgbClr val="1E2D45"/>
+            </a:solidFill>
+            <a:prstDash val="solid"/>
+          </a:ln>
+        </p:spPr>
+      </p:sp>
+      <p:sp>
+        <p:nvSpPr>
+          <p:cNvPr id="10" name="Text 7"/>
+          <p:cNvSpPr/>
+          <p:nvPr/>
+        </p:nvSpPr>
+        <p:spPr>
+          <a:xfrm>
+            <a:off x="822960" y="6053328"/>
+            <a:ext cx="9692640" cy="457200"/>
+          </a:xfrm>
+          <a:prstGeom prst="rect">
+            <a:avLst/>
+          </a:prstGeom>
+          <a:noFill/>
+          <a:ln/>
+        </p:spPr>
+        <p:txBody>
+          <a:bodyPr wrap="square" rtlCol="0" anchor="ctr"/>
+          <a:lstStyle/>
+          <a:p>
+            <a:pPr indent="0" marL="0">
+              <a:buNone/>
+            </a:pPr>
+            <a:r>
+              <a:rPr lang="en-US" sz="1150" dirty="0">
+                <a:solidFill>
+                  <a:srgbClr val="64748B"/>
+                </a:solidFill>
+                <a:latin typeface="Segoe UI" pitchFamily="34" charset="0"/>
+                <a:ea typeface="Segoe UI" pitchFamily="34" charset="-122"/>
+                <a:cs typeface="Segoe UI" pitchFamily="34" charset="-120"/>
+              </a:rPr>
+              <a:t>Illustrative incident mix consistent with agent screen sweeps across 30+ apps.</a:t>
+            </a:r>
+            <a:endParaRPr lang="en-US" sz="1150" dirty="0"/>
+          </a:p>
+        </p:txBody>
+      </p:sp>
+      <p:sp>
+        <p:nvSpPr>
+          <p:cNvPr id="11" name="Text 8"/>
+          <p:cNvSpPr/>
+          <p:nvPr/>
+        </p:nvSpPr>
+        <p:spPr>
+          <a:xfrm>
+            <a:off x="10698480" y="6382512"/>
             <a:ext cx="1188720" cy="365760"/>
           </a:xfrm>
           <a:prstGeom prst="rect">
@@ -3734,7 +10435,376 @@
                 <a:ea typeface="Consolas" pitchFamily="34" charset="-122"/>
                 <a:cs typeface="Consolas" pitchFamily="34" charset="-120"/>
               </a:rPr>
-              <a:t>8 / 8</a:t>
+              <a:t>8 / 14</a:t>
+            </a:r>
+            <a:endParaRPr lang="en-US" sz="1000" dirty="0"/>
+          </a:p>
+        </p:txBody>
+      </p:sp>
+    </p:spTree>
+  </p:cSld>
+  <p:clrMapOvr>
+    <a:masterClrMapping/>
+  </p:clrMapOvr>
+</p:sld>
+</file>
+
+<file path=ppt/slides/slide9.xml><?xml version="1.0" encoding="utf-8"?>
+<p:sld xmlns:a="http://schemas.openxmlformats.org/drawingml/2006/main" xmlns:r="http://schemas.openxmlformats.org/officeDocument/2006/relationships" xmlns:p="http://schemas.openxmlformats.org/presentationml/2006/main">
+  <p:cSld name="Slide 9">
+    <p:bg>
+      <p:bgPr>
+        <a:solidFill>
+          <a:srgbClr val="0A0C12"/>
+        </a:solidFill>
+      </p:bgPr>
+    </p:bg>
+    <p:spTree>
+      <p:nvGrpSpPr>
+        <p:cNvPr id="1" name=""/>
+        <p:cNvGrpSpPr/>
+        <p:nvPr/>
+      </p:nvGrpSpPr>
+      <p:grpSpPr>
+        <a:xfrm>
+          <a:off x="0" y="0"/>
+          <a:ext cx="0" cy="0"/>
+          <a:chOff x="0" y="0"/>
+          <a:chExt cx="0" cy="0"/>
+        </a:xfrm>
+      </p:grpSpPr>
+      <p:sp>
+        <p:nvSpPr>
+          <p:cNvPr id="2" name="Shape 0"/>
+          <p:cNvSpPr/>
+          <p:nvPr/>
+        </p:nvSpPr>
+        <p:spPr>
+          <a:xfrm>
+            <a:off x="0" y="0"/>
+            <a:ext cx="7680960" cy="64008"/>
+          </a:xfrm>
+          <a:prstGeom prst="rect">
+            <a:avLst/>
+          </a:prstGeom>
+          <a:solidFill>
+            <a:srgbClr val="3B82F6"/>
+          </a:solidFill>
+          <a:ln/>
+        </p:spPr>
+      </p:sp>
+      <p:sp>
+        <p:nvSpPr>
+          <p:cNvPr id="3" name="Shape 1"/>
+          <p:cNvSpPr/>
+          <p:nvPr/>
+        </p:nvSpPr>
+        <p:spPr>
+          <a:xfrm>
+            <a:off x="7680960" y="0"/>
+            <a:ext cx="4510735" cy="64008"/>
+          </a:xfrm>
+          <a:prstGeom prst="rect">
+            <a:avLst/>
+          </a:prstGeom>
+          <a:solidFill>
+            <a:srgbClr val="06B6D4"/>
+          </a:solidFill>
+          <a:ln/>
+        </p:spPr>
+      </p:sp>
+      <p:sp>
+        <p:nvSpPr>
+          <p:cNvPr id="4" name="Text 2"/>
+          <p:cNvSpPr/>
+          <p:nvPr/>
+        </p:nvSpPr>
+        <p:spPr>
+          <a:xfrm>
+            <a:off x="822960" y="502920"/>
+            <a:ext cx="10515600" cy="365760"/>
+          </a:xfrm>
+          <a:prstGeom prst="rect">
+            <a:avLst/>
+          </a:prstGeom>
+          <a:noFill/>
+          <a:ln/>
+        </p:spPr>
+        <p:txBody>
+          <a:bodyPr wrap="square" rtlCol="0" anchor="ctr"/>
+          <a:lstStyle/>
+          <a:p>
+            <a:pPr indent="0" marL="0">
+              <a:buNone/>
+            </a:pPr>
+            <a:r>
+              <a:rPr lang="en-US" sz="1200" spc="300" kern="0" dirty="0">
+                <a:solidFill>
+                  <a:srgbClr val="06B6D4"/>
+                </a:solidFill>
+                <a:latin typeface="Consolas" pitchFamily="34" charset="0"/>
+                <a:ea typeface="Consolas" pitchFamily="34" charset="-122"/>
+                <a:cs typeface="Consolas" pitchFamily="34" charset="-120"/>
+              </a:rPr>
+              <a:t>GATES 3 &amp; 4</a:t>
+            </a:r>
+            <a:endParaRPr lang="en-US" sz="1200" dirty="0"/>
+          </a:p>
+        </p:txBody>
+      </p:sp>
+      <p:sp>
+        <p:nvSpPr>
+          <p:cNvPr id="5" name="Text 3"/>
+          <p:cNvSpPr/>
+          <p:nvPr/>
+        </p:nvSpPr>
+        <p:spPr>
+          <a:xfrm>
+            <a:off x="822960" y="914400"/>
+            <a:ext cx="10561320" cy="868680"/>
+          </a:xfrm>
+          <a:prstGeom prst="rect">
+            <a:avLst/>
+          </a:prstGeom>
+          <a:noFill/>
+          <a:ln/>
+        </p:spPr>
+        <p:txBody>
+          <a:bodyPr wrap="square" rtlCol="0" anchor="ctr"/>
+          <a:lstStyle/>
+          <a:p>
+            <a:pPr indent="0" marL="0">
+              <a:buNone/>
+            </a:pPr>
+            <a:r>
+              <a:rPr lang="en-US" sz="2700" b="1" dirty="0">
+                <a:solidFill>
+                  <a:srgbClr val="FFFFFF"/>
+                </a:solidFill>
+                <a:latin typeface="Segoe UI" pitchFamily="34" charset="0"/>
+                <a:ea typeface="Segoe UI" pitchFamily="34" charset="-122"/>
+                <a:cs typeface="Segoe UI" pitchFamily="34" charset="-120"/>
+              </a:rPr>
+              <a:t>Version-and-backup and physical evidence</a:t>
+            </a:r>
+            <a:endParaRPr lang="en-US" sz="2700" dirty="0"/>
+          </a:p>
+        </p:txBody>
+      </p:sp>
+      <p:sp>
+        <p:nvSpPr>
+          <p:cNvPr id="6" name="Text 4"/>
+          <p:cNvSpPr/>
+          <p:nvPr/>
+        </p:nvSpPr>
+        <p:spPr>
+          <a:xfrm>
+            <a:off x="868680" y="2011680"/>
+            <a:ext cx="10424160" cy="3566160"/>
+          </a:xfrm>
+          <a:prstGeom prst="rect">
+            <a:avLst/>
+          </a:prstGeom>
+          <a:noFill/>
+          <a:ln/>
+        </p:spPr>
+        <p:txBody>
+          <a:bodyPr wrap="square" rtlCol="0" anchor="t"/>
+          <a:lstStyle/>
+          <a:p>
+            <a:pPr marL="342900" indent="-342900">
+              <a:lnSpc>
+                <a:spcPct val="112000"/>
+              </a:lnSpc>
+              <a:spcAft>
+                <a:spcPts val="900"/>
+              </a:spcAft>
+              <a:buSzPct val="100000"/>
+              <a:buChar char="▸"/>
+            </a:pPr>
+            <a:r>
+              <a:rPr lang="en-US" sz="1600" dirty="0">
+                <a:solidFill>
+                  <a:srgbClr val="CBD5E1"/>
+                </a:solidFill>
+                <a:latin typeface="Segoe UI" pitchFamily="34" charset="0"/>
+                <a:ea typeface="Segoe UI" pitchFamily="34" charset="-122"/>
+                <a:cs typeface="Segoe UI" pitchFamily="34" charset="-120"/>
+              </a:rPr>
+              <a:t>Gate 3: no release without a version increment, and the previous version is archived before the new one ships.</a:t>
+            </a:r>
+            <a:endParaRPr lang="en-US" sz="1600" dirty="0"/>
+          </a:p>
+          <a:p>
+            <a:pPr marL="342900" indent="-342900">
+              <a:lnSpc>
+                <a:spcPct val="112000"/>
+              </a:lnSpc>
+              <a:spcAft>
+                <a:spcPts val="900"/>
+              </a:spcAft>
+              <a:buSzPct val="100000"/>
+              <a:buChar char="▸"/>
+            </a:pPr>
+            <a:r>
+              <a:rPr lang="en-US" sz="1600" dirty="0">
+                <a:solidFill>
+                  <a:srgbClr val="CBD5E1"/>
+                </a:solidFill>
+                <a:latin typeface="Segoe UI" pitchFamily="34" charset="0"/>
+                <a:ea typeface="Segoe UI" pitchFamily="34" charset="-122"/>
+                <a:cs typeface="Segoe UI" pitchFamily="34" charset="-120"/>
+              </a:rPr>
+              <a:t>Rollback is a normal Tuesday, not an emergency - this one rule has saved more projects than any clever architecture.</a:t>
+            </a:r>
+            <a:endParaRPr lang="en-US" sz="1600" dirty="0"/>
+          </a:p>
+          <a:p>
+            <a:pPr marL="342900" indent="-342900">
+              <a:lnSpc>
+                <a:spcPct val="112000"/>
+              </a:lnSpc>
+              <a:spcAft>
+                <a:spcPts val="900"/>
+              </a:spcAft>
+              <a:buSzPct val="100000"/>
+              <a:buChar char="▸"/>
+            </a:pPr>
+            <a:r>
+              <a:rPr lang="en-US" sz="1600" dirty="0">
+                <a:solidFill>
+                  <a:srgbClr val="CBD5E1"/>
+                </a:solidFill>
+                <a:latin typeface="Segoe UI" pitchFamily="34" charset="0"/>
+                <a:ea typeface="Segoe UI" pitchFamily="34" charset="-122"/>
+                <a:cs typeface="Segoe UI" pitchFamily="34" charset="-120"/>
+              </a:rPr>
+              <a:t>Gate 4: passing means a log, a file, a screenshot, or a marker - something a stranger could audit.</a:t>
+            </a:r>
+            <a:endParaRPr lang="en-US" sz="1600" dirty="0"/>
+          </a:p>
+          <a:p>
+            <a:pPr marL="342900" indent="-342900">
+              <a:lnSpc>
+                <a:spcPct val="112000"/>
+              </a:lnSpc>
+              <a:spcAft>
+                <a:spcPts val="900"/>
+              </a:spcAft>
+              <a:buSzPct val="100000"/>
+              <a:buChar char="▸"/>
+            </a:pPr>
+            <a:r>
+              <a:rPr lang="en-US" sz="1600" dirty="0">
+                <a:solidFill>
+                  <a:srgbClr val="CBD5E1"/>
+                </a:solidFill>
+                <a:latin typeface="Segoe UI" pitchFamily="34" charset="0"/>
+                <a:ea typeface="Segoe UI" pitchFamily="34" charset="-122"/>
+                <a:cs typeface="Segoe UI" pitchFamily="34" charset="-120"/>
+              </a:rPr>
+              <a:t>A status field is not evidence; agents behave differently when they know someone will check the artifacts.</a:t>
+            </a:r>
+            <a:endParaRPr lang="en-US" sz="1600" dirty="0"/>
+          </a:p>
+        </p:txBody>
+      </p:sp>
+      <p:sp>
+        <p:nvSpPr>
+          <p:cNvPr id="7" name="Shape 5"/>
+          <p:cNvSpPr/>
+          <p:nvPr/>
+        </p:nvSpPr>
+        <p:spPr>
+          <a:xfrm>
+            <a:off x="822960" y="5961888"/>
+            <a:ext cx="10515600" cy="0"/>
+          </a:xfrm>
+          <a:prstGeom prst="line">
+            <a:avLst/>
+          </a:prstGeom>
+          <a:noFill/>
+          <a:ln w="12700">
+            <a:solidFill>
+              <a:srgbClr val="1E2D45"/>
+            </a:solidFill>
+            <a:prstDash val="solid"/>
+          </a:ln>
+        </p:spPr>
+      </p:sp>
+      <p:sp>
+        <p:nvSpPr>
+          <p:cNvPr id="8" name="Text 6"/>
+          <p:cNvSpPr/>
+          <p:nvPr/>
+        </p:nvSpPr>
+        <p:spPr>
+          <a:xfrm>
+            <a:off x="822960" y="6053328"/>
+            <a:ext cx="9692640" cy="457200"/>
+          </a:xfrm>
+          <a:prstGeom prst="rect">
+            <a:avLst/>
+          </a:prstGeom>
+          <a:noFill/>
+          <a:ln/>
+        </p:spPr>
+        <p:txBody>
+          <a:bodyPr wrap="square" rtlCol="0" anchor="ctr"/>
+          <a:lstStyle/>
+          <a:p>
+            <a:pPr indent="0" marL="0">
+              <a:buNone/>
+            </a:pPr>
+            <a:r>
+              <a:rPr lang="en-US" sz="1150" dirty="0">
+                <a:solidFill>
+                  <a:srgbClr val="64748B"/>
+                </a:solidFill>
+                <a:latin typeface="Segoe UI" pitchFamily="34" charset="0"/>
+                <a:ea typeface="Segoe UI" pitchFamily="34" charset="-122"/>
+                <a:cs typeface="Segoe UI" pitchFamily="34" charset="-120"/>
+              </a:rPr>
+              <a:t>Archive first, promote second - the previous version is always one step away.</a:t>
+            </a:r>
+            <a:endParaRPr lang="en-US" sz="1150" dirty="0"/>
+          </a:p>
+        </p:txBody>
+      </p:sp>
+      <p:sp>
+        <p:nvSpPr>
+          <p:cNvPr id="9" name="Text 7"/>
+          <p:cNvSpPr/>
+          <p:nvPr/>
+        </p:nvSpPr>
+        <p:spPr>
+          <a:xfrm>
+            <a:off x="10698480" y="6382512"/>
+            <a:ext cx="1188720" cy="365760"/>
+          </a:xfrm>
+          <a:prstGeom prst="rect">
+            <a:avLst/>
+          </a:prstGeom>
+          <a:noFill/>
+          <a:ln/>
+        </p:spPr>
+        <p:txBody>
+          <a:bodyPr wrap="square" rtlCol="0" anchor="ctr"/>
+          <a:lstStyle/>
+          <a:p>
+            <a:pPr algn="r" indent="0" marL="0">
+              <a:buNone/>
+            </a:pPr>
+            <a:r>
+              <a:rPr lang="en-US" sz="1000" dirty="0">
+                <a:solidFill>
+                  <a:srgbClr val="64748B"/>
+                </a:solidFill>
+                <a:latin typeface="Consolas" pitchFamily="34" charset="0"/>
+                <a:ea typeface="Consolas" pitchFamily="34" charset="-122"/>
+                <a:cs typeface="Consolas" pitchFamily="34" charset="-120"/>
+              </a:rPr>
+              <a:t>9 / 14</a:t>
             </a:r>
             <a:endParaRPr lang="en-US" sz="1000" dirty="0"/>
           </a:p>

--- a/decks/quality-gates.pptx
+++ b/decks/quality-gates.pptx
@@ -160,7 +160,7 @@
               <a:lstStyle/>
               <a:p>
                 <a:pPr>
-                  <a:defRPr b="0" i="0" strike="noStrike" sz="1000" u="none">
+                  <a:defRPr b="0" i="0" strike="noStrike" sz="1800" u="none">
                     <a:solidFill>
                       <a:srgbClr val="E2E8F0"/>
                     </a:solidFill>
@@ -289,7 +289,7 @@
             <a:lstStyle/>
             <a:p>
               <a:pPr>
-                <a:defRPr b="0" i="0" strike="noStrike" sz="1000" u="none">
+                <a:defRPr b="0" i="0" strike="noStrike" sz="1800" u="none">
                   <a:solidFill>
                     <a:srgbClr val="E2E8F0"/>
                   </a:solidFill>
@@ -337,7 +337,7 @@
           <a:lstStyle/>
           <a:p>
             <a:pPr>
-              <a:defRPr sz="1100" b="0" i="0" u="none" strike="noStrike">
+              <a:defRPr sz="1800" b="0" i="0" u="none" strike="noStrike">
                 <a:solidFill>
                   <a:srgbClr val="94A3B8"/>
                 </a:solidFill>
@@ -357,6 +357,7 @@
         <c:axId val="2094734552"/>
         <c:scaling>
           <c:orientation val="minMax"/>
+          <c:min val="0"/>
         </c:scaling>
         <c:delete val="0"/>
         <c:axPos val="l"/>
@@ -389,7 +390,7 @@
           <a:lstStyle/>
           <a:p>
             <a:pPr>
-              <a:defRPr sz="1000" b="0" i="0" u="none" strike="noStrike">
+              <a:defRPr sz="1800" b="0" i="0" u="none" strike="noStrike">
                 <a:solidFill>
                   <a:srgbClr val="94A3B8"/>
                 </a:solidFill>
@@ -749,7 +750,7 @@
           <a:lstStyle/>
           <a:p>
             <a:pPr>
-              <a:defRPr sz="1100" b="0" i="0" u="none" strike="noStrike">
+              <a:defRPr sz="1800" b="0" i="0" u="none" strike="noStrike">
                 <a:solidFill>
                   <a:srgbClr val="94A3B8"/>
                 </a:solidFill>
@@ -769,6 +770,7 @@
         <c:axId val="2094734552"/>
         <c:scaling>
           <c:orientation val="minMax"/>
+          <c:min val="0"/>
         </c:scaling>
         <c:delete val="0"/>
         <c:axPos val="l"/>
@@ -801,7 +803,7 @@
           <a:lstStyle/>
           <a:p>
             <a:pPr>
-              <a:defRPr sz="1000" b="0" i="0" u="none" strike="noStrike">
+              <a:defRPr sz="1800" b="0" i="0" u="none" strike="noStrike">
                 <a:solidFill>
                   <a:srgbClr val="94A3B8"/>
                 </a:solidFill>
@@ -833,7 +835,7 @@
         <a:lstStyle/>
         <a:p>
           <a:pPr>
-            <a:defRPr sz="1100">
+            <a:defRPr sz="1800">
               <a:solidFill>
                 <a:srgbClr val="CBD5E1"/>
               </a:solidFill>
@@ -952,7 +954,7 @@
                 <a:lstStyle/>
                 <a:p>
                   <a:pPr>
-                    <a:defRPr sz="1000" b="0" i="0" u="none" strike="noStrike">
+                    <a:defRPr sz="1800" b="0" i="0" u="none" strike="noStrike">
                       <a:solidFill>
                         <a:srgbClr val="E2E8F0"/>
                       </a:solidFill>
@@ -977,7 +979,7 @@
                 <a:lstStyle/>
                 <a:p>
                   <a:pPr>
-                    <a:defRPr sz="1000" b="0" i="0" u="none" strike="noStrike">
+                    <a:defRPr sz="1800" b="0" i="0" u="none" strike="noStrike">
                       <a:solidFill>
                         <a:srgbClr val="E2E8F0"/>
                       </a:solidFill>
@@ -1002,7 +1004,7 @@
                 <a:lstStyle/>
                 <a:p>
                   <a:pPr>
-                    <a:defRPr sz="1000" b="0" i="0" u="none" strike="noStrike">
+                    <a:defRPr sz="1800" b="0" i="0" u="none" strike="noStrike">
                       <a:solidFill>
                         <a:srgbClr val="E2E8F0"/>
                       </a:solidFill>
@@ -1027,7 +1029,7 @@
                 <a:lstStyle/>
                 <a:p>
                   <a:pPr>
-                    <a:defRPr sz="1000" b="0" i="0" u="none" strike="noStrike">
+                    <a:defRPr sz="1800" b="0" i="0" u="none" strike="noStrike">
                       <a:solidFill>
                         <a:srgbClr val="E2E8F0"/>
                       </a:solidFill>
@@ -1108,7 +1110,7 @@
           </c:val>
         </c:ser>
         <c:firstSliceAng val="0"/>
-        <c:holeSize val="62"/>
+        <c:holeSize val="60"/>
       </c:doughnutChart>
       <c:spPr>
         <a:solidFill>
@@ -1128,7 +1130,7 @@
         <a:lstStyle/>
         <a:p>
           <a:pPr>
-            <a:defRPr sz="1100">
+            <a:defRPr sz="1800">
               <a:solidFill>
                 <a:srgbClr val="CBD5E1"/>
               </a:solidFill>
@@ -1555,7 +1557,7 @@
           <a:p>
             <a:r>
               <a:rPr lang="en-US" dirty="0"/>
-              <a:t/>
+              <a:t>Opening: introduce yourself and this deck, "Quality Gates for AI-Generated Software". | Transition: next up - "What this deck covers".</a:t>
             </a:r>
             <a:endParaRPr lang="en-US" dirty="0"/>
           </a:p>
@@ -1643,7 +1645,7 @@
           <a:p>
             <a:r>
               <a:rPr lang="en-US" dirty="0"/>
-              <a:t/>
+              <a:t>Key message: Gates front-load the pain, then the escapes go to zero | Insight: Early releases catch the most, and escapes trend to zero as specs and sweeps mature - the gate gets smarter with every run. | Talk track: Illustrative trend for one app's first six gated releases; the point is the direction, not the decimals. | Transition: next up - "Speed without gates versus speed with gates".</a:t>
             </a:r>
             <a:endParaRPr lang="en-US" dirty="0"/>
           </a:p>
@@ -1731,7 +1733,7 @@
           <a:p>
             <a:r>
               <a:rPr lang="en-US" dirty="0"/>
-              <a:t/>
+              <a:t>Key message: Speed without gates versus speed with gates | Talk track: Same speed, opposite trajectory - the gates decide which one you get. | Transition: next up - "Where QA agent time goes on each release".</a:t>
             </a:r>
             <a:endParaRPr lang="en-US" dirty="0"/>
           </a:p>
@@ -1819,7 +1821,7 @@
           <a:p>
             <a:r>
               <a:rPr lang="en-US" dirty="0"/>
-              <a:t/>
+              <a:t>Key message: Where QA agent time goes on each release | Insight: Most QA effort is systematic sweeping - repeatable work agents do reliably, which is why the discipline actually happens every release. | Talk track: Illustrative effort split across the four gates for a routine release. | Transition: next up - "A gate that cannot stop traffic is not a gate".</a:t>
             </a:r>
             <a:endParaRPr lang="en-US" dirty="0"/>
           </a:p>
@@ -1907,7 +1909,7 @@
           <a:p>
             <a:r>
               <a:rPr lang="en-US" dirty="0"/>
-              <a:t/>
+              <a:t>Key message: A gate that cannot stop traffic is not a gate | Talk track: Make honesty cheaper than lying, and the easy path becomes the correct path. | Transition: next up - "Ship fast without shipping junk".</a:t>
             </a:r>
             <a:endParaRPr lang="en-US" dirty="0"/>
           </a:p>
@@ -1995,7 +1997,7 @@
           <a:p>
             <a:r>
               <a:rPr lang="en-US" dirty="0"/>
-              <a:t/>
+              <a:t>Key message: Ship fast without shipping junk | Transition: close with the call to action on the contact slide, invite questions.</a:t>
             </a:r>
             <a:endParaRPr lang="en-US" dirty="0"/>
           </a:p>
@@ -2083,7 +2085,7 @@
           <a:p>
             <a:r>
               <a:rPr lang="en-US" dirty="0"/>
-              <a:t/>
+              <a:t>Key message: What this deck covers | Agenda: The risk: machine-speed code without machine-speed judgment; Four gates, defined operationally with pass conditions and evidence; How the gates run inside the build-gate-promote-record pipeline; What enforcement looks like when a gate fails; What this buys: 30+ apps shipped, updated, and supported | Transition: next up - "AI writes code at machine speed - and debt at machine pace".</a:t>
             </a:r>
             <a:endParaRPr lang="en-US" dirty="0"/>
           </a:p>
@@ -2171,7 +2173,7 @@
           <a:p>
             <a:r>
               <a:rPr lang="en-US" dirty="0"/>
-              <a:t/>
+              <a:t>Key message: AI writes code at machine speed - and debt at machine pace | Talk track: Unreviewed speed is technical debt at machine pace. | Transition: next up - "The system the gates protect".</a:t>
             </a:r>
             <a:endParaRPr lang="en-US" dirty="0"/>
           </a:p>
@@ -2259,7 +2261,7 @@
           <a:p>
             <a:r>
               <a:rPr lang="en-US" dirty="0"/>
-              <a:t/>
+              <a:t>Key message: The system the gates protect | Talk track: Numbers from the public portfolio and published build logs. | Transition: next up - "Where the gates sit: build, gate, promote, record".</a:t>
             </a:r>
             <a:endParaRPr lang="en-US" dirty="0"/>
           </a:p>
@@ -2347,7 +2349,7 @@
           <a:p>
             <a:r>
               <a:rPr lang="en-US" dirty="0"/>
-              <a:t/>
+              <a:t>Key message: Where the gates sit: build, gate, promote, record | Talk track: With 30+ apps you do not maintain apps - you maintain the pipeline. | Transition: next up - "Four gates, defined operationally".</a:t>
             </a:r>
             <a:endParaRPr lang="en-US" dirty="0"/>
           </a:p>
@@ -2435,7 +2437,7 @@
           <a:p>
             <a:r>
               <a:rPr lang="en-US" dirty="0"/>
-              <a:t/>
+              <a:t>Key message: Four gates, defined operationally | Talk track: A status field is not evidence - the artifact is what makes the pass auditable. | Transition: next up - "The golden path and the dead-button sweep".</a:t>
             </a:r>
             <a:endParaRPr lang="en-US" dirty="0"/>
           </a:p>
@@ -2523,7 +2525,7 @@
           <a:p>
             <a:r>
               <a:rPr lang="en-US" dirty="0"/>
-              <a:t/>
+              <a:t>Key message: The golden path and the dead-button sweep | Talk track: One most-important journey, swept screens, zero exceptions. | Transition: next up - "What a dead-button sweep actually catches".</a:t>
             </a:r>
             <a:endParaRPr lang="en-US" dirty="0"/>
           </a:p>
@@ -2611,7 +2613,7 @@
           <a:p>
             <a:r>
               <a:rPr lang="en-US" dirty="0"/>
-              <a:t/>
+              <a:t>Key message: What a dead-button sweep actually catches | Insight: The most common finding is an element that renders perfectly and does nothing - invisible to a passing test suite, obvious to a sweep. | Talk track: Illustrative incident mix consistent with agent screen sweeps across 30+ apps. | Transition: next up - "Version-and-backup and physical evidence".</a:t>
             </a:r>
             <a:endParaRPr lang="en-US" dirty="0"/>
           </a:p>
@@ -2699,7 +2701,7 @@
           <a:p>
             <a:r>
               <a:rPr lang="en-US" dirty="0"/>
-              <a:t/>
+              <a:t>Key message: Version-and-backup and physical evidence | Talk track: Archive first, promote second - the previous version is always one step away. | Transition: next up - "Gates front-load the pain, then the escapes go to zero".</a:t>
             </a:r>
             <a:endParaRPr lang="en-US" dirty="0"/>
           </a:p>
@@ -3120,7 +3122,7 @@
         </p:nvSpPr>
         <p:spPr>
           <a:xfrm>
-            <a:off x="822960" y="1783080"/>
+            <a:off x="822960" y="1737360"/>
             <a:ext cx="10515600" cy="457200"/>
           </a:xfrm>
           <a:prstGeom prst="rect">
@@ -3137,7 +3139,7 @@
               <a:buNone/>
             </a:pPr>
             <a:r>
-              <a:rPr lang="en-US" sz="1400" spc="400" kern="0" dirty="0">
+              <a:rPr lang="en-US" sz="1800" spc="400" kern="0" dirty="0">
                 <a:solidFill>
                   <a:srgbClr val="06B6D4"/>
                 </a:solidFill>
@@ -3147,7 +3149,7 @@
               </a:rPr>
               <a:t>ZALIN PLATFORM · QUALITY ENGINEERING</a:t>
             </a:r>
-            <a:endParaRPr lang="en-US" sz="1400" dirty="0"/>
+            <a:endParaRPr lang="en-US" sz="1800" dirty="0"/>
           </a:p>
         </p:txBody>
       </p:sp>
@@ -3159,7 +3161,7 @@
         </p:nvSpPr>
         <p:spPr>
           <a:xfrm>
-            <a:off x="822960" y="2286000"/>
+            <a:off x="822960" y="2240280"/>
             <a:ext cx="10607040" cy="1691640"/>
           </a:xfrm>
           <a:prstGeom prst="rect">
@@ -3198,8 +3200,8 @@
         </p:nvSpPr>
         <p:spPr>
           <a:xfrm>
-            <a:off x="822960" y="4023360"/>
-            <a:ext cx="10058400" cy="777240"/>
+            <a:off x="822960" y="3977640"/>
+            <a:ext cx="10058400" cy="822960"/>
           </a:xfrm>
           <a:prstGeom prst="rect">
             <a:avLst/>
@@ -3215,7 +3217,7 @@
               <a:buNone/>
             </a:pPr>
             <a:r>
-              <a:rPr lang="en-US" sz="1700" dirty="0">
+              <a:rPr lang="en-US" sz="2000" dirty="0">
                 <a:solidFill>
                   <a:srgbClr val="94A3B8"/>
                 </a:solidFill>
@@ -3225,7 +3227,7 @@
               </a:rPr>
               <a:t>Four non-negotiables behind 30+ production apps shipped by a team of one plus nine agents</a:t>
             </a:r>
-            <a:endParaRPr lang="en-US" sz="1700" dirty="0"/>
+            <a:endParaRPr lang="en-US" sz="2000" dirty="0"/>
           </a:p>
         </p:txBody>
       </p:sp>
@@ -3237,7 +3239,7 @@
         </p:nvSpPr>
         <p:spPr>
           <a:xfrm>
-            <a:off x="822960" y="5440680"/>
+            <a:off x="822960" y="5349240"/>
             <a:ext cx="4114800" cy="0"/>
           </a:xfrm>
           <a:prstGeom prst="line">
@@ -3260,8 +3262,8 @@
         </p:nvSpPr>
         <p:spPr>
           <a:xfrm>
-            <a:off x="822960" y="5596128"/>
-            <a:ext cx="10058400" cy="457200"/>
+            <a:off x="822960" y="5532120"/>
+            <a:ext cx="10058400" cy="502920"/>
           </a:xfrm>
           <a:prstGeom prst="rect">
             <a:avLst/>
@@ -3277,9 +3279,9 @@
               <a:buNone/>
             </a:pPr>
             <a:r>
-              <a:rPr lang="en-US" sz="1250" dirty="0">
-                <a:solidFill>
-                  <a:srgbClr val="64748B"/>
+              <a:rPr lang="en-US" sz="1800" dirty="0">
+                <a:solidFill>
+                  <a:srgbClr val="8FA3BF"/>
                 </a:solidFill>
                 <a:latin typeface="Segoe UI" pitchFamily="34" charset="0"/>
                 <a:ea typeface="Segoe UI" pitchFamily="34" charset="-122"/>
@@ -3287,7 +3289,7 @@
               </a:rPr>
               <a:t>Rezalian Vatiady · Zalin Labs · 2026</a:t>
             </a:r>
-            <a:endParaRPr lang="en-US" sz="1250" dirty="0"/>
+            <a:endParaRPr lang="en-US" sz="1800" dirty="0"/>
           </a:p>
         </p:txBody>
       </p:sp>
@@ -3299,8 +3301,8 @@
         </p:nvSpPr>
         <p:spPr>
           <a:xfrm>
-            <a:off x="10698480" y="6382512"/>
-            <a:ext cx="1188720" cy="365760"/>
+            <a:off x="10698480" y="6309360"/>
+            <a:ext cx="1188720" cy="411480"/>
           </a:xfrm>
           <a:prstGeom prst="rect">
             <a:avLst/>
@@ -3316,9 +3318,9 @@
               <a:buNone/>
             </a:pPr>
             <a:r>
-              <a:rPr lang="en-US" sz="1000" dirty="0">
-                <a:solidFill>
-                  <a:srgbClr val="64748B"/>
+              <a:rPr lang="en-US" sz="1800" dirty="0">
+                <a:solidFill>
+                  <a:srgbClr val="8FA3BF"/>
                 </a:solidFill>
                 <a:latin typeface="Consolas" pitchFamily="34" charset="0"/>
                 <a:ea typeface="Consolas" pitchFamily="34" charset="-122"/>
@@ -3326,7 +3328,7 @@
               </a:rPr>
               <a:t>1 / 14</a:t>
             </a:r>
-            <a:endParaRPr lang="en-US" sz="1000" dirty="0"/>
+            <a:endParaRPr lang="en-US" sz="1800" dirty="0"/>
           </a:p>
         </p:txBody>
       </p:sp>
@@ -3410,8 +3412,8 @@
         </p:nvSpPr>
         <p:spPr>
           <a:xfrm>
-            <a:off x="822960" y="502920"/>
-            <a:ext cx="10515600" cy="365760"/>
+            <a:off x="822960" y="457200"/>
+            <a:ext cx="10515600" cy="411480"/>
           </a:xfrm>
           <a:prstGeom prst="rect">
             <a:avLst/>
@@ -3427,7 +3429,7 @@
               <a:buNone/>
             </a:pPr>
             <a:r>
-              <a:rPr lang="en-US" sz="1200" spc="300" kern="0" dirty="0">
+              <a:rPr lang="en-US" sz="1800" spc="300" kern="0" dirty="0">
                 <a:solidFill>
                   <a:srgbClr val="06B6D4"/>
                 </a:solidFill>
@@ -3437,7 +3439,7 @@
               </a:rPr>
               <a:t>DISCIPLINE OVER TIME</a:t>
             </a:r>
-            <a:endParaRPr lang="en-US" sz="1200" dirty="0"/>
+            <a:endParaRPr lang="en-US" sz="1800" dirty="0"/>
           </a:p>
         </p:txBody>
       </p:sp>
@@ -3488,7 +3490,7 @@
         </p:nvGraphicFramePr>
         <p:xfrm>
           <a:off x="822960" y="1874520"/>
-          <a:ext cx="10515600" cy="3337560"/>
+          <a:ext cx="10515600" cy="3246120"/>
         </p:xfrm>
         <a:graphic xmlns:a="http://schemas.openxmlformats.org/drawingml/2006/main">
           <a:graphicData uri="http://schemas.openxmlformats.org/drawingml/2006/chart">
@@ -3504,7 +3506,7 @@
         </p:nvSpPr>
         <p:spPr>
           <a:xfrm>
-            <a:off x="822960" y="5413248"/>
+            <a:off x="822960" y="5321808"/>
             <a:ext cx="10515600" cy="0"/>
           </a:xfrm>
           <a:prstGeom prst="line">
@@ -3527,8 +3529,8 @@
         </p:nvSpPr>
         <p:spPr>
           <a:xfrm>
-            <a:off x="822960" y="5504688"/>
-            <a:ext cx="10424160" cy="411480"/>
+            <a:off x="822960" y="5394960"/>
+            <a:ext cx="10424160" cy="502920"/>
           </a:xfrm>
           <a:prstGeom prst="rect">
             <a:avLst/>
@@ -3544,7 +3546,7 @@
               <a:buNone/>
             </a:pPr>
             <a:r>
-              <a:rPr lang="en-US" sz="1300" i="1" dirty="0">
+              <a:rPr lang="en-US" sz="1800" i="1" dirty="0">
                 <a:solidFill>
                   <a:srgbClr val="06B6D4"/>
                 </a:solidFill>
@@ -3554,7 +3556,7 @@
               </a:rPr>
               <a:t>→  Early releases catch the most, and escapes trend to zero as specs and sweeps mature - the gate gets smarter with every run.</a:t>
             </a:r>
-            <a:endParaRPr lang="en-US" sz="1300" dirty="0"/>
+            <a:endParaRPr lang="en-US" sz="1800" dirty="0"/>
           </a:p>
         </p:txBody>
       </p:sp>
@@ -3589,8 +3591,8 @@
         </p:nvSpPr>
         <p:spPr>
           <a:xfrm>
-            <a:off x="822960" y="6053328"/>
-            <a:ext cx="9692640" cy="457200"/>
+            <a:off x="822960" y="6035040"/>
+            <a:ext cx="10424160" cy="566928"/>
           </a:xfrm>
           <a:prstGeom prst="rect">
             <a:avLst/>
@@ -3606,9 +3608,9 @@
               <a:buNone/>
             </a:pPr>
             <a:r>
-              <a:rPr lang="en-US" sz="1150" dirty="0">
-                <a:solidFill>
-                  <a:srgbClr val="64748B"/>
+              <a:rPr lang="en-US" sz="1800" dirty="0">
+                <a:solidFill>
+                  <a:srgbClr val="8FA3BF"/>
                 </a:solidFill>
                 <a:latin typeface="Segoe UI" pitchFamily="34" charset="0"/>
                 <a:ea typeface="Segoe UI" pitchFamily="34" charset="-122"/>
@@ -3616,7 +3618,7 @@
               </a:rPr>
               <a:t>Illustrative trend for one app's first six gated releases; the point is the direction, not the decimals.</a:t>
             </a:r>
-            <a:endParaRPr lang="en-US" sz="1150" dirty="0"/>
+            <a:endParaRPr lang="en-US" sz="1800" dirty="0"/>
           </a:p>
         </p:txBody>
       </p:sp>
@@ -3628,8 +3630,8 @@
         </p:nvSpPr>
         <p:spPr>
           <a:xfrm>
-            <a:off x="10698480" y="6382512"/>
-            <a:ext cx="1188720" cy="365760"/>
+            <a:off x="10698480" y="6309360"/>
+            <a:ext cx="1188720" cy="411480"/>
           </a:xfrm>
           <a:prstGeom prst="rect">
             <a:avLst/>
@@ -3645,9 +3647,9 @@
               <a:buNone/>
             </a:pPr>
             <a:r>
-              <a:rPr lang="en-US" sz="1000" dirty="0">
-                <a:solidFill>
-                  <a:srgbClr val="64748B"/>
+              <a:rPr lang="en-US" sz="1800" dirty="0">
+                <a:solidFill>
+                  <a:srgbClr val="8FA3BF"/>
                 </a:solidFill>
                 <a:latin typeface="Consolas" pitchFamily="34" charset="0"/>
                 <a:ea typeface="Consolas" pitchFamily="34" charset="-122"/>
@@ -3655,7 +3657,7 @@
               </a:rPr>
               <a:t>10 / 14</a:t>
             </a:r>
-            <a:endParaRPr lang="en-US" sz="1000" dirty="0"/>
+            <a:endParaRPr lang="en-US" sz="1800" dirty="0"/>
           </a:p>
         </p:txBody>
       </p:sp>
@@ -3739,8 +3741,8 @@
         </p:nvSpPr>
         <p:spPr>
           <a:xfrm>
-            <a:off x="822960" y="502920"/>
-            <a:ext cx="10515600" cy="365760"/>
+            <a:off x="822960" y="457200"/>
+            <a:ext cx="10515600" cy="411480"/>
           </a:xfrm>
           <a:prstGeom prst="rect">
             <a:avLst/>
@@ -3756,7 +3758,7 @@
               <a:buNone/>
             </a:pPr>
             <a:r>
-              <a:rPr lang="en-US" sz="1200" spc="300" kern="0" dirty="0">
+              <a:rPr lang="en-US" sz="1800" spc="300" kern="0" dirty="0">
                 <a:solidFill>
                   <a:srgbClr val="06B6D4"/>
                 </a:solidFill>
@@ -3766,7 +3768,7 @@
               </a:rPr>
               <a:t>THE DIFFERENCE</a:t>
             </a:r>
-            <a:endParaRPr lang="en-US" sz="1200" dirty="0"/>
+            <a:endParaRPr lang="en-US" sz="1800" dirty="0"/>
           </a:p>
         </p:txBody>
       </p:sp>
@@ -3817,12 +3819,12 @@
         </p:nvSpPr>
         <p:spPr>
           <a:xfrm>
-            <a:off x="822960" y="2011680"/>
-            <a:ext cx="5074920" cy="3611880"/>
+            <a:off x="822960" y="1965960"/>
+            <a:ext cx="5074920" cy="3657600"/>
           </a:xfrm>
           <a:prstGeom prst="roundRect">
             <a:avLst>
-              <a:gd name="adj" fmla="val 2025"/>
+              <a:gd name="adj" fmla="val 2000"/>
             </a:avLst>
           </a:prstGeom>
           <a:solidFill>
@@ -3844,8 +3846,8 @@
         </p:nvSpPr>
         <p:spPr>
           <a:xfrm>
-            <a:off x="1097280" y="2240280"/>
-            <a:ext cx="4526280" cy="502920"/>
+            <a:off x="1097280" y="2194560"/>
+            <a:ext cx="4526280" cy="548640"/>
           </a:xfrm>
           <a:prstGeom prst="rect">
             <a:avLst/>
@@ -3861,7 +3863,7 @@
               <a:buNone/>
             </a:pPr>
             <a:r>
-              <a:rPr lang="en-US" sz="1650" b="1" dirty="0">
+              <a:rPr lang="en-US" sz="2000" b="1" dirty="0">
                 <a:solidFill>
                   <a:srgbClr val="06B6D4"/>
                 </a:solidFill>
@@ -3871,7 +3873,7 @@
               </a:rPr>
               <a:t>Ungated AI speed</a:t>
             </a:r>
-            <a:endParaRPr lang="en-US" sz="1650" dirty="0"/>
+            <a:endParaRPr lang="en-US" sz="2000" dirty="0"/>
           </a:p>
         </p:txBody>
       </p:sp>
@@ -3907,7 +3909,7 @@
               <a:buChar char="▸"/>
             </a:pPr>
             <a:r>
-              <a:rPr lang="en-US" sz="1280" dirty="0">
+              <a:rPr lang="en-US" sz="1800" dirty="0">
                 <a:solidFill>
                   <a:srgbClr val="CBD5E1"/>
                 </a:solidFill>
@@ -3917,7 +3919,7 @@
               </a:rPr>
               <a:t>Debt compounds at machine pace</a:t>
             </a:r>
-            <a:endParaRPr lang="en-US" sz="1280" dirty="0"/>
+            <a:endParaRPr lang="en-US" sz="1800" dirty="0"/>
           </a:p>
           <a:p>
             <a:pPr marL="342900" indent="-342900">
@@ -3931,7 +3933,7 @@
               <a:buChar char="▸"/>
             </a:pPr>
             <a:r>
-              <a:rPr lang="en-US" sz="1280" dirty="0">
+              <a:rPr lang="en-US" sz="1800" dirty="0">
                 <a:solidFill>
                   <a:srgbClr val="CBD5E1"/>
                 </a:solidFill>
@@ -3941,7 +3943,7 @@
               </a:rPr>
               <a:t>A button that does nothing ships silently</a:t>
             </a:r>
-            <a:endParaRPr lang="en-US" sz="1280" dirty="0"/>
+            <a:endParaRPr lang="en-US" sz="1800" dirty="0"/>
           </a:p>
           <a:p>
             <a:pPr marL="342900" indent="-342900">
@@ -3955,7 +3957,7 @@
               <a:buChar char="▸"/>
             </a:pPr>
             <a:r>
-              <a:rPr lang="en-US" sz="1280" dirty="0">
+              <a:rPr lang="en-US" sz="1800" dirty="0">
                 <a:solidFill>
                   <a:srgbClr val="CBD5E1"/>
                 </a:solidFill>
@@ -3965,7 +3967,7 @@
               </a:rPr>
               <a:t>Rollback is an emergency</a:t>
             </a:r>
-            <a:endParaRPr lang="en-US" sz="1280" dirty="0"/>
+            <a:endParaRPr lang="en-US" sz="1800" dirty="0"/>
           </a:p>
           <a:p>
             <a:pPr marL="342900" indent="-342900">
@@ -3979,7 +3981,7 @@
               <a:buChar char="▸"/>
             </a:pPr>
             <a:r>
-              <a:rPr lang="en-US" sz="1280" dirty="0">
+              <a:rPr lang="en-US" sz="1800" dirty="0">
                 <a:solidFill>
                   <a:srgbClr val="CBD5E1"/>
                 </a:solidFill>
@@ -3989,7 +3991,7 @@
               </a:rPr>
               <a:t>Users run the test suite</a:t>
             </a:r>
-            <a:endParaRPr lang="en-US" sz="1280" dirty="0"/>
+            <a:endParaRPr lang="en-US" sz="1800" dirty="0"/>
           </a:p>
         </p:txBody>
       </p:sp>
@@ -4001,12 +4003,12 @@
         </p:nvSpPr>
         <p:spPr>
           <a:xfrm>
-            <a:off x="6291072" y="2011680"/>
-            <a:ext cx="5074920" cy="3611880"/>
+            <a:off x="6291072" y="1965960"/>
+            <a:ext cx="5074920" cy="3657600"/>
           </a:xfrm>
           <a:prstGeom prst="roundRect">
             <a:avLst>
-              <a:gd name="adj" fmla="val 2025"/>
+              <a:gd name="adj" fmla="val 2000"/>
             </a:avLst>
           </a:prstGeom>
           <a:solidFill>
@@ -4028,8 +4030,8 @@
         </p:nvSpPr>
         <p:spPr>
           <a:xfrm>
-            <a:off x="6565392" y="2240280"/>
-            <a:ext cx="4526280" cy="502920"/>
+            <a:off x="6565392" y="2194560"/>
+            <a:ext cx="4526280" cy="548640"/>
           </a:xfrm>
           <a:prstGeom prst="rect">
             <a:avLst/>
@@ -4045,7 +4047,7 @@
               <a:buNone/>
             </a:pPr>
             <a:r>
-              <a:rPr lang="en-US" sz="1650" b="1" dirty="0">
+              <a:rPr lang="en-US" sz="2000" b="1" dirty="0">
                 <a:solidFill>
                   <a:srgbClr val="93C5FD"/>
                 </a:solidFill>
@@ -4055,7 +4057,7 @@
               </a:rPr>
               <a:t>Gated AI speed</a:t>
             </a:r>
-            <a:endParaRPr lang="en-US" sz="1650" dirty="0"/>
+            <a:endParaRPr lang="en-US" sz="2000" dirty="0"/>
           </a:p>
         </p:txBody>
       </p:sp>
@@ -4091,7 +4093,7 @@
               <a:buChar char="▸"/>
             </a:pPr>
             <a:r>
-              <a:rPr lang="en-US" sz="1280" dirty="0">
+              <a:rPr lang="en-US" sz="1800" dirty="0">
                 <a:solidFill>
                   <a:srgbClr val="CBD5E1"/>
                 </a:solidFill>
@@ -4101,7 +4103,7 @@
               </a:rPr>
               <a:t>Every release walks the golden path</a:t>
             </a:r>
-            <a:endParaRPr lang="en-US" sz="1280" dirty="0"/>
+            <a:endParaRPr lang="en-US" sz="1800" dirty="0"/>
           </a:p>
           <a:p>
             <a:pPr marL="342900" indent="-342900">
@@ -4115,7 +4117,7 @@
               <a:buChar char="▸"/>
             </a:pPr>
             <a:r>
-              <a:rPr lang="en-US" sz="1280" dirty="0">
+              <a:rPr lang="en-US" sz="1800" dirty="0">
                 <a:solidFill>
                   <a:srgbClr val="CBD5E1"/>
                 </a:solidFill>
@@ -4125,7 +4127,7 @@
               </a:rPr>
               <a:t>Agents sweep every screen for liars</a:t>
             </a:r>
-            <a:endParaRPr lang="en-US" sz="1280" dirty="0"/>
+            <a:endParaRPr lang="en-US" sz="1800" dirty="0"/>
           </a:p>
           <a:p>
             <a:pPr marL="342900" indent="-342900">
@@ -4139,7 +4141,7 @@
               <a:buChar char="▸"/>
             </a:pPr>
             <a:r>
-              <a:rPr lang="en-US" sz="1280" dirty="0">
+              <a:rPr lang="en-US" sz="1800" dirty="0">
                 <a:solidFill>
                   <a:srgbClr val="CBD5E1"/>
                 </a:solidFill>
@@ -4149,7 +4151,7 @@
               </a:rPr>
               <a:t>Rollback is a normal Tuesday</a:t>
             </a:r>
-            <a:endParaRPr lang="en-US" sz="1280" dirty="0"/>
+            <a:endParaRPr lang="en-US" sz="1800" dirty="0"/>
           </a:p>
           <a:p>
             <a:pPr marL="342900" indent="-342900">
@@ -4163,7 +4165,7 @@
               <a:buChar char="▸"/>
             </a:pPr>
             <a:r>
-              <a:rPr lang="en-US" sz="1280" dirty="0">
+              <a:rPr lang="en-US" sz="1800" dirty="0">
                 <a:solidFill>
                   <a:srgbClr val="CBD5E1"/>
                 </a:solidFill>
@@ -4173,7 +4175,7 @@
               </a:rPr>
               <a:t>Evidence a stranger could audit</a:t>
             </a:r>
-            <a:endParaRPr lang="en-US" sz="1280" dirty="0"/>
+            <a:endParaRPr lang="en-US" sz="1800" dirty="0"/>
           </a:p>
         </p:txBody>
       </p:sp>
@@ -4208,8 +4210,8 @@
         </p:nvSpPr>
         <p:spPr>
           <a:xfrm>
-            <a:off x="822960" y="6053328"/>
-            <a:ext cx="9692640" cy="457200"/>
+            <a:off x="822960" y="6035040"/>
+            <a:ext cx="10424160" cy="566928"/>
           </a:xfrm>
           <a:prstGeom prst="rect">
             <a:avLst/>
@@ -4225,9 +4227,9 @@
               <a:buNone/>
             </a:pPr>
             <a:r>
-              <a:rPr lang="en-US" sz="1150" dirty="0">
-                <a:solidFill>
-                  <a:srgbClr val="64748B"/>
+              <a:rPr lang="en-US" sz="1800" dirty="0">
+                <a:solidFill>
+                  <a:srgbClr val="8FA3BF"/>
                 </a:solidFill>
                 <a:latin typeface="Segoe UI" pitchFamily="34" charset="0"/>
                 <a:ea typeface="Segoe UI" pitchFamily="34" charset="-122"/>
@@ -4235,7 +4237,7 @@
               </a:rPr>
               <a:t>Same speed, opposite trajectory - the gates decide which one you get.</a:t>
             </a:r>
-            <a:endParaRPr lang="en-US" sz="1150" dirty="0"/>
+            <a:endParaRPr lang="en-US" sz="1800" dirty="0"/>
           </a:p>
         </p:txBody>
       </p:sp>
@@ -4247,8 +4249,8 @@
         </p:nvSpPr>
         <p:spPr>
           <a:xfrm>
-            <a:off x="10698480" y="6382512"/>
-            <a:ext cx="1188720" cy="365760"/>
+            <a:off x="10698480" y="6309360"/>
+            <a:ext cx="1188720" cy="411480"/>
           </a:xfrm>
           <a:prstGeom prst="rect">
             <a:avLst/>
@@ -4264,9 +4266,9 @@
               <a:buNone/>
             </a:pPr>
             <a:r>
-              <a:rPr lang="en-US" sz="1000" dirty="0">
-                <a:solidFill>
-                  <a:srgbClr val="64748B"/>
+              <a:rPr lang="en-US" sz="1800" dirty="0">
+                <a:solidFill>
+                  <a:srgbClr val="8FA3BF"/>
                 </a:solidFill>
                 <a:latin typeface="Consolas" pitchFamily="34" charset="0"/>
                 <a:ea typeface="Consolas" pitchFamily="34" charset="-122"/>
@@ -4274,7 +4276,7 @@
               </a:rPr>
               <a:t>11 / 14</a:t>
             </a:r>
-            <a:endParaRPr lang="en-US" sz="1000" dirty="0"/>
+            <a:endParaRPr lang="en-US" sz="1800" dirty="0"/>
           </a:p>
         </p:txBody>
       </p:sp>
@@ -4358,8 +4360,8 @@
         </p:nvSpPr>
         <p:spPr>
           <a:xfrm>
-            <a:off x="822960" y="502920"/>
-            <a:ext cx="10515600" cy="365760"/>
+            <a:off x="822960" y="457200"/>
+            <a:ext cx="10515600" cy="411480"/>
           </a:xfrm>
           <a:prstGeom prst="rect">
             <a:avLst/>
@@ -4375,7 +4377,7 @@
               <a:buNone/>
             </a:pPr>
             <a:r>
-              <a:rPr lang="en-US" sz="1200" spc="300" kern="0" dirty="0">
+              <a:rPr lang="en-US" sz="1800" spc="300" kern="0" dirty="0">
                 <a:solidFill>
                   <a:srgbClr val="06B6D4"/>
                 </a:solidFill>
@@ -4385,7 +4387,7 @@
               </a:rPr>
               <a:t>QA EFFORT</a:t>
             </a:r>
-            <a:endParaRPr lang="en-US" sz="1200" dirty="0"/>
+            <a:endParaRPr lang="en-US" sz="1800" dirty="0"/>
           </a:p>
         </p:txBody>
       </p:sp>
@@ -4435,8 +4437,8 @@
           <p:nvPr/>
         </p:nvGraphicFramePr>
         <p:xfrm>
-          <a:off x="822960" y="1874520"/>
-          <a:ext cx="10515600" cy="3337560"/>
+          <a:off x="822960" y="1783080"/>
+          <a:ext cx="10515600" cy="3383280"/>
         </p:xfrm>
         <a:graphic xmlns:a="http://schemas.openxmlformats.org/drawingml/2006/main">
           <a:graphicData uri="http://schemas.openxmlformats.org/drawingml/2006/chart">
@@ -4452,7 +4454,7 @@
         </p:nvSpPr>
         <p:spPr>
           <a:xfrm>
-            <a:off x="822960" y="5413248"/>
+            <a:off x="822960" y="5321808"/>
             <a:ext cx="10515600" cy="0"/>
           </a:xfrm>
           <a:prstGeom prst="line">
@@ -4475,8 +4477,8 @@
         </p:nvSpPr>
         <p:spPr>
           <a:xfrm>
-            <a:off x="822960" y="5504688"/>
-            <a:ext cx="10424160" cy="411480"/>
+            <a:off x="822960" y="5394960"/>
+            <a:ext cx="10424160" cy="502920"/>
           </a:xfrm>
           <a:prstGeom prst="rect">
             <a:avLst/>
@@ -4492,7 +4494,7 @@
               <a:buNone/>
             </a:pPr>
             <a:r>
-              <a:rPr lang="en-US" sz="1300" i="1" dirty="0">
+              <a:rPr lang="en-US" sz="1800" i="1" dirty="0">
                 <a:solidFill>
                   <a:srgbClr val="06B6D4"/>
                 </a:solidFill>
@@ -4502,7 +4504,7 @@
               </a:rPr>
               <a:t>→  Most QA effort is systematic sweeping - repeatable work agents do reliably, which is why the discipline actually happens every release.</a:t>
             </a:r>
-            <a:endParaRPr lang="en-US" sz="1300" dirty="0"/>
+            <a:endParaRPr lang="en-US" sz="1800" dirty="0"/>
           </a:p>
         </p:txBody>
       </p:sp>
@@ -4537,8 +4539,8 @@
         </p:nvSpPr>
         <p:spPr>
           <a:xfrm>
-            <a:off x="822960" y="6053328"/>
-            <a:ext cx="9692640" cy="457200"/>
+            <a:off x="822960" y="6035040"/>
+            <a:ext cx="10424160" cy="566928"/>
           </a:xfrm>
           <a:prstGeom prst="rect">
             <a:avLst/>
@@ -4554,9 +4556,9 @@
               <a:buNone/>
             </a:pPr>
             <a:r>
-              <a:rPr lang="en-US" sz="1150" dirty="0">
-                <a:solidFill>
-                  <a:srgbClr val="64748B"/>
+              <a:rPr lang="en-US" sz="1800" dirty="0">
+                <a:solidFill>
+                  <a:srgbClr val="8FA3BF"/>
                 </a:solidFill>
                 <a:latin typeface="Segoe UI" pitchFamily="34" charset="0"/>
                 <a:ea typeface="Segoe UI" pitchFamily="34" charset="-122"/>
@@ -4564,7 +4566,7 @@
               </a:rPr>
               <a:t>Illustrative effort split across the four gates for a routine release.</a:t>
             </a:r>
-            <a:endParaRPr lang="en-US" sz="1150" dirty="0"/>
+            <a:endParaRPr lang="en-US" sz="1800" dirty="0"/>
           </a:p>
         </p:txBody>
       </p:sp>
@@ -4576,8 +4578,8 @@
         </p:nvSpPr>
         <p:spPr>
           <a:xfrm>
-            <a:off x="10698480" y="6382512"/>
-            <a:ext cx="1188720" cy="365760"/>
+            <a:off x="10698480" y="6309360"/>
+            <a:ext cx="1188720" cy="411480"/>
           </a:xfrm>
           <a:prstGeom prst="rect">
             <a:avLst/>
@@ -4593,9 +4595,9 @@
               <a:buNone/>
             </a:pPr>
             <a:r>
-              <a:rPr lang="en-US" sz="1000" dirty="0">
-                <a:solidFill>
-                  <a:srgbClr val="64748B"/>
+              <a:rPr lang="en-US" sz="1800" dirty="0">
+                <a:solidFill>
+                  <a:srgbClr val="8FA3BF"/>
                 </a:solidFill>
                 <a:latin typeface="Consolas" pitchFamily="34" charset="0"/>
                 <a:ea typeface="Consolas" pitchFamily="34" charset="-122"/>
@@ -4603,7 +4605,7 @@
               </a:rPr>
               <a:t>12 / 14</a:t>
             </a:r>
-            <a:endParaRPr lang="en-US" sz="1000" dirty="0"/>
+            <a:endParaRPr lang="en-US" sz="1800" dirty="0"/>
           </a:p>
         </p:txBody>
       </p:sp>
@@ -4687,8 +4689,8 @@
         </p:nvSpPr>
         <p:spPr>
           <a:xfrm>
-            <a:off x="822960" y="502920"/>
-            <a:ext cx="10515600" cy="365760"/>
+            <a:off x="822960" y="457200"/>
+            <a:ext cx="10515600" cy="411480"/>
           </a:xfrm>
           <a:prstGeom prst="rect">
             <a:avLst/>
@@ -4704,7 +4706,7 @@
               <a:buNone/>
             </a:pPr>
             <a:r>
-              <a:rPr lang="en-US" sz="1200" spc="300" kern="0" dirty="0">
+              <a:rPr lang="en-US" sz="1800" spc="300" kern="0" dirty="0">
                 <a:solidFill>
                   <a:srgbClr val="06B6D4"/>
                 </a:solidFill>
@@ -4714,7 +4716,7 @@
               </a:rPr>
               <a:t>ENFORCEMENT</a:t>
             </a:r>
-            <a:endParaRPr lang="en-US" sz="1200" dirty="0"/>
+            <a:endParaRPr lang="en-US" sz="1800" dirty="0"/>
           </a:p>
         </p:txBody>
       </p:sp>
@@ -4765,8 +4767,8 @@
         </p:nvSpPr>
         <p:spPr>
           <a:xfrm>
-            <a:off x="868680" y="2011680"/>
-            <a:ext cx="10424160" cy="3566160"/>
+            <a:off x="868680" y="1965960"/>
+            <a:ext cx="10424160" cy="3840480"/>
           </a:xfrm>
           <a:prstGeom prst="rect">
             <a:avLst/>
@@ -4789,7 +4791,7 @@
               <a:buChar char="▸"/>
             </a:pPr>
             <a:r>
-              <a:rPr lang="en-US" sz="1600" dirty="0">
+              <a:rPr lang="en-US" sz="2000" dirty="0">
                 <a:solidFill>
                   <a:srgbClr val="CBD5E1"/>
                 </a:solidFill>
@@ -4799,7 +4801,7 @@
               </a:rPr>
               <a:t>One blocked item equals no deploy - the gate is only real if it can stop the line.</a:t>
             </a:r>
-            <a:endParaRPr lang="en-US" sz="1600" dirty="0"/>
+            <a:endParaRPr lang="en-US" sz="2000" dirty="0"/>
           </a:p>
           <a:p>
             <a:pPr marL="342900" indent="-342900">
@@ -4813,7 +4815,7 @@
               <a:buChar char="▸"/>
             </a:pPr>
             <a:r>
-              <a:rPr lang="en-US" sz="1600" dirty="0">
+              <a:rPr lang="en-US" sz="2000" dirty="0">
                 <a:solidFill>
                   <a:srgbClr val="CBD5E1"/>
                 </a:solidFill>
@@ -4823,7 +4825,7 @@
               </a:rPr>
               <a:t>No 'just this once': exceptions are how gates die, quietly and permanently.</a:t>
             </a:r>
-            <a:endParaRPr lang="en-US" sz="1600" dirty="0"/>
+            <a:endParaRPr lang="en-US" sz="2000" dirty="0"/>
           </a:p>
           <a:p>
             <a:pPr marL="342900" indent="-342900">
@@ -4837,7 +4839,7 @@
               <a:buChar char="▸"/>
             </a:pPr>
             <a:r>
-              <a:rPr lang="en-US" sz="1600" dirty="0">
+              <a:rPr lang="en-US" sz="2000" dirty="0">
                 <a:solidFill>
                   <a:srgbClr val="CBD5E1"/>
                 </a:solidFill>
@@ -4847,7 +4849,7 @@
               </a:rPr>
               <a:t>Agents never approve their own releases - flagged decisions route through a human approval queue.</a:t>
             </a:r>
-            <a:endParaRPr lang="en-US" sz="1600" dirty="0"/>
+            <a:endParaRPr lang="en-US" sz="2000" dirty="0"/>
           </a:p>
           <a:p>
             <a:pPr marL="342900" indent="-342900">
@@ -4861,7 +4863,7 @@
               <a:buChar char="▸"/>
             </a:pPr>
             <a:r>
-              <a:rPr lang="en-US" sz="1600" dirty="0">
+              <a:rPr lang="en-US" sz="2000" dirty="0">
                 <a:solidFill>
                   <a:srgbClr val="CBD5E1"/>
                 </a:solidFill>
@@ -4871,7 +4873,7 @@
               </a:rPr>
               <a:t>Evidence is recorded where reviewers can actually find it, not scattered across chats.</a:t>
             </a:r>
-            <a:endParaRPr lang="en-US" sz="1600" dirty="0"/>
+            <a:endParaRPr lang="en-US" sz="2000" dirty="0"/>
           </a:p>
         </p:txBody>
       </p:sp>
@@ -4906,8 +4908,8 @@
         </p:nvSpPr>
         <p:spPr>
           <a:xfrm>
-            <a:off x="822960" y="6053328"/>
-            <a:ext cx="9692640" cy="457200"/>
+            <a:off x="822960" y="6035040"/>
+            <a:ext cx="10424160" cy="566928"/>
           </a:xfrm>
           <a:prstGeom prst="rect">
             <a:avLst/>
@@ -4923,9 +4925,9 @@
               <a:buNone/>
             </a:pPr>
             <a:r>
-              <a:rPr lang="en-US" sz="1150" dirty="0">
-                <a:solidFill>
-                  <a:srgbClr val="64748B"/>
+              <a:rPr lang="en-US" sz="1800" dirty="0">
+                <a:solidFill>
+                  <a:srgbClr val="8FA3BF"/>
                 </a:solidFill>
                 <a:latin typeface="Segoe UI" pitchFamily="34" charset="0"/>
                 <a:ea typeface="Segoe UI" pitchFamily="34" charset="-122"/>
@@ -4933,7 +4935,7 @@
               </a:rPr>
               <a:t>Make honesty cheaper than lying, and the easy path becomes the correct path.</a:t>
             </a:r>
-            <a:endParaRPr lang="en-US" sz="1150" dirty="0"/>
+            <a:endParaRPr lang="en-US" sz="1800" dirty="0"/>
           </a:p>
         </p:txBody>
       </p:sp>
@@ -4945,8 +4947,8 @@
         </p:nvSpPr>
         <p:spPr>
           <a:xfrm>
-            <a:off x="10698480" y="6382512"/>
-            <a:ext cx="1188720" cy="365760"/>
+            <a:off x="10698480" y="6309360"/>
+            <a:ext cx="1188720" cy="411480"/>
           </a:xfrm>
           <a:prstGeom prst="rect">
             <a:avLst/>
@@ -4962,9 +4964,9 @@
               <a:buNone/>
             </a:pPr>
             <a:r>
-              <a:rPr lang="en-US" sz="1000" dirty="0">
-                <a:solidFill>
-                  <a:srgbClr val="64748B"/>
+              <a:rPr lang="en-US" sz="1800" dirty="0">
+                <a:solidFill>
+                  <a:srgbClr val="8FA3BF"/>
                 </a:solidFill>
                 <a:latin typeface="Consolas" pitchFamily="34" charset="0"/>
                 <a:ea typeface="Consolas" pitchFamily="34" charset="-122"/>
@@ -4972,7 +4974,7 @@
               </a:rPr>
               <a:t>13 / 14</a:t>
             </a:r>
-            <a:endParaRPr lang="en-US" sz="1000" dirty="0"/>
+            <a:endParaRPr lang="en-US" sz="1800" dirty="0"/>
           </a:p>
         </p:txBody>
       </p:sp>
@@ -5056,8 +5058,8 @@
         </p:nvSpPr>
         <p:spPr>
           <a:xfrm>
-            <a:off x="822960" y="1417320"/>
-            <a:ext cx="10515600" cy="411480"/>
+            <a:off x="822960" y="1371600"/>
+            <a:ext cx="10515600" cy="457200"/>
           </a:xfrm>
           <a:prstGeom prst="rect">
             <a:avLst/>
@@ -5073,7 +5075,7 @@
               <a:buNone/>
             </a:pPr>
             <a:r>
-              <a:rPr lang="en-US" sz="1300" spc="400" kern="0" dirty="0">
+              <a:rPr lang="en-US" sz="1800" spc="400" kern="0" dirty="0">
                 <a:solidFill>
                   <a:srgbClr val="06B6D4"/>
                 </a:solidFill>
@@ -5083,7 +5085,7 @@
               </a:rPr>
               <a:t>WORK WITH ME</a:t>
             </a:r>
-            <a:endParaRPr lang="en-US" sz="1300" dirty="0"/>
+            <a:endParaRPr lang="en-US" sz="1800" dirty="0"/>
           </a:p>
         </p:txBody>
       </p:sp>
@@ -5095,7 +5097,7 @@
         </p:nvSpPr>
         <p:spPr>
           <a:xfrm>
-            <a:off x="822960" y="1920240"/>
+            <a:off x="822960" y="1874520"/>
             <a:ext cx="10515600" cy="1371600"/>
           </a:xfrm>
           <a:prstGeom prst="rect">
@@ -5134,8 +5136,8 @@
         </p:nvSpPr>
         <p:spPr>
           <a:xfrm>
-            <a:off x="2011680" y="3429000"/>
-            <a:ext cx="8183880" cy="1554480"/>
+            <a:off x="2011680" y="3383280"/>
+            <a:ext cx="8183880" cy="1691640"/>
           </a:xfrm>
           <a:prstGeom prst="rect">
             <a:avLst/>
@@ -5154,7 +5156,7 @@
               <a:buNone/>
             </a:pPr>
             <a:r>
-              <a:rPr lang="en-US" sz="1500" dirty="0">
+              <a:rPr lang="en-US" sz="2000" dirty="0">
                 <a:solidFill>
                   <a:srgbClr val="CBD5E1"/>
                 </a:solidFill>
@@ -5171,7 +5173,7 @@
               <a:buNone/>
             </a:pPr>
             <a:r>
-              <a:rPr lang="en-US" sz="1500" dirty="0">
+              <a:rPr lang="en-US" sz="2000" dirty="0">
                 <a:solidFill>
                   <a:srgbClr val="CBD5E1"/>
                 </a:solidFill>
@@ -5188,7 +5190,7 @@
               <a:buNone/>
             </a:pPr>
             <a:r>
-              <a:rPr lang="en-US" sz="1500" dirty="0">
+              <a:rPr lang="en-US" sz="2000" dirty="0">
                 <a:solidFill>
                   <a:srgbClr val="CBD5E1"/>
                 </a:solidFill>
@@ -5198,7 +5200,7 @@
               </a:rPr>
               <a:t>Bring your current release process - I will tell you where it lies</a:t>
             </a:r>
-            <a:endParaRPr lang="en-US" sz="1500" dirty="0"/>
+            <a:endParaRPr lang="en-US" sz="2000" dirty="0"/>
           </a:p>
         </p:txBody>
       </p:sp>
@@ -5233,8 +5235,8 @@
         </p:nvSpPr>
         <p:spPr>
           <a:xfrm>
-            <a:off x="822960" y="5376672"/>
-            <a:ext cx="10515600" cy="457200"/>
+            <a:off x="822960" y="5349240"/>
+            <a:ext cx="10515600" cy="502920"/>
           </a:xfrm>
           <a:prstGeom prst="rect">
             <a:avLst/>
@@ -5250,7 +5252,7 @@
               <a:buNone/>
             </a:pPr>
             <a:r>
-              <a:rPr lang="en-US" sz="1350" b="1" dirty="0">
+              <a:rPr lang="en-US" sz="1800" b="1" dirty="0">
                 <a:solidFill>
                   <a:srgbClr val="06B6D4"/>
                 </a:solidFill>
@@ -5260,7 +5262,7 @@
               </a:rPr>
               <a:t>rezalianvatiady.github.io · github.com/rezalianvatiady</a:t>
             </a:r>
-            <a:endParaRPr lang="en-US" sz="1350" dirty="0"/>
+            <a:endParaRPr lang="en-US" sz="1800" dirty="0"/>
           </a:p>
         </p:txBody>
       </p:sp>
@@ -5272,8 +5274,8 @@
         </p:nvSpPr>
         <p:spPr>
           <a:xfrm>
-            <a:off x="10698480" y="6382512"/>
-            <a:ext cx="1188720" cy="365760"/>
+            <a:off x="10698480" y="6309360"/>
+            <a:ext cx="1188720" cy="411480"/>
           </a:xfrm>
           <a:prstGeom prst="rect">
             <a:avLst/>
@@ -5289,9 +5291,9 @@
               <a:buNone/>
             </a:pPr>
             <a:r>
-              <a:rPr lang="en-US" sz="1000" dirty="0">
-                <a:solidFill>
-                  <a:srgbClr val="64748B"/>
+              <a:rPr lang="en-US" sz="1800" dirty="0">
+                <a:solidFill>
+                  <a:srgbClr val="8FA3BF"/>
                 </a:solidFill>
                 <a:latin typeface="Consolas" pitchFamily="34" charset="0"/>
                 <a:ea typeface="Consolas" pitchFamily="34" charset="-122"/>
@@ -5299,7 +5301,7 @@
               </a:rPr>
               <a:t>14 / 14</a:t>
             </a:r>
-            <a:endParaRPr lang="en-US" sz="1000" dirty="0"/>
+            <a:endParaRPr lang="en-US" sz="1800" dirty="0"/>
           </a:p>
         </p:txBody>
       </p:sp>
@@ -5383,8 +5385,8 @@
         </p:nvSpPr>
         <p:spPr>
           <a:xfrm>
-            <a:off x="822960" y="502920"/>
-            <a:ext cx="10515600" cy="365760"/>
+            <a:off x="822960" y="457200"/>
+            <a:ext cx="10515600" cy="411480"/>
           </a:xfrm>
           <a:prstGeom prst="rect">
             <a:avLst/>
@@ -5400,7 +5402,7 @@
               <a:buNone/>
             </a:pPr>
             <a:r>
-              <a:rPr lang="en-US" sz="1200" spc="300" kern="0" dirty="0">
+              <a:rPr lang="en-US" sz="1800" spc="300" kern="0" dirty="0">
                 <a:solidFill>
                   <a:srgbClr val="06B6D4"/>
                 </a:solidFill>
@@ -5410,7 +5412,7 @@
               </a:rPr>
               <a:t>AGENDA</a:t>
             </a:r>
-            <a:endParaRPr lang="en-US" sz="1200" dirty="0"/>
+            <a:endParaRPr lang="en-US" sz="1800" dirty="0"/>
           </a:p>
         </p:txBody>
       </p:sp>
@@ -5461,8 +5463,8 @@
         </p:nvSpPr>
         <p:spPr>
           <a:xfrm>
-            <a:off x="868680" y="2112264"/>
-            <a:ext cx="420624" cy="420624"/>
+            <a:off x="868680" y="2103120"/>
+            <a:ext cx="457200" cy="457200"/>
           </a:xfrm>
           <a:prstGeom prst="ellipse">
             <a:avLst/>
@@ -5486,8 +5488,8 @@
         </p:nvSpPr>
         <p:spPr>
           <a:xfrm>
-            <a:off x="868680" y="2112264"/>
-            <a:ext cx="420624" cy="420624"/>
+            <a:off x="868680" y="2103120"/>
+            <a:ext cx="457200" cy="457200"/>
           </a:xfrm>
           <a:prstGeom prst="rect">
             <a:avLst/>
@@ -5503,7 +5505,7 @@
               <a:buNone/>
             </a:pPr>
             <a:r>
-              <a:rPr lang="en-US" sz="1300" b="1" dirty="0">
+              <a:rPr lang="en-US" sz="1800" b="1" dirty="0">
                 <a:solidFill>
                   <a:srgbClr val="3B82F6"/>
                 </a:solidFill>
@@ -5513,7 +5515,7 @@
               </a:rPr>
               <a:t>1</a:t>
             </a:r>
-            <a:endParaRPr lang="en-US" sz="1300" dirty="0"/>
+            <a:endParaRPr lang="en-US" sz="1800" dirty="0"/>
           </a:p>
         </p:txBody>
       </p:sp>
@@ -5525,8 +5527,8 @@
         </p:nvSpPr>
         <p:spPr>
           <a:xfrm>
-            <a:off x="1435608" y="2057400"/>
-            <a:ext cx="4480560" cy="822960"/>
+            <a:off x="1472184" y="2011680"/>
+            <a:ext cx="4443984" cy="960120"/>
           </a:xfrm>
           <a:prstGeom prst="rect">
             <a:avLst/>
@@ -5542,7 +5544,7 @@
               <a:buNone/>
             </a:pPr>
             <a:r>
-              <a:rPr lang="en-US" sz="1450" dirty="0">
+              <a:rPr lang="en-US" sz="2000" dirty="0">
                 <a:solidFill>
                   <a:srgbClr val="CBD5E1"/>
                 </a:solidFill>
@@ -5552,7 +5554,7 @@
               </a:rPr>
               <a:t>The risk: machine-speed code without machine-speed judgment</a:t>
             </a:r>
-            <a:endParaRPr lang="en-US" sz="1450" dirty="0"/>
+            <a:endParaRPr lang="en-US" sz="2000" dirty="0"/>
           </a:p>
         </p:txBody>
       </p:sp>
@@ -5564,8 +5566,8 @@
         </p:nvSpPr>
         <p:spPr>
           <a:xfrm>
-            <a:off x="868680" y="3044952"/>
-            <a:ext cx="420624" cy="420624"/>
+            <a:off x="868680" y="3182112"/>
+            <a:ext cx="457200" cy="457200"/>
           </a:xfrm>
           <a:prstGeom prst="ellipse">
             <a:avLst/>
@@ -5589,8 +5591,8 @@
         </p:nvSpPr>
         <p:spPr>
           <a:xfrm>
-            <a:off x="868680" y="3044952"/>
-            <a:ext cx="420624" cy="420624"/>
+            <a:off x="868680" y="3182112"/>
+            <a:ext cx="457200" cy="457200"/>
           </a:xfrm>
           <a:prstGeom prst="rect">
             <a:avLst/>
@@ -5606,7 +5608,7 @@
               <a:buNone/>
             </a:pPr>
             <a:r>
-              <a:rPr lang="en-US" sz="1300" b="1" dirty="0">
+              <a:rPr lang="en-US" sz="1800" b="1" dirty="0">
                 <a:solidFill>
                   <a:srgbClr val="06B6D4"/>
                 </a:solidFill>
@@ -5616,7 +5618,7 @@
               </a:rPr>
               <a:t>2</a:t>
             </a:r>
-            <a:endParaRPr lang="en-US" sz="1300" dirty="0"/>
+            <a:endParaRPr lang="en-US" sz="1800" dirty="0"/>
           </a:p>
         </p:txBody>
       </p:sp>
@@ -5628,8 +5630,8 @@
         </p:nvSpPr>
         <p:spPr>
           <a:xfrm>
-            <a:off x="1435608" y="2990088"/>
-            <a:ext cx="4480560" cy="822960"/>
+            <a:off x="1472184" y="3090672"/>
+            <a:ext cx="4443984" cy="960120"/>
           </a:xfrm>
           <a:prstGeom prst="rect">
             <a:avLst/>
@@ -5645,7 +5647,7 @@
               <a:buNone/>
             </a:pPr>
             <a:r>
-              <a:rPr lang="en-US" sz="1450" dirty="0">
+              <a:rPr lang="en-US" sz="2000" dirty="0">
                 <a:solidFill>
                   <a:srgbClr val="CBD5E1"/>
                 </a:solidFill>
@@ -5655,7 +5657,7 @@
               </a:rPr>
               <a:t>Four gates, defined operationally with pass conditions and evidence</a:t>
             </a:r>
-            <a:endParaRPr lang="en-US" sz="1450" dirty="0"/>
+            <a:endParaRPr lang="en-US" sz="2000" dirty="0"/>
           </a:p>
         </p:txBody>
       </p:sp>
@@ -5667,8 +5669,8 @@
         </p:nvSpPr>
         <p:spPr>
           <a:xfrm>
-            <a:off x="868680" y="3977640"/>
-            <a:ext cx="420624" cy="420624"/>
+            <a:off x="868680" y="4261104"/>
+            <a:ext cx="457200" cy="457200"/>
           </a:xfrm>
           <a:prstGeom prst="ellipse">
             <a:avLst/>
@@ -5692,8 +5694,8 @@
         </p:nvSpPr>
         <p:spPr>
           <a:xfrm>
-            <a:off x="868680" y="3977640"/>
-            <a:ext cx="420624" cy="420624"/>
+            <a:off x="868680" y="4261104"/>
+            <a:ext cx="457200" cy="457200"/>
           </a:xfrm>
           <a:prstGeom prst="rect">
             <a:avLst/>
@@ -5709,7 +5711,7 @@
               <a:buNone/>
             </a:pPr>
             <a:r>
-              <a:rPr lang="en-US" sz="1300" b="1" dirty="0">
+              <a:rPr lang="en-US" sz="1800" b="1" dirty="0">
                 <a:solidFill>
                   <a:srgbClr val="3B82F6"/>
                 </a:solidFill>
@@ -5719,7 +5721,7 @@
               </a:rPr>
               <a:t>3</a:t>
             </a:r>
-            <a:endParaRPr lang="en-US" sz="1300" dirty="0"/>
+            <a:endParaRPr lang="en-US" sz="1800" dirty="0"/>
           </a:p>
         </p:txBody>
       </p:sp>
@@ -5731,8 +5733,8 @@
         </p:nvSpPr>
         <p:spPr>
           <a:xfrm>
-            <a:off x="1435608" y="3922776"/>
-            <a:ext cx="4480560" cy="822960"/>
+            <a:off x="1472184" y="4169664"/>
+            <a:ext cx="4443984" cy="960120"/>
           </a:xfrm>
           <a:prstGeom prst="rect">
             <a:avLst/>
@@ -5748,7 +5750,7 @@
               <a:buNone/>
             </a:pPr>
             <a:r>
-              <a:rPr lang="en-US" sz="1450" dirty="0">
+              <a:rPr lang="en-US" sz="2000" dirty="0">
                 <a:solidFill>
                   <a:srgbClr val="CBD5E1"/>
                 </a:solidFill>
@@ -5758,7 +5760,7 @@
               </a:rPr>
               <a:t>How the gates run inside the build-gate-promote-record pipeline</a:t>
             </a:r>
-            <a:endParaRPr lang="en-US" sz="1450" dirty="0"/>
+            <a:endParaRPr lang="en-US" sz="2000" dirty="0"/>
           </a:p>
         </p:txBody>
       </p:sp>
@@ -5770,8 +5772,8 @@
         </p:nvSpPr>
         <p:spPr>
           <a:xfrm>
-            <a:off x="6355080" y="2112264"/>
-            <a:ext cx="420624" cy="420624"/>
+            <a:off x="6355080" y="2103120"/>
+            <a:ext cx="457200" cy="457200"/>
           </a:xfrm>
           <a:prstGeom prst="ellipse">
             <a:avLst/>
@@ -5795,8 +5797,8 @@
         </p:nvSpPr>
         <p:spPr>
           <a:xfrm>
-            <a:off x="6355080" y="2112264"/>
-            <a:ext cx="420624" cy="420624"/>
+            <a:off x="6355080" y="2103120"/>
+            <a:ext cx="457200" cy="457200"/>
           </a:xfrm>
           <a:prstGeom prst="rect">
             <a:avLst/>
@@ -5812,7 +5814,7 @@
               <a:buNone/>
             </a:pPr>
             <a:r>
-              <a:rPr lang="en-US" sz="1300" b="1" dirty="0">
+              <a:rPr lang="en-US" sz="1800" b="1" dirty="0">
                 <a:solidFill>
                   <a:srgbClr val="06B6D4"/>
                 </a:solidFill>
@@ -5822,7 +5824,7 @@
               </a:rPr>
               <a:t>4</a:t>
             </a:r>
-            <a:endParaRPr lang="en-US" sz="1300" dirty="0"/>
+            <a:endParaRPr lang="en-US" sz="1800" dirty="0"/>
           </a:p>
         </p:txBody>
       </p:sp>
@@ -5834,8 +5836,8 @@
         </p:nvSpPr>
         <p:spPr>
           <a:xfrm>
-            <a:off x="6922008" y="2057400"/>
-            <a:ext cx="4480560" cy="822960"/>
+            <a:off x="6958584" y="2011680"/>
+            <a:ext cx="4443984" cy="960120"/>
           </a:xfrm>
           <a:prstGeom prst="rect">
             <a:avLst/>
@@ -5851,7 +5853,7 @@
               <a:buNone/>
             </a:pPr>
             <a:r>
-              <a:rPr lang="en-US" sz="1450" dirty="0">
+              <a:rPr lang="en-US" sz="2000" dirty="0">
                 <a:solidFill>
                   <a:srgbClr val="CBD5E1"/>
                 </a:solidFill>
@@ -5861,7 +5863,7 @@
               </a:rPr>
               <a:t>What enforcement looks like when a gate fails</a:t>
             </a:r>
-            <a:endParaRPr lang="en-US" sz="1450" dirty="0"/>
+            <a:endParaRPr lang="en-US" sz="2000" dirty="0"/>
           </a:p>
         </p:txBody>
       </p:sp>
@@ -5873,8 +5875,8 @@
         </p:nvSpPr>
         <p:spPr>
           <a:xfrm>
-            <a:off x="6355080" y="3044952"/>
-            <a:ext cx="420624" cy="420624"/>
+            <a:off x="6355080" y="3182112"/>
+            <a:ext cx="457200" cy="457200"/>
           </a:xfrm>
           <a:prstGeom prst="ellipse">
             <a:avLst/>
@@ -5898,8 +5900,8 @@
         </p:nvSpPr>
         <p:spPr>
           <a:xfrm>
-            <a:off x="6355080" y="3044952"/>
-            <a:ext cx="420624" cy="420624"/>
+            <a:off x="6355080" y="3182112"/>
+            <a:ext cx="457200" cy="457200"/>
           </a:xfrm>
           <a:prstGeom prst="rect">
             <a:avLst/>
@@ -5915,7 +5917,7 @@
               <a:buNone/>
             </a:pPr>
             <a:r>
-              <a:rPr lang="en-US" sz="1300" b="1" dirty="0">
+              <a:rPr lang="en-US" sz="1800" b="1" dirty="0">
                 <a:solidFill>
                   <a:srgbClr val="3B82F6"/>
                 </a:solidFill>
@@ -5925,7 +5927,7 @@
               </a:rPr>
               <a:t>5</a:t>
             </a:r>
-            <a:endParaRPr lang="en-US" sz="1300" dirty="0"/>
+            <a:endParaRPr lang="en-US" sz="1800" dirty="0"/>
           </a:p>
         </p:txBody>
       </p:sp>
@@ -5937,8 +5939,8 @@
         </p:nvSpPr>
         <p:spPr>
           <a:xfrm>
-            <a:off x="6922008" y="2990088"/>
-            <a:ext cx="4480560" cy="822960"/>
+            <a:off x="6958584" y="3090672"/>
+            <a:ext cx="4443984" cy="960120"/>
           </a:xfrm>
           <a:prstGeom prst="rect">
             <a:avLst/>
@@ -5954,7 +5956,7 @@
               <a:buNone/>
             </a:pPr>
             <a:r>
-              <a:rPr lang="en-US" sz="1450" dirty="0">
+              <a:rPr lang="en-US" sz="2000" dirty="0">
                 <a:solidFill>
                   <a:srgbClr val="CBD5E1"/>
                 </a:solidFill>
@@ -5964,7 +5966,7 @@
               </a:rPr>
               <a:t>What this buys: 30+ apps shipped, updated, and supported</a:t>
             </a:r>
-            <a:endParaRPr lang="en-US" sz="1450" dirty="0"/>
+            <a:endParaRPr lang="en-US" sz="2000" dirty="0"/>
           </a:p>
         </p:txBody>
       </p:sp>
@@ -5976,8 +5978,8 @@
         </p:nvSpPr>
         <p:spPr>
           <a:xfrm>
-            <a:off x="10698480" y="6382512"/>
-            <a:ext cx="1188720" cy="365760"/>
+            <a:off x="10698480" y="6309360"/>
+            <a:ext cx="1188720" cy="411480"/>
           </a:xfrm>
           <a:prstGeom prst="rect">
             <a:avLst/>
@@ -5993,9 +5995,9 @@
               <a:buNone/>
             </a:pPr>
             <a:r>
-              <a:rPr lang="en-US" sz="1000" dirty="0">
-                <a:solidFill>
-                  <a:srgbClr val="64748B"/>
+              <a:rPr lang="en-US" sz="1800" dirty="0">
+                <a:solidFill>
+                  <a:srgbClr val="8FA3BF"/>
                 </a:solidFill>
                 <a:latin typeface="Consolas" pitchFamily="34" charset="0"/>
                 <a:ea typeface="Consolas" pitchFamily="34" charset="-122"/>
@@ -6003,7 +6005,7 @@
               </a:rPr>
               <a:t>2 / 14</a:t>
             </a:r>
-            <a:endParaRPr lang="en-US" sz="1000" dirty="0"/>
+            <a:endParaRPr lang="en-US" sz="1800" dirty="0"/>
           </a:p>
         </p:txBody>
       </p:sp>
@@ -6087,8 +6089,8 @@
         </p:nvSpPr>
         <p:spPr>
           <a:xfrm>
-            <a:off x="822960" y="502920"/>
-            <a:ext cx="10515600" cy="365760"/>
+            <a:off x="822960" y="457200"/>
+            <a:ext cx="10515600" cy="411480"/>
           </a:xfrm>
           <a:prstGeom prst="rect">
             <a:avLst/>
@@ -6104,7 +6106,7 @@
               <a:buNone/>
             </a:pPr>
             <a:r>
-              <a:rPr lang="en-US" sz="1200" spc="300" kern="0" dirty="0">
+              <a:rPr lang="en-US" sz="1800" spc="300" kern="0" dirty="0">
                 <a:solidFill>
                   <a:srgbClr val="06B6D4"/>
                 </a:solidFill>
@@ -6114,7 +6116,7 @@
               </a:rPr>
               <a:t>THE RISK</a:t>
             </a:r>
-            <a:endParaRPr lang="en-US" sz="1200" dirty="0"/>
+            <a:endParaRPr lang="en-US" sz="1800" dirty="0"/>
           </a:p>
         </p:txBody>
       </p:sp>
@@ -6165,8 +6167,8 @@
         </p:nvSpPr>
         <p:spPr>
           <a:xfrm>
-            <a:off x="868680" y="2011680"/>
-            <a:ext cx="10424160" cy="3566160"/>
+            <a:off x="868680" y="1965960"/>
+            <a:ext cx="10424160" cy="3840480"/>
           </a:xfrm>
           <a:prstGeom prst="rect">
             <a:avLst/>
@@ -6189,7 +6191,7 @@
               <a:buChar char="▸"/>
             </a:pPr>
             <a:r>
-              <a:rPr lang="en-US" sz="1600" dirty="0">
+              <a:rPr lang="en-US" sz="2000" dirty="0">
                 <a:solidFill>
                   <a:srgbClr val="CBD5E1"/>
                 </a:solidFill>
@@ -6199,7 +6201,7 @@
               </a:rPr>
               <a:t>AI changed the cost of writing code; it did not change the cost of shipping junk - that bill still comes due, with interest.</a:t>
             </a:r>
-            <a:endParaRPr lang="en-US" sz="1600" dirty="0"/>
+            <a:endParaRPr lang="en-US" sz="2000" dirty="0"/>
           </a:p>
           <a:p>
             <a:pPr marL="342900" indent="-342900">
@@ -6213,7 +6215,7 @@
               <a:buChar char="▸"/>
             </a:pPr>
             <a:r>
-              <a:rPr lang="en-US" sz="1600" dirty="0">
+              <a:rPr lang="en-US" sz="2000" dirty="0">
                 <a:solidFill>
                   <a:srgbClr val="CBD5E1"/>
                 </a:solidFill>
@@ -6223,7 +6225,7 @@
               </a:rPr>
               <a:t>The failure mode is not a crash: it is a button that does nothing and a flow that silently skips validation.</a:t>
             </a:r>
-            <a:endParaRPr lang="en-US" sz="1600" dirty="0"/>
+            <a:endParaRPr lang="en-US" sz="2000" dirty="0"/>
           </a:p>
           <a:p>
             <a:pPr marL="342900" indent="-342900">
@@ -6237,7 +6239,7 @@
               <a:buChar char="▸"/>
             </a:pPr>
             <a:r>
-              <a:rPr lang="en-US" sz="1600" dirty="0">
+              <a:rPr lang="en-US" sz="2000" dirty="0">
                 <a:solidFill>
                   <a:srgbClr val="CBD5E1"/>
                 </a:solidFill>
@@ -6247,7 +6249,7 @@
               </a:rPr>
               <a:t>Silent skips, unbumped versions, and flows that lie are invisible to a green test suite.</a:t>
             </a:r>
-            <a:endParaRPr lang="en-US" sz="1600" dirty="0"/>
+            <a:endParaRPr lang="en-US" sz="2000" dirty="0"/>
           </a:p>
           <a:p>
             <a:pPr marL="342900" indent="-342900">
@@ -6261,7 +6263,7 @@
               <a:buChar char="▸"/>
             </a:pPr>
             <a:r>
-              <a:rPr lang="en-US" sz="1600" dirty="0">
+              <a:rPr lang="en-US" sz="2000" dirty="0">
                 <a:solidFill>
                   <a:srgbClr val="CBD5E1"/>
                 </a:solidFill>
@@ -6271,7 +6273,7 @@
               </a:rPr>
               <a:t>Gates turn speed from a liability into an asset by making honesty cheaper than lying.</a:t>
             </a:r>
-            <a:endParaRPr lang="en-US" sz="1600" dirty="0"/>
+            <a:endParaRPr lang="en-US" sz="2000" dirty="0"/>
           </a:p>
         </p:txBody>
       </p:sp>
@@ -6306,8 +6308,8 @@
         </p:nvSpPr>
         <p:spPr>
           <a:xfrm>
-            <a:off x="822960" y="6053328"/>
-            <a:ext cx="9692640" cy="457200"/>
+            <a:off x="822960" y="6035040"/>
+            <a:ext cx="10424160" cy="566928"/>
           </a:xfrm>
           <a:prstGeom prst="rect">
             <a:avLst/>
@@ -6323,9 +6325,9 @@
               <a:buNone/>
             </a:pPr>
             <a:r>
-              <a:rPr lang="en-US" sz="1150" dirty="0">
-                <a:solidFill>
-                  <a:srgbClr val="64748B"/>
+              <a:rPr lang="en-US" sz="1800" dirty="0">
+                <a:solidFill>
+                  <a:srgbClr val="8FA3BF"/>
                 </a:solidFill>
                 <a:latin typeface="Segoe UI" pitchFamily="34" charset="0"/>
                 <a:ea typeface="Segoe UI" pitchFamily="34" charset="-122"/>
@@ -6333,7 +6335,7 @@
               </a:rPr>
               <a:t>Unreviewed speed is technical debt at machine pace.</a:t>
             </a:r>
-            <a:endParaRPr lang="en-US" sz="1150" dirty="0"/>
+            <a:endParaRPr lang="en-US" sz="1800" dirty="0"/>
           </a:p>
         </p:txBody>
       </p:sp>
@@ -6345,8 +6347,8 @@
         </p:nvSpPr>
         <p:spPr>
           <a:xfrm>
-            <a:off x="10698480" y="6382512"/>
-            <a:ext cx="1188720" cy="365760"/>
+            <a:off x="10698480" y="6309360"/>
+            <a:ext cx="1188720" cy="411480"/>
           </a:xfrm>
           <a:prstGeom prst="rect">
             <a:avLst/>
@@ -6362,9 +6364,9 @@
               <a:buNone/>
             </a:pPr>
             <a:r>
-              <a:rPr lang="en-US" sz="1000" dirty="0">
-                <a:solidFill>
-                  <a:srgbClr val="64748B"/>
+              <a:rPr lang="en-US" sz="1800" dirty="0">
+                <a:solidFill>
+                  <a:srgbClr val="8FA3BF"/>
                 </a:solidFill>
                 <a:latin typeface="Consolas" pitchFamily="34" charset="0"/>
                 <a:ea typeface="Consolas" pitchFamily="34" charset="-122"/>
@@ -6372,7 +6374,7 @@
               </a:rPr>
               <a:t>3 / 14</a:t>
             </a:r>
-            <a:endParaRPr lang="en-US" sz="1000" dirty="0"/>
+            <a:endParaRPr lang="en-US" sz="1800" dirty="0"/>
           </a:p>
         </p:txBody>
       </p:sp>
@@ -6456,8 +6458,8 @@
         </p:nvSpPr>
         <p:spPr>
           <a:xfrm>
-            <a:off x="822960" y="502920"/>
-            <a:ext cx="10515600" cy="365760"/>
+            <a:off x="822960" y="457200"/>
+            <a:ext cx="10515600" cy="411480"/>
           </a:xfrm>
           <a:prstGeom prst="rect">
             <a:avLst/>
@@ -6473,7 +6475,7 @@
               <a:buNone/>
             </a:pPr>
             <a:r>
-              <a:rPr lang="en-US" sz="1200" spc="300" kern="0" dirty="0">
+              <a:rPr lang="en-US" sz="1800" spc="300" kern="0" dirty="0">
                 <a:solidFill>
                   <a:srgbClr val="06B6D4"/>
                 </a:solidFill>
@@ -6483,7 +6485,7 @@
               </a:rPr>
               <a:t>THE SYSTEM</a:t>
             </a:r>
-            <a:endParaRPr lang="en-US" sz="1200" dirty="0"/>
+            <a:endParaRPr lang="en-US" sz="1800" dirty="0"/>
           </a:p>
         </p:txBody>
       </p:sp>
@@ -6534,8 +6536,8 @@
         </p:nvSpPr>
         <p:spPr>
           <a:xfrm>
-            <a:off x="822960" y="2194560"/>
-            <a:ext cx="2423160" cy="2697480"/>
+            <a:off x="822960" y="1965960"/>
+            <a:ext cx="2423160" cy="3154680"/>
           </a:xfrm>
           <a:prstGeom prst="roundRect">
             <a:avLst>
@@ -6561,7 +6563,7 @@
         </p:nvSpPr>
         <p:spPr>
           <a:xfrm>
-            <a:off x="960120" y="2514600"/>
+            <a:off x="960120" y="2194560"/>
             <a:ext cx="2148840" cy="914400"/>
           </a:xfrm>
           <a:prstGeom prst="rect">
@@ -6600,8 +6602,8 @@
         </p:nvSpPr>
         <p:spPr>
           <a:xfrm>
-            <a:off x="960120" y="3520440"/>
-            <a:ext cx="2148840" cy="502920"/>
+            <a:off x="960120" y="3200400"/>
+            <a:ext cx="2148840" cy="868680"/>
           </a:xfrm>
           <a:prstGeom prst="rect">
             <a:avLst/>
@@ -6617,7 +6619,7 @@
               <a:buNone/>
             </a:pPr>
             <a:r>
-              <a:rPr lang="en-US" sz="1450" b="1" dirty="0">
+              <a:rPr lang="en-US" sz="1800" b="1" dirty="0">
                 <a:solidFill>
                   <a:srgbClr val="FFFFFF"/>
                 </a:solidFill>
@@ -6627,7 +6629,7 @@
               </a:rPr>
               <a:t>Production apps</a:t>
             </a:r>
-            <a:endParaRPr lang="en-US" sz="1450" dirty="0"/>
+            <a:endParaRPr lang="en-US" sz="1800" dirty="0"/>
           </a:p>
         </p:txBody>
       </p:sp>
@@ -6639,8 +6641,8 @@
         </p:nvSpPr>
         <p:spPr>
           <a:xfrm>
-            <a:off x="1005840" y="4069080"/>
-            <a:ext cx="2057400" cy="685800"/>
+            <a:off x="1005840" y="4114800"/>
+            <a:ext cx="2057400" cy="914400"/>
           </a:xfrm>
           <a:prstGeom prst="rect">
             <a:avLst/>
@@ -6656,7 +6658,7 @@
               <a:buNone/>
             </a:pPr>
             <a:r>
-              <a:rPr lang="en-US" sz="1050" dirty="0">
+              <a:rPr lang="en-US" sz="1800" dirty="0">
                 <a:solidFill>
                   <a:srgbClr val="94A3B8"/>
                 </a:solidFill>
@@ -6666,7 +6668,7 @@
               </a:rPr>
               <a:t>Shipped, updated, and supported through the gated pipeline</a:t>
             </a:r>
-            <a:endParaRPr lang="en-US" sz="1050" dirty="0"/>
+            <a:endParaRPr lang="en-US" sz="1800" dirty="0"/>
           </a:p>
         </p:txBody>
       </p:sp>
@@ -6678,8 +6680,8 @@
         </p:nvSpPr>
         <p:spPr>
           <a:xfrm>
-            <a:off x="3520440" y="2194560"/>
-            <a:ext cx="2423160" cy="2697480"/>
+            <a:off x="3520440" y="1965960"/>
+            <a:ext cx="2423160" cy="3154680"/>
           </a:xfrm>
           <a:prstGeom prst="roundRect">
             <a:avLst>
@@ -6705,7 +6707,7 @@
         </p:nvSpPr>
         <p:spPr>
           <a:xfrm>
-            <a:off x="3657600" y="2514600"/>
+            <a:off x="3657600" y="2194560"/>
             <a:ext cx="2148840" cy="914400"/>
           </a:xfrm>
           <a:prstGeom prst="rect">
@@ -6744,8 +6746,8 @@
         </p:nvSpPr>
         <p:spPr>
           <a:xfrm>
-            <a:off x="3657600" y="3520440"/>
-            <a:ext cx="2148840" cy="502920"/>
+            <a:off x="3657600" y="3200400"/>
+            <a:ext cx="2148840" cy="868680"/>
           </a:xfrm>
           <a:prstGeom prst="rect">
             <a:avLst/>
@@ -6761,7 +6763,7 @@
               <a:buNone/>
             </a:pPr>
             <a:r>
-              <a:rPr lang="en-US" sz="1450" b="1" dirty="0">
+              <a:rPr lang="en-US" sz="1800" b="1" dirty="0">
                 <a:solidFill>
                   <a:srgbClr val="FFFFFF"/>
                 </a:solidFill>
@@ -6771,7 +6773,7 @@
               </a:rPr>
               <a:t>Specialist agents</a:t>
             </a:r>
-            <a:endParaRPr lang="en-US" sz="1450" dirty="0"/>
+            <a:endParaRPr lang="en-US" sz="1800" dirty="0"/>
           </a:p>
         </p:txBody>
       </p:sp>
@@ -6783,8 +6785,8 @@
         </p:nvSpPr>
         <p:spPr>
           <a:xfrm>
-            <a:off x="3703320" y="4069080"/>
-            <a:ext cx="2057400" cy="685800"/>
+            <a:off x="3703320" y="4114800"/>
+            <a:ext cx="2057400" cy="914400"/>
           </a:xfrm>
           <a:prstGeom prst="rect">
             <a:avLst/>
@@ -6800,7 +6802,7 @@
               <a:buNone/>
             </a:pPr>
             <a:r>
-              <a:rPr lang="en-US" sz="1050" dirty="0">
+              <a:rPr lang="en-US" sz="1800" dirty="0">
                 <a:solidFill>
                   <a:srgbClr val="94A3B8"/>
                 </a:solidFill>
@@ -6810,7 +6812,7 @@
               </a:rPr>
               <a:t>QA sweeps and evidence collection run on every release</a:t>
             </a:r>
-            <a:endParaRPr lang="en-US" sz="1050" dirty="0"/>
+            <a:endParaRPr lang="en-US" sz="1800" dirty="0"/>
           </a:p>
         </p:txBody>
       </p:sp>
@@ -6822,8 +6824,8 @@
         </p:nvSpPr>
         <p:spPr>
           <a:xfrm>
-            <a:off x="6217920" y="2194560"/>
-            <a:ext cx="2423160" cy="2697480"/>
+            <a:off x="6217920" y="1965960"/>
+            <a:ext cx="2423160" cy="3154680"/>
           </a:xfrm>
           <a:prstGeom prst="roundRect">
             <a:avLst>
@@ -6849,7 +6851,7 @@
         </p:nvSpPr>
         <p:spPr>
           <a:xfrm>
-            <a:off x="6355080" y="2514600"/>
+            <a:off x="6355080" y="2194560"/>
             <a:ext cx="2148840" cy="914400"/>
           </a:xfrm>
           <a:prstGeom prst="rect">
@@ -6888,8 +6890,8 @@
         </p:nvSpPr>
         <p:spPr>
           <a:xfrm>
-            <a:off x="6355080" y="3520440"/>
-            <a:ext cx="2148840" cy="502920"/>
+            <a:off x="6355080" y="3200400"/>
+            <a:ext cx="2148840" cy="868680"/>
           </a:xfrm>
           <a:prstGeom prst="rect">
             <a:avLst/>
@@ -6905,7 +6907,7 @@
               <a:buNone/>
             </a:pPr>
             <a:r>
-              <a:rPr lang="en-US" sz="1450" b="1" dirty="0">
+              <a:rPr lang="en-US" sz="1800" b="1" dirty="0">
                 <a:solidFill>
                   <a:srgbClr val="FFFFFF"/>
                 </a:solidFill>
@@ -6915,7 +6917,7 @@
               </a:rPr>
               <a:t>Production checks</a:t>
             </a:r>
-            <a:endParaRPr lang="en-US" sz="1450" dirty="0"/>
+            <a:endParaRPr lang="en-US" sz="1800" dirty="0"/>
           </a:p>
         </p:txBody>
       </p:sp>
@@ -6927,8 +6929,8 @@
         </p:nvSpPr>
         <p:spPr>
           <a:xfrm>
-            <a:off x="6400800" y="4069080"/>
-            <a:ext cx="2057400" cy="685800"/>
+            <a:off x="6400800" y="4114800"/>
+            <a:ext cx="2057400" cy="914400"/>
           </a:xfrm>
           <a:prstGeom prst="rect">
             <a:avLst/>
@@ -6944,7 +6946,7 @@
               <a:buNone/>
             </a:pPr>
             <a:r>
-              <a:rPr lang="en-US" sz="1050" dirty="0">
+              <a:rPr lang="en-US" sz="1800" dirty="0">
                 <a:solidFill>
                   <a:srgbClr val="94A3B8"/>
                 </a:solidFill>
@@ -6954,7 +6956,7 @@
               </a:rPr>
               <a:t>Passing in the live ZalinOS platform</a:t>
             </a:r>
-            <a:endParaRPr lang="en-US" sz="1050" dirty="0"/>
+            <a:endParaRPr lang="en-US" sz="1800" dirty="0"/>
           </a:p>
         </p:txBody>
       </p:sp>
@@ -6966,8 +6968,8 @@
         </p:nvSpPr>
         <p:spPr>
           <a:xfrm>
-            <a:off x="8915400" y="2194560"/>
-            <a:ext cx="2423160" cy="2697480"/>
+            <a:off x="8915400" y="1965960"/>
+            <a:ext cx="2423160" cy="3154680"/>
           </a:xfrm>
           <a:prstGeom prst="roundRect">
             <a:avLst>
@@ -6993,7 +6995,7 @@
         </p:nvSpPr>
         <p:spPr>
           <a:xfrm>
-            <a:off x="9052560" y="2514600"/>
+            <a:off x="9052560" y="2194560"/>
             <a:ext cx="2148840" cy="914400"/>
           </a:xfrm>
           <a:prstGeom prst="rect">
@@ -7032,8 +7034,8 @@
         </p:nvSpPr>
         <p:spPr>
           <a:xfrm>
-            <a:off x="9052560" y="3520440"/>
-            <a:ext cx="2148840" cy="502920"/>
+            <a:off x="9052560" y="3200400"/>
+            <a:ext cx="2148840" cy="868680"/>
           </a:xfrm>
           <a:prstGeom prst="rect">
             <a:avLst/>
@@ -7049,7 +7051,7 @@
               <a:buNone/>
             </a:pPr>
             <a:r>
-              <a:rPr lang="en-US" sz="1450" b="1" dirty="0">
+              <a:rPr lang="en-US" sz="1800" b="1" dirty="0">
                 <a:solidFill>
                   <a:srgbClr val="FFFFFF"/>
                 </a:solidFill>
@@ -7059,7 +7061,7 @@
               </a:rPr>
               <a:t>Router accuracy</a:t>
             </a:r>
-            <a:endParaRPr lang="en-US" sz="1450" dirty="0"/>
+            <a:endParaRPr lang="en-US" sz="1800" dirty="0"/>
           </a:p>
         </p:txBody>
       </p:sp>
@@ -7071,8 +7073,8 @@
         </p:nvSpPr>
         <p:spPr>
           <a:xfrm>
-            <a:off x="9098280" y="4069080"/>
-            <a:ext cx="2057400" cy="685800"/>
+            <a:off x="9098280" y="4114800"/>
+            <a:ext cx="2057400" cy="914400"/>
           </a:xfrm>
           <a:prstGeom prst="rect">
             <a:avLst/>
@@ -7088,7 +7090,7 @@
               <a:buNone/>
             </a:pPr>
             <a:r>
-              <a:rPr lang="en-US" sz="1050" dirty="0">
+              <a:rPr lang="en-US" sz="1800" dirty="0">
                 <a:solidFill>
                   <a:srgbClr val="94A3B8"/>
                 </a:solidFill>
@@ -7098,7 +7100,7 @@
               </a:rPr>
               <a:t>On the 30-query intent-router validation set</a:t>
             </a:r>
-            <a:endParaRPr lang="en-US" sz="1050" dirty="0"/>
+            <a:endParaRPr lang="en-US" sz="1800" dirty="0"/>
           </a:p>
         </p:txBody>
       </p:sp>
@@ -7110,7 +7112,7 @@
         </p:nvSpPr>
         <p:spPr>
           <a:xfrm>
-            <a:off x="822960" y="5413248"/>
+            <a:off x="822960" y="5321808"/>
             <a:ext cx="10515600" cy="0"/>
           </a:xfrm>
           <a:prstGeom prst="line">
@@ -7133,8 +7135,8 @@
         </p:nvSpPr>
         <p:spPr>
           <a:xfrm>
-            <a:off x="822960" y="5504688"/>
-            <a:ext cx="10424160" cy="411480"/>
+            <a:off x="822960" y="5394960"/>
+            <a:ext cx="10424160" cy="502920"/>
           </a:xfrm>
           <a:prstGeom prst="rect">
             <a:avLst/>
@@ -7150,7 +7152,7 @@
               <a:buNone/>
             </a:pPr>
             <a:r>
-              <a:rPr lang="en-US" sz="1300" i="1" dirty="0">
+              <a:rPr lang="en-US" sz="1800" i="1" dirty="0">
                 <a:solidFill>
                   <a:srgbClr val="06B6D4"/>
                 </a:solidFill>
@@ -7160,7 +7162,7 @@
               </a:rPr>
               <a:t>→  Numbers from the public portfolio and published build logs.</a:t>
             </a:r>
-            <a:endParaRPr lang="en-US" sz="1300" dirty="0"/>
+            <a:endParaRPr lang="en-US" sz="1800" dirty="0"/>
           </a:p>
         </p:txBody>
       </p:sp>
@@ -7172,8 +7174,8 @@
         </p:nvSpPr>
         <p:spPr>
           <a:xfrm>
-            <a:off x="10698480" y="6382512"/>
-            <a:ext cx="1188720" cy="365760"/>
+            <a:off x="10698480" y="6309360"/>
+            <a:ext cx="1188720" cy="411480"/>
           </a:xfrm>
           <a:prstGeom prst="rect">
             <a:avLst/>
@@ -7189,9 +7191,9 @@
               <a:buNone/>
             </a:pPr>
             <a:r>
-              <a:rPr lang="en-US" sz="1000" dirty="0">
-                <a:solidFill>
-                  <a:srgbClr val="64748B"/>
+              <a:rPr lang="en-US" sz="1800" dirty="0">
+                <a:solidFill>
+                  <a:srgbClr val="8FA3BF"/>
                 </a:solidFill>
                 <a:latin typeface="Consolas" pitchFamily="34" charset="0"/>
                 <a:ea typeface="Consolas" pitchFamily="34" charset="-122"/>
@@ -7199,7 +7201,7 @@
               </a:rPr>
               <a:t>4 / 14</a:t>
             </a:r>
-            <a:endParaRPr lang="en-US" sz="1000" dirty="0"/>
+            <a:endParaRPr lang="en-US" sz="1800" dirty="0"/>
           </a:p>
         </p:txBody>
       </p:sp>
@@ -7283,8 +7285,8 @@
         </p:nvSpPr>
         <p:spPr>
           <a:xfrm>
-            <a:off x="822960" y="502920"/>
-            <a:ext cx="10515600" cy="365760"/>
+            <a:off x="822960" y="457200"/>
+            <a:ext cx="10515600" cy="411480"/>
           </a:xfrm>
           <a:prstGeom prst="rect">
             <a:avLst/>
@@ -7300,7 +7302,7 @@
               <a:buNone/>
             </a:pPr>
             <a:r>
-              <a:rPr lang="en-US" sz="1200" spc="300" kern="0" dirty="0">
+              <a:rPr lang="en-US" sz="1800" spc="300" kern="0" dirty="0">
                 <a:solidFill>
                   <a:srgbClr val="06B6D4"/>
                 </a:solidFill>
@@ -7310,7 +7312,7 @@
               </a:rPr>
               <a:t>PIPELINE</a:t>
             </a:r>
-            <a:endParaRPr lang="en-US" sz="1200" dirty="0"/>
+            <a:endParaRPr lang="en-US" sz="1800" dirty="0"/>
           </a:p>
         </p:txBody>
       </p:sp>
@@ -7361,12 +7363,12 @@
         </p:nvSpPr>
         <p:spPr>
           <a:xfrm>
-            <a:off x="1075792" y="2514600"/>
-            <a:ext cx="2331720" cy="2103120"/>
+            <a:off x="1075792" y="2331720"/>
+            <a:ext cx="2331720" cy="2697480"/>
           </a:xfrm>
           <a:prstGeom prst="roundRect">
             <a:avLst>
-              <a:gd name="adj" fmla="val 3043"/>
+              <a:gd name="adj" fmla="val 2745"/>
             </a:avLst>
           </a:prstGeom>
           <a:solidFill>
@@ -7388,8 +7390,8 @@
         </p:nvSpPr>
         <p:spPr>
           <a:xfrm>
-            <a:off x="1203808" y="2633472"/>
-            <a:ext cx="2075688" cy="310896"/>
+            <a:off x="1203808" y="2450592"/>
+            <a:ext cx="2075688" cy="365760"/>
           </a:xfrm>
           <a:prstGeom prst="rect">
             <a:avLst/>
@@ -7405,7 +7407,7 @@
               <a:buNone/>
             </a:pPr>
             <a:r>
-              <a:rPr lang="en-US" sz="1100" b="1" dirty="0">
+              <a:rPr lang="en-US" sz="1800" b="1" dirty="0">
                 <a:solidFill>
                   <a:srgbClr val="3B82F6"/>
                 </a:solidFill>
@@ -7415,7 +7417,7 @@
               </a:rPr>
               <a:t>01</a:t>
             </a:r>
-            <a:endParaRPr lang="en-US" sz="1100" dirty="0"/>
+            <a:endParaRPr lang="en-US" sz="1800" dirty="0"/>
           </a:p>
         </p:txBody>
       </p:sp>
@@ -7427,8 +7429,8 @@
         </p:nvSpPr>
         <p:spPr>
           <a:xfrm>
-            <a:off x="1203808" y="2962656"/>
-            <a:ext cx="2075688" cy="566928"/>
+            <a:off x="1203808" y="2834640"/>
+            <a:ext cx="2075688" cy="713232"/>
           </a:xfrm>
           <a:prstGeom prst="rect">
             <a:avLst/>
@@ -7444,7 +7446,7 @@
               <a:buNone/>
             </a:pPr>
             <a:r>
-              <a:rPr lang="en-US" sz="1350" b="1" dirty="0">
+              <a:rPr lang="en-US" sz="1800" b="1" dirty="0">
                 <a:solidFill>
                   <a:srgbClr val="FFFFFF"/>
                 </a:solidFill>
@@ -7454,7 +7456,7 @@
               </a:rPr>
               <a:t>Build</a:t>
             </a:r>
-            <a:endParaRPr lang="en-US" sz="1350" dirty="0"/>
+            <a:endParaRPr lang="en-US" sz="1800" dirty="0"/>
           </a:p>
         </p:txBody>
       </p:sp>
@@ -7466,8 +7468,8 @@
         </p:nvSpPr>
         <p:spPr>
           <a:xfrm>
-            <a:off x="1203808" y="3566160"/>
-            <a:ext cx="2075688" cy="960120"/>
+            <a:off x="1203808" y="3584448"/>
+            <a:ext cx="2075688" cy="1371600"/>
           </a:xfrm>
           <a:prstGeom prst="rect">
             <a:avLst/>
@@ -7483,7 +7485,7 @@
               <a:buNone/>
             </a:pPr>
             <a:r>
-              <a:rPr lang="en-US" sz="980" dirty="0">
+              <a:rPr lang="en-US" sz="1800" dirty="0">
                 <a:solidFill>
                   <a:srgbClr val="CBD5E1"/>
                 </a:solidFill>
@@ -7493,7 +7495,7 @@
               </a:rPr>
               <a:t>Engineering agents produce versioned builds from structured specs.</a:t>
             </a:r>
-            <a:endParaRPr lang="en-US" sz="980" dirty="0"/>
+            <a:endParaRPr lang="en-US" sz="1800" dirty="0"/>
           </a:p>
         </p:txBody>
       </p:sp>
@@ -7505,7 +7507,7 @@
         </p:nvSpPr>
         <p:spPr>
           <a:xfrm>
-            <a:off x="3421228" y="3419856"/>
+            <a:off x="3421228" y="3566160"/>
             <a:ext cx="210312" cy="274320"/>
           </a:xfrm>
           <a:prstGeom prst="rightArrow">
@@ -7525,12 +7527,12 @@
         </p:nvSpPr>
         <p:spPr>
           <a:xfrm>
-            <a:off x="3645256" y="2514600"/>
-            <a:ext cx="2331720" cy="2103120"/>
+            <a:off x="3645256" y="2331720"/>
+            <a:ext cx="2331720" cy="2697480"/>
           </a:xfrm>
           <a:prstGeom prst="roundRect">
             <a:avLst>
-              <a:gd name="adj" fmla="val 3043"/>
+              <a:gd name="adj" fmla="val 2745"/>
             </a:avLst>
           </a:prstGeom>
           <a:solidFill>
@@ -7552,8 +7554,8 @@
         </p:nvSpPr>
         <p:spPr>
           <a:xfrm>
-            <a:off x="3773272" y="2633472"/>
-            <a:ext cx="2075688" cy="310896"/>
+            <a:off x="3773272" y="2450592"/>
+            <a:ext cx="2075688" cy="365760"/>
           </a:xfrm>
           <a:prstGeom prst="rect">
             <a:avLst/>
@@ -7569,7 +7571,7 @@
               <a:buNone/>
             </a:pPr>
             <a:r>
-              <a:rPr lang="en-US" sz="1100" b="1" dirty="0">
+              <a:rPr lang="en-US" sz="1800" b="1" dirty="0">
                 <a:solidFill>
                   <a:srgbClr val="06B6D4"/>
                 </a:solidFill>
@@ -7579,7 +7581,7 @@
               </a:rPr>
               <a:t>02</a:t>
             </a:r>
-            <a:endParaRPr lang="en-US" sz="1100" dirty="0"/>
+            <a:endParaRPr lang="en-US" sz="1800" dirty="0"/>
           </a:p>
         </p:txBody>
       </p:sp>
@@ -7591,8 +7593,8 @@
         </p:nvSpPr>
         <p:spPr>
           <a:xfrm>
-            <a:off x="3773272" y="2962656"/>
-            <a:ext cx="2075688" cy="566928"/>
+            <a:off x="3773272" y="2834640"/>
+            <a:ext cx="2075688" cy="713232"/>
           </a:xfrm>
           <a:prstGeom prst="rect">
             <a:avLst/>
@@ -7608,7 +7610,7 @@
               <a:buNone/>
             </a:pPr>
             <a:r>
-              <a:rPr lang="en-US" sz="1350" b="1" dirty="0">
+              <a:rPr lang="en-US" sz="1800" b="1" dirty="0">
                 <a:solidFill>
                   <a:srgbClr val="FFFFFF"/>
                 </a:solidFill>
@@ -7618,7 +7620,7 @@
               </a:rPr>
               <a:t>Gate</a:t>
             </a:r>
-            <a:endParaRPr lang="en-US" sz="1350" dirty="0"/>
+            <a:endParaRPr lang="en-US" sz="1800" dirty="0"/>
           </a:p>
         </p:txBody>
       </p:sp>
@@ -7630,8 +7632,8 @@
         </p:nvSpPr>
         <p:spPr>
           <a:xfrm>
-            <a:off x="3773272" y="3566160"/>
-            <a:ext cx="2075688" cy="960120"/>
+            <a:off x="3773272" y="3584448"/>
+            <a:ext cx="2075688" cy="1371600"/>
           </a:xfrm>
           <a:prstGeom prst="rect">
             <a:avLst/>
@@ -7647,7 +7649,7 @@
               <a:buNone/>
             </a:pPr>
             <a:r>
-              <a:rPr lang="en-US" sz="980" dirty="0">
+              <a:rPr lang="en-US" sz="1800" dirty="0">
                 <a:solidFill>
                   <a:srgbClr val="CBD5E1"/>
                 </a:solidFill>
@@ -7657,7 +7659,7 @@
               </a:rPr>
               <a:t>QA walks the golden path, sweeps for dead buttons, and checks offline behavior.</a:t>
             </a:r>
-            <a:endParaRPr lang="en-US" sz="980" dirty="0"/>
+            <a:endParaRPr lang="en-US" sz="1800" dirty="0"/>
           </a:p>
         </p:txBody>
       </p:sp>
@@ -7669,7 +7671,7 @@
         </p:nvSpPr>
         <p:spPr>
           <a:xfrm>
-            <a:off x="5990692" y="3419856"/>
+            <a:off x="5990692" y="3566160"/>
             <a:ext cx="210312" cy="274320"/>
           </a:xfrm>
           <a:prstGeom prst="rightArrow">
@@ -7689,12 +7691,12 @@
         </p:nvSpPr>
         <p:spPr>
           <a:xfrm>
-            <a:off x="6214720" y="2514600"/>
-            <a:ext cx="2331720" cy="2103120"/>
+            <a:off x="6214720" y="2331720"/>
+            <a:ext cx="2331720" cy="2697480"/>
           </a:xfrm>
           <a:prstGeom prst="roundRect">
             <a:avLst>
-              <a:gd name="adj" fmla="val 3043"/>
+              <a:gd name="adj" fmla="val 2745"/>
             </a:avLst>
           </a:prstGeom>
           <a:solidFill>
@@ -7716,8 +7718,8 @@
         </p:nvSpPr>
         <p:spPr>
           <a:xfrm>
-            <a:off x="6342736" y="2633472"/>
-            <a:ext cx="2075688" cy="310896"/>
+            <a:off x="6342736" y="2450592"/>
+            <a:ext cx="2075688" cy="365760"/>
           </a:xfrm>
           <a:prstGeom prst="rect">
             <a:avLst/>
@@ -7733,7 +7735,7 @@
               <a:buNone/>
             </a:pPr>
             <a:r>
-              <a:rPr lang="en-US" sz="1100" b="1" dirty="0">
+              <a:rPr lang="en-US" sz="1800" b="1" dirty="0">
                 <a:solidFill>
                   <a:srgbClr val="3B82F6"/>
                 </a:solidFill>
@@ -7743,7 +7745,7 @@
               </a:rPr>
               <a:t>03</a:t>
             </a:r>
-            <a:endParaRPr lang="en-US" sz="1100" dirty="0"/>
+            <a:endParaRPr lang="en-US" sz="1800" dirty="0"/>
           </a:p>
         </p:txBody>
       </p:sp>
@@ -7755,8 +7757,8 @@
         </p:nvSpPr>
         <p:spPr>
           <a:xfrm>
-            <a:off x="6342736" y="2962656"/>
-            <a:ext cx="2075688" cy="566928"/>
+            <a:off x="6342736" y="2834640"/>
+            <a:ext cx="2075688" cy="713232"/>
           </a:xfrm>
           <a:prstGeom prst="rect">
             <a:avLst/>
@@ -7772,7 +7774,7 @@
               <a:buNone/>
             </a:pPr>
             <a:r>
-              <a:rPr lang="en-US" sz="1350" b="1" dirty="0">
+              <a:rPr lang="en-US" sz="1800" b="1" dirty="0">
                 <a:solidFill>
                   <a:srgbClr val="FFFFFF"/>
                 </a:solidFill>
@@ -7782,7 +7784,7 @@
               </a:rPr>
               <a:t>Promote</a:t>
             </a:r>
-            <a:endParaRPr lang="en-US" sz="1350" dirty="0"/>
+            <a:endParaRPr lang="en-US" sz="1800" dirty="0"/>
           </a:p>
         </p:txBody>
       </p:sp>
@@ -7794,8 +7796,8 @@
         </p:nvSpPr>
         <p:spPr>
           <a:xfrm>
-            <a:off x="6342736" y="3566160"/>
-            <a:ext cx="2075688" cy="960120"/>
+            <a:off x="6342736" y="3584448"/>
+            <a:ext cx="2075688" cy="1371600"/>
           </a:xfrm>
           <a:prstGeom prst="rect">
             <a:avLst/>
@@ -7811,7 +7813,7 @@
               <a:buNone/>
             </a:pPr>
             <a:r>
-              <a:rPr lang="en-US" sz="980" dirty="0">
+              <a:rPr lang="en-US" sz="1800" dirty="0">
                 <a:solidFill>
                   <a:srgbClr val="CBD5E1"/>
                 </a:solidFill>
@@ -7821,7 +7823,7 @@
               </a:rPr>
               <a:t>New versions land in one place the owner always knows - no scatter, no surprises.</a:t>
             </a:r>
-            <a:endParaRPr lang="en-US" sz="980" dirty="0"/>
+            <a:endParaRPr lang="en-US" sz="1800" dirty="0"/>
           </a:p>
         </p:txBody>
       </p:sp>
@@ -7833,7 +7835,7 @@
         </p:nvSpPr>
         <p:spPr>
           <a:xfrm>
-            <a:off x="8560156" y="3419856"/>
+            <a:off x="8560156" y="3566160"/>
             <a:ext cx="210312" cy="274320"/>
           </a:xfrm>
           <a:prstGeom prst="rightArrow">
@@ -7853,12 +7855,12 @@
         </p:nvSpPr>
         <p:spPr>
           <a:xfrm>
-            <a:off x="8784184" y="2514600"/>
-            <a:ext cx="2331720" cy="2103120"/>
+            <a:off x="8784184" y="2331720"/>
+            <a:ext cx="2331720" cy="2697480"/>
           </a:xfrm>
           <a:prstGeom prst="roundRect">
             <a:avLst>
-              <a:gd name="adj" fmla="val 3043"/>
+              <a:gd name="adj" fmla="val 2745"/>
             </a:avLst>
           </a:prstGeom>
           <a:solidFill>
@@ -7880,8 +7882,8 @@
         </p:nvSpPr>
         <p:spPr>
           <a:xfrm>
-            <a:off x="8912200" y="2633472"/>
-            <a:ext cx="2075688" cy="310896"/>
+            <a:off x="8912200" y="2450592"/>
+            <a:ext cx="2075688" cy="365760"/>
           </a:xfrm>
           <a:prstGeom prst="rect">
             <a:avLst/>
@@ -7897,7 +7899,7 @@
               <a:buNone/>
             </a:pPr>
             <a:r>
-              <a:rPr lang="en-US" sz="1100" b="1" dirty="0">
+              <a:rPr lang="en-US" sz="1800" b="1" dirty="0">
                 <a:solidFill>
                   <a:srgbClr val="06B6D4"/>
                 </a:solidFill>
@@ -7907,7 +7909,7 @@
               </a:rPr>
               <a:t>04</a:t>
             </a:r>
-            <a:endParaRPr lang="en-US" sz="1100" dirty="0"/>
+            <a:endParaRPr lang="en-US" sz="1800" dirty="0"/>
           </a:p>
         </p:txBody>
       </p:sp>
@@ -7919,8 +7921,8 @@
         </p:nvSpPr>
         <p:spPr>
           <a:xfrm>
-            <a:off x="8912200" y="2962656"/>
-            <a:ext cx="2075688" cy="566928"/>
+            <a:off x="8912200" y="2834640"/>
+            <a:ext cx="2075688" cy="713232"/>
           </a:xfrm>
           <a:prstGeom prst="rect">
             <a:avLst/>
@@ -7936,7 +7938,7 @@
               <a:buNone/>
             </a:pPr>
             <a:r>
-              <a:rPr lang="en-US" sz="1350" b="1" dirty="0">
+              <a:rPr lang="en-US" sz="1800" b="1" dirty="0">
                 <a:solidFill>
                   <a:srgbClr val="FFFFFF"/>
                 </a:solidFill>
@@ -7946,7 +7948,7 @@
               </a:rPr>
               <a:t>Record</a:t>
             </a:r>
-            <a:endParaRPr lang="en-US" sz="1350" dirty="0"/>
+            <a:endParaRPr lang="en-US" sz="1800" dirty="0"/>
           </a:p>
         </p:txBody>
       </p:sp>
@@ -7958,8 +7960,8 @@
         </p:nvSpPr>
         <p:spPr>
           <a:xfrm>
-            <a:off x="8912200" y="3566160"/>
-            <a:ext cx="2075688" cy="960120"/>
+            <a:off x="8912200" y="3584448"/>
+            <a:ext cx="2075688" cy="1371600"/>
           </a:xfrm>
           <a:prstGeom prst="rect">
             <a:avLst/>
@@ -7975,7 +7977,7 @@
               <a:buNone/>
             </a:pPr>
             <a:r>
-              <a:rPr lang="en-US" sz="980" dirty="0">
+              <a:rPr lang="en-US" sz="1800" dirty="0">
                 <a:solidFill>
                   <a:srgbClr val="CBD5E1"/>
                 </a:solidFill>
@@ -7985,7 +7987,7 @@
               </a:rPr>
               <a:t>Every app keeps a status file: features, version history, decisions.</a:t>
             </a:r>
-            <a:endParaRPr lang="en-US" sz="980" dirty="0"/>
+            <a:endParaRPr lang="en-US" sz="1800" dirty="0"/>
           </a:p>
         </p:txBody>
       </p:sp>
@@ -8020,8 +8022,8 @@
         </p:nvSpPr>
         <p:spPr>
           <a:xfrm>
-            <a:off x="822960" y="6053328"/>
-            <a:ext cx="9692640" cy="457200"/>
+            <a:off x="822960" y="6035040"/>
+            <a:ext cx="10424160" cy="566928"/>
           </a:xfrm>
           <a:prstGeom prst="rect">
             <a:avLst/>
@@ -8037,9 +8039,9 @@
               <a:buNone/>
             </a:pPr>
             <a:r>
-              <a:rPr lang="en-US" sz="1150" dirty="0">
-                <a:solidFill>
-                  <a:srgbClr val="64748B"/>
+              <a:rPr lang="en-US" sz="1800" dirty="0">
+                <a:solidFill>
+                  <a:srgbClr val="8FA3BF"/>
                 </a:solidFill>
                 <a:latin typeface="Segoe UI" pitchFamily="34" charset="0"/>
                 <a:ea typeface="Segoe UI" pitchFamily="34" charset="-122"/>
@@ -8047,7 +8049,7 @@
               </a:rPr>
               <a:t>With 30+ apps you do not maintain apps - you maintain the pipeline.</a:t>
             </a:r>
-            <a:endParaRPr lang="en-US" sz="1150" dirty="0"/>
+            <a:endParaRPr lang="en-US" sz="1800" dirty="0"/>
           </a:p>
         </p:txBody>
       </p:sp>
@@ -8059,8 +8061,8 @@
         </p:nvSpPr>
         <p:spPr>
           <a:xfrm>
-            <a:off x="10698480" y="6382512"/>
-            <a:ext cx="1188720" cy="365760"/>
+            <a:off x="10698480" y="6309360"/>
+            <a:ext cx="1188720" cy="411480"/>
           </a:xfrm>
           <a:prstGeom prst="rect">
             <a:avLst/>
@@ -8076,9 +8078,9 @@
               <a:buNone/>
             </a:pPr>
             <a:r>
-              <a:rPr lang="en-US" sz="1000" dirty="0">
-                <a:solidFill>
-                  <a:srgbClr val="64748B"/>
+              <a:rPr lang="en-US" sz="1800" dirty="0">
+                <a:solidFill>
+                  <a:srgbClr val="8FA3BF"/>
                 </a:solidFill>
                 <a:latin typeface="Consolas" pitchFamily="34" charset="0"/>
                 <a:ea typeface="Consolas" pitchFamily="34" charset="-122"/>
@@ -8086,7 +8088,7 @@
               </a:rPr>
               <a:t>5 / 14</a:t>
             </a:r>
-            <a:endParaRPr lang="en-US" sz="1000" dirty="0"/>
+            <a:endParaRPr lang="en-US" sz="1800" dirty="0"/>
           </a:p>
         </p:txBody>
       </p:sp>
@@ -8170,8 +8172,8 @@
         </p:nvSpPr>
         <p:spPr>
           <a:xfrm>
-            <a:off x="822960" y="502920"/>
-            <a:ext cx="10515600" cy="365760"/>
+            <a:off x="822960" y="457200"/>
+            <a:ext cx="10515600" cy="411480"/>
           </a:xfrm>
           <a:prstGeom prst="rect">
             <a:avLst/>
@@ -8187,7 +8189,7 @@
               <a:buNone/>
             </a:pPr>
             <a:r>
-              <a:rPr lang="en-US" sz="1200" spc="300" kern="0" dirty="0">
+              <a:rPr lang="en-US" sz="1800" spc="300" kern="0" dirty="0">
                 <a:solidFill>
                   <a:srgbClr val="06B6D4"/>
                 </a:solidFill>
@@ -8197,7 +8199,7 @@
               </a:rPr>
               <a:t>THE GATES</a:t>
             </a:r>
-            <a:endParaRPr lang="en-US" sz="1200" dirty="0"/>
+            <a:endParaRPr lang="en-US" sz="1800" dirty="0"/>
           </a:p>
         </p:txBody>
       </p:sp>
@@ -8255,7 +8257,7 @@
           </p:nvPr>
         </p:nvGraphicFramePr>
         <p:xfrm>
-          <a:off x="822960" y="2011680"/>
+          <a:off x="822960" y="1828800"/>
           <a:ext cx="10515600" cy="914400"/>
         </p:xfrm>
         <a:graphic>
@@ -8268,7 +8270,7 @@
                 <a:gridCol w="2628900"/>
                 <a:gridCol w="2628900"/>
               </a:tblGrid>
-              <a:tr h="402336">
+              <a:tr h="457200">
                 <a:tc>
                   <a:txBody>
                     <a:bodyPr/>
@@ -8278,7 +8280,7 @@
                         <a:buNone/>
                       </a:pPr>
                       <a:r>
-                        <a:rPr lang="en-US" sz="1150" b="1" dirty="0">
+                        <a:rPr lang="en-US" sz="1800" b="1" dirty="0">
                           <a:solidFill>
                             <a:srgbClr val="FFFFFF"/>
                           </a:solidFill>
@@ -8288,14 +8290,14 @@
                         </a:rPr>
                         <a:t>Gate</a:t>
                       </a:r>
-                      <a:endParaRPr lang="en-US" sz="1150" dirty="0">
+                      <a:endParaRPr lang="en-US" sz="1800" dirty="0">
                         <a:latin typeface="Segoe UI" charset="0"/>
                         <a:ea typeface="Segoe UI" charset="0"/>
                         <a:cs typeface="Segoe UI" charset="0"/>
                       </a:endParaRPr>
                     </a:p>
                   </a:txBody>
-                  <a:tcPr marL="64008" marR="64008" marT="64008" marB="64008" anchor="ctr">
+                  <a:tcPr marL="36576" marR="36576" marT="36576" marB="36576" anchor="ctr">
                     <a:lnL w="6350" cap="flat" cmpd="sng" algn="ctr">
                       <a:solidFill>
                         <a:srgbClr val="24365A"/>
@@ -8346,7 +8348,7 @@
                         <a:buNone/>
                       </a:pPr>
                       <a:r>
-                        <a:rPr lang="en-US" sz="1150" b="1" dirty="0">
+                        <a:rPr lang="en-US" sz="1800" b="1" dirty="0">
                           <a:solidFill>
                             <a:srgbClr val="FFFFFF"/>
                           </a:solidFill>
@@ -8356,14 +8358,14 @@
                         </a:rPr>
                         <a:t>Check</a:t>
                       </a:r>
-                      <a:endParaRPr lang="en-US" sz="1150" dirty="0">
+                      <a:endParaRPr lang="en-US" sz="1800" dirty="0">
                         <a:latin typeface="Segoe UI" charset="0"/>
                         <a:ea typeface="Segoe UI" charset="0"/>
                         <a:cs typeface="Segoe UI" charset="0"/>
                       </a:endParaRPr>
                     </a:p>
                   </a:txBody>
-                  <a:tcPr marL="64008" marR="64008" marT="64008" marB="64008" anchor="ctr">
+                  <a:tcPr marL="36576" marR="36576" marT="36576" marB="36576" anchor="ctr">
                     <a:lnL w="6350" cap="flat" cmpd="sng" algn="ctr">
                       <a:solidFill>
                         <a:srgbClr val="24365A"/>
@@ -8414,7 +8416,7 @@
                         <a:buNone/>
                       </a:pPr>
                       <a:r>
-                        <a:rPr lang="en-US" sz="1150" b="1" dirty="0">
+                        <a:rPr lang="en-US" sz="1800" b="1" dirty="0">
                           <a:solidFill>
                             <a:srgbClr val="FFFFFF"/>
                           </a:solidFill>
@@ -8424,14 +8426,14 @@
                         </a:rPr>
                         <a:t>Pass condition</a:t>
                       </a:r>
-                      <a:endParaRPr lang="en-US" sz="1150" dirty="0">
+                      <a:endParaRPr lang="en-US" sz="1800" dirty="0">
                         <a:latin typeface="Segoe UI" charset="0"/>
                         <a:ea typeface="Segoe UI" charset="0"/>
                         <a:cs typeface="Segoe UI" charset="0"/>
                       </a:endParaRPr>
                     </a:p>
                   </a:txBody>
-                  <a:tcPr marL="64008" marR="64008" marT="64008" marB="64008" anchor="ctr">
+                  <a:tcPr marL="36576" marR="36576" marT="36576" marB="36576" anchor="ctr">
                     <a:lnL w="6350" cap="flat" cmpd="sng" algn="ctr">
                       <a:solidFill>
                         <a:srgbClr val="24365A"/>
@@ -8482,7 +8484,7 @@
                         <a:buNone/>
                       </a:pPr>
                       <a:r>
-                        <a:rPr lang="en-US" sz="1150" b="1" dirty="0">
+                        <a:rPr lang="en-US" sz="1800" b="1" dirty="0">
                           <a:solidFill>
                             <a:srgbClr val="FFFFFF"/>
                           </a:solidFill>
@@ -8492,14 +8494,14 @@
                         </a:rPr>
                         <a:t>Evidence</a:t>
                       </a:r>
-                      <a:endParaRPr lang="en-US" sz="1150" dirty="0">
+                      <a:endParaRPr lang="en-US" sz="1800" dirty="0">
                         <a:latin typeface="Segoe UI" charset="0"/>
                         <a:ea typeface="Segoe UI" charset="0"/>
                         <a:cs typeface="Segoe UI" charset="0"/>
                       </a:endParaRPr>
                     </a:p>
                   </a:txBody>
-                  <a:tcPr marL="64008" marR="64008" marT="64008" marB="64008" anchor="ctr">
+                  <a:tcPr marL="36576" marR="36576" marT="36576" marB="36576" anchor="ctr">
                     <a:lnL w="6350" cap="flat" cmpd="sng" algn="ctr">
                       <a:solidFill>
                         <a:srgbClr val="24365A"/>
@@ -8542,7 +8544,7 @@
                   </a:tcPr>
                 </a:tc>
               </a:tr>
-              <a:tr h="402336">
+              <a:tr h="457200">
                 <a:tc>
                   <a:txBody>
                     <a:bodyPr/>
@@ -8552,7 +8554,7 @@
                         <a:buNone/>
                       </a:pPr>
                       <a:r>
-                        <a:rPr lang="en-US" sz="1080" dirty="0">
+                        <a:rPr lang="en-US" sz="1800" dirty="0">
                           <a:solidFill>
                             <a:srgbClr val="CBD5E1"/>
                           </a:solidFill>
@@ -8562,14 +8564,14 @@
                         </a:rPr>
                         <a:t>1 · Golden path</a:t>
                       </a:r>
-                      <a:endParaRPr lang="en-US" sz="1080" dirty="0">
+                      <a:endParaRPr lang="en-US" sz="1800" dirty="0">
                         <a:latin typeface="Segoe UI" charset="0"/>
                         <a:ea typeface="Segoe UI" charset="0"/>
                         <a:cs typeface="Segoe UI" charset="0"/>
                       </a:endParaRPr>
                     </a:p>
                   </a:txBody>
-                  <a:tcPr marL="64008" marR="64008" marT="64008" marB="64008" anchor="ctr">
+                  <a:tcPr marL="36576" marR="36576" marT="36576" marB="36576" anchor="ctr">
                     <a:lnL w="6350" cap="flat" cmpd="sng" algn="ctr">
                       <a:solidFill>
                         <a:srgbClr val="24365A"/>
@@ -8620,7 +8622,7 @@
                         <a:buNone/>
                       </a:pPr>
                       <a:r>
-                        <a:rPr lang="en-US" sz="1080" dirty="0">
+                        <a:rPr lang="en-US" sz="1800" dirty="0">
                           <a:solidFill>
                             <a:srgbClr val="CBD5E1"/>
                           </a:solidFill>
@@ -8630,14 +8632,14 @@
                         </a:rPr>
                         <a:t>Walk the single most important user journey end-to-end</a:t>
                       </a:r>
-                      <a:endParaRPr lang="en-US" sz="1080" dirty="0">
+                      <a:endParaRPr lang="en-US" sz="1800" dirty="0">
                         <a:latin typeface="Segoe UI" charset="0"/>
                         <a:ea typeface="Segoe UI" charset="0"/>
                         <a:cs typeface="Segoe UI" charset="0"/>
                       </a:endParaRPr>
                     </a:p>
                   </a:txBody>
-                  <a:tcPr marL="64008" marR="64008" marT="64008" marB="64008" anchor="ctr">
+                  <a:tcPr marL="36576" marR="36576" marT="36576" marB="36576" anchor="ctr">
                     <a:lnL w="6350" cap="flat" cmpd="sng" algn="ctr">
                       <a:solidFill>
                         <a:srgbClr val="24365A"/>
@@ -8688,7 +8690,7 @@
                         <a:buNone/>
                       </a:pPr>
                       <a:r>
-                        <a:rPr lang="en-US" sz="1080" dirty="0">
+                        <a:rPr lang="en-US" sz="1800" dirty="0">
                           <a:solidFill>
                             <a:srgbClr val="CBD5E1"/>
                           </a:solidFill>
@@ -8698,14 +8700,14 @@
                         </a:rPr>
                         <a:t>Journey completes with no blockers</a:t>
                       </a:r>
-                      <a:endParaRPr lang="en-US" sz="1080" dirty="0">
+                      <a:endParaRPr lang="en-US" sz="1800" dirty="0">
                         <a:latin typeface="Segoe UI" charset="0"/>
                         <a:ea typeface="Segoe UI" charset="0"/>
                         <a:cs typeface="Segoe UI" charset="0"/>
                       </a:endParaRPr>
                     </a:p>
                   </a:txBody>
-                  <a:tcPr marL="64008" marR="64008" marT="64008" marB="64008" anchor="ctr">
+                  <a:tcPr marL="36576" marR="36576" marT="36576" marB="36576" anchor="ctr">
                     <a:lnL w="6350" cap="flat" cmpd="sng" algn="ctr">
                       <a:solidFill>
                         <a:srgbClr val="24365A"/>
@@ -8756,7 +8758,7 @@
                         <a:buNone/>
                       </a:pPr>
                       <a:r>
-                        <a:rPr lang="en-US" sz="1080" dirty="0">
+                        <a:rPr lang="en-US" sz="1800" dirty="0">
                           <a:solidFill>
                             <a:srgbClr val="CBD5E1"/>
                           </a:solidFill>
@@ -8766,14 +8768,14 @@
                         </a:rPr>
                         <a:t>Run log per release</a:t>
                       </a:r>
-                      <a:endParaRPr lang="en-US" sz="1080" dirty="0">
+                      <a:endParaRPr lang="en-US" sz="1800" dirty="0">
                         <a:latin typeface="Segoe UI" charset="0"/>
                         <a:ea typeface="Segoe UI" charset="0"/>
                         <a:cs typeface="Segoe UI" charset="0"/>
                       </a:endParaRPr>
                     </a:p>
                   </a:txBody>
-                  <a:tcPr marL="64008" marR="64008" marT="64008" marB="64008" anchor="ctr">
+                  <a:tcPr marL="36576" marR="36576" marT="36576" marB="36576" anchor="ctr">
                     <a:lnL w="6350" cap="flat" cmpd="sng" algn="ctr">
                       <a:solidFill>
                         <a:srgbClr val="24365A"/>
@@ -8816,7 +8818,7 @@
                   </a:tcPr>
                 </a:tc>
               </a:tr>
-              <a:tr h="402336">
+              <a:tr h="457200">
                 <a:tc>
                   <a:txBody>
                     <a:bodyPr/>
@@ -8826,7 +8828,7 @@
                         <a:buNone/>
                       </a:pPr>
                       <a:r>
-                        <a:rPr lang="en-US" sz="1080" dirty="0">
+                        <a:rPr lang="en-US" sz="1800" dirty="0">
                           <a:solidFill>
                             <a:srgbClr val="CBD5E1"/>
                           </a:solidFill>
@@ -8836,14 +8838,14 @@
                         </a:rPr>
                         <a:t>2 · Zero dead buttons</a:t>
                       </a:r>
-                      <a:endParaRPr lang="en-US" sz="1080" dirty="0">
+                      <a:endParaRPr lang="en-US" sz="1800" dirty="0">
                         <a:latin typeface="Segoe UI" charset="0"/>
                         <a:ea typeface="Segoe UI" charset="0"/>
                         <a:cs typeface="Segoe UI" charset="0"/>
                       </a:endParaRPr>
                     </a:p>
                   </a:txBody>
-                  <a:tcPr marL="64008" marR="64008" marT="64008" marB="64008" anchor="ctr">
+                  <a:tcPr marL="36576" marR="36576" marT="36576" marB="36576" anchor="ctr">
                     <a:lnL w="6350" cap="flat" cmpd="sng" algn="ctr">
                       <a:solidFill>
                         <a:srgbClr val="24365A"/>
@@ -8894,7 +8896,7 @@
                         <a:buNone/>
                       </a:pPr>
                       <a:r>
-                        <a:rPr lang="en-US" sz="1080" dirty="0">
+                        <a:rPr lang="en-US" sz="1800" dirty="0">
                           <a:solidFill>
                             <a:srgbClr val="CBD5E1"/>
                           </a:solidFill>
@@ -8904,14 +8906,14 @@
                         </a:rPr>
                         <a:t>Agents sweep every screen and interactive element</a:t>
                       </a:r>
-                      <a:endParaRPr lang="en-US" sz="1080" dirty="0">
+                      <a:endParaRPr lang="en-US" sz="1800" dirty="0">
                         <a:latin typeface="Segoe UI" charset="0"/>
                         <a:ea typeface="Segoe UI" charset="0"/>
                         <a:cs typeface="Segoe UI" charset="0"/>
                       </a:endParaRPr>
                     </a:p>
                   </a:txBody>
-                  <a:tcPr marL="64008" marR="64008" marT="64008" marB="64008" anchor="ctr">
+                  <a:tcPr marL="36576" marR="36576" marT="36576" marB="36576" anchor="ctr">
                     <a:lnL w="6350" cap="flat" cmpd="sng" algn="ctr">
                       <a:solidFill>
                         <a:srgbClr val="24365A"/>
@@ -8962,7 +8964,7 @@
                         <a:buNone/>
                       </a:pPr>
                       <a:r>
-                        <a:rPr lang="en-US" sz="1080" dirty="0">
+                        <a:rPr lang="en-US" sz="1800" dirty="0">
                           <a:solidFill>
                             <a:srgbClr val="CBD5E1"/>
                           </a:solidFill>
@@ -8972,14 +8974,14 @@
                         </a:rPr>
                         <a:t>Every control does what it claims</a:t>
                       </a:r>
-                      <a:endParaRPr lang="en-US" sz="1080" dirty="0">
+                      <a:endParaRPr lang="en-US" sz="1800" dirty="0">
                         <a:latin typeface="Segoe UI" charset="0"/>
                         <a:ea typeface="Segoe UI" charset="0"/>
                         <a:cs typeface="Segoe UI" charset="0"/>
                       </a:endParaRPr>
                     </a:p>
                   </a:txBody>
-                  <a:tcPr marL="64008" marR="64008" marT="64008" marB="64008" anchor="ctr">
+                  <a:tcPr marL="36576" marR="36576" marT="36576" marB="36576" anchor="ctr">
                     <a:lnL w="6350" cap="flat" cmpd="sng" algn="ctr">
                       <a:solidFill>
                         <a:srgbClr val="24365A"/>
@@ -9030,7 +9032,7 @@
                         <a:buNone/>
                       </a:pPr>
                       <a:r>
-                        <a:rPr lang="en-US" sz="1080" dirty="0">
+                        <a:rPr lang="en-US" sz="1800" dirty="0">
                           <a:solidFill>
                             <a:srgbClr val="CBD5E1"/>
                           </a:solidFill>
@@ -9040,14 +9042,14 @@
                         </a:rPr>
                         <a:t>Sweep report</a:t>
                       </a:r>
-                      <a:endParaRPr lang="en-US" sz="1080" dirty="0">
+                      <a:endParaRPr lang="en-US" sz="1800" dirty="0">
                         <a:latin typeface="Segoe UI" charset="0"/>
                         <a:ea typeface="Segoe UI" charset="0"/>
                         <a:cs typeface="Segoe UI" charset="0"/>
                       </a:endParaRPr>
                     </a:p>
                   </a:txBody>
-                  <a:tcPr marL="64008" marR="64008" marT="64008" marB="64008" anchor="ctr">
+                  <a:tcPr marL="36576" marR="36576" marT="36576" marB="36576" anchor="ctr">
                     <a:lnL w="6350" cap="flat" cmpd="sng" algn="ctr">
                       <a:solidFill>
                         <a:srgbClr val="24365A"/>
@@ -9090,7 +9092,7 @@
                   </a:tcPr>
                 </a:tc>
               </a:tr>
-              <a:tr h="402336">
+              <a:tr h="457200">
                 <a:tc>
                   <a:txBody>
                     <a:bodyPr/>
@@ -9100,7 +9102,7 @@
                         <a:buNone/>
                       </a:pPr>
                       <a:r>
-                        <a:rPr lang="en-US" sz="1080" dirty="0">
+                        <a:rPr lang="en-US" sz="1800" dirty="0">
                           <a:solidFill>
                             <a:srgbClr val="CBD5E1"/>
                           </a:solidFill>
@@ -9110,14 +9112,14 @@
                         </a:rPr>
                         <a:t>3 · Version + backup</a:t>
                       </a:r>
-                      <a:endParaRPr lang="en-US" sz="1080" dirty="0">
+                      <a:endParaRPr lang="en-US" sz="1800" dirty="0">
                         <a:latin typeface="Segoe UI" charset="0"/>
                         <a:ea typeface="Segoe UI" charset="0"/>
                         <a:cs typeface="Segoe UI" charset="0"/>
                       </a:endParaRPr>
                     </a:p>
                   </a:txBody>
-                  <a:tcPr marL="64008" marR="64008" marT="64008" marB="64008" anchor="ctr">
+                  <a:tcPr marL="36576" marR="36576" marT="36576" marB="36576" anchor="ctr">
                     <a:lnL w="6350" cap="flat" cmpd="sng" algn="ctr">
                       <a:solidFill>
                         <a:srgbClr val="24365A"/>
@@ -9168,7 +9170,7 @@
                         <a:buNone/>
                       </a:pPr>
                       <a:r>
-                        <a:rPr lang="en-US" sz="1080" dirty="0">
+                        <a:rPr lang="en-US" sz="1800" dirty="0">
                           <a:solidFill>
                             <a:srgbClr val="CBD5E1"/>
                           </a:solidFill>
@@ -9178,14 +9180,14 @@
                         </a:rPr>
                         <a:t>Increment the version and archive the previous build</a:t>
                       </a:r>
-                      <a:endParaRPr lang="en-US" sz="1080" dirty="0">
+                      <a:endParaRPr lang="en-US" sz="1800" dirty="0">
                         <a:latin typeface="Segoe UI" charset="0"/>
                         <a:ea typeface="Segoe UI" charset="0"/>
                         <a:cs typeface="Segoe UI" charset="0"/>
                       </a:endParaRPr>
                     </a:p>
                   </a:txBody>
-                  <a:tcPr marL="64008" marR="64008" marT="64008" marB="64008" anchor="ctr">
+                  <a:tcPr marL="36576" marR="36576" marT="36576" marB="36576" anchor="ctr">
                     <a:lnL w="6350" cap="flat" cmpd="sng" algn="ctr">
                       <a:solidFill>
                         <a:srgbClr val="24365A"/>
@@ -9236,7 +9238,7 @@
                         <a:buNone/>
                       </a:pPr>
                       <a:r>
-                        <a:rPr lang="en-US" sz="1080" dirty="0">
+                        <a:rPr lang="en-US" sz="1800" dirty="0">
                           <a:solidFill>
                             <a:srgbClr val="CBD5E1"/>
                           </a:solidFill>
@@ -9246,14 +9248,14 @@
                         </a:rPr>
                         <a:t>Bumped and archived before promote</a:t>
                       </a:r>
-                      <a:endParaRPr lang="en-US" sz="1080" dirty="0">
+                      <a:endParaRPr lang="en-US" sz="1800" dirty="0">
                         <a:latin typeface="Segoe UI" charset="0"/>
                         <a:ea typeface="Segoe UI" charset="0"/>
                         <a:cs typeface="Segoe UI" charset="0"/>
                       </a:endParaRPr>
                     </a:p>
                   </a:txBody>
-                  <a:tcPr marL="64008" marR="64008" marT="64008" marB="64008" anchor="ctr">
+                  <a:tcPr marL="36576" marR="36576" marT="36576" marB="36576" anchor="ctr">
                     <a:lnL w="6350" cap="flat" cmpd="sng" algn="ctr">
                       <a:solidFill>
                         <a:srgbClr val="24365A"/>
@@ -9304,7 +9306,7 @@
                         <a:buNone/>
                       </a:pPr>
                       <a:r>
-                        <a:rPr lang="en-US" sz="1080" dirty="0">
+                        <a:rPr lang="en-US" sz="1800" dirty="0">
                           <a:solidFill>
                             <a:srgbClr val="CBD5E1"/>
                           </a:solidFill>
@@ -9314,14 +9316,14 @@
                         </a:rPr>
                         <a:t>Backup archive</a:t>
                       </a:r>
-                      <a:endParaRPr lang="en-US" sz="1080" dirty="0">
+                      <a:endParaRPr lang="en-US" sz="1800" dirty="0">
                         <a:latin typeface="Segoe UI" charset="0"/>
                         <a:ea typeface="Segoe UI" charset="0"/>
                         <a:cs typeface="Segoe UI" charset="0"/>
                       </a:endParaRPr>
                     </a:p>
                   </a:txBody>
-                  <a:tcPr marL="64008" marR="64008" marT="64008" marB="64008" anchor="ctr">
+                  <a:tcPr marL="36576" marR="36576" marT="36576" marB="36576" anchor="ctr">
                     <a:lnL w="6350" cap="flat" cmpd="sng" algn="ctr">
                       <a:solidFill>
                         <a:srgbClr val="24365A"/>
@@ -9364,7 +9366,7 @@
                   </a:tcPr>
                 </a:tc>
               </a:tr>
-              <a:tr h="402336">
+              <a:tr h="457200">
                 <a:tc>
                   <a:txBody>
                     <a:bodyPr/>
@@ -9374,7 +9376,7 @@
                         <a:buNone/>
                       </a:pPr>
                       <a:r>
-                        <a:rPr lang="en-US" sz="1080" dirty="0">
+                        <a:rPr lang="en-US" sz="1800" dirty="0">
                           <a:solidFill>
                             <a:srgbClr val="CBD5E1"/>
                           </a:solidFill>
@@ -9384,14 +9386,14 @@
                         </a:rPr>
                         <a:t>4 · Physical evidence</a:t>
                       </a:r>
-                      <a:endParaRPr lang="en-US" sz="1080" dirty="0">
+                      <a:endParaRPr lang="en-US" sz="1800" dirty="0">
                         <a:latin typeface="Segoe UI" charset="0"/>
                         <a:ea typeface="Segoe UI" charset="0"/>
                         <a:cs typeface="Segoe UI" charset="0"/>
                       </a:endParaRPr>
                     </a:p>
                   </a:txBody>
-                  <a:tcPr marL="64008" marR="64008" marT="64008" marB="64008" anchor="ctr">
+                  <a:tcPr marL="36576" marR="36576" marT="36576" marB="36576" anchor="ctr">
                     <a:lnL w="6350" cap="flat" cmpd="sng" algn="ctr">
                       <a:solidFill>
                         <a:srgbClr val="24365A"/>
@@ -9442,7 +9444,7 @@
                         <a:buNone/>
                       </a:pPr>
                       <a:r>
-                        <a:rPr lang="en-US" sz="1080" dirty="0">
+                        <a:rPr lang="en-US" sz="1800" dirty="0">
                           <a:solidFill>
                             <a:srgbClr val="CBD5E1"/>
                           </a:solidFill>
@@ -9452,14 +9454,14 @@
                         </a:rPr>
                         <a:t>Prove the pass with an artifact</a:t>
                       </a:r>
-                      <a:endParaRPr lang="en-US" sz="1080" dirty="0">
+                      <a:endParaRPr lang="en-US" sz="1800" dirty="0">
                         <a:latin typeface="Segoe UI" charset="0"/>
                         <a:ea typeface="Segoe UI" charset="0"/>
                         <a:cs typeface="Segoe UI" charset="0"/>
                       </a:endParaRPr>
                     </a:p>
                   </a:txBody>
-                  <a:tcPr marL="64008" marR="64008" marT="64008" marB="64008" anchor="ctr">
+                  <a:tcPr marL="36576" marR="36576" marT="36576" marB="36576" anchor="ctr">
                     <a:lnL w="6350" cap="flat" cmpd="sng" algn="ctr">
                       <a:solidFill>
                         <a:srgbClr val="24365A"/>
@@ -9510,7 +9512,7 @@
                         <a:buNone/>
                       </a:pPr>
                       <a:r>
-                        <a:rPr lang="en-US" sz="1080" dirty="0">
+                        <a:rPr lang="en-US" sz="1800" dirty="0">
                           <a:solidFill>
                             <a:srgbClr val="CBD5E1"/>
                           </a:solidFill>
@@ -9520,14 +9522,14 @@
                         </a:rPr>
                         <a:t>A stranger could audit it</a:t>
                       </a:r>
-                      <a:endParaRPr lang="en-US" sz="1080" dirty="0">
+                      <a:endParaRPr lang="en-US" sz="1800" dirty="0">
                         <a:latin typeface="Segoe UI" charset="0"/>
                         <a:ea typeface="Segoe UI" charset="0"/>
                         <a:cs typeface="Segoe UI" charset="0"/>
                       </a:endParaRPr>
                     </a:p>
                   </a:txBody>
-                  <a:tcPr marL="64008" marR="64008" marT="64008" marB="64008" anchor="ctr">
+                  <a:tcPr marL="36576" marR="36576" marT="36576" marB="36576" anchor="ctr">
                     <a:lnL w="6350" cap="flat" cmpd="sng" algn="ctr">
                       <a:solidFill>
                         <a:srgbClr val="24365A"/>
@@ -9578,7 +9580,7 @@
                         <a:buNone/>
                       </a:pPr>
                       <a:r>
-                        <a:rPr lang="en-US" sz="1080" dirty="0">
+                        <a:rPr lang="en-US" sz="1800" dirty="0">
                           <a:solidFill>
                             <a:srgbClr val="CBD5E1"/>
                           </a:solidFill>
@@ -9588,14 +9590,14 @@
                         </a:rPr>
                         <a:t>Log, file, screenshot, or marker</a:t>
                       </a:r>
-                      <a:endParaRPr lang="en-US" sz="1080" dirty="0">
+                      <a:endParaRPr lang="en-US" sz="1800" dirty="0">
                         <a:latin typeface="Segoe UI" charset="0"/>
                         <a:ea typeface="Segoe UI" charset="0"/>
                         <a:cs typeface="Segoe UI" charset="0"/>
                       </a:endParaRPr>
                     </a:p>
                   </a:txBody>
-                  <a:tcPr marL="64008" marR="64008" marT="64008" marB="64008" anchor="ctr">
+                  <a:tcPr marL="36576" marR="36576" marT="36576" marB="36576" anchor="ctr">
                     <a:lnL w="6350" cap="flat" cmpd="sng" algn="ctr">
                       <a:solidFill>
                         <a:srgbClr val="24365A"/>
@@ -9673,8 +9675,8 @@
         </p:nvSpPr>
         <p:spPr>
           <a:xfrm>
-            <a:off x="822960" y="6053328"/>
-            <a:ext cx="9692640" cy="457200"/>
+            <a:off x="822960" y="6035040"/>
+            <a:ext cx="10424160" cy="566928"/>
           </a:xfrm>
           <a:prstGeom prst="rect">
             <a:avLst/>
@@ -9690,9 +9692,9 @@
               <a:buNone/>
             </a:pPr>
             <a:r>
-              <a:rPr lang="en-US" sz="1150" dirty="0">
-                <a:solidFill>
-                  <a:srgbClr val="64748B"/>
+              <a:rPr lang="en-US" sz="1800" dirty="0">
+                <a:solidFill>
+                  <a:srgbClr val="8FA3BF"/>
                 </a:solidFill>
                 <a:latin typeface="Segoe UI" pitchFamily="34" charset="0"/>
                 <a:ea typeface="Segoe UI" pitchFamily="34" charset="-122"/>
@@ -9700,7 +9702,7 @@
               </a:rPr>
               <a:t>A status field is not evidence - the artifact is what makes the pass auditable.</a:t>
             </a:r>
-            <a:endParaRPr lang="en-US" sz="1150" dirty="0"/>
+            <a:endParaRPr lang="en-US" sz="1800" dirty="0"/>
           </a:p>
         </p:txBody>
       </p:sp>
@@ -9712,8 +9714,8 @@
         </p:nvSpPr>
         <p:spPr>
           <a:xfrm>
-            <a:off x="10698480" y="6382512"/>
-            <a:ext cx="1188720" cy="365760"/>
+            <a:off x="10698480" y="6309360"/>
+            <a:ext cx="1188720" cy="411480"/>
           </a:xfrm>
           <a:prstGeom prst="rect">
             <a:avLst/>
@@ -9729,9 +9731,9 @@
               <a:buNone/>
             </a:pPr>
             <a:r>
-              <a:rPr lang="en-US" sz="1000" dirty="0">
-                <a:solidFill>
-                  <a:srgbClr val="64748B"/>
+              <a:rPr lang="en-US" sz="1800" dirty="0">
+                <a:solidFill>
+                  <a:srgbClr val="8FA3BF"/>
                 </a:solidFill>
                 <a:latin typeface="Consolas" pitchFamily="34" charset="0"/>
                 <a:ea typeface="Consolas" pitchFamily="34" charset="-122"/>
@@ -9739,7 +9741,7 @@
               </a:rPr>
               <a:t>6 / 14</a:t>
             </a:r>
-            <a:endParaRPr lang="en-US" sz="1000" dirty="0"/>
+            <a:endParaRPr lang="en-US" sz="1800" dirty="0"/>
           </a:p>
         </p:txBody>
       </p:sp>
@@ -9823,8 +9825,8 @@
         </p:nvSpPr>
         <p:spPr>
           <a:xfrm>
-            <a:off x="822960" y="502920"/>
-            <a:ext cx="10515600" cy="365760"/>
+            <a:off x="822960" y="457200"/>
+            <a:ext cx="10515600" cy="411480"/>
           </a:xfrm>
           <a:prstGeom prst="rect">
             <a:avLst/>
@@ -9840,7 +9842,7 @@
               <a:buNone/>
             </a:pPr>
             <a:r>
-              <a:rPr lang="en-US" sz="1200" spc="300" kern="0" dirty="0">
+              <a:rPr lang="en-US" sz="1800" spc="300" kern="0" dirty="0">
                 <a:solidFill>
                   <a:srgbClr val="06B6D4"/>
                 </a:solidFill>
@@ -9850,7 +9852,7 @@
               </a:rPr>
               <a:t>GATES 1 &amp; 2</a:t>
             </a:r>
-            <a:endParaRPr lang="en-US" sz="1200" dirty="0"/>
+            <a:endParaRPr lang="en-US" sz="1800" dirty="0"/>
           </a:p>
         </p:txBody>
       </p:sp>
@@ -9901,8 +9903,8 @@
         </p:nvSpPr>
         <p:spPr>
           <a:xfrm>
-            <a:off x="868680" y="2011680"/>
-            <a:ext cx="10424160" cy="3566160"/>
+            <a:off x="868680" y="1965960"/>
+            <a:ext cx="10424160" cy="3840480"/>
           </a:xfrm>
           <a:prstGeom prst="rect">
             <a:avLst/>
@@ -9925,7 +9927,7 @@
               <a:buChar char="▸"/>
             </a:pPr>
             <a:r>
-              <a:rPr lang="en-US" sz="1600" dirty="0">
+              <a:rPr lang="en-US" sz="2000" dirty="0">
                 <a:solidFill>
                   <a:srgbClr val="CBD5E1"/>
                 </a:solidFill>
@@ -9935,7 +9937,7 @@
               </a:rPr>
               <a:t>Gate 1: every release walks the single most important user journey end-to-end - if it breaks, the build does not ship.</a:t>
             </a:r>
-            <a:endParaRPr lang="en-US" sz="1600" dirty="0"/>
+            <a:endParaRPr lang="en-US" sz="2000" dirty="0"/>
           </a:p>
           <a:p>
             <a:pPr marL="342900" indent="-342900">
@@ -9949,7 +9951,7 @@
               <a:buChar char="▸"/>
             </a:pPr>
             <a:r>
-              <a:rPr lang="en-US" sz="1600" dirty="0">
+              <a:rPr lang="en-US" sz="2000" dirty="0">
                 <a:solidFill>
                   <a:srgbClr val="CBD5E1"/>
                 </a:solidFill>
@@ -9959,7 +9961,7 @@
               </a:rPr>
               <a:t>The golden path check is boring, repeatable, and non-negotiable; that is exactly why it works.</a:t>
             </a:r>
-            <a:endParaRPr lang="en-US" sz="1600" dirty="0"/>
+            <a:endParaRPr lang="en-US" sz="2000" dirty="0"/>
           </a:p>
           <a:p>
             <a:pPr marL="342900" indent="-342900">
@@ -9973,7 +9975,7 @@
               <a:buChar char="▸"/>
             </a:pPr>
             <a:r>
-              <a:rPr lang="en-US" sz="1600" dirty="0">
+              <a:rPr lang="en-US" sz="2000" dirty="0">
                 <a:solidFill>
                   <a:srgbClr val="CBD5E1"/>
                 </a:solidFill>
@@ -9983,7 +9985,7 @@
               </a:rPr>
               <a:t>Gate 2: agents sweep every screen so every button, link, and toggle does what it claims or gets removed.</a:t>
             </a:r>
-            <a:endParaRPr lang="en-US" sz="1600" dirty="0"/>
+            <a:endParaRPr lang="en-US" sz="2000" dirty="0"/>
           </a:p>
           <a:p>
             <a:pPr marL="342900" indent="-342900">
@@ -9997,7 +9999,7 @@
               <a:buChar char="▸"/>
             </a:pPr>
             <a:r>
-              <a:rPr lang="en-US" sz="1600" dirty="0">
+              <a:rPr lang="en-US" sz="2000" dirty="0">
                 <a:solidFill>
                   <a:srgbClr val="CBD5E1"/>
                 </a:solidFill>
@@ -10007,7 +10009,7 @@
               </a:rPr>
               <a:t>An interactive element that lies is a bug, full stop - and offline behavior gets checked too.</a:t>
             </a:r>
-            <a:endParaRPr lang="en-US" sz="1600" dirty="0"/>
+            <a:endParaRPr lang="en-US" sz="2000" dirty="0"/>
           </a:p>
         </p:txBody>
       </p:sp>
@@ -10042,8 +10044,8 @@
         </p:nvSpPr>
         <p:spPr>
           <a:xfrm>
-            <a:off x="822960" y="6053328"/>
-            <a:ext cx="9692640" cy="457200"/>
+            <a:off x="822960" y="6035040"/>
+            <a:ext cx="10424160" cy="566928"/>
           </a:xfrm>
           <a:prstGeom prst="rect">
             <a:avLst/>
@@ -10059,9 +10061,9 @@
               <a:buNone/>
             </a:pPr>
             <a:r>
-              <a:rPr lang="en-US" sz="1150" dirty="0">
-                <a:solidFill>
-                  <a:srgbClr val="64748B"/>
+              <a:rPr lang="en-US" sz="1800" dirty="0">
+                <a:solidFill>
+                  <a:srgbClr val="8FA3BF"/>
                 </a:solidFill>
                 <a:latin typeface="Segoe UI" pitchFamily="34" charset="0"/>
                 <a:ea typeface="Segoe UI" pitchFamily="34" charset="-122"/>
@@ -10069,7 +10071,7 @@
               </a:rPr>
               <a:t>One most-important journey, swept screens, zero exceptions.</a:t>
             </a:r>
-            <a:endParaRPr lang="en-US" sz="1150" dirty="0"/>
+            <a:endParaRPr lang="en-US" sz="1800" dirty="0"/>
           </a:p>
         </p:txBody>
       </p:sp>
@@ -10081,8 +10083,8 @@
         </p:nvSpPr>
         <p:spPr>
           <a:xfrm>
-            <a:off x="10698480" y="6382512"/>
-            <a:ext cx="1188720" cy="365760"/>
+            <a:off x="10698480" y="6309360"/>
+            <a:ext cx="1188720" cy="411480"/>
           </a:xfrm>
           <a:prstGeom prst="rect">
             <a:avLst/>
@@ -10098,9 +10100,9 @@
               <a:buNone/>
             </a:pPr>
             <a:r>
-              <a:rPr lang="en-US" sz="1000" dirty="0">
-                <a:solidFill>
-                  <a:srgbClr val="64748B"/>
+              <a:rPr lang="en-US" sz="1800" dirty="0">
+                <a:solidFill>
+                  <a:srgbClr val="8FA3BF"/>
                 </a:solidFill>
                 <a:latin typeface="Consolas" pitchFamily="34" charset="0"/>
                 <a:ea typeface="Consolas" pitchFamily="34" charset="-122"/>
@@ -10108,7 +10110,7 @@
               </a:rPr>
               <a:t>7 / 14</a:t>
             </a:r>
-            <a:endParaRPr lang="en-US" sz="1000" dirty="0"/>
+            <a:endParaRPr lang="en-US" sz="1800" dirty="0"/>
           </a:p>
         </p:txBody>
       </p:sp>
@@ -10192,8 +10194,8 @@
         </p:nvSpPr>
         <p:spPr>
           <a:xfrm>
-            <a:off x="822960" y="502920"/>
-            <a:ext cx="10515600" cy="365760"/>
+            <a:off x="822960" y="457200"/>
+            <a:ext cx="10515600" cy="411480"/>
           </a:xfrm>
           <a:prstGeom prst="rect">
             <a:avLst/>
@@ -10209,7 +10211,7 @@
               <a:buNone/>
             </a:pPr>
             <a:r>
-              <a:rPr lang="en-US" sz="1200" spc="300" kern="0" dirty="0">
+              <a:rPr lang="en-US" sz="1800" spc="300" kern="0" dirty="0">
                 <a:solidFill>
                   <a:srgbClr val="06B6D4"/>
                 </a:solidFill>
@@ -10219,7 +10221,7 @@
               </a:rPr>
               <a:t>GATE 2 IN NUMBERS</a:t>
             </a:r>
-            <a:endParaRPr lang="en-US" sz="1200" dirty="0"/>
+            <a:endParaRPr lang="en-US" sz="1800" dirty="0"/>
           </a:p>
         </p:txBody>
       </p:sp>
@@ -10270,7 +10272,7 @@
         </p:nvGraphicFramePr>
         <p:xfrm>
           <a:off x="822960" y="1874520"/>
-          <a:ext cx="10515600" cy="3337560"/>
+          <a:ext cx="10515600" cy="3246120"/>
         </p:xfrm>
         <a:graphic xmlns:a="http://schemas.openxmlformats.org/drawingml/2006/main">
           <a:graphicData uri="http://schemas.openxmlformats.org/drawingml/2006/chart">
@@ -10286,7 +10288,7 @@
         </p:nvSpPr>
         <p:spPr>
           <a:xfrm>
-            <a:off x="822960" y="5413248"/>
+            <a:off x="822960" y="5321808"/>
             <a:ext cx="10515600" cy="0"/>
           </a:xfrm>
           <a:prstGeom prst="line">
@@ -10309,8 +10311,8 @@
         </p:nvSpPr>
         <p:spPr>
           <a:xfrm>
-            <a:off x="822960" y="5504688"/>
-            <a:ext cx="10424160" cy="411480"/>
+            <a:off x="822960" y="5394960"/>
+            <a:ext cx="10424160" cy="502920"/>
           </a:xfrm>
           <a:prstGeom prst="rect">
             <a:avLst/>
@@ -10326,7 +10328,7 @@
               <a:buNone/>
             </a:pPr>
             <a:r>
-              <a:rPr lang="en-US" sz="1300" i="1" dirty="0">
+              <a:rPr lang="en-US" sz="1800" i="1" dirty="0">
                 <a:solidFill>
                   <a:srgbClr val="06B6D4"/>
                 </a:solidFill>
@@ -10336,7 +10338,7 @@
               </a:rPr>
               <a:t>→  The most common finding is an element that renders perfectly and does nothing - invisible to a passing test suite, obvious to a sweep.</a:t>
             </a:r>
-            <a:endParaRPr lang="en-US" sz="1300" dirty="0"/>
+            <a:endParaRPr lang="en-US" sz="1800" dirty="0"/>
           </a:p>
         </p:txBody>
       </p:sp>
@@ -10371,8 +10373,8 @@
         </p:nvSpPr>
         <p:spPr>
           <a:xfrm>
-            <a:off x="822960" y="6053328"/>
-            <a:ext cx="9692640" cy="457200"/>
+            <a:off x="822960" y="6035040"/>
+            <a:ext cx="10424160" cy="566928"/>
           </a:xfrm>
           <a:prstGeom prst="rect">
             <a:avLst/>
@@ -10388,9 +10390,9 @@
               <a:buNone/>
             </a:pPr>
             <a:r>
-              <a:rPr lang="en-US" sz="1150" dirty="0">
-                <a:solidFill>
-                  <a:srgbClr val="64748B"/>
+              <a:rPr lang="en-US" sz="1800" dirty="0">
+                <a:solidFill>
+                  <a:srgbClr val="8FA3BF"/>
                 </a:solidFill>
                 <a:latin typeface="Segoe UI" pitchFamily="34" charset="0"/>
                 <a:ea typeface="Segoe UI" pitchFamily="34" charset="-122"/>
@@ -10398,7 +10400,7 @@
               </a:rPr>
               <a:t>Illustrative incident mix consistent with agent screen sweeps across 30+ apps.</a:t>
             </a:r>
-            <a:endParaRPr lang="en-US" sz="1150" dirty="0"/>
+            <a:endParaRPr lang="en-US" sz="1800" dirty="0"/>
           </a:p>
         </p:txBody>
       </p:sp>
@@ -10410,8 +10412,8 @@
         </p:nvSpPr>
         <p:spPr>
           <a:xfrm>
-            <a:off x="10698480" y="6382512"/>
-            <a:ext cx="1188720" cy="365760"/>
+            <a:off x="10698480" y="6309360"/>
+            <a:ext cx="1188720" cy="411480"/>
           </a:xfrm>
           <a:prstGeom prst="rect">
             <a:avLst/>
@@ -10427,9 +10429,9 @@
               <a:buNone/>
             </a:pPr>
             <a:r>
-              <a:rPr lang="en-US" sz="1000" dirty="0">
-                <a:solidFill>
-                  <a:srgbClr val="64748B"/>
+              <a:rPr lang="en-US" sz="1800" dirty="0">
+                <a:solidFill>
+                  <a:srgbClr val="8FA3BF"/>
                 </a:solidFill>
                 <a:latin typeface="Consolas" pitchFamily="34" charset="0"/>
                 <a:ea typeface="Consolas" pitchFamily="34" charset="-122"/>
@@ -10437,7 +10439,7 @@
               </a:rPr>
               <a:t>8 / 14</a:t>
             </a:r>
-            <a:endParaRPr lang="en-US" sz="1000" dirty="0"/>
+            <a:endParaRPr lang="en-US" sz="1800" dirty="0"/>
           </a:p>
         </p:txBody>
       </p:sp>
@@ -10521,8 +10523,8 @@
         </p:nvSpPr>
         <p:spPr>
           <a:xfrm>
-            <a:off x="822960" y="502920"/>
-            <a:ext cx="10515600" cy="365760"/>
+            <a:off x="822960" y="457200"/>
+            <a:ext cx="10515600" cy="411480"/>
           </a:xfrm>
           <a:prstGeom prst="rect">
             <a:avLst/>
@@ -10538,7 +10540,7 @@
               <a:buNone/>
             </a:pPr>
             <a:r>
-              <a:rPr lang="en-US" sz="1200" spc="300" kern="0" dirty="0">
+              <a:rPr lang="en-US" sz="1800" spc="300" kern="0" dirty="0">
                 <a:solidFill>
                   <a:srgbClr val="06B6D4"/>
                 </a:solidFill>
@@ -10548,7 +10550,7 @@
               </a:rPr>
               <a:t>GATES 3 &amp; 4</a:t>
             </a:r>
-            <a:endParaRPr lang="en-US" sz="1200" dirty="0"/>
+            <a:endParaRPr lang="en-US" sz="1800" dirty="0"/>
           </a:p>
         </p:txBody>
       </p:sp>
@@ -10599,8 +10601,8 @@
         </p:nvSpPr>
         <p:spPr>
           <a:xfrm>
-            <a:off x="868680" y="2011680"/>
-            <a:ext cx="10424160" cy="3566160"/>
+            <a:off x="868680" y="1965960"/>
+            <a:ext cx="10424160" cy="3840480"/>
           </a:xfrm>
           <a:prstGeom prst="rect">
             <a:avLst/>
@@ -10623,7 +10625,7 @@
               <a:buChar char="▸"/>
             </a:pPr>
             <a:r>
-              <a:rPr lang="en-US" sz="1600" dirty="0">
+              <a:rPr lang="en-US" sz="2000" dirty="0">
                 <a:solidFill>
                   <a:srgbClr val="CBD5E1"/>
                 </a:solidFill>
@@ -10633,7 +10635,7 @@
               </a:rPr>
               <a:t>Gate 3: no release without a version increment, and the previous version is archived before the new one ships.</a:t>
             </a:r>
-            <a:endParaRPr lang="en-US" sz="1600" dirty="0"/>
+            <a:endParaRPr lang="en-US" sz="2000" dirty="0"/>
           </a:p>
           <a:p>
             <a:pPr marL="342900" indent="-342900">
@@ -10647,7 +10649,7 @@
               <a:buChar char="▸"/>
             </a:pPr>
             <a:r>
-              <a:rPr lang="en-US" sz="1600" dirty="0">
+              <a:rPr lang="en-US" sz="2000" dirty="0">
                 <a:solidFill>
                   <a:srgbClr val="CBD5E1"/>
                 </a:solidFill>
@@ -10657,7 +10659,7 @@
               </a:rPr>
               <a:t>Rollback is a normal Tuesday, not an emergency - this one rule has saved more projects than any clever architecture.</a:t>
             </a:r>
-            <a:endParaRPr lang="en-US" sz="1600" dirty="0"/>
+            <a:endParaRPr lang="en-US" sz="2000" dirty="0"/>
           </a:p>
           <a:p>
             <a:pPr marL="342900" indent="-342900">
@@ -10671,7 +10673,7 @@
               <a:buChar char="▸"/>
             </a:pPr>
             <a:r>
-              <a:rPr lang="en-US" sz="1600" dirty="0">
+              <a:rPr lang="en-US" sz="2000" dirty="0">
                 <a:solidFill>
                   <a:srgbClr val="CBD5E1"/>
                 </a:solidFill>
@@ -10681,7 +10683,7 @@
               </a:rPr>
               <a:t>Gate 4: passing means a log, a file, a screenshot, or a marker - something a stranger could audit.</a:t>
             </a:r>
-            <a:endParaRPr lang="en-US" sz="1600" dirty="0"/>
+            <a:endParaRPr lang="en-US" sz="2000" dirty="0"/>
           </a:p>
           <a:p>
             <a:pPr marL="342900" indent="-342900">
@@ -10695,7 +10697,7 @@
               <a:buChar char="▸"/>
             </a:pPr>
             <a:r>
-              <a:rPr lang="en-US" sz="1600" dirty="0">
+              <a:rPr lang="en-US" sz="2000" dirty="0">
                 <a:solidFill>
                   <a:srgbClr val="CBD5E1"/>
                 </a:solidFill>
@@ -10705,7 +10707,7 @@
               </a:rPr>
               <a:t>A status field is not evidence; agents behave differently when they know someone will check the artifacts.</a:t>
             </a:r>
-            <a:endParaRPr lang="en-US" sz="1600" dirty="0"/>
+            <a:endParaRPr lang="en-US" sz="2000" dirty="0"/>
           </a:p>
         </p:txBody>
       </p:sp>
@@ -10740,8 +10742,8 @@
         </p:nvSpPr>
         <p:spPr>
           <a:xfrm>
-            <a:off x="822960" y="6053328"/>
-            <a:ext cx="9692640" cy="457200"/>
+            <a:off x="822960" y="6035040"/>
+            <a:ext cx="10424160" cy="566928"/>
           </a:xfrm>
           <a:prstGeom prst="rect">
             <a:avLst/>
@@ -10757,9 +10759,9 @@
               <a:buNone/>
             </a:pPr>
             <a:r>
-              <a:rPr lang="en-US" sz="1150" dirty="0">
-                <a:solidFill>
-                  <a:srgbClr val="64748B"/>
+              <a:rPr lang="en-US" sz="1800" dirty="0">
+                <a:solidFill>
+                  <a:srgbClr val="8FA3BF"/>
                 </a:solidFill>
                 <a:latin typeface="Segoe UI" pitchFamily="34" charset="0"/>
                 <a:ea typeface="Segoe UI" pitchFamily="34" charset="-122"/>
@@ -10767,7 +10769,7 @@
               </a:rPr>
               <a:t>Archive first, promote second - the previous version is always one step away.</a:t>
             </a:r>
-            <a:endParaRPr lang="en-US" sz="1150" dirty="0"/>
+            <a:endParaRPr lang="en-US" sz="1800" dirty="0"/>
           </a:p>
         </p:txBody>
       </p:sp>
@@ -10779,8 +10781,8 @@
         </p:nvSpPr>
         <p:spPr>
           <a:xfrm>
-            <a:off x="10698480" y="6382512"/>
-            <a:ext cx="1188720" cy="365760"/>
+            <a:off x="10698480" y="6309360"/>
+            <a:ext cx="1188720" cy="411480"/>
           </a:xfrm>
           <a:prstGeom prst="rect">
             <a:avLst/>
@@ -10796,9 +10798,9 @@
               <a:buNone/>
             </a:pPr>
             <a:r>
-              <a:rPr lang="en-US" sz="1000" dirty="0">
-                <a:solidFill>
-                  <a:srgbClr val="64748B"/>
+              <a:rPr lang="en-US" sz="1800" dirty="0">
+                <a:solidFill>
+                  <a:srgbClr val="8FA3BF"/>
                 </a:solidFill>
                 <a:latin typeface="Consolas" pitchFamily="34" charset="0"/>
                 <a:ea typeface="Consolas" pitchFamily="34" charset="-122"/>
@@ -10806,7 +10808,7 @@
               </a:rPr>
               <a:t>9 / 14</a:t>
             </a:r>
-            <a:endParaRPr lang="en-US" sz="1000" dirty="0"/>
+            <a:endParaRPr lang="en-US" sz="1800" dirty="0"/>
           </a:p>
         </p:txBody>
       </p:sp>

--- a/decks/quality-gates.pptx
+++ b/decks/quality-gates.pptx
@@ -6199,7 +6199,7 @@
                 <a:ea typeface="Segoe UI" pitchFamily="34" charset="-122"/>
                 <a:cs typeface="Segoe UI" pitchFamily="34" charset="-120"/>
               </a:rPr>
-              <a:t>AI changed the cost of writing code; it did not change the cost of shipping junk - that bill still comes due, with interest.</a:t>
+              <a:t>AI changed the cost of writing code, not the cost of shipping junk - that bill comes due.</a:t>
             </a:r>
             <a:endParaRPr lang="en-US" sz="2000" dirty="0"/>
           </a:p>
@@ -6223,7 +6223,7 @@
                 <a:ea typeface="Segoe UI" pitchFamily="34" charset="-122"/>
                 <a:cs typeface="Segoe UI" pitchFamily="34" charset="-120"/>
               </a:rPr>
-              <a:t>The failure mode is not a crash: it is a button that does nothing and a flow that silently skips validation.</a:t>
+              <a:t>The failure mode is not a crash: a dead button and a flow that silently skips validation.</a:t>
             </a:r>
             <a:endParaRPr lang="en-US" sz="2000" dirty="0"/>
           </a:p>
@@ -9935,7 +9935,7 @@
                 <a:ea typeface="Segoe UI" pitchFamily="34" charset="-122"/>
                 <a:cs typeface="Segoe UI" pitchFamily="34" charset="-120"/>
               </a:rPr>
-              <a:t>Gate 1: every release walks the single most important user journey end-to-end - if it breaks, the build does not ship.</a:t>
+              <a:t>Gate 1: every release walks the most important user journey end-to-end, or the build does not ship.</a:t>
             </a:r>
             <a:endParaRPr lang="en-US" sz="2000" dirty="0"/>
           </a:p>
@@ -9983,7 +9983,7 @@
                 <a:ea typeface="Segoe UI" pitchFamily="34" charset="-122"/>
                 <a:cs typeface="Segoe UI" pitchFamily="34" charset="-120"/>
               </a:rPr>
-              <a:t>Gate 2: agents sweep every screen so every button, link, and toggle does what it claims or gets removed.</a:t>
+              <a:t>Gate 2: agents sweep every screen so every button and link does what it claims, or gets removed.</a:t>
             </a:r>
             <a:endParaRPr lang="en-US" sz="2000" dirty="0"/>
           </a:p>
@@ -10633,7 +10633,7 @@
                 <a:ea typeface="Segoe UI" pitchFamily="34" charset="-122"/>
                 <a:cs typeface="Segoe UI" pitchFamily="34" charset="-120"/>
               </a:rPr>
-              <a:t>Gate 3: no release without a version increment, and the previous version is archived before the new one ships.</a:t>
+              <a:t>Gate 3: no release without a version increment; the previous version is archived before the new one ships.</a:t>
             </a:r>
             <a:endParaRPr lang="en-US" sz="2000" dirty="0"/>
           </a:p>
@@ -10657,7 +10657,7 @@
                 <a:ea typeface="Segoe UI" pitchFamily="34" charset="-122"/>
                 <a:cs typeface="Segoe UI" pitchFamily="34" charset="-120"/>
               </a:rPr>
-              <a:t>Rollback is a normal Tuesday, not an emergency - this one rule has saved more projects than any clever architecture.</a:t>
+              <a:t>Rollback is a normal Tuesday, not an emergency - this rule has saved more projects than any architecture.</a:t>
             </a:r>
             <a:endParaRPr lang="en-US" sz="2000" dirty="0"/>
           </a:p>
@@ -10681,7 +10681,7 @@
                 <a:ea typeface="Segoe UI" pitchFamily="34" charset="-122"/>
                 <a:cs typeface="Segoe UI" pitchFamily="34" charset="-120"/>
               </a:rPr>
-              <a:t>Gate 4: passing means a log, a file, a screenshot, or a marker - something a stranger could audit.</a:t>
+              <a:t>Gate 4: passing means a log, file, screenshot, or marker - something a stranger could audit.</a:t>
             </a:r>
             <a:endParaRPr lang="en-US" sz="2000" dirty="0"/>
           </a:p>
